--- a/Sesion_03_mejorada.pptx
+++ b/Sesion_03_mejorada.pptx
@@ -4141,6 +4141,91 @@
                 <a:cs typeface="Montserrat" pitchFamily="34" charset="-120"/>
               </a:rPr>
               <a:t/>
+            </a:r>
+          </a:p>
+        </p:txBody>
+      </p:sp>
+      <p:sp>
+        <p:nvSpPr>
+          <p:cNvPr id="13" name="Rounded Rectangle 12"/>
+          <p:cNvSpPr/>
+          <p:nvPr/>
+        </p:nvSpPr>
+        <p:spPr>
+          <a:xfrm>
+            <a:off x="822960" y="5303520"/>
+            <a:ext cx="4754880" cy="310896"/>
+          </a:xfrm>
+          <a:prstGeom prst="roundRect">
+            <a:avLst>
+              <a:gd name="adj" fmla="val 50000"/>
+            </a:avLst>
+          </a:prstGeom>
+          <a:solidFill>
+            <a:srgbClr val="D4AF37"/>
+          </a:solidFill>
+          <a:ln>
+            <a:noFill/>
+          </a:ln>
+          <a:effectLst/>
+        </p:spPr>
+        <p:style>
+          <a:lnRef idx="1">
+            <a:schemeClr val="accent1"/>
+          </a:lnRef>
+          <a:fillRef idx="3">
+            <a:schemeClr val="accent1"/>
+          </a:fillRef>
+          <a:effectRef idx="2">
+            <a:schemeClr val="accent1"/>
+          </a:effectRef>
+          <a:fontRef idx="minor">
+            <a:schemeClr val="lt1"/>
+          </a:fontRef>
+        </p:style>
+        <p:txBody>
+          <a:bodyPr rtlCol="0" anchor="ctr"/>
+          <a:lstStyle/>
+          <a:p>
+            <a:pPr algn="ctr"/>
+          </a:p>
+        </p:txBody>
+      </p:sp>
+      <p:sp>
+        <p:nvSpPr>
+          <p:cNvPr id="14" name="TextBox 13"/>
+          <p:cNvSpPr txBox="1"/>
+          <p:nvPr/>
+        </p:nvSpPr>
+        <p:spPr>
+          <a:xfrm>
+            <a:off x="822960" y="5303520"/>
+            <a:ext cx="4754880" cy="310896"/>
+          </a:xfrm>
+          <a:prstGeom prst="rect">
+            <a:avLst/>
+          </a:prstGeom>
+          <a:noFill/>
+        </p:spPr>
+        <p:txBody>
+          <a:bodyPr wrap="square" lIns="45720" rIns="45720" tIns="27432" bIns="27432" anchor="ctr">
+            <a:spAutoFit/>
+          </a:bodyPr>
+          <a:lstStyle/>
+          <a:p>
+            <a:pPr algn="ctr">
+              <a:spcAft>
+                <a:spcPts val="400"/>
+              </a:spcAft>
+            </a:pPr>
+            <a:r>
+              <a:rPr sz="1800" b="1" i="0">
+                <a:solidFill>
+                  <a:srgbClr val="011754"/>
+                </a:solidFill>
+                <a:latin typeface="Calibri"/>
+              </a:rPr>
+              <a:t>MODALIDAD VIRTUAL · NO PRESENCIAL</a:t>
             </a:r>
           </a:p>
         </p:txBody>

--- a/Sesion_03_mejorada.pptx
+++ b/Sesion_03_mejorada.pptx
@@ -4141,91 +4141,6 @@
                 <a:cs typeface="Montserrat" pitchFamily="34" charset="-120"/>
               </a:rPr>
               <a:t/>
-            </a:r>
-          </a:p>
-        </p:txBody>
-      </p:sp>
-      <p:sp>
-        <p:nvSpPr>
-          <p:cNvPr id="13" name="Rounded Rectangle 12"/>
-          <p:cNvSpPr/>
-          <p:nvPr/>
-        </p:nvSpPr>
-        <p:spPr>
-          <a:xfrm>
-            <a:off x="822960" y="5303520"/>
-            <a:ext cx="4754880" cy="310896"/>
-          </a:xfrm>
-          <a:prstGeom prst="roundRect">
-            <a:avLst>
-              <a:gd name="adj" fmla="val 50000"/>
-            </a:avLst>
-          </a:prstGeom>
-          <a:solidFill>
-            <a:srgbClr val="D4AF37"/>
-          </a:solidFill>
-          <a:ln>
-            <a:noFill/>
-          </a:ln>
-          <a:effectLst/>
-        </p:spPr>
-        <p:style>
-          <a:lnRef idx="1">
-            <a:schemeClr val="accent1"/>
-          </a:lnRef>
-          <a:fillRef idx="3">
-            <a:schemeClr val="accent1"/>
-          </a:fillRef>
-          <a:effectRef idx="2">
-            <a:schemeClr val="accent1"/>
-          </a:effectRef>
-          <a:fontRef idx="minor">
-            <a:schemeClr val="lt1"/>
-          </a:fontRef>
-        </p:style>
-        <p:txBody>
-          <a:bodyPr rtlCol="0" anchor="ctr"/>
-          <a:lstStyle/>
-          <a:p>
-            <a:pPr algn="ctr"/>
-          </a:p>
-        </p:txBody>
-      </p:sp>
-      <p:sp>
-        <p:nvSpPr>
-          <p:cNvPr id="14" name="TextBox 13"/>
-          <p:cNvSpPr txBox="1"/>
-          <p:nvPr/>
-        </p:nvSpPr>
-        <p:spPr>
-          <a:xfrm>
-            <a:off x="822960" y="5303520"/>
-            <a:ext cx="4754880" cy="310896"/>
-          </a:xfrm>
-          <a:prstGeom prst="rect">
-            <a:avLst/>
-          </a:prstGeom>
-          <a:noFill/>
-        </p:spPr>
-        <p:txBody>
-          <a:bodyPr wrap="square" lIns="45720" rIns="45720" tIns="27432" bIns="27432" anchor="ctr">
-            <a:spAutoFit/>
-          </a:bodyPr>
-          <a:lstStyle/>
-          <a:p>
-            <a:pPr algn="ctr">
-              <a:spcAft>
-                <a:spcPts val="400"/>
-              </a:spcAft>
-            </a:pPr>
-            <a:r>
-              <a:rPr sz="1800" b="1" i="0">
-                <a:solidFill>
-                  <a:srgbClr val="011754"/>
-                </a:solidFill>
-                <a:latin typeface="Calibri"/>
-              </a:rPr>
-              <a:t>MODALIDAD VIRTUAL · NO PRESENCIAL</a:t>
             </a:r>
           </a:p>
         </p:txBody>

--- a/Sesion_03_mejorada.pptx
+++ b/Sesion_03_mejorada.pptx
@@ -20334,7 +20334,7 @@
                 </a:solidFill>
                 <a:latin typeface="Calibri"/>
               </a:rPr>
-              <a:t>Auditoría guiada de una respuesta y caso autónomo (120 min).</a:t>
+              <a:t>Auditoría guiada de una respuesta y caso autónomo.</a:t>
             </a:r>
           </a:p>
         </p:txBody>

--- a/Sesion_03_mejorada.pptx
+++ b/Sesion_03_mejorada.pptx
@@ -12,29 +12,17 @@
     <p:sldId id="307" r:id="rId3"/>
     <p:sldId id="258" r:id="rId4"/>
     <p:sldId id="259" r:id="rId5"/>
-    <p:sldId id="260" r:id="rId6"/>
     <p:sldId id="261" r:id="rId7"/>
-    <p:sldId id="263" r:id="rId8"/>
-    <p:sldId id="265" r:id="rId9"/>
     <p:sldId id="266" r:id="rId10"/>
-    <p:sldId id="268" r:id="rId11"/>
-    <p:sldId id="270" r:id="rId12"/>
     <p:sldId id="271" r:id="rId13"/>
     <p:sldId id="273" r:id="rId14"/>
-    <p:sldId id="275" r:id="rId15"/>
     <p:sldId id="277" r:id="rId16"/>
     <p:sldId id="278" r:id="rId17"/>
-    <p:sldId id="282" r:id="rId18"/>
-    <p:sldId id="283" r:id="rId19"/>
+    <p:sldId id="270" r:id="rId12"/>
     <p:sldId id="284" r:id="rId20"/>
-    <p:sldId id="286" r:id="rId21"/>
-    <p:sldId id="288" r:id="rId22"/>
     <p:sldId id="289" r:id="rId23"/>
-    <p:sldId id="290" r:id="rId24"/>
-    <p:sldId id="291" r:id="rId25"/>
     <p:sldId id="292" r:id="rId26"/>
     <p:sldId id="293" r:id="rId27"/>
-    <p:sldId id="296" r:id="rId28"/>
     <p:sldId id="308" r:id="rId29"/>
     <p:sldId id="304" r:id="rId30"/>
     <p:sldId id="305" r:id="rId31"/>
@@ -4153,133 +4141,6 @@
 </p:sld>
 </file>
 
-<file path=ppt/slides/slide10.xml><?xml version="1.0" encoding="utf-8"?>
-<p:sld xmlns:a="http://schemas.openxmlformats.org/drawingml/2006/main" xmlns:r="http://schemas.openxmlformats.org/officeDocument/2006/relationships" xmlns:p="http://schemas.openxmlformats.org/presentationml/2006/main">
-  <p:cSld>
-    <p:spTree>
-      <p:nvGrpSpPr>
-        <p:cNvPr id="1" name=""/>
-        <p:cNvGrpSpPr/>
-        <p:nvPr/>
-      </p:nvGrpSpPr>
-      <p:grpSpPr>
-        <a:xfrm>
-          <a:off x="0" y="0"/>
-          <a:ext cx="0" cy="0"/>
-          <a:chOff x="0" y="0"/>
-          <a:chExt cx="0" cy="0"/>
-        </a:xfrm>
-      </p:grpSpPr>
-      <p:pic>
-        <p:nvPicPr>
-          <p:cNvPr id="2" name="Picture 1" descr="divider_bg.png"/>
-          <p:cNvPicPr>
-            <a:picLocks noChangeAspect="1"/>
-          </p:cNvPicPr>
-          <p:nvPr/>
-        </p:nvPicPr>
-        <p:blipFill>
-          <a:blip r:embed="rId2"/>
-          <a:stretch>
-            <a:fillRect/>
-          </a:stretch>
-        </p:blipFill>
-        <p:spPr>
-          <a:xfrm>
-            <a:off x="0" y="0"/>
-            <a:ext cx="12191695" cy="6858000"/>
-          </a:xfrm>
-          <a:prstGeom prst="rect">
-            <a:avLst/>
-          </a:prstGeom>
-        </p:spPr>
-      </p:pic>
-      <p:sp>
-        <p:nvSpPr>
-          <p:cNvPr id="3" name="TextBox 2"/>
-          <p:cNvSpPr txBox="1"/>
-          <p:nvPr/>
-        </p:nvSpPr>
-        <p:spPr>
-          <a:xfrm>
-            <a:off x="982912" y="2676125"/>
-            <a:ext cx="437840" cy="1999910"/>
-          </a:xfrm>
-          <a:prstGeom prst="rect">
-            <a:avLst/>
-          </a:prstGeom>
-          <a:noFill/>
-        </p:spPr>
-        <p:txBody>
-          <a:bodyPr wrap="square">
-            <a:spAutoFit/>
-          </a:bodyPr>
-          <a:lstStyle/>
-          <a:p>
-            <a:pPr algn="l">
-              <a:lnSpc>
-                <a:spcPct val="115000"/>
-              </a:lnSpc>
-            </a:pPr>
-            <a:r>
-              <a:rPr sz="7200" b="1" i="0">
-                <a:solidFill>
-                  <a:srgbClr val="FFFFFF"/>
-                </a:solidFill>
-                <a:latin typeface="Calibri"/>
-              </a:rPr>
-              <a:t>2</a:t>
-            </a:r>
-          </a:p>
-        </p:txBody>
-      </p:sp>
-      <p:sp>
-        <p:nvSpPr>
-          <p:cNvPr id="4" name="TextBox 3"/>
-          <p:cNvSpPr txBox="1"/>
-          <p:nvPr/>
-        </p:nvSpPr>
-        <p:spPr>
-          <a:xfrm>
-            <a:off x="982912" y="4737409"/>
-            <a:ext cx="10346277" cy="702221"/>
-          </a:xfrm>
-          <a:prstGeom prst="rect">
-            <a:avLst/>
-          </a:prstGeom>
-          <a:noFill/>
-        </p:spPr>
-        <p:txBody>
-          <a:bodyPr wrap="square">
-            <a:spAutoFit/>
-          </a:bodyPr>
-          <a:lstStyle/>
-          <a:p>
-            <a:pPr algn="l">
-              <a:lnSpc>
-                <a:spcPct val="115000"/>
-              </a:lnSpc>
-            </a:pPr>
-            <a:r>
-              <a:rPr sz="2600" b="0" i="0">
-                <a:solidFill>
-                  <a:srgbClr val="FFFFFF"/>
-                </a:solidFill>
-                <a:latin typeface="Calibri"/>
-              </a:rPr>
-              <a:t>RIESGOS Y OPORTUNIDADES EN EL PROCESO INVESTIGATIVO</a:t>
-            </a:r>
-          </a:p>
-        </p:txBody>
-      </p:sp>
-    </p:spTree>
-  </p:cSld>
-  <p:clrMapOvr>
-    <a:masterClrMapping/>
-  </p:clrMapOvr>
-</p:sld>
-</file>
-
 <file path=ppt/slides/slide11.xml><?xml version="1.0" encoding="utf-8"?>
 <p:sld xmlns:a="http://schemas.openxmlformats.org/drawingml/2006/main" xmlns:r="http://schemas.openxmlformats.org/officeDocument/2006/relationships" xmlns:p="http://schemas.openxmlformats.org/presentationml/2006/main">
   <p:cSld>
@@ -4355,21 +4216,67 @@
                 </a:solidFill>
                 <a:latin typeface="Calibri"/>
               </a:rPr>
-              <a:t>Etapas de la investigación donde interviene la IA</a:t>
-            </a:r>
-          </a:p>
-        </p:txBody>
-      </p:sp>
-      <p:sp>
-        <p:nvSpPr>
-          <p:cNvPr id="4" name="TextBox 3"/>
+              <a:t>Cinco criterios para auditar una respuesta de IA</a:t>
+            </a:r>
+          </a:p>
+        </p:txBody>
+      </p:sp>
+      <p:sp>
+        <p:nvSpPr>
+          <p:cNvPr id="4" name="Rounded Rectangle 3"/>
+          <p:cNvSpPr/>
+          <p:nvPr/>
+        </p:nvSpPr>
+        <p:spPr>
+          <a:xfrm>
+            <a:off x="612648" y="1600200"/>
+            <a:ext cx="3108960" cy="777240"/>
+          </a:xfrm>
+          <a:prstGeom prst="roundRect">
+            <a:avLst>
+              <a:gd name="adj" fmla="val 6000"/>
+            </a:avLst>
+          </a:prstGeom>
+          <a:solidFill>
+            <a:srgbClr val="2B4EB4"/>
+          </a:solidFill>
+          <a:ln>
+            <a:noFill/>
+          </a:ln>
+          <a:effectLst/>
+        </p:spPr>
+        <p:style>
+          <a:lnRef idx="1">
+            <a:schemeClr val="accent1"/>
+          </a:lnRef>
+          <a:fillRef idx="3">
+            <a:schemeClr val="accent1"/>
+          </a:fillRef>
+          <a:effectRef idx="2">
+            <a:schemeClr val="accent1"/>
+          </a:effectRef>
+          <a:fontRef idx="minor">
+            <a:schemeClr val="lt1"/>
+          </a:fontRef>
+        </p:style>
+        <p:txBody>
+          <a:bodyPr rtlCol="0" anchor="ctr"/>
+          <a:lstStyle/>
+          <a:p>
+            <a:pPr algn="ctr"/>
+          </a:p>
+        </p:txBody>
+      </p:sp>
+      <p:sp>
+        <p:nvSpPr>
+          <p:cNvPr id="5" name="TextBox 4"/>
           <p:cNvSpPr txBox="1"/>
           <p:nvPr/>
         </p:nvSpPr>
         <p:spPr>
           <a:xfrm>
-            <a:off x="612648" y="1463040"/>
-            <a:ext cx="10972800" cy="457200"/>
+            <a:off x="731520" y="1600200"/>
+            <a:ext cx="2926080" cy="777240"/>
           </a:xfrm>
           <a:prstGeom prst="rect">
             <a:avLst/>
@@ -4377,7 +4284,7 @@
           <a:noFill/>
         </p:spPr>
         <p:txBody>
-          <a:bodyPr wrap="square" lIns="45720" rIns="45720" tIns="27432" bIns="27432" anchor="t">
+          <a:bodyPr wrap="square" lIns="45720" rIns="45720" tIns="27432" bIns="27432" anchor="ctr">
             <a:spAutoFit/>
           </a:bodyPr>
           <a:lstStyle/>
@@ -4388,27 +4295,27 @@
               </a:spcAft>
             </a:pPr>
             <a:r>
-              <a:rPr sz="1800" b="0" i="0">
-                <a:solidFill>
-                  <a:srgbClr val="011754"/>
-                </a:solidFill>
-                <a:latin typeface="Calibri"/>
-              </a:rPr>
-              <a:t>Cada etapa ofrece una oportunidad y un riesgo distinto si no se audita.</a:t>
-            </a:r>
-          </a:p>
-        </p:txBody>
-      </p:sp>
-      <p:sp>
-        <p:nvSpPr>
-          <p:cNvPr id="5" name="Rounded Rectangle 4"/>
+              <a:rPr sz="2000" b="1" i="0">
+                <a:solidFill>
+                  <a:srgbClr val="FFFFFF"/>
+                </a:solidFill>
+                <a:latin typeface="Calibri"/>
+              </a:rPr>
+              <a:t>Pertinencia</a:t>
+            </a:r>
+          </a:p>
+        </p:txBody>
+      </p:sp>
+      <p:sp>
+        <p:nvSpPr>
+          <p:cNvPr id="6" name="Rounded Rectangle 5"/>
           <p:cNvSpPr/>
           <p:nvPr/>
         </p:nvSpPr>
         <p:spPr>
           <a:xfrm>
-            <a:off x="612648" y="2057400"/>
-            <a:ext cx="2606040" cy="4114800"/>
+            <a:off x="3813048" y="1600200"/>
+            <a:ext cx="7772400" cy="777240"/>
           </a:xfrm>
           <a:prstGeom prst="roundRect">
             <a:avLst>
@@ -4447,17 +4354,58 @@
       </p:sp>
       <p:sp>
         <p:nvSpPr>
-          <p:cNvPr id="6" name="Oval 5"/>
+          <p:cNvPr id="7" name="TextBox 6"/>
+          <p:cNvSpPr txBox="1"/>
+          <p:nvPr/>
+        </p:nvSpPr>
+        <p:spPr>
+          <a:xfrm>
+            <a:off x="3977639" y="1600200"/>
+            <a:ext cx="7498079" cy="777240"/>
+          </a:xfrm>
+          <a:prstGeom prst="rect">
+            <a:avLst/>
+          </a:prstGeom>
+          <a:noFill/>
+        </p:spPr>
+        <p:txBody>
+          <a:bodyPr wrap="square" lIns="45720" rIns="45720" tIns="27432" bIns="27432" anchor="ctr">
+            <a:spAutoFit/>
+          </a:bodyPr>
+          <a:lstStyle/>
+          <a:p>
+            <a:pPr algn="l">
+              <a:spcAft>
+                <a:spcPts val="400"/>
+              </a:spcAft>
+            </a:pPr>
+            <a:r>
+              <a:rPr sz="1800" b="0" i="0">
+                <a:solidFill>
+                  <a:srgbClr val="011754"/>
+                </a:solidFill>
+                <a:latin typeface="Calibri"/>
+              </a:rPr>
+              <a:t>¿La respuesta aborda exactamente lo que se preguntó, sin desviarse hacia otro tema?</a:t>
+            </a:r>
+          </a:p>
+        </p:txBody>
+      </p:sp>
+      <p:sp>
+        <p:nvSpPr>
+          <p:cNvPr id="8" name="Rounded Rectangle 7"/>
           <p:cNvSpPr/>
           <p:nvPr/>
         </p:nvSpPr>
         <p:spPr>
           <a:xfrm>
-            <a:off x="795528" y="2194560"/>
-            <a:ext cx="548640" cy="548640"/>
-          </a:xfrm>
-          <a:prstGeom prst="ellipse">
-            <a:avLst/>
+            <a:off x="612648" y="2487168"/>
+            <a:ext cx="3108960" cy="777240"/>
+          </a:xfrm>
+          <a:prstGeom prst="roundRect">
+            <a:avLst>
+              <a:gd name="adj" fmla="val 6000"/>
+            </a:avLst>
           </a:prstGeom>
           <a:solidFill>
             <a:srgbClr val="2B4EB4"/>
@@ -4482,32 +4430,23 @@
           </a:fontRef>
         </p:style>
         <p:txBody>
-          <a:bodyPr rtlCol="0" anchor="ctr" lIns="0" rIns="0" tIns="0" bIns="0"/>
+          <a:bodyPr rtlCol="0" anchor="ctr"/>
           <a:lstStyle/>
           <a:p>
             <a:pPr algn="ctr"/>
-            <a:r>
-              <a:rPr sz="2000" b="1">
-                <a:solidFill>
-                  <a:srgbClr val="FFFFFF"/>
-                </a:solidFill>
-                <a:latin typeface="Calibri"/>
-              </a:rPr>
-              <a:t>1</a:t>
-            </a:r>
-          </a:p>
-        </p:txBody>
-      </p:sp>
-      <p:sp>
-        <p:nvSpPr>
-          <p:cNvPr id="7" name="TextBox 6"/>
+          </a:p>
+        </p:txBody>
+      </p:sp>
+      <p:sp>
+        <p:nvSpPr>
+          <p:cNvPr id="9" name="TextBox 8"/>
           <p:cNvSpPr txBox="1"/>
           <p:nvPr/>
         </p:nvSpPr>
         <p:spPr>
           <a:xfrm>
-            <a:off x="1435608" y="2194560"/>
-            <a:ext cx="1691640" cy="548640"/>
+            <a:off x="731520" y="2487168"/>
+            <a:ext cx="2926080" cy="777240"/>
           </a:xfrm>
           <a:prstGeom prst="rect">
             <a:avLst/>
@@ -4528,112 +4467,25 @@
             <a:r>
               <a:rPr sz="2000" b="1" i="0">
                 <a:solidFill>
-                  <a:srgbClr val="2B4EB4"/>
-                </a:solidFill>
-                <a:latin typeface="Calibri"/>
-              </a:rPr>
-              <a:t>Explorar</a:t>
-            </a:r>
-          </a:p>
-        </p:txBody>
-      </p:sp>
-      <p:sp>
-        <p:nvSpPr>
-          <p:cNvPr id="8" name="TextBox 7"/>
-          <p:cNvSpPr txBox="1"/>
-          <p:nvPr/>
-        </p:nvSpPr>
-        <p:spPr>
-          <a:xfrm>
-            <a:off x="795528" y="2880360"/>
-            <a:ext cx="2240280" cy="3200400"/>
-          </a:xfrm>
-          <a:prstGeom prst="rect">
-            <a:avLst/>
-          </a:prstGeom>
-          <a:noFill/>
-        </p:spPr>
-        <p:txBody>
-          <a:bodyPr wrap="square" lIns="45720" rIns="45720" tIns="27432" bIns="27432" anchor="t">
-            <a:spAutoFit/>
-          </a:bodyPr>
-          <a:lstStyle/>
-          <a:p>
-            <a:pPr algn="l">
-              <a:spcAft>
-                <a:spcPts val="200"/>
-              </a:spcAft>
-            </a:pPr>
-            <a:r>
-              <a:rPr sz="1800" b="1" i="0">
-                <a:solidFill>
-                  <a:srgbClr val="2B4EB4"/>
-                </a:solidFill>
-                <a:latin typeface="Calibri"/>
-              </a:rPr>
-              <a:t>Oportunidad</a:t>
-            </a:r>
-          </a:p>
-          <a:p>
-            <a:pPr algn="l">
-              <a:spcAft>
-                <a:spcPts val="1200"/>
-              </a:spcAft>
-            </a:pPr>
-            <a:r>
-              <a:rPr sz="1800" b="0" i="0">
-                <a:solidFill>
-                  <a:srgbClr val="011754"/>
-                </a:solidFill>
-                <a:latin typeface="Calibri"/>
-              </a:rPr>
-              <a:t>Ganas rapidez y variedad de enfoques.</a:t>
-            </a:r>
-          </a:p>
-          <a:p>
-            <a:pPr algn="l">
-              <a:spcAft>
-                <a:spcPts val="200"/>
-              </a:spcAft>
-            </a:pPr>
-            <a:r>
-              <a:rPr sz="1800" b="1" i="0">
-                <a:solidFill>
-                  <a:srgbClr val="A02A2A"/>
-                </a:solidFill>
-                <a:latin typeface="Calibri"/>
-              </a:rPr>
-              <a:t>Riesgo</a:t>
-            </a:r>
-          </a:p>
-          <a:p>
-            <a:pPr algn="l">
-              <a:spcAft>
-                <a:spcPts val="400"/>
-              </a:spcAft>
-            </a:pPr>
-            <a:r>
-              <a:rPr sz="1800" b="0" i="0">
-                <a:solidFill>
-                  <a:srgbClr val="011754"/>
-                </a:solidFill>
-                <a:latin typeface="Calibri"/>
-              </a:rPr>
-              <a:t>Resultados sesgados hacia ciertas fuentes.</a:t>
-            </a:r>
-          </a:p>
-        </p:txBody>
-      </p:sp>
-      <p:sp>
-        <p:nvSpPr>
-          <p:cNvPr id="9" name="Rounded Rectangle 8"/>
+                  <a:srgbClr val="FFFFFF"/>
+                </a:solidFill>
+                <a:latin typeface="Calibri"/>
+              </a:rPr>
+              <a:t>Coherencia</a:t>
+            </a:r>
+          </a:p>
+        </p:txBody>
+      </p:sp>
+      <p:sp>
+        <p:nvSpPr>
+          <p:cNvPr id="10" name="Rounded Rectangle 9"/>
           <p:cNvSpPr/>
           <p:nvPr/>
         </p:nvSpPr>
         <p:spPr>
           <a:xfrm>
-            <a:off x="3401568" y="2057400"/>
-            <a:ext cx="2606040" cy="4114800"/>
+            <a:off x="3813048" y="2487168"/>
+            <a:ext cx="7772400" cy="777240"/>
           </a:xfrm>
           <a:prstGeom prst="roundRect">
             <a:avLst>
@@ -4672,17 +4524,58 @@
       </p:sp>
       <p:sp>
         <p:nvSpPr>
-          <p:cNvPr id="10" name="Oval 9"/>
+          <p:cNvPr id="11" name="TextBox 10"/>
+          <p:cNvSpPr txBox="1"/>
+          <p:nvPr/>
+        </p:nvSpPr>
+        <p:spPr>
+          <a:xfrm>
+            <a:off x="3977639" y="2487168"/>
+            <a:ext cx="7498079" cy="777240"/>
+          </a:xfrm>
+          <a:prstGeom prst="rect">
+            <a:avLst/>
+          </a:prstGeom>
+          <a:noFill/>
+        </p:spPr>
+        <p:txBody>
+          <a:bodyPr wrap="square" lIns="45720" rIns="45720" tIns="27432" bIns="27432" anchor="ctr">
+            <a:spAutoFit/>
+          </a:bodyPr>
+          <a:lstStyle/>
+          <a:p>
+            <a:pPr algn="l">
+              <a:spcAft>
+                <a:spcPts val="400"/>
+              </a:spcAft>
+            </a:pPr>
+            <a:r>
+              <a:rPr sz="1800" b="0" i="0">
+                <a:solidFill>
+                  <a:srgbClr val="011754"/>
+                </a:solidFill>
+                <a:latin typeface="Calibri"/>
+              </a:rPr>
+              <a:t>¿Las ideas se relacionan entre sí sin contradicciones internas?</a:t>
+            </a:r>
+          </a:p>
+        </p:txBody>
+      </p:sp>
+      <p:sp>
+        <p:nvSpPr>
+          <p:cNvPr id="12" name="Rounded Rectangle 11"/>
           <p:cNvSpPr/>
           <p:nvPr/>
         </p:nvSpPr>
         <p:spPr>
           <a:xfrm>
-            <a:off x="3584448" y="2194560"/>
-            <a:ext cx="548640" cy="548640"/>
-          </a:xfrm>
-          <a:prstGeom prst="ellipse">
-            <a:avLst/>
+            <a:off x="612648" y="3374135"/>
+            <a:ext cx="3108960" cy="777240"/>
+          </a:xfrm>
+          <a:prstGeom prst="roundRect">
+            <a:avLst>
+              <a:gd name="adj" fmla="val 6000"/>
+            </a:avLst>
           </a:prstGeom>
           <a:solidFill>
             <a:srgbClr val="2B4EB4"/>
@@ -4707,32 +4600,23 @@
           </a:fontRef>
         </p:style>
         <p:txBody>
-          <a:bodyPr rtlCol="0" anchor="ctr" lIns="0" rIns="0" tIns="0" bIns="0"/>
+          <a:bodyPr rtlCol="0" anchor="ctr"/>
           <a:lstStyle/>
           <a:p>
             <a:pPr algn="ctr"/>
-            <a:r>
-              <a:rPr sz="2000" b="1">
-                <a:solidFill>
-                  <a:srgbClr val="FFFFFF"/>
-                </a:solidFill>
-                <a:latin typeface="Calibri"/>
-              </a:rPr>
-              <a:t>2</a:t>
-            </a:r>
-          </a:p>
-        </p:txBody>
-      </p:sp>
-      <p:sp>
-        <p:nvSpPr>
-          <p:cNvPr id="11" name="TextBox 10"/>
+          </a:p>
+        </p:txBody>
+      </p:sp>
+      <p:sp>
+        <p:nvSpPr>
+          <p:cNvPr id="13" name="TextBox 12"/>
           <p:cNvSpPr txBox="1"/>
           <p:nvPr/>
         </p:nvSpPr>
         <p:spPr>
           <a:xfrm>
-            <a:off x="4224528" y="2194560"/>
-            <a:ext cx="1691640" cy="548640"/>
+            <a:off x="731520" y="3374135"/>
+            <a:ext cx="2926080" cy="777240"/>
           </a:xfrm>
           <a:prstGeom prst="rect">
             <a:avLst/>
@@ -4753,112 +4637,25 @@
             <a:r>
               <a:rPr sz="2000" b="1" i="0">
                 <a:solidFill>
-                  <a:srgbClr val="2B4EB4"/>
-                </a:solidFill>
-                <a:latin typeface="Calibri"/>
-              </a:rPr>
-              <a:t>Redactar</a:t>
-            </a:r>
-          </a:p>
-        </p:txBody>
-      </p:sp>
-      <p:sp>
-        <p:nvSpPr>
-          <p:cNvPr id="12" name="TextBox 11"/>
-          <p:cNvSpPr txBox="1"/>
-          <p:nvPr/>
-        </p:nvSpPr>
-        <p:spPr>
-          <a:xfrm>
-            <a:off x="3584448" y="2880360"/>
-            <a:ext cx="2240280" cy="3200400"/>
-          </a:xfrm>
-          <a:prstGeom prst="rect">
-            <a:avLst/>
-          </a:prstGeom>
-          <a:noFill/>
-        </p:spPr>
-        <p:txBody>
-          <a:bodyPr wrap="square" lIns="45720" rIns="45720" tIns="27432" bIns="27432" anchor="t">
-            <a:spAutoFit/>
-          </a:bodyPr>
-          <a:lstStyle/>
-          <a:p>
-            <a:pPr algn="l">
-              <a:spcAft>
-                <a:spcPts val="200"/>
-              </a:spcAft>
-            </a:pPr>
-            <a:r>
-              <a:rPr sz="1800" b="1" i="0">
-                <a:solidFill>
-                  <a:srgbClr val="2B4EB4"/>
-                </a:solidFill>
-                <a:latin typeface="Calibri"/>
-              </a:rPr>
-              <a:t>Oportunidad</a:t>
-            </a:r>
-          </a:p>
-          <a:p>
-            <a:pPr algn="l">
-              <a:spcAft>
-                <a:spcPts val="1200"/>
-              </a:spcAft>
-            </a:pPr>
-            <a:r>
-              <a:rPr sz="1800" b="0" i="0">
-                <a:solidFill>
-                  <a:srgbClr val="011754"/>
-                </a:solidFill>
-                <a:latin typeface="Calibri"/>
-              </a:rPr>
-              <a:t>Obtienes un primer borrador en minutos.</a:t>
-            </a:r>
-          </a:p>
-          <a:p>
-            <a:pPr algn="l">
-              <a:spcAft>
-                <a:spcPts val="200"/>
-              </a:spcAft>
-            </a:pPr>
-            <a:r>
-              <a:rPr sz="1800" b="1" i="0">
-                <a:solidFill>
-                  <a:srgbClr val="A02A2A"/>
-                </a:solidFill>
-                <a:latin typeface="Calibri"/>
-              </a:rPr>
-              <a:t>Riesgo</a:t>
-            </a:r>
-          </a:p>
-          <a:p>
-            <a:pPr algn="l">
-              <a:spcAft>
-                <a:spcPts val="400"/>
-              </a:spcAft>
-            </a:pPr>
-            <a:r>
-              <a:rPr sz="1800" b="0" i="0">
-                <a:solidFill>
-                  <a:srgbClr val="011754"/>
-                </a:solidFill>
-                <a:latin typeface="Calibri"/>
-              </a:rPr>
-              <a:t>Pérdida de autoría y de tu propia voz.</a:t>
-            </a:r>
-          </a:p>
-        </p:txBody>
-      </p:sp>
-      <p:sp>
-        <p:nvSpPr>
-          <p:cNvPr id="13" name="Rounded Rectangle 12"/>
+                  <a:srgbClr val="FFFFFF"/>
+                </a:solidFill>
+                <a:latin typeface="Calibri"/>
+              </a:rPr>
+              <a:t>Suficiencia</a:t>
+            </a:r>
+          </a:p>
+        </p:txBody>
+      </p:sp>
+      <p:sp>
+        <p:nvSpPr>
+          <p:cNvPr id="14" name="Rounded Rectangle 13"/>
           <p:cNvSpPr/>
           <p:nvPr/>
         </p:nvSpPr>
         <p:spPr>
           <a:xfrm>
-            <a:off x="6190488" y="2057400"/>
-            <a:ext cx="2606040" cy="4114800"/>
+            <a:off x="3813048" y="3374135"/>
+            <a:ext cx="7772400" cy="777240"/>
           </a:xfrm>
           <a:prstGeom prst="roundRect">
             <a:avLst>
@@ -4897,17 +4694,58 @@
       </p:sp>
       <p:sp>
         <p:nvSpPr>
-          <p:cNvPr id="14" name="Oval 13"/>
+          <p:cNvPr id="15" name="TextBox 14"/>
+          <p:cNvSpPr txBox="1"/>
+          <p:nvPr/>
+        </p:nvSpPr>
+        <p:spPr>
+          <a:xfrm>
+            <a:off x="3977639" y="3374135"/>
+            <a:ext cx="7498079" cy="777240"/>
+          </a:xfrm>
+          <a:prstGeom prst="rect">
+            <a:avLst/>
+          </a:prstGeom>
+          <a:noFill/>
+        </p:spPr>
+        <p:txBody>
+          <a:bodyPr wrap="square" lIns="45720" rIns="45720" tIns="27432" bIns="27432" anchor="ctr">
+            <a:spAutoFit/>
+          </a:bodyPr>
+          <a:lstStyle/>
+          <a:p>
+            <a:pPr algn="l">
+              <a:spcAft>
+                <a:spcPts val="400"/>
+              </a:spcAft>
+            </a:pPr>
+            <a:r>
+              <a:rPr sz="1800" b="0" i="0">
+                <a:solidFill>
+                  <a:srgbClr val="011754"/>
+                </a:solidFill>
+                <a:latin typeface="Calibri"/>
+              </a:rPr>
+              <a:t>¿Cubre lo necesario o deja vacíos relevantes sin mencionar?</a:t>
+            </a:r>
+          </a:p>
+        </p:txBody>
+      </p:sp>
+      <p:sp>
+        <p:nvSpPr>
+          <p:cNvPr id="16" name="Rounded Rectangle 15"/>
           <p:cNvSpPr/>
           <p:nvPr/>
         </p:nvSpPr>
         <p:spPr>
           <a:xfrm>
-            <a:off x="6373368" y="2194560"/>
-            <a:ext cx="548640" cy="548640"/>
-          </a:xfrm>
-          <a:prstGeom prst="ellipse">
-            <a:avLst/>
+            <a:off x="612648" y="4261103"/>
+            <a:ext cx="3108960" cy="777240"/>
+          </a:xfrm>
+          <a:prstGeom prst="roundRect">
+            <a:avLst>
+              <a:gd name="adj" fmla="val 6000"/>
+            </a:avLst>
           </a:prstGeom>
           <a:solidFill>
             <a:srgbClr val="2B4EB4"/>
@@ -4932,32 +4770,23 @@
           </a:fontRef>
         </p:style>
         <p:txBody>
-          <a:bodyPr rtlCol="0" anchor="ctr" lIns="0" rIns="0" tIns="0" bIns="0"/>
+          <a:bodyPr rtlCol="0" anchor="ctr"/>
           <a:lstStyle/>
           <a:p>
             <a:pPr algn="ctr"/>
-            <a:r>
-              <a:rPr sz="2000" b="1">
-                <a:solidFill>
-                  <a:srgbClr val="FFFFFF"/>
-                </a:solidFill>
-                <a:latin typeface="Calibri"/>
-              </a:rPr>
-              <a:t>3</a:t>
-            </a:r>
-          </a:p>
-        </p:txBody>
-      </p:sp>
-      <p:sp>
-        <p:nvSpPr>
-          <p:cNvPr id="15" name="TextBox 14"/>
+          </a:p>
+        </p:txBody>
+      </p:sp>
+      <p:sp>
+        <p:nvSpPr>
+          <p:cNvPr id="17" name="TextBox 16"/>
           <p:cNvSpPr txBox="1"/>
           <p:nvPr/>
         </p:nvSpPr>
         <p:spPr>
           <a:xfrm>
-            <a:off x="7013448" y="2194560"/>
-            <a:ext cx="1691640" cy="548640"/>
+            <a:off x="731520" y="4261103"/>
+            <a:ext cx="2926080" cy="777240"/>
           </a:xfrm>
           <a:prstGeom prst="rect">
             <a:avLst/>
@@ -4978,112 +4807,25 @@
             <a:r>
               <a:rPr sz="2000" b="1" i="0">
                 <a:solidFill>
-                  <a:srgbClr val="2B4EB4"/>
-                </a:solidFill>
-                <a:latin typeface="Calibri"/>
-              </a:rPr>
-              <a:t>Analizar</a:t>
-            </a:r>
-          </a:p>
-        </p:txBody>
-      </p:sp>
-      <p:sp>
-        <p:nvSpPr>
-          <p:cNvPr id="16" name="TextBox 15"/>
-          <p:cNvSpPr txBox="1"/>
-          <p:nvPr/>
-        </p:nvSpPr>
-        <p:spPr>
-          <a:xfrm>
-            <a:off x="6373368" y="2880360"/>
-            <a:ext cx="2240280" cy="3200400"/>
-          </a:xfrm>
-          <a:prstGeom prst="rect">
-            <a:avLst/>
-          </a:prstGeom>
-          <a:noFill/>
-        </p:spPr>
-        <p:txBody>
-          <a:bodyPr wrap="square" lIns="45720" rIns="45720" tIns="27432" bIns="27432" anchor="t">
-            <a:spAutoFit/>
-          </a:bodyPr>
-          <a:lstStyle/>
-          <a:p>
-            <a:pPr algn="l">
-              <a:spcAft>
-                <a:spcPts val="200"/>
-              </a:spcAft>
-            </a:pPr>
-            <a:r>
-              <a:rPr sz="1800" b="1" i="0">
-                <a:solidFill>
-                  <a:srgbClr val="2B4EB4"/>
-                </a:solidFill>
-                <a:latin typeface="Calibri"/>
-              </a:rPr>
-              <a:t>Oportunidad</a:t>
-            </a:r>
-          </a:p>
-          <a:p>
-            <a:pPr algn="l">
-              <a:spcAft>
-                <a:spcPts val="1200"/>
-              </a:spcAft>
-            </a:pPr>
-            <a:r>
-              <a:rPr sz="1800" b="0" i="0">
-                <a:solidFill>
-                  <a:srgbClr val="011754"/>
-                </a:solidFill>
-                <a:latin typeface="Calibri"/>
-              </a:rPr>
-              <a:t>Comparas alternativas y estructuras ideas.</a:t>
-            </a:r>
-          </a:p>
-          <a:p>
-            <a:pPr algn="l">
-              <a:spcAft>
-                <a:spcPts val="200"/>
-              </a:spcAft>
-            </a:pPr>
-            <a:r>
-              <a:rPr sz="1800" b="1" i="0">
-                <a:solidFill>
-                  <a:srgbClr val="A02A2A"/>
-                </a:solidFill>
-                <a:latin typeface="Calibri"/>
-              </a:rPr>
-              <a:t>Riesgo</a:t>
-            </a:r>
-          </a:p>
-          <a:p>
-            <a:pPr algn="l">
-              <a:spcAft>
-                <a:spcPts val="400"/>
-              </a:spcAft>
-            </a:pPr>
-            <a:r>
-              <a:rPr sz="1800" b="0" i="0">
-                <a:solidFill>
-                  <a:srgbClr val="011754"/>
-                </a:solidFill>
-                <a:latin typeface="Calibri"/>
-              </a:rPr>
-              <a:t>Datos o cifras inventados con total seguridad.</a:t>
-            </a:r>
-          </a:p>
-        </p:txBody>
-      </p:sp>
-      <p:sp>
-        <p:nvSpPr>
-          <p:cNvPr id="17" name="Rounded Rectangle 16"/>
+                  <a:srgbClr val="FFFFFF"/>
+                </a:solidFill>
+                <a:latin typeface="Calibri"/>
+              </a:rPr>
+              <a:t>Verificabilidad</a:t>
+            </a:r>
+          </a:p>
+        </p:txBody>
+      </p:sp>
+      <p:sp>
+        <p:nvSpPr>
+          <p:cNvPr id="18" name="Rounded Rectangle 17"/>
           <p:cNvSpPr/>
           <p:nvPr/>
         </p:nvSpPr>
         <p:spPr>
           <a:xfrm>
-            <a:off x="8979408" y="2057400"/>
-            <a:ext cx="2606040" cy="4114800"/>
+            <a:off x="3813048" y="4261103"/>
+            <a:ext cx="7772400" cy="777240"/>
           </a:xfrm>
           <a:prstGeom prst="roundRect">
             <a:avLst>
@@ -5122,17 +4864,58 @@
       </p:sp>
       <p:sp>
         <p:nvSpPr>
-          <p:cNvPr id="18" name="Oval 17"/>
+          <p:cNvPr id="19" name="TextBox 18"/>
+          <p:cNvSpPr txBox="1"/>
+          <p:nvPr/>
+        </p:nvSpPr>
+        <p:spPr>
+          <a:xfrm>
+            <a:off x="3977639" y="4261103"/>
+            <a:ext cx="7498079" cy="777240"/>
+          </a:xfrm>
+          <a:prstGeom prst="rect">
+            <a:avLst/>
+          </a:prstGeom>
+          <a:noFill/>
+        </p:spPr>
+        <p:txBody>
+          <a:bodyPr wrap="square" lIns="45720" rIns="45720" tIns="27432" bIns="27432" anchor="ctr">
+            <a:spAutoFit/>
+          </a:bodyPr>
+          <a:lstStyle/>
+          <a:p>
+            <a:pPr algn="l">
+              <a:spcAft>
+                <a:spcPts val="400"/>
+              </a:spcAft>
+            </a:pPr>
+            <a:r>
+              <a:rPr sz="1800" b="0" i="0">
+                <a:solidFill>
+                  <a:srgbClr val="011754"/>
+                </a:solidFill>
+                <a:latin typeface="Calibri"/>
+              </a:rPr>
+              <a:t>¿Es posible comprobar cada dato o referencia en una fuente externa?</a:t>
+            </a:r>
+          </a:p>
+        </p:txBody>
+      </p:sp>
+      <p:sp>
+        <p:nvSpPr>
+          <p:cNvPr id="20" name="Rounded Rectangle 19"/>
           <p:cNvSpPr/>
           <p:nvPr/>
         </p:nvSpPr>
         <p:spPr>
           <a:xfrm>
-            <a:off x="9162288" y="2194560"/>
-            <a:ext cx="548640" cy="548640"/>
-          </a:xfrm>
-          <a:prstGeom prst="ellipse">
-            <a:avLst/>
+            <a:off x="612648" y="5148071"/>
+            <a:ext cx="3108960" cy="777240"/>
+          </a:xfrm>
+          <a:prstGeom prst="roundRect">
+            <a:avLst>
+              <a:gd name="adj" fmla="val 6000"/>
+            </a:avLst>
           </a:prstGeom>
           <a:solidFill>
             <a:srgbClr val="2B4EB4"/>
@@ -5157,32 +4940,23 @@
           </a:fontRef>
         </p:style>
         <p:txBody>
-          <a:bodyPr rtlCol="0" anchor="ctr" lIns="0" rIns="0" tIns="0" bIns="0"/>
+          <a:bodyPr rtlCol="0" anchor="ctr"/>
           <a:lstStyle/>
           <a:p>
             <a:pPr algn="ctr"/>
-            <a:r>
-              <a:rPr sz="2000" b="1">
-                <a:solidFill>
-                  <a:srgbClr val="FFFFFF"/>
-                </a:solidFill>
-                <a:latin typeface="Calibri"/>
-              </a:rPr>
-              <a:t>4</a:t>
-            </a:r>
-          </a:p>
-        </p:txBody>
-      </p:sp>
-      <p:sp>
-        <p:nvSpPr>
-          <p:cNvPr id="19" name="TextBox 18"/>
+          </a:p>
+        </p:txBody>
+      </p:sp>
+      <p:sp>
+        <p:nvSpPr>
+          <p:cNvPr id="21" name="TextBox 20"/>
           <p:cNvSpPr txBox="1"/>
           <p:nvPr/>
         </p:nvSpPr>
         <p:spPr>
           <a:xfrm>
-            <a:off x="9802368" y="2194560"/>
-            <a:ext cx="1691640" cy="548640"/>
+            <a:off x="731520" y="5148071"/>
+            <a:ext cx="2926080" cy="777240"/>
           </a:xfrm>
           <a:prstGeom prst="rect">
             <a:avLst/>
@@ -5203,25 +4977,71 @@
             <a:r>
               <a:rPr sz="2000" b="1" i="0">
                 <a:solidFill>
-                  <a:srgbClr val="2B4EB4"/>
-                </a:solidFill>
-                <a:latin typeface="Calibri"/>
-              </a:rPr>
-              <a:t>Verificar</a:t>
-            </a:r>
-          </a:p>
-        </p:txBody>
-      </p:sp>
-      <p:sp>
-        <p:nvSpPr>
-          <p:cNvPr id="20" name="TextBox 19"/>
+                  <a:srgbClr val="FFFFFF"/>
+                </a:solidFill>
+                <a:latin typeface="Calibri"/>
+              </a:rPr>
+              <a:t>Trazabilidad</a:t>
+            </a:r>
+          </a:p>
+        </p:txBody>
+      </p:sp>
+      <p:sp>
+        <p:nvSpPr>
+          <p:cNvPr id="22" name="Rounded Rectangle 21"/>
+          <p:cNvSpPr/>
+          <p:nvPr/>
+        </p:nvSpPr>
+        <p:spPr>
+          <a:xfrm>
+            <a:off x="3813048" y="5148071"/>
+            <a:ext cx="7772400" cy="777240"/>
+          </a:xfrm>
+          <a:prstGeom prst="roundRect">
+            <a:avLst>
+              <a:gd name="adj" fmla="val 6000"/>
+            </a:avLst>
+          </a:prstGeom>
+          <a:solidFill>
+            <a:srgbClr val="D9DEEF"/>
+          </a:solidFill>
+          <a:ln>
+            <a:noFill/>
+          </a:ln>
+          <a:effectLst/>
+        </p:spPr>
+        <p:style>
+          <a:lnRef idx="1">
+            <a:schemeClr val="accent1"/>
+          </a:lnRef>
+          <a:fillRef idx="3">
+            <a:schemeClr val="accent1"/>
+          </a:fillRef>
+          <a:effectRef idx="2">
+            <a:schemeClr val="accent1"/>
+          </a:effectRef>
+          <a:fontRef idx="minor">
+            <a:schemeClr val="lt1"/>
+          </a:fontRef>
+        </p:style>
+        <p:txBody>
+          <a:bodyPr rtlCol="0" anchor="ctr"/>
+          <a:lstStyle/>
+          <a:p>
+            <a:pPr algn="ctr"/>
+          </a:p>
+        </p:txBody>
+      </p:sp>
+      <p:sp>
+        <p:nvSpPr>
+          <p:cNvPr id="23" name="TextBox 22"/>
           <p:cNvSpPr txBox="1"/>
           <p:nvPr/>
         </p:nvSpPr>
         <p:spPr>
           <a:xfrm>
-            <a:off x="9162288" y="2880360"/>
-            <a:ext cx="2240280" cy="3200400"/>
+            <a:off x="3977639" y="5148071"/>
+            <a:ext cx="7498079" cy="777240"/>
           </a:xfrm>
           <a:prstGeom prst="rect">
             <a:avLst/>
@@ -5229,58 +5049,10 @@
           <a:noFill/>
         </p:spPr>
         <p:txBody>
-          <a:bodyPr wrap="square" lIns="45720" rIns="45720" tIns="27432" bIns="27432" anchor="t">
+          <a:bodyPr wrap="square" lIns="45720" rIns="45720" tIns="27432" bIns="27432" anchor="ctr">
             <a:spAutoFit/>
           </a:bodyPr>
           <a:lstStyle/>
-          <a:p>
-            <a:pPr algn="l">
-              <a:spcAft>
-                <a:spcPts val="200"/>
-              </a:spcAft>
-            </a:pPr>
-            <a:r>
-              <a:rPr sz="1800" b="1" i="0">
-                <a:solidFill>
-                  <a:srgbClr val="2B4EB4"/>
-                </a:solidFill>
-                <a:latin typeface="Calibri"/>
-              </a:rPr>
-              <a:t>Oportunidad</a:t>
-            </a:r>
-          </a:p>
-          <a:p>
-            <a:pPr algn="l">
-              <a:spcAft>
-                <a:spcPts val="1200"/>
-              </a:spcAft>
-            </a:pPr>
-            <a:r>
-              <a:rPr sz="1800" b="0" i="0">
-                <a:solidFill>
-                  <a:srgbClr val="011754"/>
-                </a:solidFill>
-                <a:latin typeface="Calibri"/>
-              </a:rPr>
-              <a:t>Apoyas la revisión con listas de control.</a:t>
-            </a:r>
-          </a:p>
-          <a:p>
-            <a:pPr algn="l">
-              <a:spcAft>
-                <a:spcPts val="200"/>
-              </a:spcAft>
-            </a:pPr>
-            <a:r>
-              <a:rPr sz="1800" b="1" i="0">
-                <a:solidFill>
-                  <a:srgbClr val="A02A2A"/>
-                </a:solidFill>
-                <a:latin typeface="Calibri"/>
-              </a:rPr>
-              <a:t>Riesgo</a:t>
-            </a:r>
-          </a:p>
           <a:p>
             <a:pPr algn="l">
               <a:spcAft>
@@ -5294,7 +5066,7 @@
                 </a:solidFill>
                 <a:latin typeface="Calibri"/>
               </a:rPr>
-              <a:t>Dar por válida una cita sin comprobarla.</a:t>
+              <a:t>¿Se identifica de dónde viene cada afirmación: dato propio, inferencia o fuente citada?</a:t>
             </a:r>
           </a:p>
         </p:txBody>
@@ -6424,133 +6196,6 @@
 </p:sld>
 </file>
 
-<file path=ppt/slides/slide14.xml><?xml version="1.0" encoding="utf-8"?>
-<p:sld xmlns:a="http://schemas.openxmlformats.org/drawingml/2006/main" xmlns:r="http://schemas.openxmlformats.org/officeDocument/2006/relationships" xmlns:p="http://schemas.openxmlformats.org/presentationml/2006/main">
-  <p:cSld>
-    <p:spTree>
-      <p:nvGrpSpPr>
-        <p:cNvPr id="1" name=""/>
-        <p:cNvGrpSpPr/>
-        <p:nvPr/>
-      </p:nvGrpSpPr>
-      <p:grpSpPr>
-        <a:xfrm>
-          <a:off x="0" y="0"/>
-          <a:ext cx="0" cy="0"/>
-          <a:chOff x="0" y="0"/>
-          <a:chExt cx="0" cy="0"/>
-        </a:xfrm>
-      </p:grpSpPr>
-      <p:pic>
-        <p:nvPicPr>
-          <p:cNvPr id="2" name="Picture 1" descr="divider_bg.png"/>
-          <p:cNvPicPr>
-            <a:picLocks noChangeAspect="1"/>
-          </p:cNvPicPr>
-          <p:nvPr/>
-        </p:nvPicPr>
-        <p:blipFill>
-          <a:blip r:embed="rId2"/>
-          <a:stretch>
-            <a:fillRect/>
-          </a:stretch>
-        </p:blipFill>
-        <p:spPr>
-          <a:xfrm>
-            <a:off x="0" y="0"/>
-            <a:ext cx="12191695" cy="6858000"/>
-          </a:xfrm>
-          <a:prstGeom prst="rect">
-            <a:avLst/>
-          </a:prstGeom>
-        </p:spPr>
-      </p:pic>
-      <p:sp>
-        <p:nvSpPr>
-          <p:cNvPr id="3" name="TextBox 2"/>
-          <p:cNvSpPr txBox="1"/>
-          <p:nvPr/>
-        </p:nvSpPr>
-        <p:spPr>
-          <a:xfrm>
-            <a:off x="982912" y="2676125"/>
-            <a:ext cx="437840" cy="1999910"/>
-          </a:xfrm>
-          <a:prstGeom prst="rect">
-            <a:avLst/>
-          </a:prstGeom>
-          <a:noFill/>
-        </p:spPr>
-        <p:txBody>
-          <a:bodyPr wrap="square">
-            <a:spAutoFit/>
-          </a:bodyPr>
-          <a:lstStyle/>
-          <a:p>
-            <a:pPr algn="l">
-              <a:lnSpc>
-                <a:spcPct val="115000"/>
-              </a:lnSpc>
-            </a:pPr>
-            <a:r>
-              <a:rPr sz="7200" b="1" i="0">
-                <a:solidFill>
-                  <a:srgbClr val="FFFFFF"/>
-                </a:solidFill>
-                <a:latin typeface="Calibri"/>
-              </a:rPr>
-              <a:t>3</a:t>
-            </a:r>
-          </a:p>
-        </p:txBody>
-      </p:sp>
-      <p:sp>
-        <p:nvSpPr>
-          <p:cNvPr id="4" name="TextBox 3"/>
-          <p:cNvSpPr txBox="1"/>
-          <p:nvPr/>
-        </p:nvSpPr>
-        <p:spPr>
-          <a:xfrm>
-            <a:off x="982912" y="4737409"/>
-            <a:ext cx="10346277" cy="702221"/>
-          </a:xfrm>
-          <a:prstGeom prst="rect">
-            <a:avLst/>
-          </a:prstGeom>
-          <a:noFill/>
-        </p:spPr>
-        <p:txBody>
-          <a:bodyPr wrap="square">
-            <a:spAutoFit/>
-          </a:bodyPr>
-          <a:lstStyle/>
-          <a:p>
-            <a:pPr algn="l">
-              <a:lnSpc>
-                <a:spcPct val="115000"/>
-              </a:lnSpc>
-            </a:pPr>
-            <a:r>
-              <a:rPr sz="2600" b="0" i="0">
-                <a:solidFill>
-                  <a:srgbClr val="FFFFFF"/>
-                </a:solidFill>
-                <a:latin typeface="Calibri"/>
-              </a:rPr>
-              <a:t>SESGOS, ERRORES, ALUCINACIONES Y LIMITACIONES</a:t>
-            </a:r>
-          </a:p>
-        </p:txBody>
-      </p:sp>
-    </p:spTree>
-  </p:cSld>
-  <p:clrMapOvr>
-    <a:masterClrMapping/>
-  </p:clrMapOvr>
-</p:sld>
-</file>
-
 <file path=ppt/slides/slide15.xml><?xml version="1.0" encoding="utf-8"?>
 <p:sld xmlns:a="http://schemas.openxmlformats.org/drawingml/2006/main" xmlns:r="http://schemas.openxmlformats.org/officeDocument/2006/relationships" xmlns:p="http://schemas.openxmlformats.org/presentationml/2006/main">
   <p:cSld>
@@ -7987,1686 +7632,6 @@
                 <a:latin typeface="Calibri"/>
               </a:rPr>
               <a:t>La fluidez del texto no es evidencia de que sea correcto.</a:t>
-            </a:r>
-          </a:p>
-        </p:txBody>
-      </p:sp>
-    </p:spTree>
-  </p:cSld>
-  <p:clrMapOvr>
-    <a:masterClrMapping/>
-  </p:clrMapOvr>
-</p:sld>
-</file>
-
-<file path=ppt/slides/slide17.xml><?xml version="1.0" encoding="utf-8"?>
-<p:sld xmlns:a="http://schemas.openxmlformats.org/drawingml/2006/main" xmlns:r="http://schemas.openxmlformats.org/officeDocument/2006/relationships" xmlns:p="http://schemas.openxmlformats.org/presentationml/2006/main">
-  <p:cSld>
-    <p:spTree>
-      <p:nvGrpSpPr>
-        <p:cNvPr id="1" name=""/>
-        <p:cNvGrpSpPr/>
-        <p:nvPr/>
-      </p:nvGrpSpPr>
-      <p:grpSpPr>
-        <a:xfrm>
-          <a:off x="0" y="0"/>
-          <a:ext cx="0" cy="0"/>
-          <a:chOff x="0" y="0"/>
-          <a:chExt cx="0" cy="0"/>
-        </a:xfrm>
-      </p:grpSpPr>
-      <p:pic>
-        <p:nvPicPr>
-          <p:cNvPr id="2" name="Picture 1" descr="bg_content.png"/>
-          <p:cNvPicPr>
-            <a:picLocks noChangeAspect="1"/>
-          </p:cNvPicPr>
-          <p:nvPr/>
-        </p:nvPicPr>
-        <p:blipFill>
-          <a:blip r:embed="rId2"/>
-          <a:stretch>
-            <a:fillRect/>
-          </a:stretch>
-        </p:blipFill>
-        <p:spPr>
-          <a:xfrm>
-            <a:off x="0" y="0"/>
-            <a:ext cx="12191695" cy="6858000"/>
-          </a:xfrm>
-          <a:prstGeom prst="rect">
-            <a:avLst/>
-          </a:prstGeom>
-        </p:spPr>
-      </p:pic>
-      <p:sp>
-        <p:nvSpPr>
-          <p:cNvPr id="3" name="TextBox 2"/>
-          <p:cNvSpPr txBox="1"/>
-          <p:nvPr/>
-        </p:nvSpPr>
-        <p:spPr>
-          <a:xfrm>
-            <a:off x="612648" y="777240"/>
-            <a:ext cx="10332720" cy="640080"/>
-          </a:xfrm>
-          <a:prstGeom prst="rect">
-            <a:avLst/>
-          </a:prstGeom>
-          <a:noFill/>
-        </p:spPr>
-        <p:txBody>
-          <a:bodyPr wrap="square" lIns="45720" rIns="45720" tIns="27432" bIns="27432" anchor="ctr">
-            <a:spAutoFit/>
-          </a:bodyPr>
-          <a:lstStyle/>
-          <a:p>
-            <a:pPr algn="l">
-              <a:spcAft>
-                <a:spcPts val="400"/>
-              </a:spcAft>
-            </a:pPr>
-            <a:r>
-              <a:rPr sz="2800" b="1" i="0">
-                <a:solidFill>
-                  <a:srgbClr val="1836B2"/>
-                </a:solidFill>
-                <a:latin typeface="Calibri"/>
-              </a:rPr>
-              <a:t>Banco de señales de alerta</a:t>
-            </a:r>
-          </a:p>
-        </p:txBody>
-      </p:sp>
-      <p:sp>
-        <p:nvSpPr>
-          <p:cNvPr id="4" name="Rounded Rectangle 3"/>
-          <p:cNvSpPr/>
-          <p:nvPr/>
-        </p:nvSpPr>
-        <p:spPr>
-          <a:xfrm>
-            <a:off x="612648" y="1600200"/>
-            <a:ext cx="5394960" cy="676656"/>
-          </a:xfrm>
-          <a:prstGeom prst="roundRect">
-            <a:avLst>
-              <a:gd name="adj" fmla="val 6000"/>
-            </a:avLst>
-          </a:prstGeom>
-          <a:solidFill>
-            <a:srgbClr val="D9DEEF"/>
-          </a:solidFill>
-          <a:ln>
-            <a:noFill/>
-          </a:ln>
-          <a:effectLst/>
-        </p:spPr>
-        <p:style>
-          <a:lnRef idx="1">
-            <a:schemeClr val="accent1"/>
-          </a:lnRef>
-          <a:fillRef idx="3">
-            <a:schemeClr val="accent1"/>
-          </a:fillRef>
-          <a:effectRef idx="2">
-            <a:schemeClr val="accent1"/>
-          </a:effectRef>
-          <a:fontRef idx="minor">
-            <a:schemeClr val="lt1"/>
-          </a:fontRef>
-        </p:style>
-        <p:txBody>
-          <a:bodyPr rtlCol="0" anchor="ctr"/>
-          <a:lstStyle/>
-          <a:p>
-            <a:pPr algn="ctr"/>
-          </a:p>
-        </p:txBody>
-      </p:sp>
-      <p:sp>
-        <p:nvSpPr>
-          <p:cNvPr id="5" name="Oval 4"/>
-          <p:cNvSpPr/>
-          <p:nvPr/>
-        </p:nvSpPr>
-        <p:spPr>
-          <a:xfrm>
-            <a:off x="722376" y="1682496"/>
-            <a:ext cx="512064" cy="512064"/>
-          </a:xfrm>
-          <a:prstGeom prst="ellipse">
-            <a:avLst/>
-          </a:prstGeom>
-          <a:solidFill>
-            <a:srgbClr val="2B4EB4"/>
-          </a:solidFill>
-          <a:ln>
-            <a:noFill/>
-          </a:ln>
-          <a:effectLst/>
-        </p:spPr>
-        <p:style>
-          <a:lnRef idx="1">
-            <a:schemeClr val="accent1"/>
-          </a:lnRef>
-          <a:fillRef idx="3">
-            <a:schemeClr val="accent1"/>
-          </a:fillRef>
-          <a:effectRef idx="2">
-            <a:schemeClr val="accent1"/>
-          </a:effectRef>
-          <a:fontRef idx="minor">
-            <a:schemeClr val="lt1"/>
-          </a:fontRef>
-        </p:style>
-        <p:txBody>
-          <a:bodyPr rtlCol="0" anchor="ctr" lIns="0" rIns="0" tIns="0" bIns="0"/>
-          <a:lstStyle/>
-          <a:p>
-            <a:pPr algn="ctr"/>
-            <a:r>
-              <a:rPr sz="1600" b="1">
-                <a:solidFill>
-                  <a:srgbClr val="FFFFFF"/>
-                </a:solidFill>
-                <a:latin typeface="Calibri"/>
-              </a:rPr>
-              <a:t>01</a:t>
-            </a:r>
-          </a:p>
-        </p:txBody>
-      </p:sp>
-      <p:sp>
-        <p:nvSpPr>
-          <p:cNvPr id="6" name="TextBox 5"/>
-          <p:cNvSpPr txBox="1"/>
-          <p:nvPr/>
-        </p:nvSpPr>
-        <p:spPr>
-          <a:xfrm>
-            <a:off x="1344168" y="1600200"/>
-            <a:ext cx="4572000" cy="676656"/>
-          </a:xfrm>
-          <a:prstGeom prst="rect">
-            <a:avLst/>
-          </a:prstGeom>
-          <a:noFill/>
-        </p:spPr>
-        <p:txBody>
-          <a:bodyPr wrap="square" lIns="45720" rIns="45720" tIns="27432" bIns="27432" anchor="ctr">
-            <a:spAutoFit/>
-          </a:bodyPr>
-          <a:lstStyle/>
-          <a:p>
-            <a:pPr algn="l">
-              <a:spcAft>
-                <a:spcPts val="400"/>
-              </a:spcAft>
-            </a:pPr>
-            <a:r>
-              <a:rPr sz="1800" b="0" i="0">
-                <a:solidFill>
-                  <a:srgbClr val="011754"/>
-                </a:solidFill>
-                <a:latin typeface="Calibri"/>
-              </a:rPr>
-              <a:t>Cifra sin fuente</a:t>
-            </a:r>
-          </a:p>
-        </p:txBody>
-      </p:sp>
-      <p:sp>
-        <p:nvSpPr>
-          <p:cNvPr id="7" name="Rounded Rectangle 6"/>
-          <p:cNvSpPr/>
-          <p:nvPr/>
-        </p:nvSpPr>
-        <p:spPr>
-          <a:xfrm>
-            <a:off x="612648" y="2368296"/>
-            <a:ext cx="5394960" cy="676656"/>
-          </a:xfrm>
-          <a:prstGeom prst="roundRect">
-            <a:avLst>
-              <a:gd name="adj" fmla="val 6000"/>
-            </a:avLst>
-          </a:prstGeom>
-          <a:solidFill>
-            <a:srgbClr val="D9DEEF"/>
-          </a:solidFill>
-          <a:ln>
-            <a:noFill/>
-          </a:ln>
-          <a:effectLst/>
-        </p:spPr>
-        <p:style>
-          <a:lnRef idx="1">
-            <a:schemeClr val="accent1"/>
-          </a:lnRef>
-          <a:fillRef idx="3">
-            <a:schemeClr val="accent1"/>
-          </a:fillRef>
-          <a:effectRef idx="2">
-            <a:schemeClr val="accent1"/>
-          </a:effectRef>
-          <a:fontRef idx="minor">
-            <a:schemeClr val="lt1"/>
-          </a:fontRef>
-        </p:style>
-        <p:txBody>
-          <a:bodyPr rtlCol="0" anchor="ctr"/>
-          <a:lstStyle/>
-          <a:p>
-            <a:pPr algn="ctr"/>
-          </a:p>
-        </p:txBody>
-      </p:sp>
-      <p:sp>
-        <p:nvSpPr>
-          <p:cNvPr id="8" name="Oval 7"/>
-          <p:cNvSpPr/>
-          <p:nvPr/>
-        </p:nvSpPr>
-        <p:spPr>
-          <a:xfrm>
-            <a:off x="722376" y="2450591"/>
-            <a:ext cx="512064" cy="512064"/>
-          </a:xfrm>
-          <a:prstGeom prst="ellipse">
-            <a:avLst/>
-          </a:prstGeom>
-          <a:solidFill>
-            <a:srgbClr val="2B4EB4"/>
-          </a:solidFill>
-          <a:ln>
-            <a:noFill/>
-          </a:ln>
-          <a:effectLst/>
-        </p:spPr>
-        <p:style>
-          <a:lnRef idx="1">
-            <a:schemeClr val="accent1"/>
-          </a:lnRef>
-          <a:fillRef idx="3">
-            <a:schemeClr val="accent1"/>
-          </a:fillRef>
-          <a:effectRef idx="2">
-            <a:schemeClr val="accent1"/>
-          </a:effectRef>
-          <a:fontRef idx="minor">
-            <a:schemeClr val="lt1"/>
-          </a:fontRef>
-        </p:style>
-        <p:txBody>
-          <a:bodyPr rtlCol="0" anchor="ctr" lIns="0" rIns="0" tIns="0" bIns="0"/>
-          <a:lstStyle/>
-          <a:p>
-            <a:pPr algn="ctr"/>
-            <a:r>
-              <a:rPr sz="1600" b="1">
-                <a:solidFill>
-                  <a:srgbClr val="FFFFFF"/>
-                </a:solidFill>
-                <a:latin typeface="Calibri"/>
-              </a:rPr>
-              <a:t>02</a:t>
-            </a:r>
-          </a:p>
-        </p:txBody>
-      </p:sp>
-      <p:sp>
-        <p:nvSpPr>
-          <p:cNvPr id="9" name="TextBox 8"/>
-          <p:cNvSpPr txBox="1"/>
-          <p:nvPr/>
-        </p:nvSpPr>
-        <p:spPr>
-          <a:xfrm>
-            <a:off x="1344168" y="2368296"/>
-            <a:ext cx="4572000" cy="676656"/>
-          </a:xfrm>
-          <a:prstGeom prst="rect">
-            <a:avLst/>
-          </a:prstGeom>
-          <a:noFill/>
-        </p:spPr>
-        <p:txBody>
-          <a:bodyPr wrap="square" lIns="45720" rIns="45720" tIns="27432" bIns="27432" anchor="ctr">
-            <a:spAutoFit/>
-          </a:bodyPr>
-          <a:lstStyle/>
-          <a:p>
-            <a:pPr algn="l">
-              <a:spcAft>
-                <a:spcPts val="400"/>
-              </a:spcAft>
-            </a:pPr>
-            <a:r>
-              <a:rPr sz="1800" b="0" i="0">
-                <a:solidFill>
-                  <a:srgbClr val="011754"/>
-                </a:solidFill>
-                <a:latin typeface="Calibri"/>
-              </a:rPr>
-              <a:t>Cita sin DOI</a:t>
-            </a:r>
-          </a:p>
-        </p:txBody>
-      </p:sp>
-      <p:sp>
-        <p:nvSpPr>
-          <p:cNvPr id="10" name="Rounded Rectangle 9"/>
-          <p:cNvSpPr/>
-          <p:nvPr/>
-        </p:nvSpPr>
-        <p:spPr>
-          <a:xfrm>
-            <a:off x="612648" y="3136391"/>
-            <a:ext cx="5394960" cy="676656"/>
-          </a:xfrm>
-          <a:prstGeom prst="roundRect">
-            <a:avLst>
-              <a:gd name="adj" fmla="val 6000"/>
-            </a:avLst>
-          </a:prstGeom>
-          <a:solidFill>
-            <a:srgbClr val="D9DEEF"/>
-          </a:solidFill>
-          <a:ln>
-            <a:noFill/>
-          </a:ln>
-          <a:effectLst/>
-        </p:spPr>
-        <p:style>
-          <a:lnRef idx="1">
-            <a:schemeClr val="accent1"/>
-          </a:lnRef>
-          <a:fillRef idx="3">
-            <a:schemeClr val="accent1"/>
-          </a:fillRef>
-          <a:effectRef idx="2">
-            <a:schemeClr val="accent1"/>
-          </a:effectRef>
-          <a:fontRef idx="minor">
-            <a:schemeClr val="lt1"/>
-          </a:fontRef>
-        </p:style>
-        <p:txBody>
-          <a:bodyPr rtlCol="0" anchor="ctr"/>
-          <a:lstStyle/>
-          <a:p>
-            <a:pPr algn="ctr"/>
-          </a:p>
-        </p:txBody>
-      </p:sp>
-      <p:sp>
-        <p:nvSpPr>
-          <p:cNvPr id="11" name="Oval 10"/>
-          <p:cNvSpPr/>
-          <p:nvPr/>
-        </p:nvSpPr>
-        <p:spPr>
-          <a:xfrm>
-            <a:off x="722376" y="3218687"/>
-            <a:ext cx="512064" cy="512064"/>
-          </a:xfrm>
-          <a:prstGeom prst="ellipse">
-            <a:avLst/>
-          </a:prstGeom>
-          <a:solidFill>
-            <a:srgbClr val="2B4EB4"/>
-          </a:solidFill>
-          <a:ln>
-            <a:noFill/>
-          </a:ln>
-          <a:effectLst/>
-        </p:spPr>
-        <p:style>
-          <a:lnRef idx="1">
-            <a:schemeClr val="accent1"/>
-          </a:lnRef>
-          <a:fillRef idx="3">
-            <a:schemeClr val="accent1"/>
-          </a:fillRef>
-          <a:effectRef idx="2">
-            <a:schemeClr val="accent1"/>
-          </a:effectRef>
-          <a:fontRef idx="minor">
-            <a:schemeClr val="lt1"/>
-          </a:fontRef>
-        </p:style>
-        <p:txBody>
-          <a:bodyPr rtlCol="0" anchor="ctr" lIns="0" rIns="0" tIns="0" bIns="0"/>
-          <a:lstStyle/>
-          <a:p>
-            <a:pPr algn="ctr"/>
-            <a:r>
-              <a:rPr sz="1600" b="1">
-                <a:solidFill>
-                  <a:srgbClr val="FFFFFF"/>
-                </a:solidFill>
-                <a:latin typeface="Calibri"/>
-              </a:rPr>
-              <a:t>03</a:t>
-            </a:r>
-          </a:p>
-        </p:txBody>
-      </p:sp>
-      <p:sp>
-        <p:nvSpPr>
-          <p:cNvPr id="12" name="TextBox 11"/>
-          <p:cNvSpPr txBox="1"/>
-          <p:nvPr/>
-        </p:nvSpPr>
-        <p:spPr>
-          <a:xfrm>
-            <a:off x="1344168" y="3136391"/>
-            <a:ext cx="4572000" cy="676656"/>
-          </a:xfrm>
-          <a:prstGeom prst="rect">
-            <a:avLst/>
-          </a:prstGeom>
-          <a:noFill/>
-        </p:spPr>
-        <p:txBody>
-          <a:bodyPr wrap="square" lIns="45720" rIns="45720" tIns="27432" bIns="27432" anchor="ctr">
-            <a:spAutoFit/>
-          </a:bodyPr>
-          <a:lstStyle/>
-          <a:p>
-            <a:pPr algn="l">
-              <a:spcAft>
-                <a:spcPts val="400"/>
-              </a:spcAft>
-            </a:pPr>
-            <a:r>
-              <a:rPr sz="1800" b="0" i="0">
-                <a:solidFill>
-                  <a:srgbClr val="011754"/>
-                </a:solidFill>
-                <a:latin typeface="Calibri"/>
-              </a:rPr>
-              <a:t>Autor que no aparece en ninguna base</a:t>
-            </a:r>
-          </a:p>
-        </p:txBody>
-      </p:sp>
-      <p:sp>
-        <p:nvSpPr>
-          <p:cNvPr id="13" name="Rounded Rectangle 12"/>
-          <p:cNvSpPr/>
-          <p:nvPr/>
-        </p:nvSpPr>
-        <p:spPr>
-          <a:xfrm>
-            <a:off x="612648" y="3904487"/>
-            <a:ext cx="5394960" cy="676656"/>
-          </a:xfrm>
-          <a:prstGeom prst="roundRect">
-            <a:avLst>
-              <a:gd name="adj" fmla="val 6000"/>
-            </a:avLst>
-          </a:prstGeom>
-          <a:solidFill>
-            <a:srgbClr val="D9DEEF"/>
-          </a:solidFill>
-          <a:ln>
-            <a:noFill/>
-          </a:ln>
-          <a:effectLst/>
-        </p:spPr>
-        <p:style>
-          <a:lnRef idx="1">
-            <a:schemeClr val="accent1"/>
-          </a:lnRef>
-          <a:fillRef idx="3">
-            <a:schemeClr val="accent1"/>
-          </a:fillRef>
-          <a:effectRef idx="2">
-            <a:schemeClr val="accent1"/>
-          </a:effectRef>
-          <a:fontRef idx="minor">
-            <a:schemeClr val="lt1"/>
-          </a:fontRef>
-        </p:style>
-        <p:txBody>
-          <a:bodyPr rtlCol="0" anchor="ctr"/>
-          <a:lstStyle/>
-          <a:p>
-            <a:pPr algn="ctr"/>
-          </a:p>
-        </p:txBody>
-      </p:sp>
-      <p:sp>
-        <p:nvSpPr>
-          <p:cNvPr id="14" name="Oval 13"/>
-          <p:cNvSpPr/>
-          <p:nvPr/>
-        </p:nvSpPr>
-        <p:spPr>
-          <a:xfrm>
-            <a:off x="722376" y="3986783"/>
-            <a:ext cx="512064" cy="512064"/>
-          </a:xfrm>
-          <a:prstGeom prst="ellipse">
-            <a:avLst/>
-          </a:prstGeom>
-          <a:solidFill>
-            <a:srgbClr val="2B4EB4"/>
-          </a:solidFill>
-          <a:ln>
-            <a:noFill/>
-          </a:ln>
-          <a:effectLst/>
-        </p:spPr>
-        <p:style>
-          <a:lnRef idx="1">
-            <a:schemeClr val="accent1"/>
-          </a:lnRef>
-          <a:fillRef idx="3">
-            <a:schemeClr val="accent1"/>
-          </a:fillRef>
-          <a:effectRef idx="2">
-            <a:schemeClr val="accent1"/>
-          </a:effectRef>
-          <a:fontRef idx="minor">
-            <a:schemeClr val="lt1"/>
-          </a:fontRef>
-        </p:style>
-        <p:txBody>
-          <a:bodyPr rtlCol="0" anchor="ctr" lIns="0" rIns="0" tIns="0" bIns="0"/>
-          <a:lstStyle/>
-          <a:p>
-            <a:pPr algn="ctr"/>
-            <a:r>
-              <a:rPr sz="1600" b="1">
-                <a:solidFill>
-                  <a:srgbClr val="FFFFFF"/>
-                </a:solidFill>
-                <a:latin typeface="Calibri"/>
-              </a:rPr>
-              <a:t>04</a:t>
-            </a:r>
-          </a:p>
-        </p:txBody>
-      </p:sp>
-      <p:sp>
-        <p:nvSpPr>
-          <p:cNvPr id="15" name="TextBox 14"/>
-          <p:cNvSpPr txBox="1"/>
-          <p:nvPr/>
-        </p:nvSpPr>
-        <p:spPr>
-          <a:xfrm>
-            <a:off x="1344168" y="3904487"/>
-            <a:ext cx="4572000" cy="676656"/>
-          </a:xfrm>
-          <a:prstGeom prst="rect">
-            <a:avLst/>
-          </a:prstGeom>
-          <a:noFill/>
-        </p:spPr>
-        <p:txBody>
-          <a:bodyPr wrap="square" lIns="45720" rIns="45720" tIns="27432" bIns="27432" anchor="ctr">
-            <a:spAutoFit/>
-          </a:bodyPr>
-          <a:lstStyle/>
-          <a:p>
-            <a:pPr algn="l">
-              <a:spcAft>
-                <a:spcPts val="400"/>
-              </a:spcAft>
-            </a:pPr>
-            <a:r>
-              <a:rPr sz="1800" b="0" i="0">
-                <a:solidFill>
-                  <a:srgbClr val="011754"/>
-                </a:solidFill>
-                <a:latin typeface="Calibri"/>
-              </a:rPr>
-              <a:t>Dato demasiado redondo</a:t>
-            </a:r>
-          </a:p>
-        </p:txBody>
-      </p:sp>
-      <p:sp>
-        <p:nvSpPr>
-          <p:cNvPr id="16" name="Rounded Rectangle 15"/>
-          <p:cNvSpPr/>
-          <p:nvPr/>
-        </p:nvSpPr>
-        <p:spPr>
-          <a:xfrm>
-            <a:off x="612648" y="4672583"/>
-            <a:ext cx="5394960" cy="676656"/>
-          </a:xfrm>
-          <a:prstGeom prst="roundRect">
-            <a:avLst>
-              <a:gd name="adj" fmla="val 6000"/>
-            </a:avLst>
-          </a:prstGeom>
-          <a:solidFill>
-            <a:srgbClr val="D9DEEF"/>
-          </a:solidFill>
-          <a:ln>
-            <a:noFill/>
-          </a:ln>
-          <a:effectLst/>
-        </p:spPr>
-        <p:style>
-          <a:lnRef idx="1">
-            <a:schemeClr val="accent1"/>
-          </a:lnRef>
-          <a:fillRef idx="3">
-            <a:schemeClr val="accent1"/>
-          </a:fillRef>
-          <a:effectRef idx="2">
-            <a:schemeClr val="accent1"/>
-          </a:effectRef>
-          <a:fontRef idx="minor">
-            <a:schemeClr val="lt1"/>
-          </a:fontRef>
-        </p:style>
-        <p:txBody>
-          <a:bodyPr rtlCol="0" anchor="ctr"/>
-          <a:lstStyle/>
-          <a:p>
-            <a:pPr algn="ctr"/>
-          </a:p>
-        </p:txBody>
-      </p:sp>
-      <p:sp>
-        <p:nvSpPr>
-          <p:cNvPr id="17" name="Oval 16"/>
-          <p:cNvSpPr/>
-          <p:nvPr/>
-        </p:nvSpPr>
-        <p:spPr>
-          <a:xfrm>
-            <a:off x="722376" y="4754879"/>
-            <a:ext cx="512064" cy="512064"/>
-          </a:xfrm>
-          <a:prstGeom prst="ellipse">
-            <a:avLst/>
-          </a:prstGeom>
-          <a:solidFill>
-            <a:srgbClr val="2B4EB4"/>
-          </a:solidFill>
-          <a:ln>
-            <a:noFill/>
-          </a:ln>
-          <a:effectLst/>
-        </p:spPr>
-        <p:style>
-          <a:lnRef idx="1">
-            <a:schemeClr val="accent1"/>
-          </a:lnRef>
-          <a:fillRef idx="3">
-            <a:schemeClr val="accent1"/>
-          </a:fillRef>
-          <a:effectRef idx="2">
-            <a:schemeClr val="accent1"/>
-          </a:effectRef>
-          <a:fontRef idx="minor">
-            <a:schemeClr val="lt1"/>
-          </a:fontRef>
-        </p:style>
-        <p:txBody>
-          <a:bodyPr rtlCol="0" anchor="ctr" lIns="0" rIns="0" tIns="0" bIns="0"/>
-          <a:lstStyle/>
-          <a:p>
-            <a:pPr algn="ctr"/>
-            <a:r>
-              <a:rPr sz="1600" b="1">
-                <a:solidFill>
-                  <a:srgbClr val="FFFFFF"/>
-                </a:solidFill>
-                <a:latin typeface="Calibri"/>
-              </a:rPr>
-              <a:t>05</a:t>
-            </a:r>
-          </a:p>
-        </p:txBody>
-      </p:sp>
-      <p:sp>
-        <p:nvSpPr>
-          <p:cNvPr id="18" name="TextBox 17"/>
-          <p:cNvSpPr txBox="1"/>
-          <p:nvPr/>
-        </p:nvSpPr>
-        <p:spPr>
-          <a:xfrm>
-            <a:off x="1344168" y="4672583"/>
-            <a:ext cx="4572000" cy="676656"/>
-          </a:xfrm>
-          <a:prstGeom prst="rect">
-            <a:avLst/>
-          </a:prstGeom>
-          <a:noFill/>
-        </p:spPr>
-        <p:txBody>
-          <a:bodyPr wrap="square" lIns="45720" rIns="45720" tIns="27432" bIns="27432" anchor="ctr">
-            <a:spAutoFit/>
-          </a:bodyPr>
-          <a:lstStyle/>
-          <a:p>
-            <a:pPr algn="l">
-              <a:spcAft>
-                <a:spcPts val="400"/>
-              </a:spcAft>
-            </a:pPr>
-            <a:r>
-              <a:rPr sz="1800" b="0" i="0">
-                <a:solidFill>
-                  <a:srgbClr val="011754"/>
-                </a:solidFill>
-                <a:latin typeface="Calibri"/>
-              </a:rPr>
-              <a:t>Tono absoluto («siempre», «nunca»)</a:t>
-            </a:r>
-          </a:p>
-        </p:txBody>
-      </p:sp>
-      <p:sp>
-        <p:nvSpPr>
-          <p:cNvPr id="19" name="Rounded Rectangle 18"/>
-          <p:cNvSpPr/>
-          <p:nvPr/>
-        </p:nvSpPr>
-        <p:spPr>
-          <a:xfrm>
-            <a:off x="6190488" y="1600200"/>
-            <a:ext cx="5394960" cy="676656"/>
-          </a:xfrm>
-          <a:prstGeom prst="roundRect">
-            <a:avLst>
-              <a:gd name="adj" fmla="val 6000"/>
-            </a:avLst>
-          </a:prstGeom>
-          <a:solidFill>
-            <a:srgbClr val="D9DEEF"/>
-          </a:solidFill>
-          <a:ln>
-            <a:noFill/>
-          </a:ln>
-          <a:effectLst/>
-        </p:spPr>
-        <p:style>
-          <a:lnRef idx="1">
-            <a:schemeClr val="accent1"/>
-          </a:lnRef>
-          <a:fillRef idx="3">
-            <a:schemeClr val="accent1"/>
-          </a:fillRef>
-          <a:effectRef idx="2">
-            <a:schemeClr val="accent1"/>
-          </a:effectRef>
-          <a:fontRef idx="minor">
-            <a:schemeClr val="lt1"/>
-          </a:fontRef>
-        </p:style>
-        <p:txBody>
-          <a:bodyPr rtlCol="0" anchor="ctr"/>
-          <a:lstStyle/>
-          <a:p>
-            <a:pPr algn="ctr"/>
-          </a:p>
-        </p:txBody>
-      </p:sp>
-      <p:sp>
-        <p:nvSpPr>
-          <p:cNvPr id="20" name="Oval 19"/>
-          <p:cNvSpPr/>
-          <p:nvPr/>
-        </p:nvSpPr>
-        <p:spPr>
-          <a:xfrm>
-            <a:off x="6300216" y="1682496"/>
-            <a:ext cx="512064" cy="512064"/>
-          </a:xfrm>
-          <a:prstGeom prst="ellipse">
-            <a:avLst/>
-          </a:prstGeom>
-          <a:solidFill>
-            <a:srgbClr val="2B4EB4"/>
-          </a:solidFill>
-          <a:ln>
-            <a:noFill/>
-          </a:ln>
-          <a:effectLst/>
-        </p:spPr>
-        <p:style>
-          <a:lnRef idx="1">
-            <a:schemeClr val="accent1"/>
-          </a:lnRef>
-          <a:fillRef idx="3">
-            <a:schemeClr val="accent1"/>
-          </a:fillRef>
-          <a:effectRef idx="2">
-            <a:schemeClr val="accent1"/>
-          </a:effectRef>
-          <a:fontRef idx="minor">
-            <a:schemeClr val="lt1"/>
-          </a:fontRef>
-        </p:style>
-        <p:txBody>
-          <a:bodyPr rtlCol="0" anchor="ctr" lIns="0" rIns="0" tIns="0" bIns="0"/>
-          <a:lstStyle/>
-          <a:p>
-            <a:pPr algn="ctr"/>
-            <a:r>
-              <a:rPr sz="1600" b="1">
-                <a:solidFill>
-                  <a:srgbClr val="FFFFFF"/>
-                </a:solidFill>
-                <a:latin typeface="Calibri"/>
-              </a:rPr>
-              <a:t>06</a:t>
-            </a:r>
-          </a:p>
-        </p:txBody>
-      </p:sp>
-      <p:sp>
-        <p:nvSpPr>
-          <p:cNvPr id="21" name="TextBox 20"/>
-          <p:cNvSpPr txBox="1"/>
-          <p:nvPr/>
-        </p:nvSpPr>
-        <p:spPr>
-          <a:xfrm>
-            <a:off x="6922007" y="1600200"/>
-            <a:ext cx="4572000" cy="676656"/>
-          </a:xfrm>
-          <a:prstGeom prst="rect">
-            <a:avLst/>
-          </a:prstGeom>
-          <a:noFill/>
-        </p:spPr>
-        <p:txBody>
-          <a:bodyPr wrap="square" lIns="45720" rIns="45720" tIns="27432" bIns="27432" anchor="ctr">
-            <a:spAutoFit/>
-          </a:bodyPr>
-          <a:lstStyle/>
-          <a:p>
-            <a:pPr algn="l">
-              <a:spcAft>
-                <a:spcPts val="400"/>
-              </a:spcAft>
-            </a:pPr>
-            <a:r>
-              <a:rPr sz="1800" b="0" i="0">
-                <a:solidFill>
-                  <a:srgbClr val="011754"/>
-                </a:solidFill>
-                <a:latin typeface="Calibri"/>
-              </a:rPr>
-              <a:t>Fuente que no coincide con el tema</a:t>
-            </a:r>
-          </a:p>
-        </p:txBody>
-      </p:sp>
-      <p:sp>
-        <p:nvSpPr>
-          <p:cNvPr id="22" name="Rounded Rectangle 21"/>
-          <p:cNvSpPr/>
-          <p:nvPr/>
-        </p:nvSpPr>
-        <p:spPr>
-          <a:xfrm>
-            <a:off x="6190488" y="2368296"/>
-            <a:ext cx="5394960" cy="676656"/>
-          </a:xfrm>
-          <a:prstGeom prst="roundRect">
-            <a:avLst>
-              <a:gd name="adj" fmla="val 6000"/>
-            </a:avLst>
-          </a:prstGeom>
-          <a:solidFill>
-            <a:srgbClr val="D9DEEF"/>
-          </a:solidFill>
-          <a:ln>
-            <a:noFill/>
-          </a:ln>
-          <a:effectLst/>
-        </p:spPr>
-        <p:style>
-          <a:lnRef idx="1">
-            <a:schemeClr val="accent1"/>
-          </a:lnRef>
-          <a:fillRef idx="3">
-            <a:schemeClr val="accent1"/>
-          </a:fillRef>
-          <a:effectRef idx="2">
-            <a:schemeClr val="accent1"/>
-          </a:effectRef>
-          <a:fontRef idx="minor">
-            <a:schemeClr val="lt1"/>
-          </a:fontRef>
-        </p:style>
-        <p:txBody>
-          <a:bodyPr rtlCol="0" anchor="ctr"/>
-          <a:lstStyle/>
-          <a:p>
-            <a:pPr algn="ctr"/>
-          </a:p>
-        </p:txBody>
-      </p:sp>
-      <p:sp>
-        <p:nvSpPr>
-          <p:cNvPr id="23" name="Oval 22"/>
-          <p:cNvSpPr/>
-          <p:nvPr/>
-        </p:nvSpPr>
-        <p:spPr>
-          <a:xfrm>
-            <a:off x="6300216" y="2450591"/>
-            <a:ext cx="512064" cy="512064"/>
-          </a:xfrm>
-          <a:prstGeom prst="ellipse">
-            <a:avLst/>
-          </a:prstGeom>
-          <a:solidFill>
-            <a:srgbClr val="2B4EB4"/>
-          </a:solidFill>
-          <a:ln>
-            <a:noFill/>
-          </a:ln>
-          <a:effectLst/>
-        </p:spPr>
-        <p:style>
-          <a:lnRef idx="1">
-            <a:schemeClr val="accent1"/>
-          </a:lnRef>
-          <a:fillRef idx="3">
-            <a:schemeClr val="accent1"/>
-          </a:fillRef>
-          <a:effectRef idx="2">
-            <a:schemeClr val="accent1"/>
-          </a:effectRef>
-          <a:fontRef idx="minor">
-            <a:schemeClr val="lt1"/>
-          </a:fontRef>
-        </p:style>
-        <p:txBody>
-          <a:bodyPr rtlCol="0" anchor="ctr" lIns="0" rIns="0" tIns="0" bIns="0"/>
-          <a:lstStyle/>
-          <a:p>
-            <a:pPr algn="ctr"/>
-            <a:r>
-              <a:rPr sz="1600" b="1">
-                <a:solidFill>
-                  <a:srgbClr val="FFFFFF"/>
-                </a:solidFill>
-                <a:latin typeface="Calibri"/>
-              </a:rPr>
-              <a:t>07</a:t>
-            </a:r>
-          </a:p>
-        </p:txBody>
-      </p:sp>
-      <p:sp>
-        <p:nvSpPr>
-          <p:cNvPr id="24" name="TextBox 23"/>
-          <p:cNvSpPr txBox="1"/>
-          <p:nvPr/>
-        </p:nvSpPr>
-        <p:spPr>
-          <a:xfrm>
-            <a:off x="6922007" y="2368296"/>
-            <a:ext cx="4572000" cy="676656"/>
-          </a:xfrm>
-          <a:prstGeom prst="rect">
-            <a:avLst/>
-          </a:prstGeom>
-          <a:noFill/>
-        </p:spPr>
-        <p:txBody>
-          <a:bodyPr wrap="square" lIns="45720" rIns="45720" tIns="27432" bIns="27432" anchor="ctr">
-            <a:spAutoFit/>
-          </a:bodyPr>
-          <a:lstStyle/>
-          <a:p>
-            <a:pPr algn="l">
-              <a:spcAft>
-                <a:spcPts val="400"/>
-              </a:spcAft>
-            </a:pPr>
-            <a:r>
-              <a:rPr sz="1800" b="0" i="0">
-                <a:solidFill>
-                  <a:srgbClr val="011754"/>
-                </a:solidFill>
-                <a:latin typeface="Calibri"/>
-              </a:rPr>
-              <a:t>Referencia reciente imposible de verificar</a:t>
-            </a:r>
-          </a:p>
-        </p:txBody>
-      </p:sp>
-      <p:sp>
-        <p:nvSpPr>
-          <p:cNvPr id="25" name="Rounded Rectangle 24"/>
-          <p:cNvSpPr/>
-          <p:nvPr/>
-        </p:nvSpPr>
-        <p:spPr>
-          <a:xfrm>
-            <a:off x="6190488" y="3136391"/>
-            <a:ext cx="5394960" cy="676656"/>
-          </a:xfrm>
-          <a:prstGeom prst="roundRect">
-            <a:avLst>
-              <a:gd name="adj" fmla="val 6000"/>
-            </a:avLst>
-          </a:prstGeom>
-          <a:solidFill>
-            <a:srgbClr val="D9DEEF"/>
-          </a:solidFill>
-          <a:ln>
-            <a:noFill/>
-          </a:ln>
-          <a:effectLst/>
-        </p:spPr>
-        <p:style>
-          <a:lnRef idx="1">
-            <a:schemeClr val="accent1"/>
-          </a:lnRef>
-          <a:fillRef idx="3">
-            <a:schemeClr val="accent1"/>
-          </a:fillRef>
-          <a:effectRef idx="2">
-            <a:schemeClr val="accent1"/>
-          </a:effectRef>
-          <a:fontRef idx="minor">
-            <a:schemeClr val="lt1"/>
-          </a:fontRef>
-        </p:style>
-        <p:txBody>
-          <a:bodyPr rtlCol="0" anchor="ctr"/>
-          <a:lstStyle/>
-          <a:p>
-            <a:pPr algn="ctr"/>
-          </a:p>
-        </p:txBody>
-      </p:sp>
-      <p:sp>
-        <p:nvSpPr>
-          <p:cNvPr id="26" name="Oval 25"/>
-          <p:cNvSpPr/>
-          <p:nvPr/>
-        </p:nvSpPr>
-        <p:spPr>
-          <a:xfrm>
-            <a:off x="6300216" y="3218687"/>
-            <a:ext cx="512064" cy="512064"/>
-          </a:xfrm>
-          <a:prstGeom prst="ellipse">
-            <a:avLst/>
-          </a:prstGeom>
-          <a:solidFill>
-            <a:srgbClr val="2B4EB4"/>
-          </a:solidFill>
-          <a:ln>
-            <a:noFill/>
-          </a:ln>
-          <a:effectLst/>
-        </p:spPr>
-        <p:style>
-          <a:lnRef idx="1">
-            <a:schemeClr val="accent1"/>
-          </a:lnRef>
-          <a:fillRef idx="3">
-            <a:schemeClr val="accent1"/>
-          </a:fillRef>
-          <a:effectRef idx="2">
-            <a:schemeClr val="accent1"/>
-          </a:effectRef>
-          <a:fontRef idx="minor">
-            <a:schemeClr val="lt1"/>
-          </a:fontRef>
-        </p:style>
-        <p:txBody>
-          <a:bodyPr rtlCol="0" anchor="ctr" lIns="0" rIns="0" tIns="0" bIns="0"/>
-          <a:lstStyle/>
-          <a:p>
-            <a:pPr algn="ctr"/>
-            <a:r>
-              <a:rPr sz="1600" b="1">
-                <a:solidFill>
-                  <a:srgbClr val="FFFFFF"/>
-                </a:solidFill>
-                <a:latin typeface="Calibri"/>
-              </a:rPr>
-              <a:t>08</a:t>
-            </a:r>
-          </a:p>
-        </p:txBody>
-      </p:sp>
-      <p:sp>
-        <p:nvSpPr>
-          <p:cNvPr id="27" name="TextBox 26"/>
-          <p:cNvSpPr txBox="1"/>
-          <p:nvPr/>
-        </p:nvSpPr>
-        <p:spPr>
-          <a:xfrm>
-            <a:off x="6922007" y="3136391"/>
-            <a:ext cx="4572000" cy="676656"/>
-          </a:xfrm>
-          <a:prstGeom prst="rect">
-            <a:avLst/>
-          </a:prstGeom>
-          <a:noFill/>
-        </p:spPr>
-        <p:txBody>
-          <a:bodyPr wrap="square" lIns="45720" rIns="45720" tIns="27432" bIns="27432" anchor="ctr">
-            <a:spAutoFit/>
-          </a:bodyPr>
-          <a:lstStyle/>
-          <a:p>
-            <a:pPr algn="l">
-              <a:spcAft>
-                <a:spcPts val="400"/>
-              </a:spcAft>
-            </a:pPr>
-            <a:r>
-              <a:rPr sz="1800" b="0" i="0">
-                <a:solidFill>
-                  <a:srgbClr val="011754"/>
-                </a:solidFill>
-                <a:latin typeface="Calibri"/>
-              </a:rPr>
-              <a:t>Ausencia de limitaciones</a:t>
-            </a:r>
-          </a:p>
-        </p:txBody>
-      </p:sp>
-      <p:sp>
-        <p:nvSpPr>
-          <p:cNvPr id="28" name="Rounded Rectangle 27"/>
-          <p:cNvSpPr/>
-          <p:nvPr/>
-        </p:nvSpPr>
-        <p:spPr>
-          <a:xfrm>
-            <a:off x="6190488" y="3904487"/>
-            <a:ext cx="5394960" cy="676656"/>
-          </a:xfrm>
-          <a:prstGeom prst="roundRect">
-            <a:avLst>
-              <a:gd name="adj" fmla="val 6000"/>
-            </a:avLst>
-          </a:prstGeom>
-          <a:solidFill>
-            <a:srgbClr val="D9DEEF"/>
-          </a:solidFill>
-          <a:ln>
-            <a:noFill/>
-          </a:ln>
-          <a:effectLst/>
-        </p:spPr>
-        <p:style>
-          <a:lnRef idx="1">
-            <a:schemeClr val="accent1"/>
-          </a:lnRef>
-          <a:fillRef idx="3">
-            <a:schemeClr val="accent1"/>
-          </a:fillRef>
-          <a:effectRef idx="2">
-            <a:schemeClr val="accent1"/>
-          </a:effectRef>
-          <a:fontRef idx="minor">
-            <a:schemeClr val="lt1"/>
-          </a:fontRef>
-        </p:style>
-        <p:txBody>
-          <a:bodyPr rtlCol="0" anchor="ctr"/>
-          <a:lstStyle/>
-          <a:p>
-            <a:pPr algn="ctr"/>
-          </a:p>
-        </p:txBody>
-      </p:sp>
-      <p:sp>
-        <p:nvSpPr>
-          <p:cNvPr id="29" name="Oval 28"/>
-          <p:cNvSpPr/>
-          <p:nvPr/>
-        </p:nvSpPr>
-        <p:spPr>
-          <a:xfrm>
-            <a:off x="6300216" y="3986783"/>
-            <a:ext cx="512064" cy="512064"/>
-          </a:xfrm>
-          <a:prstGeom prst="ellipse">
-            <a:avLst/>
-          </a:prstGeom>
-          <a:solidFill>
-            <a:srgbClr val="2B4EB4"/>
-          </a:solidFill>
-          <a:ln>
-            <a:noFill/>
-          </a:ln>
-          <a:effectLst/>
-        </p:spPr>
-        <p:style>
-          <a:lnRef idx="1">
-            <a:schemeClr val="accent1"/>
-          </a:lnRef>
-          <a:fillRef idx="3">
-            <a:schemeClr val="accent1"/>
-          </a:fillRef>
-          <a:effectRef idx="2">
-            <a:schemeClr val="accent1"/>
-          </a:effectRef>
-          <a:fontRef idx="minor">
-            <a:schemeClr val="lt1"/>
-          </a:fontRef>
-        </p:style>
-        <p:txBody>
-          <a:bodyPr rtlCol="0" anchor="ctr" lIns="0" rIns="0" tIns="0" bIns="0"/>
-          <a:lstStyle/>
-          <a:p>
-            <a:pPr algn="ctr"/>
-            <a:r>
-              <a:rPr sz="1600" b="1">
-                <a:solidFill>
-                  <a:srgbClr val="FFFFFF"/>
-                </a:solidFill>
-                <a:latin typeface="Calibri"/>
-              </a:rPr>
-              <a:t>09</a:t>
-            </a:r>
-          </a:p>
-        </p:txBody>
-      </p:sp>
-      <p:sp>
-        <p:nvSpPr>
-          <p:cNvPr id="30" name="TextBox 29"/>
-          <p:cNvSpPr txBox="1"/>
-          <p:nvPr/>
-        </p:nvSpPr>
-        <p:spPr>
-          <a:xfrm>
-            <a:off x="6922007" y="3904487"/>
-            <a:ext cx="4572000" cy="676656"/>
-          </a:xfrm>
-          <a:prstGeom prst="rect">
-            <a:avLst/>
-          </a:prstGeom>
-          <a:noFill/>
-        </p:spPr>
-        <p:txBody>
-          <a:bodyPr wrap="square" lIns="45720" rIns="45720" tIns="27432" bIns="27432" anchor="ctr">
-            <a:spAutoFit/>
-          </a:bodyPr>
-          <a:lstStyle/>
-          <a:p>
-            <a:pPr algn="l">
-              <a:spcAft>
-                <a:spcPts val="400"/>
-              </a:spcAft>
-            </a:pPr>
-            <a:r>
-              <a:rPr sz="1800" b="0" i="0">
-                <a:solidFill>
-                  <a:srgbClr val="011754"/>
-                </a:solidFill>
-                <a:latin typeface="Calibri"/>
-              </a:rPr>
-              <a:t>Enfoque repetido en el mismo tipo de fuente</a:t>
-            </a:r>
-          </a:p>
-        </p:txBody>
-      </p:sp>
-      <p:sp>
-        <p:nvSpPr>
-          <p:cNvPr id="31" name="Rounded Rectangle 30"/>
-          <p:cNvSpPr/>
-          <p:nvPr/>
-        </p:nvSpPr>
-        <p:spPr>
-          <a:xfrm>
-            <a:off x="6190488" y="4672583"/>
-            <a:ext cx="5394960" cy="676656"/>
-          </a:xfrm>
-          <a:prstGeom prst="roundRect">
-            <a:avLst>
-              <a:gd name="adj" fmla="val 6000"/>
-            </a:avLst>
-          </a:prstGeom>
-          <a:solidFill>
-            <a:srgbClr val="D9DEEF"/>
-          </a:solidFill>
-          <a:ln>
-            <a:noFill/>
-          </a:ln>
-          <a:effectLst/>
-        </p:spPr>
-        <p:style>
-          <a:lnRef idx="1">
-            <a:schemeClr val="accent1"/>
-          </a:lnRef>
-          <a:fillRef idx="3">
-            <a:schemeClr val="accent1"/>
-          </a:fillRef>
-          <a:effectRef idx="2">
-            <a:schemeClr val="accent1"/>
-          </a:effectRef>
-          <a:fontRef idx="minor">
-            <a:schemeClr val="lt1"/>
-          </a:fontRef>
-        </p:style>
-        <p:txBody>
-          <a:bodyPr rtlCol="0" anchor="ctr"/>
-          <a:lstStyle/>
-          <a:p>
-            <a:pPr algn="ctr"/>
-          </a:p>
-        </p:txBody>
-      </p:sp>
-      <p:sp>
-        <p:nvSpPr>
-          <p:cNvPr id="32" name="Oval 31"/>
-          <p:cNvSpPr/>
-          <p:nvPr/>
-        </p:nvSpPr>
-        <p:spPr>
-          <a:xfrm>
-            <a:off x="6300216" y="4754879"/>
-            <a:ext cx="512064" cy="512064"/>
-          </a:xfrm>
-          <a:prstGeom prst="ellipse">
-            <a:avLst/>
-          </a:prstGeom>
-          <a:solidFill>
-            <a:srgbClr val="2B4EB4"/>
-          </a:solidFill>
-          <a:ln>
-            <a:noFill/>
-          </a:ln>
-          <a:effectLst/>
-        </p:spPr>
-        <p:style>
-          <a:lnRef idx="1">
-            <a:schemeClr val="accent1"/>
-          </a:lnRef>
-          <a:fillRef idx="3">
-            <a:schemeClr val="accent1"/>
-          </a:fillRef>
-          <a:effectRef idx="2">
-            <a:schemeClr val="accent1"/>
-          </a:effectRef>
-          <a:fontRef idx="minor">
-            <a:schemeClr val="lt1"/>
-          </a:fontRef>
-        </p:style>
-        <p:txBody>
-          <a:bodyPr rtlCol="0" anchor="ctr" lIns="0" rIns="0" tIns="0" bIns="0"/>
-          <a:lstStyle/>
-          <a:p>
-            <a:pPr algn="ctr"/>
-            <a:r>
-              <a:rPr sz="1600" b="1">
-                <a:solidFill>
-                  <a:srgbClr val="FFFFFF"/>
-                </a:solidFill>
-                <a:latin typeface="Calibri"/>
-              </a:rPr>
-              <a:t>10</a:t>
-            </a:r>
-          </a:p>
-        </p:txBody>
-      </p:sp>
-      <p:sp>
-        <p:nvSpPr>
-          <p:cNvPr id="33" name="TextBox 32"/>
-          <p:cNvSpPr txBox="1"/>
-          <p:nvPr/>
-        </p:nvSpPr>
-        <p:spPr>
-          <a:xfrm>
-            <a:off x="6922007" y="4672583"/>
-            <a:ext cx="4572000" cy="676656"/>
-          </a:xfrm>
-          <a:prstGeom prst="rect">
-            <a:avLst/>
-          </a:prstGeom>
-          <a:noFill/>
-        </p:spPr>
-        <p:txBody>
-          <a:bodyPr wrap="square" lIns="45720" rIns="45720" tIns="27432" bIns="27432" anchor="ctr">
-            <a:spAutoFit/>
-          </a:bodyPr>
-          <a:lstStyle/>
-          <a:p>
-            <a:pPr algn="l">
-              <a:spcAft>
-                <a:spcPts val="400"/>
-              </a:spcAft>
-            </a:pPr>
-            <a:r>
-              <a:rPr sz="1800" b="0" i="0">
-                <a:solidFill>
-                  <a:srgbClr val="011754"/>
-                </a:solidFill>
-                <a:latin typeface="Calibri"/>
-              </a:rPr>
-              <a:t>Afirmación sin dato que la respalde</a:t>
-            </a:r>
-          </a:p>
-        </p:txBody>
-      </p:sp>
-      <p:sp>
-        <p:nvSpPr>
-          <p:cNvPr id="34" name="Rounded Rectangle 33"/>
-          <p:cNvSpPr/>
-          <p:nvPr/>
-        </p:nvSpPr>
-        <p:spPr>
-          <a:xfrm>
-            <a:off x="612648" y="5532120"/>
-            <a:ext cx="10972800" cy="685800"/>
-          </a:xfrm>
-          <a:prstGeom prst="roundRect">
-            <a:avLst>
-              <a:gd name="adj" fmla="val 6000"/>
-            </a:avLst>
-          </a:prstGeom>
-          <a:solidFill>
-            <a:srgbClr val="011754"/>
-          </a:solidFill>
-          <a:ln>
-            <a:noFill/>
-          </a:ln>
-          <a:effectLst/>
-        </p:spPr>
-        <p:style>
-          <a:lnRef idx="1">
-            <a:schemeClr val="accent1"/>
-          </a:lnRef>
-          <a:fillRef idx="3">
-            <a:schemeClr val="accent1"/>
-          </a:fillRef>
-          <a:effectRef idx="2">
-            <a:schemeClr val="accent1"/>
-          </a:effectRef>
-          <a:fontRef idx="minor">
-            <a:schemeClr val="lt1"/>
-          </a:fontRef>
-        </p:style>
-        <p:txBody>
-          <a:bodyPr rtlCol="0" anchor="ctr"/>
-          <a:lstStyle/>
-          <a:p>
-            <a:pPr algn="ctr"/>
-          </a:p>
-        </p:txBody>
-      </p:sp>
-      <p:sp>
-        <p:nvSpPr>
-          <p:cNvPr id="35" name="TextBox 34"/>
-          <p:cNvSpPr txBox="1"/>
-          <p:nvPr/>
-        </p:nvSpPr>
-        <p:spPr>
-          <a:xfrm>
-            <a:off x="841248" y="5532120"/>
-            <a:ext cx="10515600" cy="685800"/>
-          </a:xfrm>
-          <a:prstGeom prst="rect">
-            <a:avLst/>
-          </a:prstGeom>
-          <a:noFill/>
-        </p:spPr>
-        <p:txBody>
-          <a:bodyPr wrap="square" lIns="45720" rIns="45720" tIns="27432" bIns="27432" anchor="ctr">
-            <a:spAutoFit/>
-          </a:bodyPr>
-          <a:lstStyle/>
-          <a:p>
-            <a:pPr algn="l">
-              <a:spcAft>
-                <a:spcPts val="400"/>
-              </a:spcAft>
-            </a:pPr>
-            <a:r>
-              <a:rPr sz="1800" b="1" i="0">
-                <a:solidFill>
-                  <a:srgbClr val="FFFFFF"/>
-                </a:solidFill>
-                <a:latin typeface="Calibri"/>
-              </a:rPr>
-              <a:t>La lista completa de señales de alerta será un recurso descargable de la sesión.</a:t>
-            </a:r>
-          </a:p>
-        </p:txBody>
-      </p:sp>
-    </p:spTree>
-  </p:cSld>
-  <p:clrMapOvr>
-    <a:masterClrMapping/>
-  </p:clrMapOvr>
-</p:sld>
-</file>
-
-<file path=ppt/slides/slide18.xml><?xml version="1.0" encoding="utf-8"?>
-<p:sld xmlns:a="http://schemas.openxmlformats.org/drawingml/2006/main" xmlns:r="http://schemas.openxmlformats.org/officeDocument/2006/relationships" xmlns:p="http://schemas.openxmlformats.org/presentationml/2006/main">
-  <p:cSld>
-    <p:spTree>
-      <p:nvGrpSpPr>
-        <p:cNvPr id="1" name=""/>
-        <p:cNvGrpSpPr/>
-        <p:nvPr/>
-      </p:nvGrpSpPr>
-      <p:grpSpPr>
-        <a:xfrm>
-          <a:off x="0" y="0"/>
-          <a:ext cx="0" cy="0"/>
-          <a:chOff x="0" y="0"/>
-          <a:chExt cx="0" cy="0"/>
-        </a:xfrm>
-      </p:grpSpPr>
-      <p:pic>
-        <p:nvPicPr>
-          <p:cNvPr id="2" name="Picture 1" descr="divider_bg.png"/>
-          <p:cNvPicPr>
-            <a:picLocks noChangeAspect="1"/>
-          </p:cNvPicPr>
-          <p:nvPr/>
-        </p:nvPicPr>
-        <p:blipFill>
-          <a:blip r:embed="rId2"/>
-          <a:stretch>
-            <a:fillRect/>
-          </a:stretch>
-        </p:blipFill>
-        <p:spPr>
-          <a:xfrm>
-            <a:off x="0" y="0"/>
-            <a:ext cx="12191695" cy="6858000"/>
-          </a:xfrm>
-          <a:prstGeom prst="rect">
-            <a:avLst/>
-          </a:prstGeom>
-        </p:spPr>
-      </p:pic>
-      <p:sp>
-        <p:nvSpPr>
-          <p:cNvPr id="3" name="TextBox 2"/>
-          <p:cNvSpPr txBox="1"/>
-          <p:nvPr/>
-        </p:nvSpPr>
-        <p:spPr>
-          <a:xfrm>
-            <a:off x="982912" y="2676125"/>
-            <a:ext cx="437840" cy="1999910"/>
-          </a:xfrm>
-          <a:prstGeom prst="rect">
-            <a:avLst/>
-          </a:prstGeom>
-          <a:noFill/>
-        </p:spPr>
-        <p:txBody>
-          <a:bodyPr wrap="square">
-            <a:spAutoFit/>
-          </a:bodyPr>
-          <a:lstStyle/>
-          <a:p>
-            <a:pPr algn="l">
-              <a:lnSpc>
-                <a:spcPct val="115000"/>
-              </a:lnSpc>
-            </a:pPr>
-            <a:r>
-              <a:rPr sz="7200" b="1" i="0">
-                <a:solidFill>
-                  <a:srgbClr val="FFFFFF"/>
-                </a:solidFill>
-                <a:latin typeface="Calibri"/>
-              </a:rPr>
-              <a:t>4</a:t>
-            </a:r>
-          </a:p>
-        </p:txBody>
-      </p:sp>
-      <p:sp>
-        <p:nvSpPr>
-          <p:cNvPr id="4" name="TextBox 3"/>
-          <p:cNvSpPr txBox="1"/>
-          <p:nvPr/>
-        </p:nvSpPr>
-        <p:spPr>
-          <a:xfrm>
-            <a:off x="982912" y="4737409"/>
-            <a:ext cx="10346277" cy="702221"/>
-          </a:xfrm>
-          <a:prstGeom prst="rect">
-            <a:avLst/>
-          </a:prstGeom>
-          <a:noFill/>
-        </p:spPr>
-        <p:txBody>
-          <a:bodyPr wrap="square">
-            <a:spAutoFit/>
-          </a:bodyPr>
-          <a:lstStyle/>
-          <a:p>
-            <a:pPr algn="l">
-              <a:lnSpc>
-                <a:spcPct val="115000"/>
-              </a:lnSpc>
-            </a:pPr>
-            <a:r>
-              <a:rPr sz="2600" b="0" i="0">
-                <a:solidFill>
-                  <a:srgbClr val="FFFFFF"/>
-                </a:solidFill>
-                <a:latin typeface="Calibri"/>
-              </a:rPr>
-              <a:t>ÉTICA Y LÍMITES DEL USO DE LA IA EN LA ACADEMIA</a:t>
             </a:r>
           </a:p>
         </p:txBody>
@@ -11679,1355 +9644,6 @@
             <a:endParaRPr lang="es-MX" sz="1700" dirty="0">
               <a:latin typeface="Montserrat"/>
             </a:endParaRPr>
-          </a:p>
-        </p:txBody>
-      </p:sp>
-    </p:spTree>
-  </p:cSld>
-  <p:clrMapOvr>
-    <a:masterClrMapping/>
-  </p:clrMapOvr>
-</p:sld>
-</file>
-
-<file path=ppt/slides/slide20.xml><?xml version="1.0" encoding="utf-8"?>
-<p:sld xmlns:a="http://schemas.openxmlformats.org/drawingml/2006/main" xmlns:r="http://schemas.openxmlformats.org/officeDocument/2006/relationships" xmlns:p="http://schemas.openxmlformats.org/presentationml/2006/main">
-  <p:cSld>
-    <p:spTree>
-      <p:nvGrpSpPr>
-        <p:cNvPr id="1" name=""/>
-        <p:cNvGrpSpPr/>
-        <p:nvPr/>
-      </p:nvGrpSpPr>
-      <p:grpSpPr>
-        <a:xfrm>
-          <a:off x="0" y="0"/>
-          <a:ext cx="0" cy="0"/>
-          <a:chOff x="0" y="0"/>
-          <a:chExt cx="0" cy="0"/>
-        </a:xfrm>
-      </p:grpSpPr>
-      <p:pic>
-        <p:nvPicPr>
-          <p:cNvPr id="2" name="Picture 1" descr="bg_content.png"/>
-          <p:cNvPicPr>
-            <a:picLocks noChangeAspect="1"/>
-          </p:cNvPicPr>
-          <p:nvPr/>
-        </p:nvPicPr>
-        <p:blipFill>
-          <a:blip r:embed="rId2"/>
-          <a:stretch>
-            <a:fillRect/>
-          </a:stretch>
-        </p:blipFill>
-        <p:spPr>
-          <a:xfrm>
-            <a:off x="0" y="0"/>
-            <a:ext cx="12191695" cy="6858000"/>
-          </a:xfrm>
-          <a:prstGeom prst="rect">
-            <a:avLst/>
-          </a:prstGeom>
-        </p:spPr>
-      </p:pic>
-      <p:sp>
-        <p:nvSpPr>
-          <p:cNvPr id="3" name="TextBox 2"/>
-          <p:cNvSpPr txBox="1"/>
-          <p:nvPr/>
-        </p:nvSpPr>
-        <p:spPr>
-          <a:xfrm>
-            <a:off x="612648" y="777240"/>
-            <a:ext cx="10332720" cy="640080"/>
-          </a:xfrm>
-          <a:prstGeom prst="rect">
-            <a:avLst/>
-          </a:prstGeom>
-          <a:noFill/>
-        </p:spPr>
-        <p:txBody>
-          <a:bodyPr wrap="square" lIns="45720" rIns="45720" tIns="27432" bIns="27432" anchor="ctr">
-            <a:spAutoFit/>
-          </a:bodyPr>
-          <a:lstStyle/>
-          <a:p>
-            <a:pPr algn="l">
-              <a:spcAft>
-                <a:spcPts val="400"/>
-              </a:spcAft>
-            </a:pPr>
-            <a:r>
-              <a:rPr sz="2800" b="1" i="0">
-                <a:solidFill>
-                  <a:srgbClr val="1836B2"/>
-                </a:solidFill>
-                <a:latin typeface="Calibri"/>
-              </a:rPr>
-              <a:t>Qué no debe compartirse con una IA gratuita</a:t>
-            </a:r>
-          </a:p>
-        </p:txBody>
-      </p:sp>
-      <p:sp>
-        <p:nvSpPr>
-          <p:cNvPr id="4" name="TextBox 3"/>
-          <p:cNvSpPr txBox="1"/>
-          <p:nvPr/>
-        </p:nvSpPr>
-        <p:spPr>
-          <a:xfrm>
-            <a:off x="612648" y="1463040"/>
-            <a:ext cx="10972800" cy="457200"/>
-          </a:xfrm>
-          <a:prstGeom prst="rect">
-            <a:avLst/>
-          </a:prstGeom>
-          <a:noFill/>
-        </p:spPr>
-        <p:txBody>
-          <a:bodyPr wrap="square" lIns="45720" rIns="45720" tIns="27432" bIns="27432" anchor="t">
-            <a:spAutoFit/>
-          </a:bodyPr>
-          <a:lstStyle/>
-          <a:p>
-            <a:pPr algn="l">
-              <a:spcAft>
-                <a:spcPts val="400"/>
-              </a:spcAft>
-            </a:pPr>
-            <a:r>
-              <a:rPr sz="1800" b="0" i="0">
-                <a:solidFill>
-                  <a:srgbClr val="011754"/>
-                </a:solidFill>
-                <a:latin typeface="Calibri"/>
-              </a:rPr>
-              <a:t>Antes de pegar cualquier fragmento en un asistente conversacional, revísalo en cuatro pasos.</a:t>
-            </a:r>
-          </a:p>
-        </p:txBody>
-      </p:sp>
-      <p:sp>
-        <p:nvSpPr>
-          <p:cNvPr id="5" name="Rounded Rectangle 4"/>
-          <p:cNvSpPr/>
-          <p:nvPr/>
-        </p:nvSpPr>
-        <p:spPr>
-          <a:xfrm>
-            <a:off x="612648" y="2103120"/>
-            <a:ext cx="5394960" cy="1920240"/>
-          </a:xfrm>
-          <a:prstGeom prst="roundRect">
-            <a:avLst>
-              <a:gd name="adj" fmla="val 6000"/>
-            </a:avLst>
-          </a:prstGeom>
-          <a:solidFill>
-            <a:srgbClr val="D9DEEF"/>
-          </a:solidFill>
-          <a:ln>
-            <a:noFill/>
-          </a:ln>
-          <a:effectLst/>
-        </p:spPr>
-        <p:style>
-          <a:lnRef idx="1">
-            <a:schemeClr val="accent1"/>
-          </a:lnRef>
-          <a:fillRef idx="3">
-            <a:schemeClr val="accent1"/>
-          </a:fillRef>
-          <a:effectRef idx="2">
-            <a:schemeClr val="accent1"/>
-          </a:effectRef>
-          <a:fontRef idx="minor">
-            <a:schemeClr val="lt1"/>
-          </a:fontRef>
-        </p:style>
-        <p:txBody>
-          <a:bodyPr rtlCol="0" anchor="ctr"/>
-          <a:lstStyle/>
-          <a:p>
-            <a:pPr algn="ctr"/>
-          </a:p>
-        </p:txBody>
-      </p:sp>
-      <p:sp>
-        <p:nvSpPr>
-          <p:cNvPr id="6" name="TextBox 5"/>
-          <p:cNvSpPr txBox="1"/>
-          <p:nvPr/>
-        </p:nvSpPr>
-        <p:spPr>
-          <a:xfrm>
-            <a:off x="795528" y="2212848"/>
-            <a:ext cx="5029200" cy="1700784"/>
-          </a:xfrm>
-          <a:prstGeom prst="rect">
-            <a:avLst/>
-          </a:prstGeom>
-          <a:noFill/>
-        </p:spPr>
-        <p:txBody>
-          <a:bodyPr wrap="square" lIns="45720" rIns="45720" tIns="27432" bIns="27432" anchor="t">
-            <a:spAutoFit/>
-          </a:bodyPr>
-          <a:lstStyle/>
-          <a:p>
-            <a:pPr algn="l">
-              <a:spcAft>
-                <a:spcPts val="600"/>
-              </a:spcAft>
-            </a:pPr>
-            <a:r>
-              <a:rPr sz="2000" b="1" i="0">
-                <a:solidFill>
-                  <a:srgbClr val="2B4EB4"/>
-                </a:solidFill>
-                <a:latin typeface="Calibri"/>
-              </a:rPr>
-              <a:t>1. Identificar</a:t>
-            </a:r>
-          </a:p>
-          <a:p>
-            <a:pPr algn="l">
-              <a:spcAft>
-                <a:spcPts val="400"/>
-              </a:spcAft>
-            </a:pPr>
-            <a:r>
-              <a:rPr sz="1800" b="0" i="0">
-                <a:solidFill>
-                  <a:srgbClr val="011754"/>
-                </a:solidFill>
-                <a:latin typeface="Calibri"/>
-              </a:rPr>
-              <a:t>Localiza nombres, DNI, contactos, cifras inéditas o datos de una institución dentro del fragmento.</a:t>
-            </a:r>
-          </a:p>
-        </p:txBody>
-      </p:sp>
-      <p:sp>
-        <p:nvSpPr>
-          <p:cNvPr id="7" name="Rounded Rectangle 6"/>
-          <p:cNvSpPr/>
-          <p:nvPr/>
-        </p:nvSpPr>
-        <p:spPr>
-          <a:xfrm>
-            <a:off x="6190488" y="2103120"/>
-            <a:ext cx="5394960" cy="1920240"/>
-          </a:xfrm>
-          <a:prstGeom prst="roundRect">
-            <a:avLst>
-              <a:gd name="adj" fmla="val 6000"/>
-            </a:avLst>
-          </a:prstGeom>
-          <a:solidFill>
-            <a:srgbClr val="D9DEEF"/>
-          </a:solidFill>
-          <a:ln>
-            <a:noFill/>
-          </a:ln>
-          <a:effectLst/>
-        </p:spPr>
-        <p:style>
-          <a:lnRef idx="1">
-            <a:schemeClr val="accent1"/>
-          </a:lnRef>
-          <a:fillRef idx="3">
-            <a:schemeClr val="accent1"/>
-          </a:fillRef>
-          <a:effectRef idx="2">
-            <a:schemeClr val="accent1"/>
-          </a:effectRef>
-          <a:fontRef idx="minor">
-            <a:schemeClr val="lt1"/>
-          </a:fontRef>
-        </p:style>
-        <p:txBody>
-          <a:bodyPr rtlCol="0" anchor="ctr"/>
-          <a:lstStyle/>
-          <a:p>
-            <a:pPr algn="ctr"/>
-          </a:p>
-        </p:txBody>
-      </p:sp>
-      <p:sp>
-        <p:nvSpPr>
-          <p:cNvPr id="8" name="TextBox 7"/>
-          <p:cNvSpPr txBox="1"/>
-          <p:nvPr/>
-        </p:nvSpPr>
-        <p:spPr>
-          <a:xfrm>
-            <a:off x="6373368" y="2212848"/>
-            <a:ext cx="5029200" cy="1700784"/>
-          </a:xfrm>
-          <a:prstGeom prst="rect">
-            <a:avLst/>
-          </a:prstGeom>
-          <a:noFill/>
-        </p:spPr>
-        <p:txBody>
-          <a:bodyPr wrap="square" lIns="45720" rIns="45720" tIns="27432" bIns="27432" anchor="t">
-            <a:spAutoFit/>
-          </a:bodyPr>
-          <a:lstStyle/>
-          <a:p>
-            <a:pPr algn="l">
-              <a:spcAft>
-                <a:spcPts val="600"/>
-              </a:spcAft>
-            </a:pPr>
-            <a:r>
-              <a:rPr sz="2000" b="1" i="0">
-                <a:solidFill>
-                  <a:srgbClr val="2B4EB4"/>
-                </a:solidFill>
-                <a:latin typeface="Calibri"/>
-              </a:rPr>
-              <a:t>2. Clasificar</a:t>
-            </a:r>
-          </a:p>
-          <a:p>
-            <a:pPr algn="l">
-              <a:spcAft>
-                <a:spcPts val="400"/>
-              </a:spcAft>
-            </a:pPr>
-            <a:r>
-              <a:rPr sz="1800" b="0" i="0">
-                <a:solidFill>
-                  <a:srgbClr val="011754"/>
-                </a:solidFill>
-                <a:latin typeface="Calibri"/>
-              </a:rPr>
-              <a:t>Separa lo publicado y propio de lo ajeno, inédito o identificable.</a:t>
-            </a:r>
-          </a:p>
-        </p:txBody>
-      </p:sp>
-      <p:sp>
-        <p:nvSpPr>
-          <p:cNvPr id="9" name="Rounded Rectangle 8"/>
-          <p:cNvSpPr/>
-          <p:nvPr/>
-        </p:nvSpPr>
-        <p:spPr>
-          <a:xfrm>
-            <a:off x="612648" y="4206240"/>
-            <a:ext cx="5394960" cy="1920240"/>
-          </a:xfrm>
-          <a:prstGeom prst="roundRect">
-            <a:avLst>
-              <a:gd name="adj" fmla="val 6000"/>
-            </a:avLst>
-          </a:prstGeom>
-          <a:solidFill>
-            <a:srgbClr val="D9DEEF"/>
-          </a:solidFill>
-          <a:ln>
-            <a:noFill/>
-          </a:ln>
-          <a:effectLst/>
-        </p:spPr>
-        <p:style>
-          <a:lnRef idx="1">
-            <a:schemeClr val="accent1"/>
-          </a:lnRef>
-          <a:fillRef idx="3">
-            <a:schemeClr val="accent1"/>
-          </a:fillRef>
-          <a:effectRef idx="2">
-            <a:schemeClr val="accent1"/>
-          </a:effectRef>
-          <a:fontRef idx="minor">
-            <a:schemeClr val="lt1"/>
-          </a:fontRef>
-        </p:style>
-        <p:txBody>
-          <a:bodyPr rtlCol="0" anchor="ctr"/>
-          <a:lstStyle/>
-          <a:p>
-            <a:pPr algn="ctr"/>
-          </a:p>
-        </p:txBody>
-      </p:sp>
-      <p:sp>
-        <p:nvSpPr>
-          <p:cNvPr id="10" name="TextBox 9"/>
-          <p:cNvSpPr txBox="1"/>
-          <p:nvPr/>
-        </p:nvSpPr>
-        <p:spPr>
-          <a:xfrm>
-            <a:off x="795528" y="4315968"/>
-            <a:ext cx="5029200" cy="1700784"/>
-          </a:xfrm>
-          <a:prstGeom prst="rect">
-            <a:avLst/>
-          </a:prstGeom>
-          <a:noFill/>
-        </p:spPr>
-        <p:txBody>
-          <a:bodyPr wrap="square" lIns="45720" rIns="45720" tIns="27432" bIns="27432" anchor="t">
-            <a:spAutoFit/>
-          </a:bodyPr>
-          <a:lstStyle/>
-          <a:p>
-            <a:pPr algn="l">
-              <a:spcAft>
-                <a:spcPts val="600"/>
-              </a:spcAft>
-            </a:pPr>
-            <a:r>
-              <a:rPr sz="2000" b="1" i="0">
-                <a:solidFill>
-                  <a:srgbClr val="2B4EB4"/>
-                </a:solidFill>
-                <a:latin typeface="Calibri"/>
-              </a:rPr>
-              <a:t>3. Decidir</a:t>
-            </a:r>
-          </a:p>
-          <a:p>
-            <a:pPr algn="l">
-              <a:spcAft>
-                <a:spcPts val="400"/>
-              </a:spcAft>
-            </a:pPr>
-            <a:r>
-              <a:rPr sz="1800" b="0" i="0">
-                <a:solidFill>
-                  <a:srgbClr val="011754"/>
-                </a:solidFill>
-                <a:latin typeface="Calibri"/>
-              </a:rPr>
-              <a:t>Pregúntate si divulgarlo podría perjudicar a una persona o a una institución.</a:t>
-            </a:r>
-          </a:p>
-        </p:txBody>
-      </p:sp>
-      <p:sp>
-        <p:nvSpPr>
-          <p:cNvPr id="11" name="Rounded Rectangle 10"/>
-          <p:cNvSpPr/>
-          <p:nvPr/>
-        </p:nvSpPr>
-        <p:spPr>
-          <a:xfrm>
-            <a:off x="6190488" y="4206240"/>
-            <a:ext cx="5394960" cy="1920240"/>
-          </a:xfrm>
-          <a:prstGeom prst="roundRect">
-            <a:avLst>
-              <a:gd name="adj" fmla="val 6000"/>
-            </a:avLst>
-          </a:prstGeom>
-          <a:solidFill>
-            <a:srgbClr val="D9DEEF"/>
-          </a:solidFill>
-          <a:ln>
-            <a:noFill/>
-          </a:ln>
-          <a:effectLst/>
-        </p:spPr>
-        <p:style>
-          <a:lnRef idx="1">
-            <a:schemeClr val="accent1"/>
-          </a:lnRef>
-          <a:fillRef idx="3">
-            <a:schemeClr val="accent1"/>
-          </a:fillRef>
-          <a:effectRef idx="2">
-            <a:schemeClr val="accent1"/>
-          </a:effectRef>
-          <a:fontRef idx="minor">
-            <a:schemeClr val="lt1"/>
-          </a:fontRef>
-        </p:style>
-        <p:txBody>
-          <a:bodyPr rtlCol="0" anchor="ctr"/>
-          <a:lstStyle/>
-          <a:p>
-            <a:pPr algn="ctr"/>
-          </a:p>
-        </p:txBody>
-      </p:sp>
-      <p:sp>
-        <p:nvSpPr>
-          <p:cNvPr id="12" name="TextBox 11"/>
-          <p:cNvSpPr txBox="1"/>
-          <p:nvPr/>
-        </p:nvSpPr>
-        <p:spPr>
-          <a:xfrm>
-            <a:off x="6373368" y="4315968"/>
-            <a:ext cx="5029200" cy="1700784"/>
-          </a:xfrm>
-          <a:prstGeom prst="rect">
-            <a:avLst/>
-          </a:prstGeom>
-          <a:noFill/>
-        </p:spPr>
-        <p:txBody>
-          <a:bodyPr wrap="square" lIns="45720" rIns="45720" tIns="27432" bIns="27432" anchor="t">
-            <a:spAutoFit/>
-          </a:bodyPr>
-          <a:lstStyle/>
-          <a:p>
-            <a:pPr algn="l">
-              <a:spcAft>
-                <a:spcPts val="600"/>
-              </a:spcAft>
-            </a:pPr>
-            <a:r>
-              <a:rPr sz="2000" b="1" i="0">
-                <a:solidFill>
-                  <a:srgbClr val="2B4EB4"/>
-                </a:solidFill>
-                <a:latin typeface="Calibri"/>
-              </a:rPr>
-              <a:t>4. Anonimizar o retener</a:t>
-            </a:r>
-          </a:p>
-          <a:p>
-            <a:pPr algn="l">
-              <a:spcAft>
-                <a:spcPts val="400"/>
-              </a:spcAft>
-            </a:pPr>
-            <a:r>
-              <a:rPr sz="1800" b="0" i="0">
-                <a:solidFill>
-                  <a:srgbClr val="011754"/>
-                </a:solidFill>
-                <a:latin typeface="Calibri"/>
-              </a:rPr>
-              <a:t>Quita los datos identificables o, si no es posible, no lo compartas.</a:t>
-            </a:r>
-          </a:p>
-        </p:txBody>
-      </p:sp>
-      <p:sp>
-        <p:nvSpPr>
-          <p:cNvPr id="13" name="TextBox 12"/>
-          <p:cNvSpPr txBox="1"/>
-          <p:nvPr/>
-        </p:nvSpPr>
-        <p:spPr>
-          <a:xfrm>
-            <a:off x="612648" y="5943600"/>
-            <a:ext cx="10972800" cy="365760"/>
-          </a:xfrm>
-          <a:prstGeom prst="rect">
-            <a:avLst/>
-          </a:prstGeom>
-          <a:noFill/>
-        </p:spPr>
-        <p:txBody>
-          <a:bodyPr wrap="square" lIns="45720" rIns="45720" tIns="27432" bIns="27432" anchor="t">
-            <a:spAutoFit/>
-          </a:bodyPr>
-          <a:lstStyle/>
-          <a:p>
-            <a:pPr algn="l">
-              <a:spcAft>
-                <a:spcPts val="400"/>
-              </a:spcAft>
-            </a:pPr>
-            <a:r>
-              <a:rPr sz="1800" b="1" i="0">
-                <a:solidFill>
-                  <a:srgbClr val="2B4EB4"/>
-                </a:solidFill>
-                <a:latin typeface="Calibri"/>
-              </a:rPr>
-              <a:t>Lo que pegas puede quedar almacenado fuera de tu control.</a:t>
-            </a:r>
-          </a:p>
-        </p:txBody>
-      </p:sp>
-    </p:spTree>
-  </p:cSld>
-  <p:clrMapOvr>
-    <a:masterClrMapping/>
-  </p:clrMapOvr>
-</p:sld>
-</file>
-
-<file path=ppt/slides/slide21.xml><?xml version="1.0" encoding="utf-8"?>
-<p:sld xmlns:a="http://schemas.openxmlformats.org/drawingml/2006/main" xmlns:r="http://schemas.openxmlformats.org/officeDocument/2006/relationships" xmlns:p="http://schemas.openxmlformats.org/presentationml/2006/main">
-  <p:cSld>
-    <p:spTree>
-      <p:nvGrpSpPr>
-        <p:cNvPr id="1" name=""/>
-        <p:cNvGrpSpPr/>
-        <p:nvPr/>
-      </p:nvGrpSpPr>
-      <p:grpSpPr>
-        <a:xfrm>
-          <a:off x="0" y="0"/>
-          <a:ext cx="0" cy="0"/>
-          <a:chOff x="0" y="0"/>
-          <a:chExt cx="0" cy="0"/>
-        </a:xfrm>
-      </p:grpSpPr>
-      <p:pic>
-        <p:nvPicPr>
-          <p:cNvPr id="2" name="Picture 1" descr="bg_content.png"/>
-          <p:cNvPicPr>
-            <a:picLocks noChangeAspect="1"/>
-          </p:cNvPicPr>
-          <p:nvPr/>
-        </p:nvPicPr>
-        <p:blipFill>
-          <a:blip r:embed="rId2"/>
-          <a:stretch>
-            <a:fillRect/>
-          </a:stretch>
-        </p:blipFill>
-        <p:spPr>
-          <a:xfrm>
-            <a:off x="0" y="0"/>
-            <a:ext cx="12191695" cy="6858000"/>
-          </a:xfrm>
-          <a:prstGeom prst="rect">
-            <a:avLst/>
-          </a:prstGeom>
-        </p:spPr>
-      </p:pic>
-      <p:sp>
-        <p:nvSpPr>
-          <p:cNvPr id="3" name="TextBox 2"/>
-          <p:cNvSpPr txBox="1"/>
-          <p:nvPr/>
-        </p:nvSpPr>
-        <p:spPr>
-          <a:xfrm>
-            <a:off x="612648" y="777240"/>
-            <a:ext cx="10332720" cy="640080"/>
-          </a:xfrm>
-          <a:prstGeom prst="rect">
-            <a:avLst/>
-          </a:prstGeom>
-          <a:noFill/>
-        </p:spPr>
-        <p:txBody>
-          <a:bodyPr wrap="square" lIns="45720" rIns="45720" tIns="27432" bIns="27432" anchor="ctr">
-            <a:spAutoFit/>
-          </a:bodyPr>
-          <a:lstStyle/>
-          <a:p>
-            <a:pPr algn="l">
-              <a:spcAft>
-                <a:spcPts val="400"/>
-              </a:spcAft>
-            </a:pPr>
-            <a:r>
-              <a:rPr sz="2800" b="1" i="0">
-                <a:solidFill>
-                  <a:srgbClr val="1836B2"/>
-                </a:solidFill>
-                <a:latin typeface="Calibri"/>
-              </a:rPr>
-              <a:t>¿Qué sí puede compartirse?</a:t>
-            </a:r>
-          </a:p>
-        </p:txBody>
-      </p:sp>
-      <p:sp>
-        <p:nvSpPr>
-          <p:cNvPr id="4" name="Rounded Rectangle 3"/>
-          <p:cNvSpPr/>
-          <p:nvPr/>
-        </p:nvSpPr>
-        <p:spPr>
-          <a:xfrm>
-            <a:off x="612648" y="1600200"/>
-            <a:ext cx="3535680" cy="1920240"/>
-          </a:xfrm>
-          <a:prstGeom prst="roundRect">
-            <a:avLst>
-              <a:gd name="adj" fmla="val 6000"/>
-            </a:avLst>
-          </a:prstGeom>
-          <a:solidFill>
-            <a:srgbClr val="D9DEEF"/>
-          </a:solidFill>
-          <a:ln>
-            <a:noFill/>
-          </a:ln>
-          <a:effectLst/>
-        </p:spPr>
-        <p:style>
-          <a:lnRef idx="1">
-            <a:schemeClr val="accent1"/>
-          </a:lnRef>
-          <a:fillRef idx="3">
-            <a:schemeClr val="accent1"/>
-          </a:fillRef>
-          <a:effectRef idx="2">
-            <a:schemeClr val="accent1"/>
-          </a:effectRef>
-          <a:fontRef idx="minor">
-            <a:schemeClr val="lt1"/>
-          </a:fontRef>
-        </p:style>
-        <p:txBody>
-          <a:bodyPr rtlCol="0" anchor="ctr"/>
-          <a:lstStyle/>
-          <a:p>
-            <a:pPr algn="ctr"/>
-          </a:p>
-        </p:txBody>
-      </p:sp>
-      <p:sp>
-        <p:nvSpPr>
-          <p:cNvPr id="5" name="TextBox 4"/>
-          <p:cNvSpPr txBox="1"/>
-          <p:nvPr/>
-        </p:nvSpPr>
-        <p:spPr>
-          <a:xfrm>
-            <a:off x="795528" y="1709928"/>
-            <a:ext cx="3169920" cy="1700784"/>
-          </a:xfrm>
-          <a:prstGeom prst="rect">
-            <a:avLst/>
-          </a:prstGeom>
-          <a:noFill/>
-        </p:spPr>
-        <p:txBody>
-          <a:bodyPr wrap="square" lIns="45720" rIns="45720" tIns="27432" bIns="27432" anchor="t">
-            <a:spAutoFit/>
-          </a:bodyPr>
-          <a:lstStyle/>
-          <a:p>
-            <a:pPr algn="l">
-              <a:spcAft>
-                <a:spcPts val="600"/>
-              </a:spcAft>
-            </a:pPr>
-            <a:r>
-              <a:rPr sz="2000" b="1" i="0">
-                <a:solidFill>
-                  <a:srgbClr val="2B4EB4"/>
-                </a:solidFill>
-                <a:latin typeface="Calibri"/>
-              </a:rPr>
-              <a:t>Metodología general</a:t>
-            </a:r>
-          </a:p>
-          <a:p>
-            <a:pPr algn="l">
-              <a:spcAft>
-                <a:spcPts val="400"/>
-              </a:spcAft>
-            </a:pPr>
-            <a:r>
-              <a:rPr sz="1800" b="0" i="0">
-                <a:solidFill>
-                  <a:srgbClr val="011754"/>
-                </a:solidFill>
-                <a:latin typeface="Calibri"/>
-              </a:rPr>
-              <a:t>Descripción del diseño y los pasos, sin cifras ni nombres.</a:t>
-            </a:r>
-          </a:p>
-        </p:txBody>
-      </p:sp>
-      <p:sp>
-        <p:nvSpPr>
-          <p:cNvPr id="6" name="Rounded Rectangle 5"/>
-          <p:cNvSpPr/>
-          <p:nvPr/>
-        </p:nvSpPr>
-        <p:spPr>
-          <a:xfrm>
-            <a:off x="4331208" y="1600200"/>
-            <a:ext cx="3535680" cy="1920240"/>
-          </a:xfrm>
-          <a:prstGeom prst="roundRect">
-            <a:avLst>
-              <a:gd name="adj" fmla="val 6000"/>
-            </a:avLst>
-          </a:prstGeom>
-          <a:solidFill>
-            <a:srgbClr val="D9DEEF"/>
-          </a:solidFill>
-          <a:ln>
-            <a:noFill/>
-          </a:ln>
-          <a:effectLst/>
-        </p:spPr>
-        <p:style>
-          <a:lnRef idx="1">
-            <a:schemeClr val="accent1"/>
-          </a:lnRef>
-          <a:fillRef idx="3">
-            <a:schemeClr val="accent1"/>
-          </a:fillRef>
-          <a:effectRef idx="2">
-            <a:schemeClr val="accent1"/>
-          </a:effectRef>
-          <a:fontRef idx="minor">
-            <a:schemeClr val="lt1"/>
-          </a:fontRef>
-        </p:style>
-        <p:txBody>
-          <a:bodyPr rtlCol="0" anchor="ctr"/>
-          <a:lstStyle/>
-          <a:p>
-            <a:pPr algn="ctr"/>
-          </a:p>
-        </p:txBody>
-      </p:sp>
-      <p:sp>
-        <p:nvSpPr>
-          <p:cNvPr id="7" name="TextBox 6"/>
-          <p:cNvSpPr txBox="1"/>
-          <p:nvPr/>
-        </p:nvSpPr>
-        <p:spPr>
-          <a:xfrm>
-            <a:off x="4514088" y="1709928"/>
-            <a:ext cx="3169920" cy="1700784"/>
-          </a:xfrm>
-          <a:prstGeom prst="rect">
-            <a:avLst/>
-          </a:prstGeom>
-          <a:noFill/>
-        </p:spPr>
-        <p:txBody>
-          <a:bodyPr wrap="square" lIns="45720" rIns="45720" tIns="27432" bIns="27432" anchor="t">
-            <a:spAutoFit/>
-          </a:bodyPr>
-          <a:lstStyle/>
-          <a:p>
-            <a:pPr algn="l">
-              <a:spcAft>
-                <a:spcPts val="600"/>
-              </a:spcAft>
-            </a:pPr>
-            <a:r>
-              <a:rPr sz="2000" b="1" i="0">
-                <a:solidFill>
-                  <a:srgbClr val="2B4EB4"/>
-                </a:solidFill>
-                <a:latin typeface="Calibri"/>
-              </a:rPr>
-              <a:t>Pregunta de investigación</a:t>
-            </a:r>
-          </a:p>
-          <a:p>
-            <a:pPr algn="l">
-              <a:spcAft>
-                <a:spcPts val="400"/>
-              </a:spcAft>
-            </a:pPr>
-            <a:r>
-              <a:rPr sz="1800" b="0" i="0">
-                <a:solidFill>
-                  <a:srgbClr val="011754"/>
-                </a:solidFill>
-                <a:latin typeface="Calibri"/>
-              </a:rPr>
-              <a:t>El problema que quieres resolver, sin datos reservados.</a:t>
-            </a:r>
-          </a:p>
-        </p:txBody>
-      </p:sp>
-      <p:sp>
-        <p:nvSpPr>
-          <p:cNvPr id="8" name="Rounded Rectangle 7"/>
-          <p:cNvSpPr/>
-          <p:nvPr/>
-        </p:nvSpPr>
-        <p:spPr>
-          <a:xfrm>
-            <a:off x="8049767" y="1600200"/>
-            <a:ext cx="3535680" cy="1920240"/>
-          </a:xfrm>
-          <a:prstGeom prst="roundRect">
-            <a:avLst>
-              <a:gd name="adj" fmla="val 6000"/>
-            </a:avLst>
-          </a:prstGeom>
-          <a:solidFill>
-            <a:srgbClr val="D9DEEF"/>
-          </a:solidFill>
-          <a:ln>
-            <a:noFill/>
-          </a:ln>
-          <a:effectLst/>
-        </p:spPr>
-        <p:style>
-          <a:lnRef idx="1">
-            <a:schemeClr val="accent1"/>
-          </a:lnRef>
-          <a:fillRef idx="3">
-            <a:schemeClr val="accent1"/>
-          </a:fillRef>
-          <a:effectRef idx="2">
-            <a:schemeClr val="accent1"/>
-          </a:effectRef>
-          <a:fontRef idx="minor">
-            <a:schemeClr val="lt1"/>
-          </a:fontRef>
-        </p:style>
-        <p:txBody>
-          <a:bodyPr rtlCol="0" anchor="ctr"/>
-          <a:lstStyle/>
-          <a:p>
-            <a:pPr algn="ctr"/>
-          </a:p>
-        </p:txBody>
-      </p:sp>
-      <p:sp>
-        <p:nvSpPr>
-          <p:cNvPr id="9" name="TextBox 8"/>
-          <p:cNvSpPr txBox="1"/>
-          <p:nvPr/>
-        </p:nvSpPr>
-        <p:spPr>
-          <a:xfrm>
-            <a:off x="8232647" y="1709928"/>
-            <a:ext cx="3169920" cy="1700784"/>
-          </a:xfrm>
-          <a:prstGeom prst="rect">
-            <a:avLst/>
-          </a:prstGeom>
-          <a:noFill/>
-        </p:spPr>
-        <p:txBody>
-          <a:bodyPr wrap="square" lIns="45720" rIns="45720" tIns="27432" bIns="27432" anchor="t">
-            <a:spAutoFit/>
-          </a:bodyPr>
-          <a:lstStyle/>
-          <a:p>
-            <a:pPr algn="l">
-              <a:spcAft>
-                <a:spcPts val="600"/>
-              </a:spcAft>
-            </a:pPr>
-            <a:r>
-              <a:rPr sz="2000" b="1" i="0">
-                <a:solidFill>
-                  <a:srgbClr val="2B4EB4"/>
-                </a:solidFill>
-                <a:latin typeface="Calibri"/>
-              </a:rPr>
-              <a:t>Literatura publicada</a:t>
-            </a:r>
-          </a:p>
-          <a:p>
-            <a:pPr algn="l">
-              <a:spcAft>
-                <a:spcPts val="400"/>
-              </a:spcAft>
-            </a:pPr>
-            <a:r>
-              <a:rPr sz="1800" b="0" i="0">
-                <a:solidFill>
-                  <a:srgbClr val="011754"/>
-                </a:solidFill>
-                <a:latin typeface="Calibri"/>
-              </a:rPr>
-              <a:t>Artículos, libros e informes ya disponibles públicamente.</a:t>
-            </a:r>
-          </a:p>
-        </p:txBody>
-      </p:sp>
-      <p:sp>
-        <p:nvSpPr>
-          <p:cNvPr id="10" name="Rounded Rectangle 9"/>
-          <p:cNvSpPr/>
-          <p:nvPr/>
-        </p:nvSpPr>
-        <p:spPr>
-          <a:xfrm>
-            <a:off x="612648" y="3703320"/>
-            <a:ext cx="3535680" cy="1920240"/>
-          </a:xfrm>
-          <a:prstGeom prst="roundRect">
-            <a:avLst>
-              <a:gd name="adj" fmla="val 6000"/>
-            </a:avLst>
-          </a:prstGeom>
-          <a:solidFill>
-            <a:srgbClr val="D9DEEF"/>
-          </a:solidFill>
-          <a:ln>
-            <a:noFill/>
-          </a:ln>
-          <a:effectLst/>
-        </p:spPr>
-        <p:style>
-          <a:lnRef idx="1">
-            <a:schemeClr val="accent1"/>
-          </a:lnRef>
-          <a:fillRef idx="3">
-            <a:schemeClr val="accent1"/>
-          </a:fillRef>
-          <a:effectRef idx="2">
-            <a:schemeClr val="accent1"/>
-          </a:effectRef>
-          <a:fontRef idx="minor">
-            <a:schemeClr val="lt1"/>
-          </a:fontRef>
-        </p:style>
-        <p:txBody>
-          <a:bodyPr rtlCol="0" anchor="ctr"/>
-          <a:lstStyle/>
-          <a:p>
-            <a:pPr algn="ctr"/>
-          </a:p>
-        </p:txBody>
-      </p:sp>
-      <p:sp>
-        <p:nvSpPr>
-          <p:cNvPr id="11" name="TextBox 10"/>
-          <p:cNvSpPr txBox="1"/>
-          <p:nvPr/>
-        </p:nvSpPr>
-        <p:spPr>
-          <a:xfrm>
-            <a:off x="795528" y="3813048"/>
-            <a:ext cx="3169920" cy="1700784"/>
-          </a:xfrm>
-          <a:prstGeom prst="rect">
-            <a:avLst/>
-          </a:prstGeom>
-          <a:noFill/>
-        </p:spPr>
-        <p:txBody>
-          <a:bodyPr wrap="square" lIns="45720" rIns="45720" tIns="27432" bIns="27432" anchor="t">
-            <a:spAutoFit/>
-          </a:bodyPr>
-          <a:lstStyle/>
-          <a:p>
-            <a:pPr algn="l">
-              <a:spcAft>
-                <a:spcPts val="600"/>
-              </a:spcAft>
-            </a:pPr>
-            <a:r>
-              <a:rPr sz="2000" b="1" i="0">
-                <a:solidFill>
-                  <a:srgbClr val="2B4EB4"/>
-                </a:solidFill>
-                <a:latin typeface="Calibri"/>
-              </a:rPr>
-              <a:t>Resultados ya publicados</a:t>
-            </a:r>
-          </a:p>
-          <a:p>
-            <a:pPr algn="l">
-              <a:spcAft>
-                <a:spcPts val="400"/>
-              </a:spcAft>
-            </a:pPr>
-            <a:r>
-              <a:rPr sz="1800" b="0" i="0">
-                <a:solidFill>
-                  <a:srgbClr val="011754"/>
-                </a:solidFill>
-                <a:latin typeface="Calibri"/>
-              </a:rPr>
-              <a:t>Hallazgos de un artículo indexado y accesible.</a:t>
-            </a:r>
-          </a:p>
-        </p:txBody>
-      </p:sp>
-      <p:sp>
-        <p:nvSpPr>
-          <p:cNvPr id="12" name="Rounded Rectangle 11"/>
-          <p:cNvSpPr/>
-          <p:nvPr/>
-        </p:nvSpPr>
-        <p:spPr>
-          <a:xfrm>
-            <a:off x="4331208" y="3703320"/>
-            <a:ext cx="3535680" cy="1920240"/>
-          </a:xfrm>
-          <a:prstGeom prst="roundRect">
-            <a:avLst>
-              <a:gd name="adj" fmla="val 6000"/>
-            </a:avLst>
-          </a:prstGeom>
-          <a:solidFill>
-            <a:srgbClr val="D9DEEF"/>
-          </a:solidFill>
-          <a:ln>
-            <a:noFill/>
-          </a:ln>
-          <a:effectLst/>
-        </p:spPr>
-        <p:style>
-          <a:lnRef idx="1">
-            <a:schemeClr val="accent1"/>
-          </a:lnRef>
-          <a:fillRef idx="3">
-            <a:schemeClr val="accent1"/>
-          </a:fillRef>
-          <a:effectRef idx="2">
-            <a:schemeClr val="accent1"/>
-          </a:effectRef>
-          <a:fontRef idx="minor">
-            <a:schemeClr val="lt1"/>
-          </a:fontRef>
-        </p:style>
-        <p:txBody>
-          <a:bodyPr rtlCol="0" anchor="ctr"/>
-          <a:lstStyle/>
-          <a:p>
-            <a:pPr algn="ctr"/>
-          </a:p>
-        </p:txBody>
-      </p:sp>
-      <p:sp>
-        <p:nvSpPr>
-          <p:cNvPr id="13" name="TextBox 12"/>
-          <p:cNvSpPr txBox="1"/>
-          <p:nvPr/>
-        </p:nvSpPr>
-        <p:spPr>
-          <a:xfrm>
-            <a:off x="4514088" y="3813048"/>
-            <a:ext cx="3169920" cy="1700784"/>
-          </a:xfrm>
-          <a:prstGeom prst="rect">
-            <a:avLst/>
-          </a:prstGeom>
-          <a:noFill/>
-        </p:spPr>
-        <p:txBody>
-          <a:bodyPr wrap="square" lIns="45720" rIns="45720" tIns="27432" bIns="27432" anchor="t">
-            <a:spAutoFit/>
-          </a:bodyPr>
-          <a:lstStyle/>
-          <a:p>
-            <a:pPr algn="l">
-              <a:spcAft>
-                <a:spcPts val="600"/>
-              </a:spcAft>
-            </a:pPr>
-            <a:r>
-              <a:rPr sz="2000" b="1" i="0">
-                <a:solidFill>
-                  <a:srgbClr val="2B4EB4"/>
-                </a:solidFill>
-                <a:latin typeface="Calibri"/>
-              </a:rPr>
-              <a:t>Texto propio para revisar</a:t>
-            </a:r>
-          </a:p>
-          <a:p>
-            <a:pPr algn="l">
-              <a:spcAft>
-                <a:spcPts val="400"/>
-              </a:spcAft>
-            </a:pPr>
-            <a:r>
-              <a:rPr sz="1800" b="0" i="0">
-                <a:solidFill>
-                  <a:srgbClr val="011754"/>
-                </a:solidFill>
-                <a:latin typeface="Calibri"/>
-              </a:rPr>
-              <a:t>Un párrafo tuyo, sin información identificable.</a:t>
-            </a:r>
-          </a:p>
-        </p:txBody>
-      </p:sp>
-      <p:sp>
-        <p:nvSpPr>
-          <p:cNvPr id="14" name="Rounded Rectangle 13"/>
-          <p:cNvSpPr/>
-          <p:nvPr/>
-        </p:nvSpPr>
-        <p:spPr>
-          <a:xfrm>
-            <a:off x="8049767" y="3703320"/>
-            <a:ext cx="3535680" cy="1920240"/>
-          </a:xfrm>
-          <a:prstGeom prst="roundRect">
-            <a:avLst>
-              <a:gd name="adj" fmla="val 6000"/>
-            </a:avLst>
-          </a:prstGeom>
-          <a:solidFill>
-            <a:srgbClr val="D9DEEF"/>
-          </a:solidFill>
-          <a:ln>
-            <a:noFill/>
-          </a:ln>
-          <a:effectLst/>
-        </p:spPr>
-        <p:style>
-          <a:lnRef idx="1">
-            <a:schemeClr val="accent1"/>
-          </a:lnRef>
-          <a:fillRef idx="3">
-            <a:schemeClr val="accent1"/>
-          </a:fillRef>
-          <a:effectRef idx="2">
-            <a:schemeClr val="accent1"/>
-          </a:effectRef>
-          <a:fontRef idx="minor">
-            <a:schemeClr val="lt1"/>
-          </a:fontRef>
-        </p:style>
-        <p:txBody>
-          <a:bodyPr rtlCol="0" anchor="ctr"/>
-          <a:lstStyle/>
-          <a:p>
-            <a:pPr algn="ctr"/>
-          </a:p>
-        </p:txBody>
-      </p:sp>
-      <p:sp>
-        <p:nvSpPr>
-          <p:cNvPr id="15" name="TextBox 14"/>
-          <p:cNvSpPr txBox="1"/>
-          <p:nvPr/>
-        </p:nvSpPr>
-        <p:spPr>
-          <a:xfrm>
-            <a:off x="8232647" y="3813048"/>
-            <a:ext cx="3169920" cy="1700784"/>
-          </a:xfrm>
-          <a:prstGeom prst="rect">
-            <a:avLst/>
-          </a:prstGeom>
-          <a:noFill/>
-        </p:spPr>
-        <p:txBody>
-          <a:bodyPr wrap="square" lIns="45720" rIns="45720" tIns="27432" bIns="27432" anchor="t">
-            <a:spAutoFit/>
-          </a:bodyPr>
-          <a:lstStyle/>
-          <a:p>
-            <a:pPr algn="l">
-              <a:spcAft>
-                <a:spcPts val="600"/>
-              </a:spcAft>
-            </a:pPr>
-            <a:r>
-              <a:rPr sz="2000" b="1" i="0">
-                <a:solidFill>
-                  <a:srgbClr val="2B4EB4"/>
-                </a:solidFill>
-                <a:latin typeface="Calibri"/>
-              </a:rPr>
-              <a:t>Dudas conceptuales</a:t>
-            </a:r>
-          </a:p>
-          <a:p>
-            <a:pPr algn="l">
-              <a:spcAft>
-                <a:spcPts val="400"/>
-              </a:spcAft>
-            </a:pPr>
-            <a:r>
-              <a:rPr sz="1800" b="0" i="0">
-                <a:solidFill>
-                  <a:srgbClr val="011754"/>
-                </a:solidFill>
-                <a:latin typeface="Calibri"/>
-              </a:rPr>
-              <a:t>Preguntas sobre un método, un término o una técnica.</a:t>
-            </a:r>
-          </a:p>
-        </p:txBody>
-      </p:sp>
-      <p:sp>
-        <p:nvSpPr>
-          <p:cNvPr id="16" name="Rounded Rectangle 15"/>
-          <p:cNvSpPr/>
-          <p:nvPr/>
-        </p:nvSpPr>
-        <p:spPr>
-          <a:xfrm>
-            <a:off x="612648" y="5577840"/>
-            <a:ext cx="10972800" cy="685800"/>
-          </a:xfrm>
-          <a:prstGeom prst="roundRect">
-            <a:avLst>
-              <a:gd name="adj" fmla="val 6000"/>
-            </a:avLst>
-          </a:prstGeom>
-          <a:solidFill>
-            <a:srgbClr val="011754"/>
-          </a:solidFill>
-          <a:ln>
-            <a:noFill/>
-          </a:ln>
-          <a:effectLst/>
-        </p:spPr>
-        <p:style>
-          <a:lnRef idx="1">
-            <a:schemeClr val="accent1"/>
-          </a:lnRef>
-          <a:fillRef idx="3">
-            <a:schemeClr val="accent1"/>
-          </a:fillRef>
-          <a:effectRef idx="2">
-            <a:schemeClr val="accent1"/>
-          </a:effectRef>
-          <a:fontRef idx="minor">
-            <a:schemeClr val="lt1"/>
-          </a:fontRef>
-        </p:style>
-        <p:txBody>
-          <a:bodyPr rtlCol="0" anchor="ctr"/>
-          <a:lstStyle/>
-          <a:p>
-            <a:pPr algn="ctr"/>
-          </a:p>
-        </p:txBody>
-      </p:sp>
-      <p:sp>
-        <p:nvSpPr>
-          <p:cNvPr id="17" name="TextBox 16"/>
-          <p:cNvSpPr txBox="1"/>
-          <p:nvPr/>
-        </p:nvSpPr>
-        <p:spPr>
-          <a:xfrm>
-            <a:off x="841248" y="5577840"/>
-            <a:ext cx="10515600" cy="685800"/>
-          </a:xfrm>
-          <a:prstGeom prst="rect">
-            <a:avLst/>
-          </a:prstGeom>
-          <a:noFill/>
-        </p:spPr>
-        <p:txBody>
-          <a:bodyPr wrap="square" lIns="45720" rIns="45720" tIns="27432" bIns="27432" anchor="ctr">
-            <a:spAutoFit/>
-          </a:bodyPr>
-          <a:lstStyle/>
-          <a:p>
-            <a:pPr algn="l">
-              <a:spcAft>
-                <a:spcPts val="400"/>
-              </a:spcAft>
-            </a:pPr>
-            <a:r>
-              <a:rPr sz="1800" b="1" i="0">
-                <a:solidFill>
-                  <a:srgbClr val="FFFFFF"/>
-                </a:solidFill>
-                <a:latin typeface="Calibri"/>
-              </a:rPr>
-              <a:t>Lo publicado y lo propio pueden compartirse; lo ajeno, inédito o identificable, no.</a:t>
-            </a:r>
           </a:p>
         </p:txBody>
       </p:sp>
@@ -13619,556 +10235,6 @@
 </p:sld>
 </file>
 
-<file path=ppt/slides/slide23.xml><?xml version="1.0" encoding="utf-8"?>
-<p:sld xmlns:a="http://schemas.openxmlformats.org/drawingml/2006/main" xmlns:r="http://schemas.openxmlformats.org/officeDocument/2006/relationships" xmlns:p="http://schemas.openxmlformats.org/presentationml/2006/main">
-  <p:cSld>
-    <p:spTree>
-      <p:nvGrpSpPr>
-        <p:cNvPr id="1" name=""/>
-        <p:cNvGrpSpPr/>
-        <p:nvPr/>
-      </p:nvGrpSpPr>
-      <p:grpSpPr>
-        <a:xfrm>
-          <a:off x="0" y="0"/>
-          <a:ext cx="0" cy="0"/>
-          <a:chOff x="0" y="0"/>
-          <a:chExt cx="0" cy="0"/>
-        </a:xfrm>
-      </p:grpSpPr>
-      <p:pic>
-        <p:nvPicPr>
-          <p:cNvPr id="2" name="Picture 1" descr="divider_bg.png"/>
-          <p:cNvPicPr>
-            <a:picLocks noChangeAspect="1"/>
-          </p:cNvPicPr>
-          <p:nvPr/>
-        </p:nvPicPr>
-        <p:blipFill>
-          <a:blip r:embed="rId2"/>
-          <a:stretch>
-            <a:fillRect/>
-          </a:stretch>
-        </p:blipFill>
-        <p:spPr>
-          <a:xfrm>
-            <a:off x="0" y="0"/>
-            <a:ext cx="12191695" cy="6858000"/>
-          </a:xfrm>
-          <a:prstGeom prst="rect">
-            <a:avLst/>
-          </a:prstGeom>
-        </p:spPr>
-      </p:pic>
-      <p:sp>
-        <p:nvSpPr>
-          <p:cNvPr id="3" name="TextBox 2"/>
-          <p:cNvSpPr txBox="1"/>
-          <p:nvPr/>
-        </p:nvSpPr>
-        <p:spPr>
-          <a:xfrm>
-            <a:off x="982912" y="2676125"/>
-            <a:ext cx="437840" cy="1999910"/>
-          </a:xfrm>
-          <a:prstGeom prst="rect">
-            <a:avLst/>
-          </a:prstGeom>
-          <a:noFill/>
-        </p:spPr>
-        <p:txBody>
-          <a:bodyPr wrap="square">
-            <a:spAutoFit/>
-          </a:bodyPr>
-          <a:lstStyle/>
-          <a:p>
-            <a:pPr algn="l">
-              <a:lnSpc>
-                <a:spcPct val="115000"/>
-              </a:lnSpc>
-            </a:pPr>
-            <a:r>
-              <a:rPr sz="7200" b="1" i="0">
-                <a:solidFill>
-                  <a:srgbClr val="FFFFFF"/>
-                </a:solidFill>
-                <a:latin typeface="Calibri"/>
-              </a:rPr>
-              <a:t>5</a:t>
-            </a:r>
-          </a:p>
-        </p:txBody>
-      </p:sp>
-      <p:sp>
-        <p:nvSpPr>
-          <p:cNvPr id="4" name="TextBox 3"/>
-          <p:cNvSpPr txBox="1"/>
-          <p:nvPr/>
-        </p:nvSpPr>
-        <p:spPr>
-          <a:xfrm>
-            <a:off x="982912" y="4737409"/>
-            <a:ext cx="10346277" cy="702221"/>
-          </a:xfrm>
-          <a:prstGeom prst="rect">
-            <a:avLst/>
-          </a:prstGeom>
-          <a:noFill/>
-        </p:spPr>
-        <p:txBody>
-          <a:bodyPr wrap="square">
-            <a:spAutoFit/>
-          </a:bodyPr>
-          <a:lstStyle/>
-          <a:p>
-            <a:pPr algn="l">
-              <a:lnSpc>
-                <a:spcPct val="115000"/>
-              </a:lnSpc>
-            </a:pPr>
-            <a:r>
-              <a:rPr sz="2600" b="0" i="0">
-                <a:solidFill>
-                  <a:srgbClr val="FFFFFF"/>
-                </a:solidFill>
-                <a:latin typeface="Calibri"/>
-              </a:rPr>
-              <a:t>AUTORÍA, TRANSPARENCIA Y DECLARACIÓN DE USO</a:t>
-            </a:r>
-          </a:p>
-        </p:txBody>
-      </p:sp>
-    </p:spTree>
-  </p:cSld>
-  <p:clrMapOvr>
-    <a:masterClrMapping/>
-  </p:clrMapOvr>
-</p:sld>
-</file>
-
-<file path=ppt/slides/slide24.xml><?xml version="1.0" encoding="utf-8"?>
-<p:sld xmlns:a="http://schemas.openxmlformats.org/drawingml/2006/main" xmlns:r="http://schemas.openxmlformats.org/officeDocument/2006/relationships" xmlns:p="http://schemas.openxmlformats.org/presentationml/2006/main">
-  <p:cSld>
-    <p:spTree>
-      <p:nvGrpSpPr>
-        <p:cNvPr id="1" name=""/>
-        <p:cNvGrpSpPr/>
-        <p:nvPr/>
-      </p:nvGrpSpPr>
-      <p:grpSpPr>
-        <a:xfrm>
-          <a:off x="0" y="0"/>
-          <a:ext cx="0" cy="0"/>
-          <a:chOff x="0" y="0"/>
-          <a:chExt cx="0" cy="0"/>
-        </a:xfrm>
-      </p:grpSpPr>
-      <p:pic>
-        <p:nvPicPr>
-          <p:cNvPr id="2" name="Picture 1" descr="bg_content.png"/>
-          <p:cNvPicPr>
-            <a:picLocks noChangeAspect="1"/>
-          </p:cNvPicPr>
-          <p:nvPr/>
-        </p:nvPicPr>
-        <p:blipFill>
-          <a:blip r:embed="rId2"/>
-          <a:stretch>
-            <a:fillRect/>
-          </a:stretch>
-        </p:blipFill>
-        <p:spPr>
-          <a:xfrm>
-            <a:off x="0" y="0"/>
-            <a:ext cx="12191695" cy="6858000"/>
-          </a:xfrm>
-          <a:prstGeom prst="rect">
-            <a:avLst/>
-          </a:prstGeom>
-        </p:spPr>
-      </p:pic>
-      <p:sp>
-        <p:nvSpPr>
-          <p:cNvPr id="3" name="TextBox 2"/>
-          <p:cNvSpPr txBox="1"/>
-          <p:nvPr/>
-        </p:nvSpPr>
-        <p:spPr>
-          <a:xfrm>
-            <a:off x="612648" y="777240"/>
-            <a:ext cx="10332720" cy="640080"/>
-          </a:xfrm>
-          <a:prstGeom prst="rect">
-            <a:avLst/>
-          </a:prstGeom>
-          <a:noFill/>
-        </p:spPr>
-        <p:txBody>
-          <a:bodyPr wrap="square" lIns="45720" rIns="45720" tIns="27432" bIns="27432" anchor="ctr">
-            <a:spAutoFit/>
-          </a:bodyPr>
-          <a:lstStyle/>
-          <a:p>
-            <a:pPr algn="l">
-              <a:spcAft>
-                <a:spcPts val="400"/>
-              </a:spcAft>
-            </a:pPr>
-            <a:r>
-              <a:rPr sz="2800" b="1" i="0">
-                <a:solidFill>
-                  <a:srgbClr val="1836B2"/>
-                </a:solidFill>
-                <a:latin typeface="Calibri"/>
-              </a:rPr>
-              <a:t>Partimos de un texto ya trabajado con IA</a:t>
-            </a:r>
-          </a:p>
-        </p:txBody>
-      </p:sp>
-      <p:sp>
-        <p:nvSpPr>
-          <p:cNvPr id="4" name="Rounded Rectangle 3"/>
-          <p:cNvSpPr/>
-          <p:nvPr/>
-        </p:nvSpPr>
-        <p:spPr>
-          <a:xfrm>
-            <a:off x="612648" y="1600200"/>
-            <a:ext cx="10972800" cy="1097280"/>
-          </a:xfrm>
-          <a:prstGeom prst="roundRect">
-            <a:avLst>
-              <a:gd name="adj" fmla="val 6000"/>
-            </a:avLst>
-          </a:prstGeom>
-          <a:solidFill>
-            <a:srgbClr val="011754"/>
-          </a:solidFill>
-          <a:ln>
-            <a:noFill/>
-          </a:ln>
-          <a:effectLst/>
-        </p:spPr>
-        <p:style>
-          <a:lnRef idx="1">
-            <a:schemeClr val="accent1"/>
-          </a:lnRef>
-          <a:fillRef idx="3">
-            <a:schemeClr val="accent1"/>
-          </a:fillRef>
-          <a:effectRef idx="2">
-            <a:schemeClr val="accent1"/>
-          </a:effectRef>
-          <a:fontRef idx="minor">
-            <a:schemeClr val="lt1"/>
-          </a:fontRef>
-        </p:style>
-        <p:txBody>
-          <a:bodyPr rtlCol="0" anchor="ctr"/>
-          <a:lstStyle/>
-          <a:p>
-            <a:pPr algn="ctr"/>
-          </a:p>
-        </p:txBody>
-      </p:sp>
-      <p:sp>
-        <p:nvSpPr>
-          <p:cNvPr id="5" name="TextBox 4"/>
-          <p:cNvSpPr txBox="1"/>
-          <p:nvPr/>
-        </p:nvSpPr>
-        <p:spPr>
-          <a:xfrm>
-            <a:off x="868680" y="1600200"/>
-            <a:ext cx="10424160" cy="1097280"/>
-          </a:xfrm>
-          <a:prstGeom prst="rect">
-            <a:avLst/>
-          </a:prstGeom>
-          <a:noFill/>
-        </p:spPr>
-        <p:txBody>
-          <a:bodyPr wrap="square" lIns="45720" rIns="45720" tIns="27432" bIns="27432" anchor="ctr">
-            <a:spAutoFit/>
-          </a:bodyPr>
-          <a:lstStyle/>
-          <a:p>
-            <a:pPr algn="l">
-              <a:spcAft>
-                <a:spcPts val="400"/>
-              </a:spcAft>
-            </a:pPr>
-            <a:r>
-              <a:rPr sz="2200" b="0" i="1">
-                <a:solidFill>
-                  <a:srgbClr val="FFFFFF"/>
-                </a:solidFill>
-                <a:latin typeface="Calibri"/>
-              </a:rPr>
-              <a:t>«Usé una IA para traducir y mejorar la redacción de mi artículo.»</a:t>
-            </a:r>
-          </a:p>
-        </p:txBody>
-      </p:sp>
-      <p:sp>
-        <p:nvSpPr>
-          <p:cNvPr id="6" name="Rounded Rectangle 5"/>
-          <p:cNvSpPr/>
-          <p:nvPr/>
-        </p:nvSpPr>
-        <p:spPr>
-          <a:xfrm>
-            <a:off x="612648" y="2926080"/>
-            <a:ext cx="5394960" cy="2926080"/>
-          </a:xfrm>
-          <a:prstGeom prst="roundRect">
-            <a:avLst>
-              <a:gd name="adj" fmla="val 6000"/>
-            </a:avLst>
-          </a:prstGeom>
-          <a:solidFill>
-            <a:srgbClr val="D9DEEF"/>
-          </a:solidFill>
-          <a:ln>
-            <a:noFill/>
-          </a:ln>
-          <a:effectLst/>
-        </p:spPr>
-        <p:style>
-          <a:lnRef idx="1">
-            <a:schemeClr val="accent1"/>
-          </a:lnRef>
-          <a:fillRef idx="3">
-            <a:schemeClr val="accent1"/>
-          </a:fillRef>
-          <a:effectRef idx="2">
-            <a:schemeClr val="accent1"/>
-          </a:effectRef>
-          <a:fontRef idx="minor">
-            <a:schemeClr val="lt1"/>
-          </a:fontRef>
-        </p:style>
-        <p:txBody>
-          <a:bodyPr rtlCol="0" anchor="ctr"/>
-          <a:lstStyle/>
-          <a:p>
-            <a:pPr algn="ctr"/>
-          </a:p>
-        </p:txBody>
-      </p:sp>
-      <p:sp>
-        <p:nvSpPr>
-          <p:cNvPr id="7" name="TextBox 6"/>
-          <p:cNvSpPr txBox="1"/>
-          <p:nvPr/>
-        </p:nvSpPr>
-        <p:spPr>
-          <a:xfrm>
-            <a:off x="795528" y="3035808"/>
-            <a:ext cx="5029200" cy="2706624"/>
-          </a:xfrm>
-          <a:prstGeom prst="rect">
-            <a:avLst/>
-          </a:prstGeom>
-          <a:noFill/>
-        </p:spPr>
-        <p:txBody>
-          <a:bodyPr wrap="square" lIns="45720" rIns="45720" tIns="27432" bIns="27432" anchor="t">
-            <a:spAutoFit/>
-          </a:bodyPr>
-          <a:lstStyle/>
-          <a:p>
-            <a:pPr algn="l">
-              <a:spcAft>
-                <a:spcPts val="600"/>
-              </a:spcAft>
-            </a:pPr>
-            <a:r>
-              <a:rPr sz="2000" b="1" i="0">
-                <a:solidFill>
-                  <a:srgbClr val="2B4EB4"/>
-                </a:solidFill>
-                <a:latin typeface="Calibri"/>
-              </a:rPr>
-              <a:t>Lo que sí dice</a:t>
-            </a:r>
-          </a:p>
-          <a:p>
-            <a:pPr algn="l">
-              <a:spcAft>
-                <a:spcPts val="400"/>
-              </a:spcAft>
-            </a:pPr>
-            <a:r>
-              <a:rPr sz="1800" b="0" i="0">
-                <a:solidFill>
-                  <a:srgbClr val="011754"/>
-                </a:solidFill>
-                <a:latin typeface="Calibri"/>
-              </a:rPr>
-              <a:t>Que se usó IA.</a:t>
-            </a:r>
-          </a:p>
-          <a:p>
-            <a:pPr algn="l">
-              <a:spcAft>
-                <a:spcPts val="400"/>
-              </a:spcAft>
-            </a:pPr>
-            <a:r>
-              <a:rPr sz="1800" b="0" i="0">
-                <a:solidFill>
-                  <a:srgbClr val="011754"/>
-                </a:solidFill>
-                <a:latin typeface="Calibri"/>
-              </a:rPr>
-              <a:t>Que la tarea fue traducir y mejorar la redacción.</a:t>
-            </a:r>
-          </a:p>
-        </p:txBody>
-      </p:sp>
-      <p:sp>
-        <p:nvSpPr>
-          <p:cNvPr id="8" name="Rounded Rectangle 7"/>
-          <p:cNvSpPr/>
-          <p:nvPr/>
-        </p:nvSpPr>
-        <p:spPr>
-          <a:xfrm>
-            <a:off x="6190488" y="2926080"/>
-            <a:ext cx="5394960" cy="2926080"/>
-          </a:xfrm>
-          <a:prstGeom prst="roundRect">
-            <a:avLst>
-              <a:gd name="adj" fmla="val 6000"/>
-            </a:avLst>
-          </a:prstGeom>
-          <a:solidFill>
-            <a:srgbClr val="F6ECC8"/>
-          </a:solidFill>
-          <a:ln>
-            <a:noFill/>
-          </a:ln>
-          <a:effectLst/>
-        </p:spPr>
-        <p:style>
-          <a:lnRef idx="1">
-            <a:schemeClr val="accent1"/>
-          </a:lnRef>
-          <a:fillRef idx="3">
-            <a:schemeClr val="accent1"/>
-          </a:fillRef>
-          <a:effectRef idx="2">
-            <a:schemeClr val="accent1"/>
-          </a:effectRef>
-          <a:fontRef idx="minor">
-            <a:schemeClr val="lt1"/>
-          </a:fontRef>
-        </p:style>
-        <p:txBody>
-          <a:bodyPr rtlCol="0" anchor="ctr"/>
-          <a:lstStyle/>
-          <a:p>
-            <a:pPr algn="ctr"/>
-          </a:p>
-        </p:txBody>
-      </p:sp>
-      <p:sp>
-        <p:nvSpPr>
-          <p:cNvPr id="9" name="TextBox 8"/>
-          <p:cNvSpPr txBox="1"/>
-          <p:nvPr/>
-        </p:nvSpPr>
-        <p:spPr>
-          <a:xfrm>
-            <a:off x="6373368" y="3035808"/>
-            <a:ext cx="5029200" cy="2706624"/>
-          </a:xfrm>
-          <a:prstGeom prst="rect">
-            <a:avLst/>
-          </a:prstGeom>
-          <a:noFill/>
-        </p:spPr>
-        <p:txBody>
-          <a:bodyPr wrap="square" lIns="45720" rIns="45720" tIns="27432" bIns="27432" anchor="t">
-            <a:spAutoFit/>
-          </a:bodyPr>
-          <a:lstStyle/>
-          <a:p>
-            <a:pPr algn="l">
-              <a:spcAft>
-                <a:spcPts val="600"/>
-              </a:spcAft>
-            </a:pPr>
-            <a:r>
-              <a:rPr sz="2000" b="1" i="0">
-                <a:solidFill>
-                  <a:srgbClr val="8A5A00"/>
-                </a:solidFill>
-                <a:latin typeface="Calibri"/>
-              </a:rPr>
-              <a:t>¿Es suficiente? Falta indicar</a:t>
-            </a:r>
-          </a:p>
-          <a:p>
-            <a:pPr algn="l">
-              <a:spcAft>
-                <a:spcPts val="400"/>
-              </a:spcAft>
-            </a:pPr>
-            <a:r>
-              <a:rPr sz="1800" b="0" i="0">
-                <a:solidFill>
-                  <a:srgbClr val="011754"/>
-                </a:solidFill>
-                <a:latin typeface="Calibri"/>
-              </a:rPr>
-              <a:t>• La herramienta y su versión.</a:t>
-            </a:r>
-          </a:p>
-          <a:p>
-            <a:pPr algn="l">
-              <a:spcAft>
-                <a:spcPts val="400"/>
-              </a:spcAft>
-            </a:pPr>
-            <a:r>
-              <a:rPr sz="1800" b="0" i="0">
-                <a:solidFill>
-                  <a:srgbClr val="011754"/>
-                </a:solidFill>
-                <a:latin typeface="Calibri"/>
-              </a:rPr>
-              <a:t>• La tarea exacta y las partes del texto.</a:t>
-            </a:r>
-          </a:p>
-          <a:p>
-            <a:pPr algn="l">
-              <a:spcAft>
-                <a:spcPts val="400"/>
-              </a:spcAft>
-            </a:pPr>
-            <a:r>
-              <a:rPr sz="1800" b="0" i="0">
-                <a:solidFill>
-                  <a:srgbClr val="011754"/>
-                </a:solidFill>
-                <a:latin typeface="Calibri"/>
-              </a:rPr>
-              <a:t>• Qué verificaron los autores.</a:t>
-            </a:r>
-          </a:p>
-        </p:txBody>
-      </p:sp>
-    </p:spTree>
-  </p:cSld>
-  <p:clrMapOvr>
-    <a:masterClrMapping/>
-  </p:clrMapOvr>
-</p:sld>
-</file>
-
 <file path=ppt/slides/slide25.xml><?xml version="1.0" encoding="utf-8"?>
 <p:sld xmlns:a="http://schemas.openxmlformats.org/drawingml/2006/main" xmlns:r="http://schemas.openxmlformats.org/officeDocument/2006/relationships" xmlns:p="http://schemas.openxmlformats.org/presentationml/2006/main">
   <p:cSld>
@@ -15249,482 +11315,6 @@
                 <a:latin typeface="Calibri"/>
               </a:rPr>
               <a:t>La declaración protege la autoría; ocultar el uso de IA no.</a:t>
-            </a:r>
-          </a:p>
-        </p:txBody>
-      </p:sp>
-    </p:spTree>
-  </p:cSld>
-  <p:clrMapOvr>
-    <a:masterClrMapping/>
-  </p:clrMapOvr>
-</p:sld>
-</file>
-
-<file path=ppt/slides/slide27.xml><?xml version="1.0" encoding="utf-8"?>
-<p:sld xmlns:a="http://schemas.openxmlformats.org/drawingml/2006/main" xmlns:r="http://schemas.openxmlformats.org/officeDocument/2006/relationships" xmlns:p="http://schemas.openxmlformats.org/presentationml/2006/main">
-  <p:cSld>
-    <p:spTree>
-      <p:nvGrpSpPr>
-        <p:cNvPr id="1" name=""/>
-        <p:cNvGrpSpPr/>
-        <p:nvPr/>
-      </p:nvGrpSpPr>
-      <p:grpSpPr>
-        <a:xfrm>
-          <a:off x="0" y="0"/>
-          <a:ext cx="0" cy="0"/>
-          <a:chOff x="0" y="0"/>
-          <a:chExt cx="0" cy="0"/>
-        </a:xfrm>
-      </p:grpSpPr>
-      <p:pic>
-        <p:nvPicPr>
-          <p:cNvPr id="2" name="Picture 1" descr="bg_content.png"/>
-          <p:cNvPicPr>
-            <a:picLocks noChangeAspect="1"/>
-          </p:cNvPicPr>
-          <p:nvPr/>
-        </p:nvPicPr>
-        <p:blipFill>
-          <a:blip r:embed="rId2"/>
-          <a:stretch>
-            <a:fillRect/>
-          </a:stretch>
-        </p:blipFill>
-        <p:spPr>
-          <a:xfrm>
-            <a:off x="0" y="0"/>
-            <a:ext cx="12191695" cy="6858000"/>
-          </a:xfrm>
-          <a:prstGeom prst="rect">
-            <a:avLst/>
-          </a:prstGeom>
-        </p:spPr>
-      </p:pic>
-      <p:sp>
-        <p:nvSpPr>
-          <p:cNvPr id="3" name="TextBox 2"/>
-          <p:cNvSpPr txBox="1"/>
-          <p:nvPr/>
-        </p:nvSpPr>
-        <p:spPr>
-          <a:xfrm>
-            <a:off x="612648" y="777240"/>
-            <a:ext cx="10332720" cy="640080"/>
-          </a:xfrm>
-          <a:prstGeom prst="rect">
-            <a:avLst/>
-          </a:prstGeom>
-          <a:noFill/>
-        </p:spPr>
-        <p:txBody>
-          <a:bodyPr wrap="square" lIns="45720" rIns="45720" tIns="27432" bIns="27432" anchor="ctr">
-            <a:spAutoFit/>
-          </a:bodyPr>
-          <a:lstStyle/>
-          <a:p>
-            <a:pPr algn="l">
-              <a:spcAft>
-                <a:spcPts val="400"/>
-              </a:spcAft>
-            </a:pPr>
-            <a:r>
-              <a:rPr sz="2800" b="1" i="0">
-                <a:solidFill>
-                  <a:srgbClr val="1836B2"/>
-                </a:solidFill>
-                <a:latin typeface="Calibri"/>
-              </a:rPr>
-              <a:t>Límite de la declaración</a:t>
-            </a:r>
-          </a:p>
-        </p:txBody>
-      </p:sp>
-      <p:sp>
-        <p:nvSpPr>
-          <p:cNvPr id="4" name="Rounded Rectangle 3"/>
-          <p:cNvSpPr/>
-          <p:nvPr/>
-        </p:nvSpPr>
-        <p:spPr>
-          <a:xfrm>
-            <a:off x="612648" y="1645920"/>
-            <a:ext cx="3505200" cy="3017520"/>
-          </a:xfrm>
-          <a:prstGeom prst="roundRect">
-            <a:avLst>
-              <a:gd name="adj" fmla="val 6000"/>
-            </a:avLst>
-          </a:prstGeom>
-          <a:solidFill>
-            <a:srgbClr val="D9DEEF"/>
-          </a:solidFill>
-          <a:ln>
-            <a:noFill/>
-          </a:ln>
-          <a:effectLst/>
-        </p:spPr>
-        <p:style>
-          <a:lnRef idx="1">
-            <a:schemeClr val="accent1"/>
-          </a:lnRef>
-          <a:fillRef idx="3">
-            <a:schemeClr val="accent1"/>
-          </a:fillRef>
-          <a:effectRef idx="2">
-            <a:schemeClr val="accent1"/>
-          </a:effectRef>
-          <a:fontRef idx="minor">
-            <a:schemeClr val="lt1"/>
-          </a:fontRef>
-        </p:style>
-        <p:txBody>
-          <a:bodyPr rtlCol="0" anchor="ctr"/>
-          <a:lstStyle/>
-          <a:p>
-            <a:pPr algn="ctr"/>
-          </a:p>
-        </p:txBody>
-      </p:sp>
-      <p:sp>
-        <p:nvSpPr>
-          <p:cNvPr id="5" name="TextBox 4"/>
-          <p:cNvSpPr txBox="1"/>
-          <p:nvPr/>
-        </p:nvSpPr>
-        <p:spPr>
-          <a:xfrm>
-            <a:off x="795528" y="1755648"/>
-            <a:ext cx="3139440" cy="2798063"/>
-          </a:xfrm>
-          <a:prstGeom prst="rect">
-            <a:avLst/>
-          </a:prstGeom>
-          <a:noFill/>
-        </p:spPr>
-        <p:txBody>
-          <a:bodyPr wrap="square" lIns="45720" rIns="45720" tIns="27432" bIns="27432" anchor="t">
-            <a:spAutoFit/>
-          </a:bodyPr>
-          <a:lstStyle/>
-          <a:p>
-            <a:pPr algn="l">
-              <a:spcAft>
-                <a:spcPts val="600"/>
-              </a:spcAft>
-            </a:pPr>
-            <a:r>
-              <a:rPr sz="2000" b="1" i="0">
-                <a:solidFill>
-                  <a:srgbClr val="2B4EB4"/>
-                </a:solidFill>
-                <a:latin typeface="Calibri"/>
-              </a:rPr>
-              <a:t>Lo que declara</a:t>
-            </a:r>
-          </a:p>
-          <a:p>
-            <a:pPr algn="l">
-              <a:spcAft>
-                <a:spcPts val="400"/>
-              </a:spcAft>
-            </a:pPr>
-            <a:r>
-              <a:rPr sz="1800" b="0" i="0">
-                <a:solidFill>
-                  <a:srgbClr val="011754"/>
-                </a:solidFill>
-                <a:latin typeface="Calibri"/>
-              </a:rPr>
-              <a:t>Qué herramienta se usó y en qué tarea, con transparencia ante la revista o el comité.</a:t>
-            </a:r>
-          </a:p>
-        </p:txBody>
-      </p:sp>
-      <p:sp>
-        <p:nvSpPr>
-          <p:cNvPr id="6" name="Rounded Rectangle 5"/>
-          <p:cNvSpPr/>
-          <p:nvPr/>
-        </p:nvSpPr>
-        <p:spPr>
-          <a:xfrm>
-            <a:off x="4346448" y="1645920"/>
-            <a:ext cx="3505200" cy="3017520"/>
-          </a:xfrm>
-          <a:prstGeom prst="roundRect">
-            <a:avLst>
-              <a:gd name="adj" fmla="val 6000"/>
-            </a:avLst>
-          </a:prstGeom>
-          <a:solidFill>
-            <a:srgbClr val="D9DEEF"/>
-          </a:solidFill>
-          <a:ln>
-            <a:noFill/>
-          </a:ln>
-          <a:effectLst/>
-        </p:spPr>
-        <p:style>
-          <a:lnRef idx="1">
-            <a:schemeClr val="accent1"/>
-          </a:lnRef>
-          <a:fillRef idx="3">
-            <a:schemeClr val="accent1"/>
-          </a:fillRef>
-          <a:effectRef idx="2">
-            <a:schemeClr val="accent1"/>
-          </a:effectRef>
-          <a:fontRef idx="minor">
-            <a:schemeClr val="lt1"/>
-          </a:fontRef>
-        </p:style>
-        <p:txBody>
-          <a:bodyPr rtlCol="0" anchor="ctr"/>
-          <a:lstStyle/>
-          <a:p>
-            <a:pPr algn="ctr"/>
-          </a:p>
-        </p:txBody>
-      </p:sp>
-      <p:sp>
-        <p:nvSpPr>
-          <p:cNvPr id="7" name="TextBox 6"/>
-          <p:cNvSpPr txBox="1"/>
-          <p:nvPr/>
-        </p:nvSpPr>
-        <p:spPr>
-          <a:xfrm>
-            <a:off x="4529328" y="1755648"/>
-            <a:ext cx="3139440" cy="2798063"/>
-          </a:xfrm>
-          <a:prstGeom prst="rect">
-            <a:avLst/>
-          </a:prstGeom>
-          <a:noFill/>
-        </p:spPr>
-        <p:txBody>
-          <a:bodyPr wrap="square" lIns="45720" rIns="45720" tIns="27432" bIns="27432" anchor="t">
-            <a:spAutoFit/>
-          </a:bodyPr>
-          <a:lstStyle/>
-          <a:p>
-            <a:pPr algn="l">
-              <a:spcAft>
-                <a:spcPts val="600"/>
-              </a:spcAft>
-            </a:pPr>
-            <a:r>
-              <a:rPr sz="2000" b="1" i="0">
-                <a:solidFill>
-                  <a:srgbClr val="2B4EB4"/>
-                </a:solidFill>
-                <a:latin typeface="Calibri"/>
-              </a:rPr>
-              <a:t>Lo que no reemplaza</a:t>
-            </a:r>
-          </a:p>
-          <a:p>
-            <a:pPr algn="l">
-              <a:spcAft>
-                <a:spcPts val="400"/>
-              </a:spcAft>
-            </a:pPr>
-            <a:r>
-              <a:rPr sz="1800" b="0" i="0">
-                <a:solidFill>
-                  <a:srgbClr val="011754"/>
-                </a:solidFill>
-                <a:latin typeface="Calibri"/>
-              </a:rPr>
-              <a:t>La revisión, la verificación y la decisión del investigador sobre el contenido.</a:t>
-            </a:r>
-          </a:p>
-        </p:txBody>
-      </p:sp>
-      <p:sp>
-        <p:nvSpPr>
-          <p:cNvPr id="8" name="Rounded Rectangle 7"/>
-          <p:cNvSpPr/>
-          <p:nvPr/>
-        </p:nvSpPr>
-        <p:spPr>
-          <a:xfrm>
-            <a:off x="8080248" y="1645920"/>
-            <a:ext cx="3505200" cy="3017520"/>
-          </a:xfrm>
-          <a:prstGeom prst="roundRect">
-            <a:avLst>
-              <a:gd name="adj" fmla="val 6000"/>
-            </a:avLst>
-          </a:prstGeom>
-          <a:solidFill>
-            <a:srgbClr val="D9DEEF"/>
-          </a:solidFill>
-          <a:ln>
-            <a:noFill/>
-          </a:ln>
-          <a:effectLst/>
-        </p:spPr>
-        <p:style>
-          <a:lnRef idx="1">
-            <a:schemeClr val="accent1"/>
-          </a:lnRef>
-          <a:fillRef idx="3">
-            <a:schemeClr val="accent1"/>
-          </a:fillRef>
-          <a:effectRef idx="2">
-            <a:schemeClr val="accent1"/>
-          </a:effectRef>
-          <a:fontRef idx="minor">
-            <a:schemeClr val="lt1"/>
-          </a:fontRef>
-        </p:style>
-        <p:txBody>
-          <a:bodyPr rtlCol="0" anchor="ctr"/>
-          <a:lstStyle/>
-          <a:p>
-            <a:pPr algn="ctr"/>
-          </a:p>
-        </p:txBody>
-      </p:sp>
-      <p:sp>
-        <p:nvSpPr>
-          <p:cNvPr id="9" name="TextBox 8"/>
-          <p:cNvSpPr txBox="1"/>
-          <p:nvPr/>
-        </p:nvSpPr>
-        <p:spPr>
-          <a:xfrm>
-            <a:off x="8263128" y="1755648"/>
-            <a:ext cx="3139440" cy="2798063"/>
-          </a:xfrm>
-          <a:prstGeom prst="rect">
-            <a:avLst/>
-          </a:prstGeom>
-          <a:noFill/>
-        </p:spPr>
-        <p:txBody>
-          <a:bodyPr wrap="square" lIns="45720" rIns="45720" tIns="27432" bIns="27432" anchor="t">
-            <a:spAutoFit/>
-          </a:bodyPr>
-          <a:lstStyle/>
-          <a:p>
-            <a:pPr algn="l">
-              <a:spcAft>
-                <a:spcPts val="600"/>
-              </a:spcAft>
-            </a:pPr>
-            <a:r>
-              <a:rPr sz="2000" b="1" i="0">
-                <a:solidFill>
-                  <a:srgbClr val="2B4EB4"/>
-                </a:solidFill>
-                <a:latin typeface="Calibri"/>
-              </a:rPr>
-              <a:t>Investigador</a:t>
-            </a:r>
-          </a:p>
-          <a:p>
-            <a:pPr algn="l">
-              <a:spcAft>
-                <a:spcPts val="400"/>
-              </a:spcAft>
-            </a:pPr>
-            <a:r>
-              <a:rPr sz="1800" b="0" i="0">
-                <a:solidFill>
-                  <a:srgbClr val="011754"/>
-                </a:solidFill>
-                <a:latin typeface="Calibri"/>
-              </a:rPr>
-              <a:t>Evalúa, verifica, interpreta, decide y firma. La responsabilidad no se transfiere.</a:t>
-            </a:r>
-          </a:p>
-        </p:txBody>
-      </p:sp>
-      <p:sp>
-        <p:nvSpPr>
-          <p:cNvPr id="10" name="Rounded Rectangle 9"/>
-          <p:cNvSpPr/>
-          <p:nvPr/>
-        </p:nvSpPr>
-        <p:spPr>
-          <a:xfrm>
-            <a:off x="612648" y="4937760"/>
-            <a:ext cx="10972800" cy="914400"/>
-          </a:xfrm>
-          <a:prstGeom prst="roundRect">
-            <a:avLst>
-              <a:gd name="adj" fmla="val 6000"/>
-            </a:avLst>
-          </a:prstGeom>
-          <a:solidFill>
-            <a:srgbClr val="011754"/>
-          </a:solidFill>
-          <a:ln>
-            <a:noFill/>
-          </a:ln>
-          <a:effectLst/>
-        </p:spPr>
-        <p:style>
-          <a:lnRef idx="1">
-            <a:schemeClr val="accent1"/>
-          </a:lnRef>
-          <a:fillRef idx="3">
-            <a:schemeClr val="accent1"/>
-          </a:fillRef>
-          <a:effectRef idx="2">
-            <a:schemeClr val="accent1"/>
-          </a:effectRef>
-          <a:fontRef idx="minor">
-            <a:schemeClr val="lt1"/>
-          </a:fontRef>
-        </p:style>
-        <p:txBody>
-          <a:bodyPr rtlCol="0" anchor="ctr"/>
-          <a:lstStyle/>
-          <a:p>
-            <a:pPr algn="ctr"/>
-          </a:p>
-        </p:txBody>
-      </p:sp>
-      <p:sp>
-        <p:nvSpPr>
-          <p:cNvPr id="11" name="TextBox 10"/>
-          <p:cNvSpPr txBox="1"/>
-          <p:nvPr/>
-        </p:nvSpPr>
-        <p:spPr>
-          <a:xfrm>
-            <a:off x="841248" y="4937760"/>
-            <a:ext cx="10515600" cy="914400"/>
-          </a:xfrm>
-          <a:prstGeom prst="rect">
-            <a:avLst/>
-          </a:prstGeom>
-          <a:noFill/>
-        </p:spPr>
-        <p:txBody>
-          <a:bodyPr wrap="square" lIns="45720" rIns="45720" tIns="27432" bIns="27432" anchor="ctr">
-            <a:spAutoFit/>
-          </a:bodyPr>
-          <a:lstStyle/>
-          <a:p>
-            <a:pPr algn="l">
-              <a:spcAft>
-                <a:spcPts val="400"/>
-              </a:spcAft>
-            </a:pPr>
-            <a:r>
-              <a:rPr sz="1800" b="1" i="0">
-                <a:solidFill>
-                  <a:srgbClr val="FFFFFF"/>
-                </a:solidFill>
-                <a:latin typeface="Calibri"/>
-              </a:rPr>
-              <a:t>Declarar el uso de IA no disminuye la autoría; ocultarlo sí la compromete.</a:t>
             </a:r>
           </a:p>
         </p:txBody>
@@ -16247,8 +11837,8 @@
         </p:nvSpPr>
         <p:spPr>
           <a:xfrm>
-            <a:off x="904150" y="4997700"/>
-            <a:ext cx="6710400" cy="1046440"/>
+            <a:off x="904150" y="4800600"/>
+            <a:ext cx="6710400" cy="1600200"/>
           </a:xfrm>
           <a:prstGeom prst="rect">
             <a:avLst/>
@@ -19675,7 +15265,7 @@
                 </a:solidFill>
                 <a:latin typeface="Calibri"/>
               </a:rPr>
-              <a:t>1. El investigador como director de la IA</a:t>
+              <a:t>1. El investigador como responsable</a:t>
             </a:r>
           </a:p>
         </p:txBody>
@@ -19923,7 +15513,7 @@
                 </a:solidFill>
                 <a:latin typeface="Calibri"/>
               </a:rPr>
-              <a:t>3. Sesgos, errores y alucinaciones</a:t>
+              <a:t>3. Alucinaciones, sesgos y errores</a:t>
             </a:r>
           </a:p>
         </p:txBody>
@@ -19962,7 +15552,7 @@
                 </a:solidFill>
                 <a:latin typeface="Calibri"/>
               </a:rPr>
-              <a:t>Cómo fallan las respuestas y cómo detectarlo.</a:t>
+              <a:t>Cómo fallan las respuestas y cómo reconocerlo.</a:t>
             </a:r>
           </a:p>
         </p:txBody>
@@ -20047,7 +15637,7 @@
                 </a:solidFill>
                 <a:latin typeface="Calibri"/>
               </a:rPr>
-              <a:t>4. Ética y límites en la academia</a:t>
+              <a:t>4. Criterios y ciclo de auditoría</a:t>
             </a:r>
           </a:p>
         </p:txBody>
@@ -20086,7 +15676,7 @@
                 </a:solidFill>
                 <a:latin typeface="Calibri"/>
               </a:rPr>
-              <a:t>Qué datos no se comparten con una IA gratuita.</a:t>
+              <a:t>Cinco criterios para decidir si una respuesta se acepta.</a:t>
             </a:r>
           </a:p>
         </p:txBody>
@@ -20171,7 +15761,7 @@
                 </a:solidFill>
                 <a:latin typeface="Calibri"/>
               </a:rPr>
-              <a:t>5. Autoría y declaración de uso</a:t>
+              <a:t>5. Datos sensibles y declaración de uso</a:t>
             </a:r>
           </a:p>
         </p:txBody>
@@ -20210,7 +15800,7 @@
                 </a:solidFill>
                 <a:latin typeface="Calibri"/>
               </a:rPr>
-              <a:t>Cómo declarar el uso de IA con herramienta, tarea y verificación.</a:t>
+              <a:t>Qué no compartir con una IA gratuita y cómo declarar su uso.</a:t>
             </a:r>
           </a:p>
         </p:txBody>
@@ -20334,134 +15924,7 @@
                 </a:solidFill>
                 <a:latin typeface="Calibri"/>
               </a:rPr>
-              <a:t>Auditoría guiada de una respuesta y caso autónomo.</a:t>
-            </a:r>
-          </a:p>
-        </p:txBody>
-      </p:sp>
-    </p:spTree>
-  </p:cSld>
-  <p:clrMapOvr>
-    <a:masterClrMapping/>
-  </p:clrMapOvr>
-</p:sld>
-</file>
-
-<file path=ppt/slides/slide5.xml><?xml version="1.0" encoding="utf-8"?>
-<p:sld xmlns:a="http://schemas.openxmlformats.org/drawingml/2006/main" xmlns:r="http://schemas.openxmlformats.org/officeDocument/2006/relationships" xmlns:p="http://schemas.openxmlformats.org/presentationml/2006/main">
-  <p:cSld>
-    <p:spTree>
-      <p:nvGrpSpPr>
-        <p:cNvPr id="1" name=""/>
-        <p:cNvGrpSpPr/>
-        <p:nvPr/>
-      </p:nvGrpSpPr>
-      <p:grpSpPr>
-        <a:xfrm>
-          <a:off x="0" y="0"/>
-          <a:ext cx="0" cy="0"/>
-          <a:chOff x="0" y="0"/>
-          <a:chExt cx="0" cy="0"/>
-        </a:xfrm>
-      </p:grpSpPr>
-      <p:pic>
-        <p:nvPicPr>
-          <p:cNvPr id="2" name="Picture 1" descr="divider_bg.png"/>
-          <p:cNvPicPr>
-            <a:picLocks noChangeAspect="1"/>
-          </p:cNvPicPr>
-          <p:nvPr/>
-        </p:nvPicPr>
-        <p:blipFill>
-          <a:blip r:embed="rId2"/>
-          <a:stretch>
-            <a:fillRect/>
-          </a:stretch>
-        </p:blipFill>
-        <p:spPr>
-          <a:xfrm>
-            <a:off x="0" y="0"/>
-            <a:ext cx="12191695" cy="6858000"/>
-          </a:xfrm>
-          <a:prstGeom prst="rect">
-            <a:avLst/>
-          </a:prstGeom>
-        </p:spPr>
-      </p:pic>
-      <p:sp>
-        <p:nvSpPr>
-          <p:cNvPr id="3" name="TextBox 2"/>
-          <p:cNvSpPr txBox="1"/>
-          <p:nvPr/>
-        </p:nvSpPr>
-        <p:spPr>
-          <a:xfrm>
-            <a:off x="982912" y="2676125"/>
-            <a:ext cx="437840" cy="1999910"/>
-          </a:xfrm>
-          <a:prstGeom prst="rect">
-            <a:avLst/>
-          </a:prstGeom>
-          <a:noFill/>
-        </p:spPr>
-        <p:txBody>
-          <a:bodyPr wrap="square">
-            <a:spAutoFit/>
-          </a:bodyPr>
-          <a:lstStyle/>
-          <a:p>
-            <a:pPr algn="l">
-              <a:lnSpc>
-                <a:spcPct val="115000"/>
-              </a:lnSpc>
-            </a:pPr>
-            <a:r>
-              <a:rPr sz="7200" b="1" i="0">
-                <a:solidFill>
-                  <a:srgbClr val="FFFFFF"/>
-                </a:solidFill>
-                <a:latin typeface="Calibri"/>
-              </a:rPr>
-              <a:t>1</a:t>
-            </a:r>
-          </a:p>
-        </p:txBody>
-      </p:sp>
-      <p:sp>
-        <p:nvSpPr>
-          <p:cNvPr id="4" name="TextBox 3"/>
-          <p:cNvSpPr txBox="1"/>
-          <p:nvPr/>
-        </p:nvSpPr>
-        <p:spPr>
-          <a:xfrm>
-            <a:off x="982912" y="4737409"/>
-            <a:ext cx="10346277" cy="702221"/>
-          </a:xfrm>
-          <a:prstGeom prst="rect">
-            <a:avLst/>
-          </a:prstGeom>
-          <a:noFill/>
-        </p:spPr>
-        <p:txBody>
-          <a:bodyPr wrap="square">
-            <a:spAutoFit/>
-          </a:bodyPr>
-          <a:lstStyle/>
-          <a:p>
-            <a:pPr algn="l">
-              <a:lnSpc>
-                <a:spcPct val="115000"/>
-              </a:lnSpc>
-            </a:pPr>
-            <a:r>
-              <a:rPr sz="2600" b="0" i="0">
-                <a:solidFill>
-                  <a:srgbClr val="FFFFFF"/>
-                </a:solidFill>
-                <a:latin typeface="Calibri"/>
-              </a:rPr>
-              <a:t>EL INVESTIGADOR COMO DIRECTOR DE LA IA</a:t>
+              <a:t>Auditoría guiada de una respuesta de IA y declaración de uso.</a:t>
             </a:r>
           </a:p>
         </p:txBody>
@@ -20938,1160 +16401,6 @@
                 <a:latin typeface="Calibri"/>
               </a:rPr>
               <a:t>La IA apoya el proceso; no lo reemplaza. Si algo falla en la tesis, responde el investigador, no el chatbot.</a:t>
-            </a:r>
-          </a:p>
-        </p:txBody>
-      </p:sp>
-    </p:spTree>
-  </p:cSld>
-  <p:clrMapOvr>
-    <a:masterClrMapping/>
-  </p:clrMapOvr>
-</p:sld>
-</file>
-
-<file path=ppt/slides/slide7.xml><?xml version="1.0" encoding="utf-8"?>
-<p:sld xmlns:a="http://schemas.openxmlformats.org/drawingml/2006/main" xmlns:r="http://schemas.openxmlformats.org/officeDocument/2006/relationships" xmlns:p="http://schemas.openxmlformats.org/presentationml/2006/main">
-  <p:cSld>
-    <p:spTree>
-      <p:nvGrpSpPr>
-        <p:cNvPr id="1" name=""/>
-        <p:cNvGrpSpPr/>
-        <p:nvPr/>
-      </p:nvGrpSpPr>
-      <p:grpSpPr>
-        <a:xfrm>
-          <a:off x="0" y="0"/>
-          <a:ext cx="0" cy="0"/>
-          <a:chOff x="0" y="0"/>
-          <a:chExt cx="0" cy="0"/>
-        </a:xfrm>
-      </p:grpSpPr>
-      <p:pic>
-        <p:nvPicPr>
-          <p:cNvPr id="2" name="Picture 1" descr="bg_content.png"/>
-          <p:cNvPicPr>
-            <a:picLocks noChangeAspect="1"/>
-          </p:cNvPicPr>
-          <p:nvPr/>
-        </p:nvPicPr>
-        <p:blipFill>
-          <a:blip r:embed="rId2"/>
-          <a:stretch>
-            <a:fillRect/>
-          </a:stretch>
-        </p:blipFill>
-        <p:spPr>
-          <a:xfrm>
-            <a:off x="0" y="0"/>
-            <a:ext cx="12191695" cy="6858000"/>
-          </a:xfrm>
-          <a:prstGeom prst="rect">
-            <a:avLst/>
-          </a:prstGeom>
-        </p:spPr>
-      </p:pic>
-      <p:sp>
-        <p:nvSpPr>
-          <p:cNvPr id="3" name="TextBox 2"/>
-          <p:cNvSpPr txBox="1"/>
-          <p:nvPr/>
-        </p:nvSpPr>
-        <p:spPr>
-          <a:xfrm>
-            <a:off x="612648" y="777240"/>
-            <a:ext cx="10332720" cy="640080"/>
-          </a:xfrm>
-          <a:prstGeom prst="rect">
-            <a:avLst/>
-          </a:prstGeom>
-          <a:noFill/>
-        </p:spPr>
-        <p:txBody>
-          <a:bodyPr wrap="square" lIns="45720" rIns="45720" tIns="27432" bIns="27432" anchor="ctr">
-            <a:spAutoFit/>
-          </a:bodyPr>
-          <a:lstStyle/>
-          <a:p>
-            <a:pPr algn="l">
-              <a:spcAft>
-                <a:spcPts val="400"/>
-              </a:spcAft>
-            </a:pPr>
-            <a:r>
-              <a:rPr sz="2800" b="1" i="0">
-                <a:solidFill>
-                  <a:srgbClr val="1836B2"/>
-                </a:solidFill>
-                <a:latin typeface="Calibri"/>
-              </a:rPr>
-              <a:t>¿Qué decisiones sigue tomando el investigador?</a:t>
-            </a:r>
-          </a:p>
-        </p:txBody>
-      </p:sp>
-      <p:sp>
-        <p:nvSpPr>
-          <p:cNvPr id="4" name="Rounded Rectangle 3"/>
-          <p:cNvSpPr/>
-          <p:nvPr/>
-        </p:nvSpPr>
-        <p:spPr>
-          <a:xfrm>
-            <a:off x="612648" y="1600200"/>
-            <a:ext cx="5394960" cy="1828800"/>
-          </a:xfrm>
-          <a:prstGeom prst="roundRect">
-            <a:avLst>
-              <a:gd name="adj" fmla="val 6000"/>
-            </a:avLst>
-          </a:prstGeom>
-          <a:solidFill>
-            <a:srgbClr val="D9DEEF"/>
-          </a:solidFill>
-          <a:ln>
-            <a:noFill/>
-          </a:ln>
-          <a:effectLst/>
-        </p:spPr>
-        <p:style>
-          <a:lnRef idx="1">
-            <a:schemeClr val="accent1"/>
-          </a:lnRef>
-          <a:fillRef idx="3">
-            <a:schemeClr val="accent1"/>
-          </a:fillRef>
-          <a:effectRef idx="2">
-            <a:schemeClr val="accent1"/>
-          </a:effectRef>
-          <a:fontRef idx="minor">
-            <a:schemeClr val="lt1"/>
-          </a:fontRef>
-        </p:style>
-        <p:txBody>
-          <a:bodyPr rtlCol="0" anchor="ctr"/>
-          <a:lstStyle/>
-          <a:p>
-            <a:pPr algn="ctr"/>
-          </a:p>
-        </p:txBody>
-      </p:sp>
-      <p:sp>
-        <p:nvSpPr>
-          <p:cNvPr id="5" name="TextBox 4"/>
-          <p:cNvSpPr txBox="1"/>
-          <p:nvPr/>
-        </p:nvSpPr>
-        <p:spPr>
-          <a:xfrm>
-            <a:off x="795528" y="1709928"/>
-            <a:ext cx="5029200" cy="1609344"/>
-          </a:xfrm>
-          <a:prstGeom prst="rect">
-            <a:avLst/>
-          </a:prstGeom>
-          <a:noFill/>
-        </p:spPr>
-        <p:txBody>
-          <a:bodyPr wrap="square" lIns="45720" rIns="45720" tIns="27432" bIns="27432" anchor="t">
-            <a:spAutoFit/>
-          </a:bodyPr>
-          <a:lstStyle/>
-          <a:p>
-            <a:pPr algn="l">
-              <a:spcAft>
-                <a:spcPts val="600"/>
-              </a:spcAft>
-            </a:pPr>
-            <a:r>
-              <a:rPr sz="2000" b="1" i="0">
-                <a:solidFill>
-                  <a:srgbClr val="2B4EB4"/>
-                </a:solidFill>
-                <a:latin typeface="Calibri"/>
-              </a:rPr>
-              <a:t>Qué preguntar</a:t>
-            </a:r>
-          </a:p>
-          <a:p>
-            <a:pPr algn="l">
-              <a:spcAft>
-                <a:spcPts val="400"/>
-              </a:spcAft>
-            </a:pPr>
-            <a:r>
-              <a:rPr sz="1800" b="0" i="0">
-                <a:solidFill>
-                  <a:srgbClr val="011754"/>
-                </a:solidFill>
-                <a:latin typeface="Calibri"/>
-              </a:rPr>
-              <a:t>Formular la pregunta de investigación y delimitar el problema. La IA responde lo que se le pide; no sabe qué vale la pena preguntar.</a:t>
-            </a:r>
-          </a:p>
-        </p:txBody>
-      </p:sp>
-      <p:sp>
-        <p:nvSpPr>
-          <p:cNvPr id="6" name="Rounded Rectangle 5"/>
-          <p:cNvSpPr/>
-          <p:nvPr/>
-        </p:nvSpPr>
-        <p:spPr>
-          <a:xfrm>
-            <a:off x="6190488" y="1600200"/>
-            <a:ext cx="5394960" cy="1828800"/>
-          </a:xfrm>
-          <a:prstGeom prst="roundRect">
-            <a:avLst>
-              <a:gd name="adj" fmla="val 6000"/>
-            </a:avLst>
-          </a:prstGeom>
-          <a:solidFill>
-            <a:srgbClr val="D9DEEF"/>
-          </a:solidFill>
-          <a:ln>
-            <a:noFill/>
-          </a:ln>
-          <a:effectLst/>
-        </p:spPr>
-        <p:style>
-          <a:lnRef idx="1">
-            <a:schemeClr val="accent1"/>
-          </a:lnRef>
-          <a:fillRef idx="3">
-            <a:schemeClr val="accent1"/>
-          </a:fillRef>
-          <a:effectRef idx="2">
-            <a:schemeClr val="accent1"/>
-          </a:effectRef>
-          <a:fontRef idx="minor">
-            <a:schemeClr val="lt1"/>
-          </a:fontRef>
-        </p:style>
-        <p:txBody>
-          <a:bodyPr rtlCol="0" anchor="ctr"/>
-          <a:lstStyle/>
-          <a:p>
-            <a:pPr algn="ctr"/>
-          </a:p>
-        </p:txBody>
-      </p:sp>
-      <p:sp>
-        <p:nvSpPr>
-          <p:cNvPr id="7" name="TextBox 6"/>
-          <p:cNvSpPr txBox="1"/>
-          <p:nvPr/>
-        </p:nvSpPr>
-        <p:spPr>
-          <a:xfrm>
-            <a:off x="6373368" y="1709928"/>
-            <a:ext cx="5029200" cy="1609344"/>
-          </a:xfrm>
-          <a:prstGeom prst="rect">
-            <a:avLst/>
-          </a:prstGeom>
-          <a:noFill/>
-        </p:spPr>
-        <p:txBody>
-          <a:bodyPr wrap="square" lIns="45720" rIns="45720" tIns="27432" bIns="27432" anchor="t">
-            <a:spAutoFit/>
-          </a:bodyPr>
-          <a:lstStyle/>
-          <a:p>
-            <a:pPr algn="l">
-              <a:spcAft>
-                <a:spcPts val="600"/>
-              </a:spcAft>
-            </a:pPr>
-            <a:r>
-              <a:rPr sz="2000" b="1" i="0">
-                <a:solidFill>
-                  <a:srgbClr val="2B4EB4"/>
-                </a:solidFill>
-                <a:latin typeface="Calibri"/>
-              </a:rPr>
-              <a:t>Qué aceptar</a:t>
-            </a:r>
-          </a:p>
-          <a:p>
-            <a:pPr algn="l">
-              <a:spcAft>
-                <a:spcPts val="400"/>
-              </a:spcAft>
-            </a:pPr>
-            <a:r>
-              <a:rPr sz="1800" b="0" i="0">
-                <a:solidFill>
-                  <a:srgbClr val="011754"/>
-                </a:solidFill>
-                <a:latin typeface="Calibri"/>
-              </a:rPr>
-              <a:t>Evaluar si una respuesta es pertinente y suficiente antes de usarla como evidencia o antecedente.</a:t>
-            </a:r>
-          </a:p>
-        </p:txBody>
-      </p:sp>
-      <p:sp>
-        <p:nvSpPr>
-          <p:cNvPr id="8" name="Rounded Rectangle 7"/>
-          <p:cNvSpPr/>
-          <p:nvPr/>
-        </p:nvSpPr>
-        <p:spPr>
-          <a:xfrm>
-            <a:off x="612648" y="3611880"/>
-            <a:ext cx="5394960" cy="1828800"/>
-          </a:xfrm>
-          <a:prstGeom prst="roundRect">
-            <a:avLst>
-              <a:gd name="adj" fmla="val 6000"/>
-            </a:avLst>
-          </a:prstGeom>
-          <a:solidFill>
-            <a:srgbClr val="D9DEEF"/>
-          </a:solidFill>
-          <a:ln>
-            <a:noFill/>
-          </a:ln>
-          <a:effectLst/>
-        </p:spPr>
-        <p:style>
-          <a:lnRef idx="1">
-            <a:schemeClr val="accent1"/>
-          </a:lnRef>
-          <a:fillRef idx="3">
-            <a:schemeClr val="accent1"/>
-          </a:fillRef>
-          <a:effectRef idx="2">
-            <a:schemeClr val="accent1"/>
-          </a:effectRef>
-          <a:fontRef idx="minor">
-            <a:schemeClr val="lt1"/>
-          </a:fontRef>
-        </p:style>
-        <p:txBody>
-          <a:bodyPr rtlCol="0" anchor="ctr"/>
-          <a:lstStyle/>
-          <a:p>
-            <a:pPr algn="ctr"/>
-          </a:p>
-        </p:txBody>
-      </p:sp>
-      <p:sp>
-        <p:nvSpPr>
-          <p:cNvPr id="9" name="TextBox 8"/>
-          <p:cNvSpPr txBox="1"/>
-          <p:nvPr/>
-        </p:nvSpPr>
-        <p:spPr>
-          <a:xfrm>
-            <a:off x="795528" y="3721608"/>
-            <a:ext cx="5029200" cy="1609344"/>
-          </a:xfrm>
-          <a:prstGeom prst="rect">
-            <a:avLst/>
-          </a:prstGeom>
-          <a:noFill/>
-        </p:spPr>
-        <p:txBody>
-          <a:bodyPr wrap="square" lIns="45720" rIns="45720" tIns="27432" bIns="27432" anchor="t">
-            <a:spAutoFit/>
-          </a:bodyPr>
-          <a:lstStyle/>
-          <a:p>
-            <a:pPr algn="l">
-              <a:spcAft>
-                <a:spcPts val="600"/>
-              </a:spcAft>
-            </a:pPr>
-            <a:r>
-              <a:rPr sz="2000" b="1" i="0">
-                <a:solidFill>
-                  <a:srgbClr val="2B4EB4"/>
-                </a:solidFill>
-                <a:latin typeface="Calibri"/>
-              </a:rPr>
-              <a:t>Qué verificar</a:t>
-            </a:r>
-          </a:p>
-          <a:p>
-            <a:pPr algn="l">
-              <a:spcAft>
-                <a:spcPts val="400"/>
-              </a:spcAft>
-            </a:pPr>
-            <a:r>
-              <a:rPr sz="1800" b="0" i="0">
-                <a:solidFill>
-                  <a:srgbClr val="011754"/>
-                </a:solidFill>
-                <a:latin typeface="Calibri"/>
-              </a:rPr>
-              <a:t>Comprobar datos, cifras y referencias en la fuente original: título, autor, año, revista y DOI.</a:t>
-            </a:r>
-          </a:p>
-        </p:txBody>
-      </p:sp>
-      <p:sp>
-        <p:nvSpPr>
-          <p:cNvPr id="10" name="Rounded Rectangle 9"/>
-          <p:cNvSpPr/>
-          <p:nvPr/>
-        </p:nvSpPr>
-        <p:spPr>
-          <a:xfrm>
-            <a:off x="6190488" y="3611880"/>
-            <a:ext cx="5394960" cy="1828800"/>
-          </a:xfrm>
-          <a:prstGeom prst="roundRect">
-            <a:avLst>
-              <a:gd name="adj" fmla="val 6000"/>
-            </a:avLst>
-          </a:prstGeom>
-          <a:solidFill>
-            <a:srgbClr val="D9DEEF"/>
-          </a:solidFill>
-          <a:ln>
-            <a:noFill/>
-          </a:ln>
-          <a:effectLst/>
-        </p:spPr>
-        <p:style>
-          <a:lnRef idx="1">
-            <a:schemeClr val="accent1"/>
-          </a:lnRef>
-          <a:fillRef idx="3">
-            <a:schemeClr val="accent1"/>
-          </a:fillRef>
-          <a:effectRef idx="2">
-            <a:schemeClr val="accent1"/>
-          </a:effectRef>
-          <a:fontRef idx="minor">
-            <a:schemeClr val="lt1"/>
-          </a:fontRef>
-        </p:style>
-        <p:txBody>
-          <a:bodyPr rtlCol="0" anchor="ctr"/>
-          <a:lstStyle/>
-          <a:p>
-            <a:pPr algn="ctr"/>
-          </a:p>
-        </p:txBody>
-      </p:sp>
-      <p:sp>
-        <p:nvSpPr>
-          <p:cNvPr id="11" name="TextBox 10"/>
-          <p:cNvSpPr txBox="1"/>
-          <p:nvPr/>
-        </p:nvSpPr>
-        <p:spPr>
-          <a:xfrm>
-            <a:off x="6373368" y="3721608"/>
-            <a:ext cx="5029200" cy="1609344"/>
-          </a:xfrm>
-          <a:prstGeom prst="rect">
-            <a:avLst/>
-          </a:prstGeom>
-          <a:noFill/>
-        </p:spPr>
-        <p:txBody>
-          <a:bodyPr wrap="square" lIns="45720" rIns="45720" tIns="27432" bIns="27432" anchor="t">
-            <a:spAutoFit/>
-          </a:bodyPr>
-          <a:lstStyle/>
-          <a:p>
-            <a:pPr algn="l">
-              <a:spcAft>
-                <a:spcPts val="600"/>
-              </a:spcAft>
-            </a:pPr>
-            <a:r>
-              <a:rPr sz="2000" b="1" i="0">
-                <a:solidFill>
-                  <a:srgbClr val="2B4EB4"/>
-                </a:solidFill>
-                <a:latin typeface="Calibri"/>
-              </a:rPr>
-              <a:t>Qué declarar</a:t>
-            </a:r>
-          </a:p>
-          <a:p>
-            <a:pPr algn="l">
-              <a:spcAft>
-                <a:spcPts val="400"/>
-              </a:spcAft>
-            </a:pPr>
-            <a:r>
-              <a:rPr sz="1800" b="0" i="0">
-                <a:solidFill>
-                  <a:srgbClr val="011754"/>
-                </a:solidFill>
-                <a:latin typeface="Calibri"/>
-              </a:rPr>
-              <a:t>Registrar cómo se usó la IA en el trabajo final: herramienta, tarea y verificación realizada.</a:t>
-            </a:r>
-          </a:p>
-        </p:txBody>
-      </p:sp>
-      <p:sp>
-        <p:nvSpPr>
-          <p:cNvPr id="12" name="Rounded Rectangle 11"/>
-          <p:cNvSpPr/>
-          <p:nvPr/>
-        </p:nvSpPr>
-        <p:spPr>
-          <a:xfrm>
-            <a:off x="612648" y="5486400"/>
-            <a:ext cx="10972800" cy="640080"/>
-          </a:xfrm>
-          <a:prstGeom prst="roundRect">
-            <a:avLst>
-              <a:gd name="adj" fmla="val 6000"/>
-            </a:avLst>
-          </a:prstGeom>
-          <a:solidFill>
-            <a:srgbClr val="011754"/>
-          </a:solidFill>
-          <a:ln>
-            <a:noFill/>
-          </a:ln>
-          <a:effectLst/>
-        </p:spPr>
-        <p:style>
-          <a:lnRef idx="1">
-            <a:schemeClr val="accent1"/>
-          </a:lnRef>
-          <a:fillRef idx="3">
-            <a:schemeClr val="accent1"/>
-          </a:fillRef>
-          <a:effectRef idx="2">
-            <a:schemeClr val="accent1"/>
-          </a:effectRef>
-          <a:fontRef idx="minor">
-            <a:schemeClr val="lt1"/>
-          </a:fontRef>
-        </p:style>
-        <p:txBody>
-          <a:bodyPr rtlCol="0" anchor="ctr"/>
-          <a:lstStyle/>
-          <a:p>
-            <a:pPr algn="ctr"/>
-          </a:p>
-        </p:txBody>
-      </p:sp>
-      <p:sp>
-        <p:nvSpPr>
-          <p:cNvPr id="13" name="TextBox 12"/>
-          <p:cNvSpPr txBox="1"/>
-          <p:nvPr/>
-        </p:nvSpPr>
-        <p:spPr>
-          <a:xfrm>
-            <a:off x="841248" y="5486400"/>
-            <a:ext cx="10515600" cy="640080"/>
-          </a:xfrm>
-          <a:prstGeom prst="rect">
-            <a:avLst/>
-          </a:prstGeom>
-          <a:noFill/>
-        </p:spPr>
-        <p:txBody>
-          <a:bodyPr wrap="square" lIns="45720" rIns="45720" tIns="27432" bIns="27432" anchor="ctr">
-            <a:spAutoFit/>
-          </a:bodyPr>
-          <a:lstStyle/>
-          <a:p>
-            <a:pPr algn="l">
-              <a:spcAft>
-                <a:spcPts val="400"/>
-              </a:spcAft>
-            </a:pPr>
-            <a:r>
-              <a:rPr sz="1800" b="1" i="0">
-                <a:solidFill>
-                  <a:srgbClr val="FFFFFF"/>
-                </a:solidFill>
-                <a:latin typeface="Calibri"/>
-              </a:rPr>
-              <a:t>Cuatro decisiones, un solo responsable: el investigador.</a:t>
-            </a:r>
-          </a:p>
-        </p:txBody>
-      </p:sp>
-    </p:spTree>
-  </p:cSld>
-  <p:clrMapOvr>
-    <a:masterClrMapping/>
-  </p:clrMapOvr>
-</p:sld>
-</file>
-
-<file path=ppt/slides/slide8.xml><?xml version="1.0" encoding="utf-8"?>
-<p:sld xmlns:a="http://schemas.openxmlformats.org/drawingml/2006/main" xmlns:r="http://schemas.openxmlformats.org/officeDocument/2006/relationships" xmlns:p="http://schemas.openxmlformats.org/presentationml/2006/main">
-  <p:cSld>
-    <p:spTree>
-      <p:nvGrpSpPr>
-        <p:cNvPr id="1" name=""/>
-        <p:cNvGrpSpPr/>
-        <p:nvPr/>
-      </p:nvGrpSpPr>
-      <p:grpSpPr>
-        <a:xfrm>
-          <a:off x="0" y="0"/>
-          <a:ext cx="0" cy="0"/>
-          <a:chOff x="0" y="0"/>
-          <a:chExt cx="0" cy="0"/>
-        </a:xfrm>
-      </p:grpSpPr>
-      <p:pic>
-        <p:nvPicPr>
-          <p:cNvPr id="2" name="Picture 1" descr="bg_content.png"/>
-          <p:cNvPicPr>
-            <a:picLocks noChangeAspect="1"/>
-          </p:cNvPicPr>
-          <p:nvPr/>
-        </p:nvPicPr>
-        <p:blipFill>
-          <a:blip r:embed="rId2"/>
-          <a:stretch>
-            <a:fillRect/>
-          </a:stretch>
-        </p:blipFill>
-        <p:spPr>
-          <a:xfrm>
-            <a:off x="0" y="0"/>
-            <a:ext cx="12191695" cy="6858000"/>
-          </a:xfrm>
-          <a:prstGeom prst="rect">
-            <a:avLst/>
-          </a:prstGeom>
-        </p:spPr>
-      </p:pic>
-      <p:sp>
-        <p:nvSpPr>
-          <p:cNvPr id="3" name="TextBox 2"/>
-          <p:cNvSpPr txBox="1"/>
-          <p:nvPr/>
-        </p:nvSpPr>
-        <p:spPr>
-          <a:xfrm>
-            <a:off x="612648" y="777240"/>
-            <a:ext cx="10332720" cy="640080"/>
-          </a:xfrm>
-          <a:prstGeom prst="rect">
-            <a:avLst/>
-          </a:prstGeom>
-          <a:noFill/>
-        </p:spPr>
-        <p:txBody>
-          <a:bodyPr wrap="square" lIns="45720" rIns="45720" tIns="27432" bIns="27432" anchor="ctr">
-            <a:spAutoFit/>
-          </a:bodyPr>
-          <a:lstStyle/>
-          <a:p>
-            <a:pPr algn="l">
-              <a:spcAft>
-                <a:spcPts val="400"/>
-              </a:spcAft>
-            </a:pPr>
-            <a:r>
-              <a:rPr sz="2800" b="1" i="0">
-                <a:solidFill>
-                  <a:srgbClr val="1836B2"/>
-                </a:solidFill>
-                <a:latin typeface="Calibri"/>
-              </a:rPr>
-              <a:t>¿Para qué puede apoyar la IA al investigador?</a:t>
-            </a:r>
-          </a:p>
-        </p:txBody>
-      </p:sp>
-      <p:sp>
-        <p:nvSpPr>
-          <p:cNvPr id="4" name="Rounded Rectangle 3"/>
-          <p:cNvSpPr/>
-          <p:nvPr/>
-        </p:nvSpPr>
-        <p:spPr>
-          <a:xfrm>
-            <a:off x="612648" y="1600200"/>
-            <a:ext cx="5394960" cy="1828800"/>
-          </a:xfrm>
-          <a:prstGeom prst="roundRect">
-            <a:avLst>
-              <a:gd name="adj" fmla="val 6000"/>
-            </a:avLst>
-          </a:prstGeom>
-          <a:solidFill>
-            <a:srgbClr val="D9DEEF"/>
-          </a:solidFill>
-          <a:ln>
-            <a:noFill/>
-          </a:ln>
-          <a:effectLst/>
-        </p:spPr>
-        <p:style>
-          <a:lnRef idx="1">
-            <a:schemeClr val="accent1"/>
-          </a:lnRef>
-          <a:fillRef idx="3">
-            <a:schemeClr val="accent1"/>
-          </a:fillRef>
-          <a:effectRef idx="2">
-            <a:schemeClr val="accent1"/>
-          </a:effectRef>
-          <a:fontRef idx="minor">
-            <a:schemeClr val="lt1"/>
-          </a:fontRef>
-        </p:style>
-        <p:txBody>
-          <a:bodyPr rtlCol="0" anchor="ctr"/>
-          <a:lstStyle/>
-          <a:p>
-            <a:pPr algn="ctr"/>
-          </a:p>
-        </p:txBody>
-      </p:sp>
-      <p:sp>
-        <p:nvSpPr>
-          <p:cNvPr id="5" name="TextBox 4"/>
-          <p:cNvSpPr txBox="1"/>
-          <p:nvPr/>
-        </p:nvSpPr>
-        <p:spPr>
-          <a:xfrm>
-            <a:off x="795528" y="1709928"/>
-            <a:ext cx="5029200" cy="1609344"/>
-          </a:xfrm>
-          <a:prstGeom prst="rect">
-            <a:avLst/>
-          </a:prstGeom>
-          <a:noFill/>
-        </p:spPr>
-        <p:txBody>
-          <a:bodyPr wrap="square" lIns="45720" rIns="45720" tIns="27432" bIns="27432" anchor="t">
-            <a:spAutoFit/>
-          </a:bodyPr>
-          <a:lstStyle/>
-          <a:p>
-            <a:pPr algn="l">
-              <a:spcAft>
-                <a:spcPts val="600"/>
-              </a:spcAft>
-            </a:pPr>
-            <a:r>
-              <a:rPr sz="2000" b="1" i="0">
-                <a:solidFill>
-                  <a:srgbClr val="2B4EB4"/>
-                </a:solidFill>
-                <a:latin typeface="Calibri"/>
-              </a:rPr>
-              <a:t>Explorar</a:t>
-            </a:r>
-          </a:p>
-          <a:p>
-            <a:pPr algn="l">
-              <a:spcAft>
-                <a:spcPts val="400"/>
-              </a:spcAft>
-            </a:pPr>
-            <a:r>
-              <a:rPr sz="1800" b="0" i="0">
-                <a:solidFill>
-                  <a:srgbClr val="011754"/>
-                </a:solidFill>
-                <a:latin typeface="Calibri"/>
-              </a:rPr>
-              <a:t>Identificar ángulos o enfoques posibles de un problema y términos de búsqueda que aún no consideraste.</a:t>
-            </a:r>
-          </a:p>
-        </p:txBody>
-      </p:sp>
-      <p:sp>
-        <p:nvSpPr>
-          <p:cNvPr id="6" name="Rounded Rectangle 5"/>
-          <p:cNvSpPr/>
-          <p:nvPr/>
-        </p:nvSpPr>
-        <p:spPr>
-          <a:xfrm>
-            <a:off x="6190488" y="1600200"/>
-            <a:ext cx="5394960" cy="1828800"/>
-          </a:xfrm>
-          <a:prstGeom prst="roundRect">
-            <a:avLst>
-              <a:gd name="adj" fmla="val 6000"/>
-            </a:avLst>
-          </a:prstGeom>
-          <a:solidFill>
-            <a:srgbClr val="D9DEEF"/>
-          </a:solidFill>
-          <a:ln>
-            <a:noFill/>
-          </a:ln>
-          <a:effectLst/>
-        </p:spPr>
-        <p:style>
-          <a:lnRef idx="1">
-            <a:schemeClr val="accent1"/>
-          </a:lnRef>
-          <a:fillRef idx="3">
-            <a:schemeClr val="accent1"/>
-          </a:fillRef>
-          <a:effectRef idx="2">
-            <a:schemeClr val="accent1"/>
-          </a:effectRef>
-          <a:fontRef idx="minor">
-            <a:schemeClr val="lt1"/>
-          </a:fontRef>
-        </p:style>
-        <p:txBody>
-          <a:bodyPr rtlCol="0" anchor="ctr"/>
-          <a:lstStyle/>
-          <a:p>
-            <a:pPr algn="ctr"/>
-          </a:p>
-        </p:txBody>
-      </p:sp>
-      <p:sp>
-        <p:nvSpPr>
-          <p:cNvPr id="7" name="TextBox 6"/>
-          <p:cNvSpPr txBox="1"/>
-          <p:nvPr/>
-        </p:nvSpPr>
-        <p:spPr>
-          <a:xfrm>
-            <a:off x="6373368" y="1709928"/>
-            <a:ext cx="5029200" cy="1609344"/>
-          </a:xfrm>
-          <a:prstGeom prst="rect">
-            <a:avLst/>
-          </a:prstGeom>
-          <a:noFill/>
-        </p:spPr>
-        <p:txBody>
-          <a:bodyPr wrap="square" lIns="45720" rIns="45720" tIns="27432" bIns="27432" anchor="t">
-            <a:spAutoFit/>
-          </a:bodyPr>
-          <a:lstStyle/>
-          <a:p>
-            <a:pPr algn="l">
-              <a:spcAft>
-                <a:spcPts val="600"/>
-              </a:spcAft>
-            </a:pPr>
-            <a:r>
-              <a:rPr sz="2000" b="1" i="0">
-                <a:solidFill>
-                  <a:srgbClr val="2B4EB4"/>
-                </a:solidFill>
-                <a:latin typeface="Calibri"/>
-              </a:rPr>
-              <a:t>Organizar</a:t>
-            </a:r>
-          </a:p>
-          <a:p>
-            <a:pPr algn="l">
-              <a:spcAft>
-                <a:spcPts val="400"/>
-              </a:spcAft>
-            </a:pPr>
-            <a:r>
-              <a:rPr sz="1800" b="0" i="0">
-                <a:solidFill>
-                  <a:srgbClr val="011754"/>
-                </a:solidFill>
-                <a:latin typeface="Calibri"/>
-              </a:rPr>
-              <a:t>Estructurar ideas, antecedentes o resultados que ya obtuviste, por ejemplo en un esquema o una matriz.</a:t>
-            </a:r>
-          </a:p>
-        </p:txBody>
-      </p:sp>
-      <p:sp>
-        <p:nvSpPr>
-          <p:cNvPr id="8" name="Rounded Rectangle 7"/>
-          <p:cNvSpPr/>
-          <p:nvPr/>
-        </p:nvSpPr>
-        <p:spPr>
-          <a:xfrm>
-            <a:off x="612648" y="3611880"/>
-            <a:ext cx="5394960" cy="1828800"/>
-          </a:xfrm>
-          <a:prstGeom prst="roundRect">
-            <a:avLst>
-              <a:gd name="adj" fmla="val 6000"/>
-            </a:avLst>
-          </a:prstGeom>
-          <a:solidFill>
-            <a:srgbClr val="D9DEEF"/>
-          </a:solidFill>
-          <a:ln>
-            <a:noFill/>
-          </a:ln>
-          <a:effectLst/>
-        </p:spPr>
-        <p:style>
-          <a:lnRef idx="1">
-            <a:schemeClr val="accent1"/>
-          </a:lnRef>
-          <a:fillRef idx="3">
-            <a:schemeClr val="accent1"/>
-          </a:fillRef>
-          <a:effectRef idx="2">
-            <a:schemeClr val="accent1"/>
-          </a:effectRef>
-          <a:fontRef idx="minor">
-            <a:schemeClr val="lt1"/>
-          </a:fontRef>
-        </p:style>
-        <p:txBody>
-          <a:bodyPr rtlCol="0" anchor="ctr"/>
-          <a:lstStyle/>
-          <a:p>
-            <a:pPr algn="ctr"/>
-          </a:p>
-        </p:txBody>
-      </p:sp>
-      <p:sp>
-        <p:nvSpPr>
-          <p:cNvPr id="9" name="TextBox 8"/>
-          <p:cNvSpPr txBox="1"/>
-          <p:nvPr/>
-        </p:nvSpPr>
-        <p:spPr>
-          <a:xfrm>
-            <a:off x="795528" y="3721608"/>
-            <a:ext cx="5029200" cy="1609344"/>
-          </a:xfrm>
-          <a:prstGeom prst="rect">
-            <a:avLst/>
-          </a:prstGeom>
-          <a:noFill/>
-        </p:spPr>
-        <p:txBody>
-          <a:bodyPr wrap="square" lIns="45720" rIns="45720" tIns="27432" bIns="27432" anchor="t">
-            <a:spAutoFit/>
-          </a:bodyPr>
-          <a:lstStyle/>
-          <a:p>
-            <a:pPr algn="l">
-              <a:spcAft>
-                <a:spcPts val="600"/>
-              </a:spcAft>
-            </a:pPr>
-            <a:r>
-              <a:rPr sz="2000" b="1" i="0">
-                <a:solidFill>
-                  <a:srgbClr val="2B4EB4"/>
-                </a:solidFill>
-                <a:latin typeface="Calibri"/>
-              </a:rPr>
-              <a:t>Redactar borradores</a:t>
-            </a:r>
-          </a:p>
-          <a:p>
-            <a:pPr algn="l">
-              <a:spcAft>
-                <a:spcPts val="400"/>
-              </a:spcAft>
-            </a:pPr>
-            <a:r>
-              <a:rPr sz="1800" b="0" i="0">
-                <a:solidFill>
-                  <a:srgbClr val="011754"/>
-                </a:solidFill>
-                <a:latin typeface="Calibri"/>
-              </a:rPr>
-              <a:t>Proponer una primera versión de un texto o resumen que luego revisas, corriges y reescribes.</a:t>
-            </a:r>
-          </a:p>
-        </p:txBody>
-      </p:sp>
-      <p:sp>
-        <p:nvSpPr>
-          <p:cNvPr id="10" name="Rounded Rectangle 9"/>
-          <p:cNvSpPr/>
-          <p:nvPr/>
-        </p:nvSpPr>
-        <p:spPr>
-          <a:xfrm>
-            <a:off x="6190488" y="3611880"/>
-            <a:ext cx="5394960" cy="1828800"/>
-          </a:xfrm>
-          <a:prstGeom prst="roundRect">
-            <a:avLst>
-              <a:gd name="adj" fmla="val 6000"/>
-            </a:avLst>
-          </a:prstGeom>
-          <a:solidFill>
-            <a:srgbClr val="D9DEEF"/>
-          </a:solidFill>
-          <a:ln>
-            <a:noFill/>
-          </a:ln>
-          <a:effectLst/>
-        </p:spPr>
-        <p:style>
-          <a:lnRef idx="1">
-            <a:schemeClr val="accent1"/>
-          </a:lnRef>
-          <a:fillRef idx="3">
-            <a:schemeClr val="accent1"/>
-          </a:fillRef>
-          <a:effectRef idx="2">
-            <a:schemeClr val="accent1"/>
-          </a:effectRef>
-          <a:fontRef idx="minor">
-            <a:schemeClr val="lt1"/>
-          </a:fontRef>
-        </p:style>
-        <p:txBody>
-          <a:bodyPr rtlCol="0" anchor="ctr"/>
-          <a:lstStyle/>
-          <a:p>
-            <a:pPr algn="ctr"/>
-          </a:p>
-        </p:txBody>
-      </p:sp>
-      <p:sp>
-        <p:nvSpPr>
-          <p:cNvPr id="11" name="TextBox 10"/>
-          <p:cNvSpPr txBox="1"/>
-          <p:nvPr/>
-        </p:nvSpPr>
-        <p:spPr>
-          <a:xfrm>
-            <a:off x="6373368" y="3721608"/>
-            <a:ext cx="5029200" cy="1609344"/>
-          </a:xfrm>
-          <a:prstGeom prst="rect">
-            <a:avLst/>
-          </a:prstGeom>
-          <a:noFill/>
-        </p:spPr>
-        <p:txBody>
-          <a:bodyPr wrap="square" lIns="45720" rIns="45720" tIns="27432" bIns="27432" anchor="t">
-            <a:spAutoFit/>
-          </a:bodyPr>
-          <a:lstStyle/>
-          <a:p>
-            <a:pPr algn="l">
-              <a:spcAft>
-                <a:spcPts val="600"/>
-              </a:spcAft>
-            </a:pPr>
-            <a:r>
-              <a:rPr sz="2000" b="1" i="0">
-                <a:solidFill>
-                  <a:srgbClr val="2B4EB4"/>
-                </a:solidFill>
-                <a:latin typeface="Calibri"/>
-              </a:rPr>
-              <a:t>Comparar</a:t>
-            </a:r>
-          </a:p>
-          <a:p>
-            <a:pPr algn="l">
-              <a:spcAft>
-                <a:spcPts val="400"/>
-              </a:spcAft>
-            </a:pPr>
-            <a:r>
-              <a:rPr sz="1800" b="0" i="0">
-                <a:solidFill>
-                  <a:srgbClr val="011754"/>
-                </a:solidFill>
-                <a:latin typeface="Calibri"/>
-              </a:rPr>
-              <a:t>Contrastar alternativas o enfoques que el investigador ya reunió, señalando coincidencias y diferencias.</a:t>
-            </a:r>
-          </a:p>
-        </p:txBody>
-      </p:sp>
-      <p:sp>
-        <p:nvSpPr>
-          <p:cNvPr id="12" name="Rounded Rectangle 11"/>
-          <p:cNvSpPr/>
-          <p:nvPr/>
-        </p:nvSpPr>
-        <p:spPr>
-          <a:xfrm>
-            <a:off x="612648" y="5486400"/>
-            <a:ext cx="10972800" cy="640080"/>
-          </a:xfrm>
-          <a:prstGeom prst="roundRect">
-            <a:avLst>
-              <a:gd name="adj" fmla="val 6000"/>
-            </a:avLst>
-          </a:prstGeom>
-          <a:solidFill>
-            <a:srgbClr val="011754"/>
-          </a:solidFill>
-          <a:ln>
-            <a:noFill/>
-          </a:ln>
-          <a:effectLst/>
-        </p:spPr>
-        <p:style>
-          <a:lnRef idx="1">
-            <a:schemeClr val="accent1"/>
-          </a:lnRef>
-          <a:fillRef idx="3">
-            <a:schemeClr val="accent1"/>
-          </a:fillRef>
-          <a:effectRef idx="2">
-            <a:schemeClr val="accent1"/>
-          </a:effectRef>
-          <a:fontRef idx="minor">
-            <a:schemeClr val="lt1"/>
-          </a:fontRef>
-        </p:style>
-        <p:txBody>
-          <a:bodyPr rtlCol="0" anchor="ctr"/>
-          <a:lstStyle/>
-          <a:p>
-            <a:pPr algn="ctr"/>
-          </a:p>
-        </p:txBody>
-      </p:sp>
-      <p:sp>
-        <p:nvSpPr>
-          <p:cNvPr id="13" name="TextBox 12"/>
-          <p:cNvSpPr txBox="1"/>
-          <p:nvPr/>
-        </p:nvSpPr>
-        <p:spPr>
-          <a:xfrm>
-            <a:off x="841248" y="5486400"/>
-            <a:ext cx="10515600" cy="640080"/>
-          </a:xfrm>
-          <a:prstGeom prst="rect">
-            <a:avLst/>
-          </a:prstGeom>
-          <a:noFill/>
-        </p:spPr>
-        <p:txBody>
-          <a:bodyPr wrap="square" lIns="45720" rIns="45720" tIns="27432" bIns="27432" anchor="ctr">
-            <a:spAutoFit/>
-          </a:bodyPr>
-          <a:lstStyle/>
-          <a:p>
-            <a:pPr algn="l">
-              <a:spcAft>
-                <a:spcPts val="400"/>
-              </a:spcAft>
-            </a:pPr>
-            <a:r>
-              <a:rPr sz="1800" b="1" i="0">
-                <a:solidFill>
-                  <a:srgbClr val="FFFFFF"/>
-                </a:solidFill>
-                <a:latin typeface="Calibri"/>
-              </a:rPr>
-              <a:t>Ninguna de estas tareas reemplaza el juicio del investigador.</a:t>
             </a:r>
           </a:p>
         </p:txBody>

--- a/Sesion_03_mejorada.pptx
+++ b/Sesion_03_mejorada.pptx
@@ -12,17 +12,29 @@
     <p:sldId id="307" r:id="rId3"/>
     <p:sldId id="258" r:id="rId4"/>
     <p:sldId id="259" r:id="rId5"/>
+    <p:sldId id="260" r:id="rId6"/>
     <p:sldId id="261" r:id="rId7"/>
+    <p:sldId id="263" r:id="rId8"/>
+    <p:sldId id="265" r:id="rId9"/>
     <p:sldId id="266" r:id="rId10"/>
+    <p:sldId id="268" r:id="rId11"/>
+    <p:sldId id="270" r:id="rId12"/>
     <p:sldId id="271" r:id="rId13"/>
     <p:sldId id="273" r:id="rId14"/>
+    <p:sldId id="275" r:id="rId15"/>
     <p:sldId id="277" r:id="rId16"/>
     <p:sldId id="278" r:id="rId17"/>
-    <p:sldId id="270" r:id="rId12"/>
+    <p:sldId id="282" r:id="rId18"/>
+    <p:sldId id="283" r:id="rId19"/>
     <p:sldId id="284" r:id="rId20"/>
+    <p:sldId id="286" r:id="rId21"/>
+    <p:sldId id="288" r:id="rId22"/>
     <p:sldId id="289" r:id="rId23"/>
+    <p:sldId id="290" r:id="rId24"/>
+    <p:sldId id="291" r:id="rId25"/>
     <p:sldId id="292" r:id="rId26"/>
     <p:sldId id="293" r:id="rId27"/>
+    <p:sldId id="296" r:id="rId28"/>
     <p:sldId id="308" r:id="rId29"/>
     <p:sldId id="304" r:id="rId30"/>
     <p:sldId id="305" r:id="rId31"/>
@@ -4141,6 +4153,133 @@
 </p:sld>
 </file>
 
+<file path=ppt/slides/slide10.xml><?xml version="1.0" encoding="utf-8"?>
+<p:sld xmlns:a="http://schemas.openxmlformats.org/drawingml/2006/main" xmlns:r="http://schemas.openxmlformats.org/officeDocument/2006/relationships" xmlns:p="http://schemas.openxmlformats.org/presentationml/2006/main">
+  <p:cSld>
+    <p:spTree>
+      <p:nvGrpSpPr>
+        <p:cNvPr id="1" name=""/>
+        <p:cNvGrpSpPr/>
+        <p:nvPr/>
+      </p:nvGrpSpPr>
+      <p:grpSpPr>
+        <a:xfrm>
+          <a:off x="0" y="0"/>
+          <a:ext cx="0" cy="0"/>
+          <a:chOff x="0" y="0"/>
+          <a:chExt cx="0" cy="0"/>
+        </a:xfrm>
+      </p:grpSpPr>
+      <p:pic>
+        <p:nvPicPr>
+          <p:cNvPr id="2" name="Picture 1" descr="divider_bg.png"/>
+          <p:cNvPicPr>
+            <a:picLocks noChangeAspect="1"/>
+          </p:cNvPicPr>
+          <p:nvPr/>
+        </p:nvPicPr>
+        <p:blipFill>
+          <a:blip r:embed="rId2"/>
+          <a:stretch>
+            <a:fillRect/>
+          </a:stretch>
+        </p:blipFill>
+        <p:spPr>
+          <a:xfrm>
+            <a:off x="0" y="0"/>
+            <a:ext cx="12191695" cy="6858000"/>
+          </a:xfrm>
+          <a:prstGeom prst="rect">
+            <a:avLst/>
+          </a:prstGeom>
+        </p:spPr>
+      </p:pic>
+      <p:sp>
+        <p:nvSpPr>
+          <p:cNvPr id="3" name="TextBox 2"/>
+          <p:cNvSpPr txBox="1"/>
+          <p:nvPr/>
+        </p:nvSpPr>
+        <p:spPr>
+          <a:xfrm>
+            <a:off x="982912" y="2676125"/>
+            <a:ext cx="437840" cy="1999910"/>
+          </a:xfrm>
+          <a:prstGeom prst="rect">
+            <a:avLst/>
+          </a:prstGeom>
+          <a:noFill/>
+        </p:spPr>
+        <p:txBody>
+          <a:bodyPr wrap="square">
+            <a:spAutoFit/>
+          </a:bodyPr>
+          <a:lstStyle/>
+          <a:p>
+            <a:pPr algn="l">
+              <a:lnSpc>
+                <a:spcPct val="115000"/>
+              </a:lnSpc>
+            </a:pPr>
+            <a:r>
+              <a:rPr sz="7200" b="1" i="0">
+                <a:solidFill>
+                  <a:srgbClr val="FFFFFF"/>
+                </a:solidFill>
+                <a:latin typeface="Calibri"/>
+              </a:rPr>
+              <a:t>2</a:t>
+            </a:r>
+          </a:p>
+        </p:txBody>
+      </p:sp>
+      <p:sp>
+        <p:nvSpPr>
+          <p:cNvPr id="4" name="TextBox 3"/>
+          <p:cNvSpPr txBox="1"/>
+          <p:nvPr/>
+        </p:nvSpPr>
+        <p:spPr>
+          <a:xfrm>
+            <a:off x="982912" y="4737409"/>
+            <a:ext cx="10346277" cy="702221"/>
+          </a:xfrm>
+          <a:prstGeom prst="rect">
+            <a:avLst/>
+          </a:prstGeom>
+          <a:noFill/>
+        </p:spPr>
+        <p:txBody>
+          <a:bodyPr wrap="square">
+            <a:spAutoFit/>
+          </a:bodyPr>
+          <a:lstStyle/>
+          <a:p>
+            <a:pPr algn="l">
+              <a:lnSpc>
+                <a:spcPct val="115000"/>
+              </a:lnSpc>
+            </a:pPr>
+            <a:r>
+              <a:rPr sz="2600" b="0" i="0">
+                <a:solidFill>
+                  <a:srgbClr val="FFFFFF"/>
+                </a:solidFill>
+                <a:latin typeface="Calibri"/>
+              </a:rPr>
+              <a:t>RIESGOS Y OPORTUNIDADES EN EL PROCESO INVESTIGATIVO</a:t>
+            </a:r>
+          </a:p>
+        </p:txBody>
+      </p:sp>
+    </p:spTree>
+  </p:cSld>
+  <p:clrMapOvr>
+    <a:masterClrMapping/>
+  </p:clrMapOvr>
+</p:sld>
+</file>
+
 <file path=ppt/slides/slide11.xml><?xml version="1.0" encoding="utf-8"?>
 <p:sld xmlns:a="http://schemas.openxmlformats.org/drawingml/2006/main" xmlns:r="http://schemas.openxmlformats.org/officeDocument/2006/relationships" xmlns:p="http://schemas.openxmlformats.org/presentationml/2006/main">
   <p:cSld>
@@ -4216,26 +4355,109 @@
                 </a:solidFill>
                 <a:latin typeface="Calibri"/>
               </a:rPr>
-              <a:t>Cinco criterios para auditar una respuesta de IA</a:t>
-            </a:r>
-          </a:p>
-        </p:txBody>
-      </p:sp>
-      <p:sp>
-        <p:nvSpPr>
-          <p:cNvPr id="4" name="Rounded Rectangle 3"/>
+              <a:t>Etapas de la investigación donde interviene la IA</a:t>
+            </a:r>
+          </a:p>
+        </p:txBody>
+      </p:sp>
+      <p:sp>
+        <p:nvSpPr>
+          <p:cNvPr id="4" name="TextBox 3"/>
+          <p:cNvSpPr txBox="1"/>
+          <p:nvPr/>
+        </p:nvSpPr>
+        <p:spPr>
+          <a:xfrm>
+            <a:off x="612648" y="1463040"/>
+            <a:ext cx="10972800" cy="457200"/>
+          </a:xfrm>
+          <a:prstGeom prst="rect">
+            <a:avLst/>
+          </a:prstGeom>
+          <a:noFill/>
+        </p:spPr>
+        <p:txBody>
+          <a:bodyPr wrap="square" lIns="45720" rIns="45720" tIns="27432" bIns="27432" anchor="t">
+            <a:spAutoFit/>
+          </a:bodyPr>
+          <a:lstStyle/>
+          <a:p>
+            <a:pPr algn="l">
+              <a:spcAft>
+                <a:spcPts val="400"/>
+              </a:spcAft>
+            </a:pPr>
+            <a:r>
+              <a:rPr sz="1800" b="0" i="0">
+                <a:solidFill>
+                  <a:srgbClr val="011754"/>
+                </a:solidFill>
+                <a:latin typeface="Calibri"/>
+              </a:rPr>
+              <a:t>Cada etapa ofrece una oportunidad y un riesgo distinto si no se audita.</a:t>
+            </a:r>
+          </a:p>
+        </p:txBody>
+      </p:sp>
+      <p:sp>
+        <p:nvSpPr>
+          <p:cNvPr id="5" name="Rounded Rectangle 4"/>
           <p:cNvSpPr/>
           <p:nvPr/>
         </p:nvSpPr>
         <p:spPr>
           <a:xfrm>
-            <a:off x="612648" y="1600200"/>
-            <a:ext cx="3108960" cy="777240"/>
+            <a:off x="612648" y="2057400"/>
+            <a:ext cx="2606040" cy="4114800"/>
           </a:xfrm>
           <a:prstGeom prst="roundRect">
             <a:avLst>
               <a:gd name="adj" fmla="val 6000"/>
             </a:avLst>
+          </a:prstGeom>
+          <a:solidFill>
+            <a:srgbClr val="D9DEEF"/>
+          </a:solidFill>
+          <a:ln>
+            <a:noFill/>
+          </a:ln>
+          <a:effectLst/>
+        </p:spPr>
+        <p:style>
+          <a:lnRef idx="1">
+            <a:schemeClr val="accent1"/>
+          </a:lnRef>
+          <a:fillRef idx="3">
+            <a:schemeClr val="accent1"/>
+          </a:fillRef>
+          <a:effectRef idx="2">
+            <a:schemeClr val="accent1"/>
+          </a:effectRef>
+          <a:fontRef idx="minor">
+            <a:schemeClr val="lt1"/>
+          </a:fontRef>
+        </p:style>
+        <p:txBody>
+          <a:bodyPr rtlCol="0" anchor="ctr"/>
+          <a:lstStyle/>
+          <a:p>
+            <a:pPr algn="ctr"/>
+          </a:p>
+        </p:txBody>
+      </p:sp>
+      <p:sp>
+        <p:nvSpPr>
+          <p:cNvPr id="6" name="Oval 5"/>
+          <p:cNvSpPr/>
+          <p:nvPr/>
+        </p:nvSpPr>
+        <p:spPr>
+          <a:xfrm>
+            <a:off x="795528" y="2194560"/>
+            <a:ext cx="548640" cy="548640"/>
+          </a:xfrm>
+          <a:prstGeom prst="ellipse">
+            <a:avLst/>
           </a:prstGeom>
           <a:solidFill>
             <a:srgbClr val="2B4EB4"/>
@@ -4260,23 +4482,32 @@
           </a:fontRef>
         </p:style>
         <p:txBody>
-          <a:bodyPr rtlCol="0" anchor="ctr"/>
+          <a:bodyPr rtlCol="0" anchor="ctr" lIns="0" rIns="0" tIns="0" bIns="0"/>
           <a:lstStyle/>
           <a:p>
             <a:pPr algn="ctr"/>
-          </a:p>
-        </p:txBody>
-      </p:sp>
-      <p:sp>
-        <p:nvSpPr>
-          <p:cNvPr id="5" name="TextBox 4"/>
+            <a:r>
+              <a:rPr sz="2000" b="1">
+                <a:solidFill>
+                  <a:srgbClr val="FFFFFF"/>
+                </a:solidFill>
+                <a:latin typeface="Calibri"/>
+              </a:rPr>
+              <a:t>1</a:t>
+            </a:r>
+          </a:p>
+        </p:txBody>
+      </p:sp>
+      <p:sp>
+        <p:nvSpPr>
+          <p:cNvPr id="7" name="TextBox 6"/>
           <p:cNvSpPr txBox="1"/>
           <p:nvPr/>
         </p:nvSpPr>
         <p:spPr>
           <a:xfrm>
-            <a:off x="731520" y="1600200"/>
-            <a:ext cx="2926080" cy="777240"/>
+            <a:off x="1435608" y="2194560"/>
+            <a:ext cx="1691640" cy="548640"/>
           </a:xfrm>
           <a:prstGeom prst="rect">
             <a:avLst/>
@@ -4297,25 +4528,112 @@
             <a:r>
               <a:rPr sz="2000" b="1" i="0">
                 <a:solidFill>
-                  <a:srgbClr val="FFFFFF"/>
-                </a:solidFill>
-                <a:latin typeface="Calibri"/>
-              </a:rPr>
-              <a:t>Pertinencia</a:t>
-            </a:r>
-          </a:p>
-        </p:txBody>
-      </p:sp>
-      <p:sp>
-        <p:nvSpPr>
-          <p:cNvPr id="6" name="Rounded Rectangle 5"/>
+                  <a:srgbClr val="2B4EB4"/>
+                </a:solidFill>
+                <a:latin typeface="Calibri"/>
+              </a:rPr>
+              <a:t>Explorar</a:t>
+            </a:r>
+          </a:p>
+        </p:txBody>
+      </p:sp>
+      <p:sp>
+        <p:nvSpPr>
+          <p:cNvPr id="8" name="TextBox 7"/>
+          <p:cNvSpPr txBox="1"/>
+          <p:nvPr/>
+        </p:nvSpPr>
+        <p:spPr>
+          <a:xfrm>
+            <a:off x="795528" y="2880360"/>
+            <a:ext cx="2240280" cy="3200400"/>
+          </a:xfrm>
+          <a:prstGeom prst="rect">
+            <a:avLst/>
+          </a:prstGeom>
+          <a:noFill/>
+        </p:spPr>
+        <p:txBody>
+          <a:bodyPr wrap="square" lIns="45720" rIns="45720" tIns="27432" bIns="27432" anchor="t">
+            <a:spAutoFit/>
+          </a:bodyPr>
+          <a:lstStyle/>
+          <a:p>
+            <a:pPr algn="l">
+              <a:spcAft>
+                <a:spcPts val="200"/>
+              </a:spcAft>
+            </a:pPr>
+            <a:r>
+              <a:rPr sz="1800" b="1" i="0">
+                <a:solidFill>
+                  <a:srgbClr val="2B4EB4"/>
+                </a:solidFill>
+                <a:latin typeface="Calibri"/>
+              </a:rPr>
+              <a:t>Oportunidad</a:t>
+            </a:r>
+          </a:p>
+          <a:p>
+            <a:pPr algn="l">
+              <a:spcAft>
+                <a:spcPts val="1200"/>
+              </a:spcAft>
+            </a:pPr>
+            <a:r>
+              <a:rPr sz="1800" b="0" i="0">
+                <a:solidFill>
+                  <a:srgbClr val="011754"/>
+                </a:solidFill>
+                <a:latin typeface="Calibri"/>
+              </a:rPr>
+              <a:t>Ganas rapidez y variedad de enfoques.</a:t>
+            </a:r>
+          </a:p>
+          <a:p>
+            <a:pPr algn="l">
+              <a:spcAft>
+                <a:spcPts val="200"/>
+              </a:spcAft>
+            </a:pPr>
+            <a:r>
+              <a:rPr sz="1800" b="1" i="0">
+                <a:solidFill>
+                  <a:srgbClr val="A02A2A"/>
+                </a:solidFill>
+                <a:latin typeface="Calibri"/>
+              </a:rPr>
+              <a:t>Riesgo</a:t>
+            </a:r>
+          </a:p>
+          <a:p>
+            <a:pPr algn="l">
+              <a:spcAft>
+                <a:spcPts val="400"/>
+              </a:spcAft>
+            </a:pPr>
+            <a:r>
+              <a:rPr sz="1800" b="0" i="0">
+                <a:solidFill>
+                  <a:srgbClr val="011754"/>
+                </a:solidFill>
+                <a:latin typeface="Calibri"/>
+              </a:rPr>
+              <a:t>Resultados sesgados hacia ciertas fuentes.</a:t>
+            </a:r>
+          </a:p>
+        </p:txBody>
+      </p:sp>
+      <p:sp>
+        <p:nvSpPr>
+          <p:cNvPr id="9" name="Rounded Rectangle 8"/>
           <p:cNvSpPr/>
           <p:nvPr/>
         </p:nvSpPr>
         <p:spPr>
           <a:xfrm>
-            <a:off x="3813048" y="1600200"/>
-            <a:ext cx="7772400" cy="777240"/>
+            <a:off x="3401568" y="2057400"/>
+            <a:ext cx="2606040" cy="4114800"/>
           </a:xfrm>
           <a:prstGeom prst="roundRect">
             <a:avLst>
@@ -4354,58 +4672,17 @@
       </p:sp>
       <p:sp>
         <p:nvSpPr>
-          <p:cNvPr id="7" name="TextBox 6"/>
-          <p:cNvSpPr txBox="1"/>
-          <p:nvPr/>
-        </p:nvSpPr>
-        <p:spPr>
-          <a:xfrm>
-            <a:off x="3977639" y="1600200"/>
-            <a:ext cx="7498079" cy="777240"/>
-          </a:xfrm>
-          <a:prstGeom prst="rect">
-            <a:avLst/>
-          </a:prstGeom>
-          <a:noFill/>
-        </p:spPr>
-        <p:txBody>
-          <a:bodyPr wrap="square" lIns="45720" rIns="45720" tIns="27432" bIns="27432" anchor="ctr">
-            <a:spAutoFit/>
-          </a:bodyPr>
-          <a:lstStyle/>
-          <a:p>
-            <a:pPr algn="l">
-              <a:spcAft>
-                <a:spcPts val="400"/>
-              </a:spcAft>
-            </a:pPr>
-            <a:r>
-              <a:rPr sz="1800" b="0" i="0">
-                <a:solidFill>
-                  <a:srgbClr val="011754"/>
-                </a:solidFill>
-                <a:latin typeface="Calibri"/>
-              </a:rPr>
-              <a:t>¿La respuesta aborda exactamente lo que se preguntó, sin desviarse hacia otro tema?</a:t>
-            </a:r>
-          </a:p>
-        </p:txBody>
-      </p:sp>
-      <p:sp>
-        <p:nvSpPr>
-          <p:cNvPr id="8" name="Rounded Rectangle 7"/>
+          <p:cNvPr id="10" name="Oval 9"/>
           <p:cNvSpPr/>
           <p:nvPr/>
         </p:nvSpPr>
         <p:spPr>
           <a:xfrm>
-            <a:off x="612648" y="2487168"/>
-            <a:ext cx="3108960" cy="777240"/>
-          </a:xfrm>
-          <a:prstGeom prst="roundRect">
-            <a:avLst>
-              <a:gd name="adj" fmla="val 6000"/>
-            </a:avLst>
+            <a:off x="3584448" y="2194560"/>
+            <a:ext cx="548640" cy="548640"/>
+          </a:xfrm>
+          <a:prstGeom prst="ellipse">
+            <a:avLst/>
           </a:prstGeom>
           <a:solidFill>
             <a:srgbClr val="2B4EB4"/>
@@ -4430,23 +4707,32 @@
           </a:fontRef>
         </p:style>
         <p:txBody>
-          <a:bodyPr rtlCol="0" anchor="ctr"/>
+          <a:bodyPr rtlCol="0" anchor="ctr" lIns="0" rIns="0" tIns="0" bIns="0"/>
           <a:lstStyle/>
           <a:p>
             <a:pPr algn="ctr"/>
-          </a:p>
-        </p:txBody>
-      </p:sp>
-      <p:sp>
-        <p:nvSpPr>
-          <p:cNvPr id="9" name="TextBox 8"/>
+            <a:r>
+              <a:rPr sz="2000" b="1">
+                <a:solidFill>
+                  <a:srgbClr val="FFFFFF"/>
+                </a:solidFill>
+                <a:latin typeface="Calibri"/>
+              </a:rPr>
+              <a:t>2</a:t>
+            </a:r>
+          </a:p>
+        </p:txBody>
+      </p:sp>
+      <p:sp>
+        <p:nvSpPr>
+          <p:cNvPr id="11" name="TextBox 10"/>
           <p:cNvSpPr txBox="1"/>
           <p:nvPr/>
         </p:nvSpPr>
         <p:spPr>
           <a:xfrm>
-            <a:off x="731520" y="2487168"/>
-            <a:ext cx="2926080" cy="777240"/>
+            <a:off x="4224528" y="2194560"/>
+            <a:ext cx="1691640" cy="548640"/>
           </a:xfrm>
           <a:prstGeom prst="rect">
             <a:avLst/>
@@ -4467,25 +4753,112 @@
             <a:r>
               <a:rPr sz="2000" b="1" i="0">
                 <a:solidFill>
-                  <a:srgbClr val="FFFFFF"/>
-                </a:solidFill>
-                <a:latin typeface="Calibri"/>
-              </a:rPr>
-              <a:t>Coherencia</a:t>
-            </a:r>
-          </a:p>
-        </p:txBody>
-      </p:sp>
-      <p:sp>
-        <p:nvSpPr>
-          <p:cNvPr id="10" name="Rounded Rectangle 9"/>
+                  <a:srgbClr val="2B4EB4"/>
+                </a:solidFill>
+                <a:latin typeface="Calibri"/>
+              </a:rPr>
+              <a:t>Redactar</a:t>
+            </a:r>
+          </a:p>
+        </p:txBody>
+      </p:sp>
+      <p:sp>
+        <p:nvSpPr>
+          <p:cNvPr id="12" name="TextBox 11"/>
+          <p:cNvSpPr txBox="1"/>
+          <p:nvPr/>
+        </p:nvSpPr>
+        <p:spPr>
+          <a:xfrm>
+            <a:off x="3584448" y="2880360"/>
+            <a:ext cx="2240280" cy="3200400"/>
+          </a:xfrm>
+          <a:prstGeom prst="rect">
+            <a:avLst/>
+          </a:prstGeom>
+          <a:noFill/>
+        </p:spPr>
+        <p:txBody>
+          <a:bodyPr wrap="square" lIns="45720" rIns="45720" tIns="27432" bIns="27432" anchor="t">
+            <a:spAutoFit/>
+          </a:bodyPr>
+          <a:lstStyle/>
+          <a:p>
+            <a:pPr algn="l">
+              <a:spcAft>
+                <a:spcPts val="200"/>
+              </a:spcAft>
+            </a:pPr>
+            <a:r>
+              <a:rPr sz="1800" b="1" i="0">
+                <a:solidFill>
+                  <a:srgbClr val="2B4EB4"/>
+                </a:solidFill>
+                <a:latin typeface="Calibri"/>
+              </a:rPr>
+              <a:t>Oportunidad</a:t>
+            </a:r>
+          </a:p>
+          <a:p>
+            <a:pPr algn="l">
+              <a:spcAft>
+                <a:spcPts val="1200"/>
+              </a:spcAft>
+            </a:pPr>
+            <a:r>
+              <a:rPr sz="1800" b="0" i="0">
+                <a:solidFill>
+                  <a:srgbClr val="011754"/>
+                </a:solidFill>
+                <a:latin typeface="Calibri"/>
+              </a:rPr>
+              <a:t>Obtienes un primer borrador en minutos.</a:t>
+            </a:r>
+          </a:p>
+          <a:p>
+            <a:pPr algn="l">
+              <a:spcAft>
+                <a:spcPts val="200"/>
+              </a:spcAft>
+            </a:pPr>
+            <a:r>
+              <a:rPr sz="1800" b="1" i="0">
+                <a:solidFill>
+                  <a:srgbClr val="A02A2A"/>
+                </a:solidFill>
+                <a:latin typeface="Calibri"/>
+              </a:rPr>
+              <a:t>Riesgo</a:t>
+            </a:r>
+          </a:p>
+          <a:p>
+            <a:pPr algn="l">
+              <a:spcAft>
+                <a:spcPts val="400"/>
+              </a:spcAft>
+            </a:pPr>
+            <a:r>
+              <a:rPr sz="1800" b="0" i="0">
+                <a:solidFill>
+                  <a:srgbClr val="011754"/>
+                </a:solidFill>
+                <a:latin typeface="Calibri"/>
+              </a:rPr>
+              <a:t>Pérdida de autoría y de tu propia voz.</a:t>
+            </a:r>
+          </a:p>
+        </p:txBody>
+      </p:sp>
+      <p:sp>
+        <p:nvSpPr>
+          <p:cNvPr id="13" name="Rounded Rectangle 12"/>
           <p:cNvSpPr/>
           <p:nvPr/>
         </p:nvSpPr>
         <p:spPr>
           <a:xfrm>
-            <a:off x="3813048" y="2487168"/>
-            <a:ext cx="7772400" cy="777240"/>
+            <a:off x="6190488" y="2057400"/>
+            <a:ext cx="2606040" cy="4114800"/>
           </a:xfrm>
           <a:prstGeom prst="roundRect">
             <a:avLst>
@@ -4524,58 +4897,17 @@
       </p:sp>
       <p:sp>
         <p:nvSpPr>
-          <p:cNvPr id="11" name="TextBox 10"/>
-          <p:cNvSpPr txBox="1"/>
-          <p:nvPr/>
-        </p:nvSpPr>
-        <p:spPr>
-          <a:xfrm>
-            <a:off x="3977639" y="2487168"/>
-            <a:ext cx="7498079" cy="777240"/>
-          </a:xfrm>
-          <a:prstGeom prst="rect">
-            <a:avLst/>
-          </a:prstGeom>
-          <a:noFill/>
-        </p:spPr>
-        <p:txBody>
-          <a:bodyPr wrap="square" lIns="45720" rIns="45720" tIns="27432" bIns="27432" anchor="ctr">
-            <a:spAutoFit/>
-          </a:bodyPr>
-          <a:lstStyle/>
-          <a:p>
-            <a:pPr algn="l">
-              <a:spcAft>
-                <a:spcPts val="400"/>
-              </a:spcAft>
-            </a:pPr>
-            <a:r>
-              <a:rPr sz="1800" b="0" i="0">
-                <a:solidFill>
-                  <a:srgbClr val="011754"/>
-                </a:solidFill>
-                <a:latin typeface="Calibri"/>
-              </a:rPr>
-              <a:t>¿Las ideas se relacionan entre sí sin contradicciones internas?</a:t>
-            </a:r>
-          </a:p>
-        </p:txBody>
-      </p:sp>
-      <p:sp>
-        <p:nvSpPr>
-          <p:cNvPr id="12" name="Rounded Rectangle 11"/>
+          <p:cNvPr id="14" name="Oval 13"/>
           <p:cNvSpPr/>
           <p:nvPr/>
         </p:nvSpPr>
         <p:spPr>
           <a:xfrm>
-            <a:off x="612648" y="3374135"/>
-            <a:ext cx="3108960" cy="777240"/>
-          </a:xfrm>
-          <a:prstGeom prst="roundRect">
-            <a:avLst>
-              <a:gd name="adj" fmla="val 6000"/>
-            </a:avLst>
+            <a:off x="6373368" y="2194560"/>
+            <a:ext cx="548640" cy="548640"/>
+          </a:xfrm>
+          <a:prstGeom prst="ellipse">
+            <a:avLst/>
           </a:prstGeom>
           <a:solidFill>
             <a:srgbClr val="2B4EB4"/>
@@ -4600,23 +4932,32 @@
           </a:fontRef>
         </p:style>
         <p:txBody>
-          <a:bodyPr rtlCol="0" anchor="ctr"/>
+          <a:bodyPr rtlCol="0" anchor="ctr" lIns="0" rIns="0" tIns="0" bIns="0"/>
           <a:lstStyle/>
           <a:p>
             <a:pPr algn="ctr"/>
-          </a:p>
-        </p:txBody>
-      </p:sp>
-      <p:sp>
-        <p:nvSpPr>
-          <p:cNvPr id="13" name="TextBox 12"/>
+            <a:r>
+              <a:rPr sz="2000" b="1">
+                <a:solidFill>
+                  <a:srgbClr val="FFFFFF"/>
+                </a:solidFill>
+                <a:latin typeface="Calibri"/>
+              </a:rPr>
+              <a:t>3</a:t>
+            </a:r>
+          </a:p>
+        </p:txBody>
+      </p:sp>
+      <p:sp>
+        <p:nvSpPr>
+          <p:cNvPr id="15" name="TextBox 14"/>
           <p:cNvSpPr txBox="1"/>
           <p:nvPr/>
         </p:nvSpPr>
         <p:spPr>
           <a:xfrm>
-            <a:off x="731520" y="3374135"/>
-            <a:ext cx="2926080" cy="777240"/>
+            <a:off x="7013448" y="2194560"/>
+            <a:ext cx="1691640" cy="548640"/>
           </a:xfrm>
           <a:prstGeom prst="rect">
             <a:avLst/>
@@ -4637,25 +4978,112 @@
             <a:r>
               <a:rPr sz="2000" b="1" i="0">
                 <a:solidFill>
-                  <a:srgbClr val="FFFFFF"/>
-                </a:solidFill>
-                <a:latin typeface="Calibri"/>
-              </a:rPr>
-              <a:t>Suficiencia</a:t>
-            </a:r>
-          </a:p>
-        </p:txBody>
-      </p:sp>
-      <p:sp>
-        <p:nvSpPr>
-          <p:cNvPr id="14" name="Rounded Rectangle 13"/>
+                  <a:srgbClr val="2B4EB4"/>
+                </a:solidFill>
+                <a:latin typeface="Calibri"/>
+              </a:rPr>
+              <a:t>Analizar</a:t>
+            </a:r>
+          </a:p>
+        </p:txBody>
+      </p:sp>
+      <p:sp>
+        <p:nvSpPr>
+          <p:cNvPr id="16" name="TextBox 15"/>
+          <p:cNvSpPr txBox="1"/>
+          <p:nvPr/>
+        </p:nvSpPr>
+        <p:spPr>
+          <a:xfrm>
+            <a:off x="6373368" y="2880360"/>
+            <a:ext cx="2240280" cy="3200400"/>
+          </a:xfrm>
+          <a:prstGeom prst="rect">
+            <a:avLst/>
+          </a:prstGeom>
+          <a:noFill/>
+        </p:spPr>
+        <p:txBody>
+          <a:bodyPr wrap="square" lIns="45720" rIns="45720" tIns="27432" bIns="27432" anchor="t">
+            <a:spAutoFit/>
+          </a:bodyPr>
+          <a:lstStyle/>
+          <a:p>
+            <a:pPr algn="l">
+              <a:spcAft>
+                <a:spcPts val="200"/>
+              </a:spcAft>
+            </a:pPr>
+            <a:r>
+              <a:rPr sz="1800" b="1" i="0">
+                <a:solidFill>
+                  <a:srgbClr val="2B4EB4"/>
+                </a:solidFill>
+                <a:latin typeface="Calibri"/>
+              </a:rPr>
+              <a:t>Oportunidad</a:t>
+            </a:r>
+          </a:p>
+          <a:p>
+            <a:pPr algn="l">
+              <a:spcAft>
+                <a:spcPts val="1200"/>
+              </a:spcAft>
+            </a:pPr>
+            <a:r>
+              <a:rPr sz="1800" b="0" i="0">
+                <a:solidFill>
+                  <a:srgbClr val="011754"/>
+                </a:solidFill>
+                <a:latin typeface="Calibri"/>
+              </a:rPr>
+              <a:t>Comparas alternativas y estructuras ideas.</a:t>
+            </a:r>
+          </a:p>
+          <a:p>
+            <a:pPr algn="l">
+              <a:spcAft>
+                <a:spcPts val="200"/>
+              </a:spcAft>
+            </a:pPr>
+            <a:r>
+              <a:rPr sz="1800" b="1" i="0">
+                <a:solidFill>
+                  <a:srgbClr val="A02A2A"/>
+                </a:solidFill>
+                <a:latin typeface="Calibri"/>
+              </a:rPr>
+              <a:t>Riesgo</a:t>
+            </a:r>
+          </a:p>
+          <a:p>
+            <a:pPr algn="l">
+              <a:spcAft>
+                <a:spcPts val="400"/>
+              </a:spcAft>
+            </a:pPr>
+            <a:r>
+              <a:rPr sz="1800" b="0" i="0">
+                <a:solidFill>
+                  <a:srgbClr val="011754"/>
+                </a:solidFill>
+                <a:latin typeface="Calibri"/>
+              </a:rPr>
+              <a:t>Datos o cifras inventados con total seguridad.</a:t>
+            </a:r>
+          </a:p>
+        </p:txBody>
+      </p:sp>
+      <p:sp>
+        <p:nvSpPr>
+          <p:cNvPr id="17" name="Rounded Rectangle 16"/>
           <p:cNvSpPr/>
           <p:nvPr/>
         </p:nvSpPr>
         <p:spPr>
           <a:xfrm>
-            <a:off x="3813048" y="3374135"/>
-            <a:ext cx="7772400" cy="777240"/>
+            <a:off x="8979408" y="2057400"/>
+            <a:ext cx="2606040" cy="4114800"/>
           </a:xfrm>
           <a:prstGeom prst="roundRect">
             <a:avLst>
@@ -4694,58 +5122,17 @@
       </p:sp>
       <p:sp>
         <p:nvSpPr>
-          <p:cNvPr id="15" name="TextBox 14"/>
-          <p:cNvSpPr txBox="1"/>
-          <p:nvPr/>
-        </p:nvSpPr>
-        <p:spPr>
-          <a:xfrm>
-            <a:off x="3977639" y="3374135"/>
-            <a:ext cx="7498079" cy="777240"/>
-          </a:xfrm>
-          <a:prstGeom prst="rect">
-            <a:avLst/>
-          </a:prstGeom>
-          <a:noFill/>
-        </p:spPr>
-        <p:txBody>
-          <a:bodyPr wrap="square" lIns="45720" rIns="45720" tIns="27432" bIns="27432" anchor="ctr">
-            <a:spAutoFit/>
-          </a:bodyPr>
-          <a:lstStyle/>
-          <a:p>
-            <a:pPr algn="l">
-              <a:spcAft>
-                <a:spcPts val="400"/>
-              </a:spcAft>
-            </a:pPr>
-            <a:r>
-              <a:rPr sz="1800" b="0" i="0">
-                <a:solidFill>
-                  <a:srgbClr val="011754"/>
-                </a:solidFill>
-                <a:latin typeface="Calibri"/>
-              </a:rPr>
-              <a:t>¿Cubre lo necesario o deja vacíos relevantes sin mencionar?</a:t>
-            </a:r>
-          </a:p>
-        </p:txBody>
-      </p:sp>
-      <p:sp>
-        <p:nvSpPr>
-          <p:cNvPr id="16" name="Rounded Rectangle 15"/>
+          <p:cNvPr id="18" name="Oval 17"/>
           <p:cNvSpPr/>
           <p:nvPr/>
         </p:nvSpPr>
         <p:spPr>
           <a:xfrm>
-            <a:off x="612648" y="4261103"/>
-            <a:ext cx="3108960" cy="777240"/>
-          </a:xfrm>
-          <a:prstGeom prst="roundRect">
-            <a:avLst>
-              <a:gd name="adj" fmla="val 6000"/>
-            </a:avLst>
+            <a:off x="9162288" y="2194560"/>
+            <a:ext cx="548640" cy="548640"/>
+          </a:xfrm>
+          <a:prstGeom prst="ellipse">
+            <a:avLst/>
           </a:prstGeom>
           <a:solidFill>
             <a:srgbClr val="2B4EB4"/>
@@ -4770,23 +5157,32 @@
           </a:fontRef>
         </p:style>
         <p:txBody>
-          <a:bodyPr rtlCol="0" anchor="ctr"/>
+          <a:bodyPr rtlCol="0" anchor="ctr" lIns="0" rIns="0" tIns="0" bIns="0"/>
           <a:lstStyle/>
           <a:p>
             <a:pPr algn="ctr"/>
-          </a:p>
-        </p:txBody>
-      </p:sp>
-      <p:sp>
-        <p:nvSpPr>
-          <p:cNvPr id="17" name="TextBox 16"/>
+            <a:r>
+              <a:rPr sz="2000" b="1">
+                <a:solidFill>
+                  <a:srgbClr val="FFFFFF"/>
+                </a:solidFill>
+                <a:latin typeface="Calibri"/>
+              </a:rPr>
+              <a:t>4</a:t>
+            </a:r>
+          </a:p>
+        </p:txBody>
+      </p:sp>
+      <p:sp>
+        <p:nvSpPr>
+          <p:cNvPr id="19" name="TextBox 18"/>
           <p:cNvSpPr txBox="1"/>
           <p:nvPr/>
         </p:nvSpPr>
         <p:spPr>
           <a:xfrm>
-            <a:off x="731520" y="4261103"/>
-            <a:ext cx="2926080" cy="777240"/>
+            <a:off x="9802368" y="2194560"/>
+            <a:ext cx="1691640" cy="548640"/>
           </a:xfrm>
           <a:prstGeom prst="rect">
             <a:avLst/>
@@ -4807,71 +5203,25 @@
             <a:r>
               <a:rPr sz="2000" b="1" i="0">
                 <a:solidFill>
-                  <a:srgbClr val="FFFFFF"/>
-                </a:solidFill>
-                <a:latin typeface="Calibri"/>
-              </a:rPr>
-              <a:t>Verificabilidad</a:t>
-            </a:r>
-          </a:p>
-        </p:txBody>
-      </p:sp>
-      <p:sp>
-        <p:nvSpPr>
-          <p:cNvPr id="18" name="Rounded Rectangle 17"/>
-          <p:cNvSpPr/>
-          <p:nvPr/>
-        </p:nvSpPr>
-        <p:spPr>
-          <a:xfrm>
-            <a:off x="3813048" y="4261103"/>
-            <a:ext cx="7772400" cy="777240"/>
-          </a:xfrm>
-          <a:prstGeom prst="roundRect">
-            <a:avLst>
-              <a:gd name="adj" fmla="val 6000"/>
-            </a:avLst>
-          </a:prstGeom>
-          <a:solidFill>
-            <a:srgbClr val="D9DEEF"/>
-          </a:solidFill>
-          <a:ln>
-            <a:noFill/>
-          </a:ln>
-          <a:effectLst/>
-        </p:spPr>
-        <p:style>
-          <a:lnRef idx="1">
-            <a:schemeClr val="accent1"/>
-          </a:lnRef>
-          <a:fillRef idx="3">
-            <a:schemeClr val="accent1"/>
-          </a:fillRef>
-          <a:effectRef idx="2">
-            <a:schemeClr val="accent1"/>
-          </a:effectRef>
-          <a:fontRef idx="minor">
-            <a:schemeClr val="lt1"/>
-          </a:fontRef>
-        </p:style>
-        <p:txBody>
-          <a:bodyPr rtlCol="0" anchor="ctr"/>
-          <a:lstStyle/>
-          <a:p>
-            <a:pPr algn="ctr"/>
-          </a:p>
-        </p:txBody>
-      </p:sp>
-      <p:sp>
-        <p:nvSpPr>
-          <p:cNvPr id="19" name="TextBox 18"/>
+                  <a:srgbClr val="2B4EB4"/>
+                </a:solidFill>
+                <a:latin typeface="Calibri"/>
+              </a:rPr>
+              <a:t>Verificar</a:t>
+            </a:r>
+          </a:p>
+        </p:txBody>
+      </p:sp>
+      <p:sp>
+        <p:nvSpPr>
+          <p:cNvPr id="20" name="TextBox 19"/>
           <p:cNvSpPr txBox="1"/>
           <p:nvPr/>
         </p:nvSpPr>
         <p:spPr>
           <a:xfrm>
-            <a:off x="3977639" y="4261103"/>
-            <a:ext cx="7498079" cy="777240"/>
+            <a:off x="9162288" y="2880360"/>
+            <a:ext cx="2240280" cy="3200400"/>
           </a:xfrm>
           <a:prstGeom prst="rect">
             <a:avLst/>
@@ -4879,13 +5229,61 @@
           <a:noFill/>
         </p:spPr>
         <p:txBody>
-          <a:bodyPr wrap="square" lIns="45720" rIns="45720" tIns="27432" bIns="27432" anchor="ctr">
+          <a:bodyPr wrap="square" lIns="45720" rIns="45720" tIns="27432" bIns="27432" anchor="t">
             <a:spAutoFit/>
           </a:bodyPr>
           <a:lstStyle/>
           <a:p>
             <a:pPr algn="l">
               <a:spcAft>
+                <a:spcPts val="200"/>
+              </a:spcAft>
+            </a:pPr>
+            <a:r>
+              <a:rPr sz="1800" b="1" i="0">
+                <a:solidFill>
+                  <a:srgbClr val="2B4EB4"/>
+                </a:solidFill>
+                <a:latin typeface="Calibri"/>
+              </a:rPr>
+              <a:t>Oportunidad</a:t>
+            </a:r>
+          </a:p>
+          <a:p>
+            <a:pPr algn="l">
+              <a:spcAft>
+                <a:spcPts val="1200"/>
+              </a:spcAft>
+            </a:pPr>
+            <a:r>
+              <a:rPr sz="1800" b="0" i="0">
+                <a:solidFill>
+                  <a:srgbClr val="011754"/>
+                </a:solidFill>
+                <a:latin typeface="Calibri"/>
+              </a:rPr>
+              <a:t>Apoyas la revisión con listas de control.</a:t>
+            </a:r>
+          </a:p>
+          <a:p>
+            <a:pPr algn="l">
+              <a:spcAft>
+                <a:spcPts val="200"/>
+              </a:spcAft>
+            </a:pPr>
+            <a:r>
+              <a:rPr sz="1800" b="1" i="0">
+                <a:solidFill>
+                  <a:srgbClr val="A02A2A"/>
+                </a:solidFill>
+                <a:latin typeface="Calibri"/>
+              </a:rPr>
+              <a:t>Riesgo</a:t>
+            </a:r>
+          </a:p>
+          <a:p>
+            <a:pPr algn="l">
+              <a:spcAft>
                 <a:spcPts val="400"/>
               </a:spcAft>
             </a:pPr>
@@ -4896,177 +5294,7 @@
                 </a:solidFill>
                 <a:latin typeface="Calibri"/>
               </a:rPr>
-              <a:t>¿Es posible comprobar cada dato o referencia en una fuente externa?</a:t>
-            </a:r>
-          </a:p>
-        </p:txBody>
-      </p:sp>
-      <p:sp>
-        <p:nvSpPr>
-          <p:cNvPr id="20" name="Rounded Rectangle 19"/>
-          <p:cNvSpPr/>
-          <p:nvPr/>
-        </p:nvSpPr>
-        <p:spPr>
-          <a:xfrm>
-            <a:off x="612648" y="5148071"/>
-            <a:ext cx="3108960" cy="777240"/>
-          </a:xfrm>
-          <a:prstGeom prst="roundRect">
-            <a:avLst>
-              <a:gd name="adj" fmla="val 6000"/>
-            </a:avLst>
-          </a:prstGeom>
-          <a:solidFill>
-            <a:srgbClr val="2B4EB4"/>
-          </a:solidFill>
-          <a:ln>
-            <a:noFill/>
-          </a:ln>
-          <a:effectLst/>
-        </p:spPr>
-        <p:style>
-          <a:lnRef idx="1">
-            <a:schemeClr val="accent1"/>
-          </a:lnRef>
-          <a:fillRef idx="3">
-            <a:schemeClr val="accent1"/>
-          </a:fillRef>
-          <a:effectRef idx="2">
-            <a:schemeClr val="accent1"/>
-          </a:effectRef>
-          <a:fontRef idx="minor">
-            <a:schemeClr val="lt1"/>
-          </a:fontRef>
-        </p:style>
-        <p:txBody>
-          <a:bodyPr rtlCol="0" anchor="ctr"/>
-          <a:lstStyle/>
-          <a:p>
-            <a:pPr algn="ctr"/>
-          </a:p>
-        </p:txBody>
-      </p:sp>
-      <p:sp>
-        <p:nvSpPr>
-          <p:cNvPr id="21" name="TextBox 20"/>
-          <p:cNvSpPr txBox="1"/>
-          <p:nvPr/>
-        </p:nvSpPr>
-        <p:spPr>
-          <a:xfrm>
-            <a:off x="731520" y="5148071"/>
-            <a:ext cx="2926080" cy="777240"/>
-          </a:xfrm>
-          <a:prstGeom prst="rect">
-            <a:avLst/>
-          </a:prstGeom>
-          <a:noFill/>
-        </p:spPr>
-        <p:txBody>
-          <a:bodyPr wrap="square" lIns="45720" rIns="45720" tIns="27432" bIns="27432" anchor="ctr">
-            <a:spAutoFit/>
-          </a:bodyPr>
-          <a:lstStyle/>
-          <a:p>
-            <a:pPr algn="l">
-              <a:spcAft>
-                <a:spcPts val="400"/>
-              </a:spcAft>
-            </a:pPr>
-            <a:r>
-              <a:rPr sz="2000" b="1" i="0">
-                <a:solidFill>
-                  <a:srgbClr val="FFFFFF"/>
-                </a:solidFill>
-                <a:latin typeface="Calibri"/>
-              </a:rPr>
-              <a:t>Trazabilidad</a:t>
-            </a:r>
-          </a:p>
-        </p:txBody>
-      </p:sp>
-      <p:sp>
-        <p:nvSpPr>
-          <p:cNvPr id="22" name="Rounded Rectangle 21"/>
-          <p:cNvSpPr/>
-          <p:nvPr/>
-        </p:nvSpPr>
-        <p:spPr>
-          <a:xfrm>
-            <a:off x="3813048" y="5148071"/>
-            <a:ext cx="7772400" cy="777240"/>
-          </a:xfrm>
-          <a:prstGeom prst="roundRect">
-            <a:avLst>
-              <a:gd name="adj" fmla="val 6000"/>
-            </a:avLst>
-          </a:prstGeom>
-          <a:solidFill>
-            <a:srgbClr val="D9DEEF"/>
-          </a:solidFill>
-          <a:ln>
-            <a:noFill/>
-          </a:ln>
-          <a:effectLst/>
-        </p:spPr>
-        <p:style>
-          <a:lnRef idx="1">
-            <a:schemeClr val="accent1"/>
-          </a:lnRef>
-          <a:fillRef idx="3">
-            <a:schemeClr val="accent1"/>
-          </a:fillRef>
-          <a:effectRef idx="2">
-            <a:schemeClr val="accent1"/>
-          </a:effectRef>
-          <a:fontRef idx="minor">
-            <a:schemeClr val="lt1"/>
-          </a:fontRef>
-        </p:style>
-        <p:txBody>
-          <a:bodyPr rtlCol="0" anchor="ctr"/>
-          <a:lstStyle/>
-          <a:p>
-            <a:pPr algn="ctr"/>
-          </a:p>
-        </p:txBody>
-      </p:sp>
-      <p:sp>
-        <p:nvSpPr>
-          <p:cNvPr id="23" name="TextBox 22"/>
-          <p:cNvSpPr txBox="1"/>
-          <p:nvPr/>
-        </p:nvSpPr>
-        <p:spPr>
-          <a:xfrm>
-            <a:off x="3977639" y="5148071"/>
-            <a:ext cx="7498079" cy="777240"/>
-          </a:xfrm>
-          <a:prstGeom prst="rect">
-            <a:avLst/>
-          </a:prstGeom>
-          <a:noFill/>
-        </p:spPr>
-        <p:txBody>
-          <a:bodyPr wrap="square" lIns="45720" rIns="45720" tIns="27432" bIns="27432" anchor="ctr">
-            <a:spAutoFit/>
-          </a:bodyPr>
-          <a:lstStyle/>
-          <a:p>
-            <a:pPr algn="l">
-              <a:spcAft>
-                <a:spcPts val="400"/>
-              </a:spcAft>
-            </a:pPr>
-            <a:r>
-              <a:rPr sz="1800" b="0" i="0">
-                <a:solidFill>
-                  <a:srgbClr val="011754"/>
-                </a:solidFill>
-                <a:latin typeface="Calibri"/>
-              </a:rPr>
-              <a:t>¿Se identifica de dónde viene cada afirmación: dato propio, inferencia o fuente citada?</a:t>
+              <a:t>Dar por válida una cita sin comprobarla.</a:t>
             </a:r>
           </a:p>
         </p:txBody>
@@ -6196,6 +6424,133 @@
 </p:sld>
 </file>
 
+<file path=ppt/slides/slide14.xml><?xml version="1.0" encoding="utf-8"?>
+<p:sld xmlns:a="http://schemas.openxmlformats.org/drawingml/2006/main" xmlns:r="http://schemas.openxmlformats.org/officeDocument/2006/relationships" xmlns:p="http://schemas.openxmlformats.org/presentationml/2006/main">
+  <p:cSld>
+    <p:spTree>
+      <p:nvGrpSpPr>
+        <p:cNvPr id="1" name=""/>
+        <p:cNvGrpSpPr/>
+        <p:nvPr/>
+      </p:nvGrpSpPr>
+      <p:grpSpPr>
+        <a:xfrm>
+          <a:off x="0" y="0"/>
+          <a:ext cx="0" cy="0"/>
+          <a:chOff x="0" y="0"/>
+          <a:chExt cx="0" cy="0"/>
+        </a:xfrm>
+      </p:grpSpPr>
+      <p:pic>
+        <p:nvPicPr>
+          <p:cNvPr id="2" name="Picture 1" descr="divider_bg.png"/>
+          <p:cNvPicPr>
+            <a:picLocks noChangeAspect="1"/>
+          </p:cNvPicPr>
+          <p:nvPr/>
+        </p:nvPicPr>
+        <p:blipFill>
+          <a:blip r:embed="rId2"/>
+          <a:stretch>
+            <a:fillRect/>
+          </a:stretch>
+        </p:blipFill>
+        <p:spPr>
+          <a:xfrm>
+            <a:off x="0" y="0"/>
+            <a:ext cx="12191695" cy="6858000"/>
+          </a:xfrm>
+          <a:prstGeom prst="rect">
+            <a:avLst/>
+          </a:prstGeom>
+        </p:spPr>
+      </p:pic>
+      <p:sp>
+        <p:nvSpPr>
+          <p:cNvPr id="3" name="TextBox 2"/>
+          <p:cNvSpPr txBox="1"/>
+          <p:nvPr/>
+        </p:nvSpPr>
+        <p:spPr>
+          <a:xfrm>
+            <a:off x="982912" y="2676125"/>
+            <a:ext cx="437840" cy="1999910"/>
+          </a:xfrm>
+          <a:prstGeom prst="rect">
+            <a:avLst/>
+          </a:prstGeom>
+          <a:noFill/>
+        </p:spPr>
+        <p:txBody>
+          <a:bodyPr wrap="square">
+            <a:spAutoFit/>
+          </a:bodyPr>
+          <a:lstStyle/>
+          <a:p>
+            <a:pPr algn="l">
+              <a:lnSpc>
+                <a:spcPct val="115000"/>
+              </a:lnSpc>
+            </a:pPr>
+            <a:r>
+              <a:rPr sz="7200" b="1" i="0">
+                <a:solidFill>
+                  <a:srgbClr val="FFFFFF"/>
+                </a:solidFill>
+                <a:latin typeface="Calibri"/>
+              </a:rPr>
+              <a:t>3</a:t>
+            </a:r>
+          </a:p>
+        </p:txBody>
+      </p:sp>
+      <p:sp>
+        <p:nvSpPr>
+          <p:cNvPr id="4" name="TextBox 3"/>
+          <p:cNvSpPr txBox="1"/>
+          <p:nvPr/>
+        </p:nvSpPr>
+        <p:spPr>
+          <a:xfrm>
+            <a:off x="982912" y="4737409"/>
+            <a:ext cx="10346277" cy="702221"/>
+          </a:xfrm>
+          <a:prstGeom prst="rect">
+            <a:avLst/>
+          </a:prstGeom>
+          <a:noFill/>
+        </p:spPr>
+        <p:txBody>
+          <a:bodyPr wrap="square">
+            <a:spAutoFit/>
+          </a:bodyPr>
+          <a:lstStyle/>
+          <a:p>
+            <a:pPr algn="l">
+              <a:lnSpc>
+                <a:spcPct val="115000"/>
+              </a:lnSpc>
+            </a:pPr>
+            <a:r>
+              <a:rPr sz="2600" b="0" i="0">
+                <a:solidFill>
+                  <a:srgbClr val="FFFFFF"/>
+                </a:solidFill>
+                <a:latin typeface="Calibri"/>
+              </a:rPr>
+              <a:t>SESGOS, ERRORES, ALUCINACIONES Y LIMITACIONES</a:t>
+            </a:r>
+          </a:p>
+        </p:txBody>
+      </p:sp>
+    </p:spTree>
+  </p:cSld>
+  <p:clrMapOvr>
+    <a:masterClrMapping/>
+  </p:clrMapOvr>
+</p:sld>
+</file>
+
 <file path=ppt/slides/slide15.xml><?xml version="1.0" encoding="utf-8"?>
 <p:sld xmlns:a="http://schemas.openxmlformats.org/drawingml/2006/main" xmlns:r="http://schemas.openxmlformats.org/officeDocument/2006/relationships" xmlns:p="http://schemas.openxmlformats.org/presentationml/2006/main">
   <p:cSld>
@@ -7632,6 +7987,1686 @@
                 <a:latin typeface="Calibri"/>
               </a:rPr>
               <a:t>La fluidez del texto no es evidencia de que sea correcto.</a:t>
+            </a:r>
+          </a:p>
+        </p:txBody>
+      </p:sp>
+    </p:spTree>
+  </p:cSld>
+  <p:clrMapOvr>
+    <a:masterClrMapping/>
+  </p:clrMapOvr>
+</p:sld>
+</file>
+
+<file path=ppt/slides/slide17.xml><?xml version="1.0" encoding="utf-8"?>
+<p:sld xmlns:a="http://schemas.openxmlformats.org/drawingml/2006/main" xmlns:r="http://schemas.openxmlformats.org/officeDocument/2006/relationships" xmlns:p="http://schemas.openxmlformats.org/presentationml/2006/main">
+  <p:cSld>
+    <p:spTree>
+      <p:nvGrpSpPr>
+        <p:cNvPr id="1" name=""/>
+        <p:cNvGrpSpPr/>
+        <p:nvPr/>
+      </p:nvGrpSpPr>
+      <p:grpSpPr>
+        <a:xfrm>
+          <a:off x="0" y="0"/>
+          <a:ext cx="0" cy="0"/>
+          <a:chOff x="0" y="0"/>
+          <a:chExt cx="0" cy="0"/>
+        </a:xfrm>
+      </p:grpSpPr>
+      <p:pic>
+        <p:nvPicPr>
+          <p:cNvPr id="2" name="Picture 1" descr="bg_content.png"/>
+          <p:cNvPicPr>
+            <a:picLocks noChangeAspect="1"/>
+          </p:cNvPicPr>
+          <p:nvPr/>
+        </p:nvPicPr>
+        <p:blipFill>
+          <a:blip r:embed="rId2"/>
+          <a:stretch>
+            <a:fillRect/>
+          </a:stretch>
+        </p:blipFill>
+        <p:spPr>
+          <a:xfrm>
+            <a:off x="0" y="0"/>
+            <a:ext cx="12191695" cy="6858000"/>
+          </a:xfrm>
+          <a:prstGeom prst="rect">
+            <a:avLst/>
+          </a:prstGeom>
+        </p:spPr>
+      </p:pic>
+      <p:sp>
+        <p:nvSpPr>
+          <p:cNvPr id="3" name="TextBox 2"/>
+          <p:cNvSpPr txBox="1"/>
+          <p:nvPr/>
+        </p:nvSpPr>
+        <p:spPr>
+          <a:xfrm>
+            <a:off x="612648" y="777240"/>
+            <a:ext cx="10332720" cy="640080"/>
+          </a:xfrm>
+          <a:prstGeom prst="rect">
+            <a:avLst/>
+          </a:prstGeom>
+          <a:noFill/>
+        </p:spPr>
+        <p:txBody>
+          <a:bodyPr wrap="square" lIns="45720" rIns="45720" tIns="27432" bIns="27432" anchor="ctr">
+            <a:spAutoFit/>
+          </a:bodyPr>
+          <a:lstStyle/>
+          <a:p>
+            <a:pPr algn="l">
+              <a:spcAft>
+                <a:spcPts val="400"/>
+              </a:spcAft>
+            </a:pPr>
+            <a:r>
+              <a:rPr sz="2800" b="1" i="0">
+                <a:solidFill>
+                  <a:srgbClr val="1836B2"/>
+                </a:solidFill>
+                <a:latin typeface="Calibri"/>
+              </a:rPr>
+              <a:t>Banco de señales de alerta</a:t>
+            </a:r>
+          </a:p>
+        </p:txBody>
+      </p:sp>
+      <p:sp>
+        <p:nvSpPr>
+          <p:cNvPr id="4" name="Rounded Rectangle 3"/>
+          <p:cNvSpPr/>
+          <p:nvPr/>
+        </p:nvSpPr>
+        <p:spPr>
+          <a:xfrm>
+            <a:off x="612648" y="1600200"/>
+            <a:ext cx="5394960" cy="676656"/>
+          </a:xfrm>
+          <a:prstGeom prst="roundRect">
+            <a:avLst>
+              <a:gd name="adj" fmla="val 6000"/>
+            </a:avLst>
+          </a:prstGeom>
+          <a:solidFill>
+            <a:srgbClr val="D9DEEF"/>
+          </a:solidFill>
+          <a:ln>
+            <a:noFill/>
+          </a:ln>
+          <a:effectLst/>
+        </p:spPr>
+        <p:style>
+          <a:lnRef idx="1">
+            <a:schemeClr val="accent1"/>
+          </a:lnRef>
+          <a:fillRef idx="3">
+            <a:schemeClr val="accent1"/>
+          </a:fillRef>
+          <a:effectRef idx="2">
+            <a:schemeClr val="accent1"/>
+          </a:effectRef>
+          <a:fontRef idx="minor">
+            <a:schemeClr val="lt1"/>
+          </a:fontRef>
+        </p:style>
+        <p:txBody>
+          <a:bodyPr rtlCol="0" anchor="ctr"/>
+          <a:lstStyle/>
+          <a:p>
+            <a:pPr algn="ctr"/>
+          </a:p>
+        </p:txBody>
+      </p:sp>
+      <p:sp>
+        <p:nvSpPr>
+          <p:cNvPr id="5" name="Oval 4"/>
+          <p:cNvSpPr/>
+          <p:nvPr/>
+        </p:nvSpPr>
+        <p:spPr>
+          <a:xfrm>
+            <a:off x="722376" y="1682496"/>
+            <a:ext cx="512064" cy="512064"/>
+          </a:xfrm>
+          <a:prstGeom prst="ellipse">
+            <a:avLst/>
+          </a:prstGeom>
+          <a:solidFill>
+            <a:srgbClr val="2B4EB4"/>
+          </a:solidFill>
+          <a:ln>
+            <a:noFill/>
+          </a:ln>
+          <a:effectLst/>
+        </p:spPr>
+        <p:style>
+          <a:lnRef idx="1">
+            <a:schemeClr val="accent1"/>
+          </a:lnRef>
+          <a:fillRef idx="3">
+            <a:schemeClr val="accent1"/>
+          </a:fillRef>
+          <a:effectRef idx="2">
+            <a:schemeClr val="accent1"/>
+          </a:effectRef>
+          <a:fontRef idx="minor">
+            <a:schemeClr val="lt1"/>
+          </a:fontRef>
+        </p:style>
+        <p:txBody>
+          <a:bodyPr rtlCol="0" anchor="ctr" lIns="0" rIns="0" tIns="0" bIns="0"/>
+          <a:lstStyle/>
+          <a:p>
+            <a:pPr algn="ctr"/>
+            <a:r>
+              <a:rPr sz="1600" b="1">
+                <a:solidFill>
+                  <a:srgbClr val="FFFFFF"/>
+                </a:solidFill>
+                <a:latin typeface="Calibri"/>
+              </a:rPr>
+              <a:t>01</a:t>
+            </a:r>
+          </a:p>
+        </p:txBody>
+      </p:sp>
+      <p:sp>
+        <p:nvSpPr>
+          <p:cNvPr id="6" name="TextBox 5"/>
+          <p:cNvSpPr txBox="1"/>
+          <p:nvPr/>
+        </p:nvSpPr>
+        <p:spPr>
+          <a:xfrm>
+            <a:off x="1344168" y="1600200"/>
+            <a:ext cx="4572000" cy="676656"/>
+          </a:xfrm>
+          <a:prstGeom prst="rect">
+            <a:avLst/>
+          </a:prstGeom>
+          <a:noFill/>
+        </p:spPr>
+        <p:txBody>
+          <a:bodyPr wrap="square" lIns="45720" rIns="45720" tIns="27432" bIns="27432" anchor="ctr">
+            <a:spAutoFit/>
+          </a:bodyPr>
+          <a:lstStyle/>
+          <a:p>
+            <a:pPr algn="l">
+              <a:spcAft>
+                <a:spcPts val="400"/>
+              </a:spcAft>
+            </a:pPr>
+            <a:r>
+              <a:rPr sz="1800" b="0" i="0">
+                <a:solidFill>
+                  <a:srgbClr val="011754"/>
+                </a:solidFill>
+                <a:latin typeface="Calibri"/>
+              </a:rPr>
+              <a:t>Cifra sin fuente</a:t>
+            </a:r>
+          </a:p>
+        </p:txBody>
+      </p:sp>
+      <p:sp>
+        <p:nvSpPr>
+          <p:cNvPr id="7" name="Rounded Rectangle 6"/>
+          <p:cNvSpPr/>
+          <p:nvPr/>
+        </p:nvSpPr>
+        <p:spPr>
+          <a:xfrm>
+            <a:off x="612648" y="2368296"/>
+            <a:ext cx="5394960" cy="676656"/>
+          </a:xfrm>
+          <a:prstGeom prst="roundRect">
+            <a:avLst>
+              <a:gd name="adj" fmla="val 6000"/>
+            </a:avLst>
+          </a:prstGeom>
+          <a:solidFill>
+            <a:srgbClr val="D9DEEF"/>
+          </a:solidFill>
+          <a:ln>
+            <a:noFill/>
+          </a:ln>
+          <a:effectLst/>
+        </p:spPr>
+        <p:style>
+          <a:lnRef idx="1">
+            <a:schemeClr val="accent1"/>
+          </a:lnRef>
+          <a:fillRef idx="3">
+            <a:schemeClr val="accent1"/>
+          </a:fillRef>
+          <a:effectRef idx="2">
+            <a:schemeClr val="accent1"/>
+          </a:effectRef>
+          <a:fontRef idx="minor">
+            <a:schemeClr val="lt1"/>
+          </a:fontRef>
+        </p:style>
+        <p:txBody>
+          <a:bodyPr rtlCol="0" anchor="ctr"/>
+          <a:lstStyle/>
+          <a:p>
+            <a:pPr algn="ctr"/>
+          </a:p>
+        </p:txBody>
+      </p:sp>
+      <p:sp>
+        <p:nvSpPr>
+          <p:cNvPr id="8" name="Oval 7"/>
+          <p:cNvSpPr/>
+          <p:nvPr/>
+        </p:nvSpPr>
+        <p:spPr>
+          <a:xfrm>
+            <a:off x="722376" y="2450591"/>
+            <a:ext cx="512064" cy="512064"/>
+          </a:xfrm>
+          <a:prstGeom prst="ellipse">
+            <a:avLst/>
+          </a:prstGeom>
+          <a:solidFill>
+            <a:srgbClr val="2B4EB4"/>
+          </a:solidFill>
+          <a:ln>
+            <a:noFill/>
+          </a:ln>
+          <a:effectLst/>
+        </p:spPr>
+        <p:style>
+          <a:lnRef idx="1">
+            <a:schemeClr val="accent1"/>
+          </a:lnRef>
+          <a:fillRef idx="3">
+            <a:schemeClr val="accent1"/>
+          </a:fillRef>
+          <a:effectRef idx="2">
+            <a:schemeClr val="accent1"/>
+          </a:effectRef>
+          <a:fontRef idx="minor">
+            <a:schemeClr val="lt1"/>
+          </a:fontRef>
+        </p:style>
+        <p:txBody>
+          <a:bodyPr rtlCol="0" anchor="ctr" lIns="0" rIns="0" tIns="0" bIns="0"/>
+          <a:lstStyle/>
+          <a:p>
+            <a:pPr algn="ctr"/>
+            <a:r>
+              <a:rPr sz="1600" b="1">
+                <a:solidFill>
+                  <a:srgbClr val="FFFFFF"/>
+                </a:solidFill>
+                <a:latin typeface="Calibri"/>
+              </a:rPr>
+              <a:t>02</a:t>
+            </a:r>
+          </a:p>
+        </p:txBody>
+      </p:sp>
+      <p:sp>
+        <p:nvSpPr>
+          <p:cNvPr id="9" name="TextBox 8"/>
+          <p:cNvSpPr txBox="1"/>
+          <p:nvPr/>
+        </p:nvSpPr>
+        <p:spPr>
+          <a:xfrm>
+            <a:off x="1344168" y="2368296"/>
+            <a:ext cx="4572000" cy="676656"/>
+          </a:xfrm>
+          <a:prstGeom prst="rect">
+            <a:avLst/>
+          </a:prstGeom>
+          <a:noFill/>
+        </p:spPr>
+        <p:txBody>
+          <a:bodyPr wrap="square" lIns="45720" rIns="45720" tIns="27432" bIns="27432" anchor="ctr">
+            <a:spAutoFit/>
+          </a:bodyPr>
+          <a:lstStyle/>
+          <a:p>
+            <a:pPr algn="l">
+              <a:spcAft>
+                <a:spcPts val="400"/>
+              </a:spcAft>
+            </a:pPr>
+            <a:r>
+              <a:rPr sz="1800" b="0" i="0">
+                <a:solidFill>
+                  <a:srgbClr val="011754"/>
+                </a:solidFill>
+                <a:latin typeface="Calibri"/>
+              </a:rPr>
+              <a:t>Cita sin DOI</a:t>
+            </a:r>
+          </a:p>
+        </p:txBody>
+      </p:sp>
+      <p:sp>
+        <p:nvSpPr>
+          <p:cNvPr id="10" name="Rounded Rectangle 9"/>
+          <p:cNvSpPr/>
+          <p:nvPr/>
+        </p:nvSpPr>
+        <p:spPr>
+          <a:xfrm>
+            <a:off x="612648" y="3136391"/>
+            <a:ext cx="5394960" cy="676656"/>
+          </a:xfrm>
+          <a:prstGeom prst="roundRect">
+            <a:avLst>
+              <a:gd name="adj" fmla="val 6000"/>
+            </a:avLst>
+          </a:prstGeom>
+          <a:solidFill>
+            <a:srgbClr val="D9DEEF"/>
+          </a:solidFill>
+          <a:ln>
+            <a:noFill/>
+          </a:ln>
+          <a:effectLst/>
+        </p:spPr>
+        <p:style>
+          <a:lnRef idx="1">
+            <a:schemeClr val="accent1"/>
+          </a:lnRef>
+          <a:fillRef idx="3">
+            <a:schemeClr val="accent1"/>
+          </a:fillRef>
+          <a:effectRef idx="2">
+            <a:schemeClr val="accent1"/>
+          </a:effectRef>
+          <a:fontRef idx="minor">
+            <a:schemeClr val="lt1"/>
+          </a:fontRef>
+        </p:style>
+        <p:txBody>
+          <a:bodyPr rtlCol="0" anchor="ctr"/>
+          <a:lstStyle/>
+          <a:p>
+            <a:pPr algn="ctr"/>
+          </a:p>
+        </p:txBody>
+      </p:sp>
+      <p:sp>
+        <p:nvSpPr>
+          <p:cNvPr id="11" name="Oval 10"/>
+          <p:cNvSpPr/>
+          <p:nvPr/>
+        </p:nvSpPr>
+        <p:spPr>
+          <a:xfrm>
+            <a:off x="722376" y="3218687"/>
+            <a:ext cx="512064" cy="512064"/>
+          </a:xfrm>
+          <a:prstGeom prst="ellipse">
+            <a:avLst/>
+          </a:prstGeom>
+          <a:solidFill>
+            <a:srgbClr val="2B4EB4"/>
+          </a:solidFill>
+          <a:ln>
+            <a:noFill/>
+          </a:ln>
+          <a:effectLst/>
+        </p:spPr>
+        <p:style>
+          <a:lnRef idx="1">
+            <a:schemeClr val="accent1"/>
+          </a:lnRef>
+          <a:fillRef idx="3">
+            <a:schemeClr val="accent1"/>
+          </a:fillRef>
+          <a:effectRef idx="2">
+            <a:schemeClr val="accent1"/>
+          </a:effectRef>
+          <a:fontRef idx="minor">
+            <a:schemeClr val="lt1"/>
+          </a:fontRef>
+        </p:style>
+        <p:txBody>
+          <a:bodyPr rtlCol="0" anchor="ctr" lIns="0" rIns="0" tIns="0" bIns="0"/>
+          <a:lstStyle/>
+          <a:p>
+            <a:pPr algn="ctr"/>
+            <a:r>
+              <a:rPr sz="1600" b="1">
+                <a:solidFill>
+                  <a:srgbClr val="FFFFFF"/>
+                </a:solidFill>
+                <a:latin typeface="Calibri"/>
+              </a:rPr>
+              <a:t>03</a:t>
+            </a:r>
+          </a:p>
+        </p:txBody>
+      </p:sp>
+      <p:sp>
+        <p:nvSpPr>
+          <p:cNvPr id="12" name="TextBox 11"/>
+          <p:cNvSpPr txBox="1"/>
+          <p:nvPr/>
+        </p:nvSpPr>
+        <p:spPr>
+          <a:xfrm>
+            <a:off x="1344168" y="3136391"/>
+            <a:ext cx="4572000" cy="676656"/>
+          </a:xfrm>
+          <a:prstGeom prst="rect">
+            <a:avLst/>
+          </a:prstGeom>
+          <a:noFill/>
+        </p:spPr>
+        <p:txBody>
+          <a:bodyPr wrap="square" lIns="45720" rIns="45720" tIns="27432" bIns="27432" anchor="ctr">
+            <a:spAutoFit/>
+          </a:bodyPr>
+          <a:lstStyle/>
+          <a:p>
+            <a:pPr algn="l">
+              <a:spcAft>
+                <a:spcPts val="400"/>
+              </a:spcAft>
+            </a:pPr>
+            <a:r>
+              <a:rPr sz="1800" b="0" i="0">
+                <a:solidFill>
+                  <a:srgbClr val="011754"/>
+                </a:solidFill>
+                <a:latin typeface="Calibri"/>
+              </a:rPr>
+              <a:t>Autor que no aparece en ninguna base</a:t>
+            </a:r>
+          </a:p>
+        </p:txBody>
+      </p:sp>
+      <p:sp>
+        <p:nvSpPr>
+          <p:cNvPr id="13" name="Rounded Rectangle 12"/>
+          <p:cNvSpPr/>
+          <p:nvPr/>
+        </p:nvSpPr>
+        <p:spPr>
+          <a:xfrm>
+            <a:off x="612648" y="3904487"/>
+            <a:ext cx="5394960" cy="676656"/>
+          </a:xfrm>
+          <a:prstGeom prst="roundRect">
+            <a:avLst>
+              <a:gd name="adj" fmla="val 6000"/>
+            </a:avLst>
+          </a:prstGeom>
+          <a:solidFill>
+            <a:srgbClr val="D9DEEF"/>
+          </a:solidFill>
+          <a:ln>
+            <a:noFill/>
+          </a:ln>
+          <a:effectLst/>
+        </p:spPr>
+        <p:style>
+          <a:lnRef idx="1">
+            <a:schemeClr val="accent1"/>
+          </a:lnRef>
+          <a:fillRef idx="3">
+            <a:schemeClr val="accent1"/>
+          </a:fillRef>
+          <a:effectRef idx="2">
+            <a:schemeClr val="accent1"/>
+          </a:effectRef>
+          <a:fontRef idx="minor">
+            <a:schemeClr val="lt1"/>
+          </a:fontRef>
+        </p:style>
+        <p:txBody>
+          <a:bodyPr rtlCol="0" anchor="ctr"/>
+          <a:lstStyle/>
+          <a:p>
+            <a:pPr algn="ctr"/>
+          </a:p>
+        </p:txBody>
+      </p:sp>
+      <p:sp>
+        <p:nvSpPr>
+          <p:cNvPr id="14" name="Oval 13"/>
+          <p:cNvSpPr/>
+          <p:nvPr/>
+        </p:nvSpPr>
+        <p:spPr>
+          <a:xfrm>
+            <a:off x="722376" y="3986783"/>
+            <a:ext cx="512064" cy="512064"/>
+          </a:xfrm>
+          <a:prstGeom prst="ellipse">
+            <a:avLst/>
+          </a:prstGeom>
+          <a:solidFill>
+            <a:srgbClr val="2B4EB4"/>
+          </a:solidFill>
+          <a:ln>
+            <a:noFill/>
+          </a:ln>
+          <a:effectLst/>
+        </p:spPr>
+        <p:style>
+          <a:lnRef idx="1">
+            <a:schemeClr val="accent1"/>
+          </a:lnRef>
+          <a:fillRef idx="3">
+            <a:schemeClr val="accent1"/>
+          </a:fillRef>
+          <a:effectRef idx="2">
+            <a:schemeClr val="accent1"/>
+          </a:effectRef>
+          <a:fontRef idx="minor">
+            <a:schemeClr val="lt1"/>
+          </a:fontRef>
+        </p:style>
+        <p:txBody>
+          <a:bodyPr rtlCol="0" anchor="ctr" lIns="0" rIns="0" tIns="0" bIns="0"/>
+          <a:lstStyle/>
+          <a:p>
+            <a:pPr algn="ctr"/>
+            <a:r>
+              <a:rPr sz="1600" b="1">
+                <a:solidFill>
+                  <a:srgbClr val="FFFFFF"/>
+                </a:solidFill>
+                <a:latin typeface="Calibri"/>
+              </a:rPr>
+              <a:t>04</a:t>
+            </a:r>
+          </a:p>
+        </p:txBody>
+      </p:sp>
+      <p:sp>
+        <p:nvSpPr>
+          <p:cNvPr id="15" name="TextBox 14"/>
+          <p:cNvSpPr txBox="1"/>
+          <p:nvPr/>
+        </p:nvSpPr>
+        <p:spPr>
+          <a:xfrm>
+            <a:off x="1344168" y="3904487"/>
+            <a:ext cx="4572000" cy="676656"/>
+          </a:xfrm>
+          <a:prstGeom prst="rect">
+            <a:avLst/>
+          </a:prstGeom>
+          <a:noFill/>
+        </p:spPr>
+        <p:txBody>
+          <a:bodyPr wrap="square" lIns="45720" rIns="45720" tIns="27432" bIns="27432" anchor="ctr">
+            <a:spAutoFit/>
+          </a:bodyPr>
+          <a:lstStyle/>
+          <a:p>
+            <a:pPr algn="l">
+              <a:spcAft>
+                <a:spcPts val="400"/>
+              </a:spcAft>
+            </a:pPr>
+            <a:r>
+              <a:rPr sz="1800" b="0" i="0">
+                <a:solidFill>
+                  <a:srgbClr val="011754"/>
+                </a:solidFill>
+                <a:latin typeface="Calibri"/>
+              </a:rPr>
+              <a:t>Dato demasiado redondo</a:t>
+            </a:r>
+          </a:p>
+        </p:txBody>
+      </p:sp>
+      <p:sp>
+        <p:nvSpPr>
+          <p:cNvPr id="16" name="Rounded Rectangle 15"/>
+          <p:cNvSpPr/>
+          <p:nvPr/>
+        </p:nvSpPr>
+        <p:spPr>
+          <a:xfrm>
+            <a:off x="612648" y="4672583"/>
+            <a:ext cx="5394960" cy="676656"/>
+          </a:xfrm>
+          <a:prstGeom prst="roundRect">
+            <a:avLst>
+              <a:gd name="adj" fmla="val 6000"/>
+            </a:avLst>
+          </a:prstGeom>
+          <a:solidFill>
+            <a:srgbClr val="D9DEEF"/>
+          </a:solidFill>
+          <a:ln>
+            <a:noFill/>
+          </a:ln>
+          <a:effectLst/>
+        </p:spPr>
+        <p:style>
+          <a:lnRef idx="1">
+            <a:schemeClr val="accent1"/>
+          </a:lnRef>
+          <a:fillRef idx="3">
+            <a:schemeClr val="accent1"/>
+          </a:fillRef>
+          <a:effectRef idx="2">
+            <a:schemeClr val="accent1"/>
+          </a:effectRef>
+          <a:fontRef idx="minor">
+            <a:schemeClr val="lt1"/>
+          </a:fontRef>
+        </p:style>
+        <p:txBody>
+          <a:bodyPr rtlCol="0" anchor="ctr"/>
+          <a:lstStyle/>
+          <a:p>
+            <a:pPr algn="ctr"/>
+          </a:p>
+        </p:txBody>
+      </p:sp>
+      <p:sp>
+        <p:nvSpPr>
+          <p:cNvPr id="17" name="Oval 16"/>
+          <p:cNvSpPr/>
+          <p:nvPr/>
+        </p:nvSpPr>
+        <p:spPr>
+          <a:xfrm>
+            <a:off x="722376" y="4754879"/>
+            <a:ext cx="512064" cy="512064"/>
+          </a:xfrm>
+          <a:prstGeom prst="ellipse">
+            <a:avLst/>
+          </a:prstGeom>
+          <a:solidFill>
+            <a:srgbClr val="2B4EB4"/>
+          </a:solidFill>
+          <a:ln>
+            <a:noFill/>
+          </a:ln>
+          <a:effectLst/>
+        </p:spPr>
+        <p:style>
+          <a:lnRef idx="1">
+            <a:schemeClr val="accent1"/>
+          </a:lnRef>
+          <a:fillRef idx="3">
+            <a:schemeClr val="accent1"/>
+          </a:fillRef>
+          <a:effectRef idx="2">
+            <a:schemeClr val="accent1"/>
+          </a:effectRef>
+          <a:fontRef idx="minor">
+            <a:schemeClr val="lt1"/>
+          </a:fontRef>
+        </p:style>
+        <p:txBody>
+          <a:bodyPr rtlCol="0" anchor="ctr" lIns="0" rIns="0" tIns="0" bIns="0"/>
+          <a:lstStyle/>
+          <a:p>
+            <a:pPr algn="ctr"/>
+            <a:r>
+              <a:rPr sz="1600" b="1">
+                <a:solidFill>
+                  <a:srgbClr val="FFFFFF"/>
+                </a:solidFill>
+                <a:latin typeface="Calibri"/>
+              </a:rPr>
+              <a:t>05</a:t>
+            </a:r>
+          </a:p>
+        </p:txBody>
+      </p:sp>
+      <p:sp>
+        <p:nvSpPr>
+          <p:cNvPr id="18" name="TextBox 17"/>
+          <p:cNvSpPr txBox="1"/>
+          <p:nvPr/>
+        </p:nvSpPr>
+        <p:spPr>
+          <a:xfrm>
+            <a:off x="1344168" y="4672583"/>
+            <a:ext cx="4572000" cy="676656"/>
+          </a:xfrm>
+          <a:prstGeom prst="rect">
+            <a:avLst/>
+          </a:prstGeom>
+          <a:noFill/>
+        </p:spPr>
+        <p:txBody>
+          <a:bodyPr wrap="square" lIns="45720" rIns="45720" tIns="27432" bIns="27432" anchor="ctr">
+            <a:spAutoFit/>
+          </a:bodyPr>
+          <a:lstStyle/>
+          <a:p>
+            <a:pPr algn="l">
+              <a:spcAft>
+                <a:spcPts val="400"/>
+              </a:spcAft>
+            </a:pPr>
+            <a:r>
+              <a:rPr sz="1800" b="0" i="0">
+                <a:solidFill>
+                  <a:srgbClr val="011754"/>
+                </a:solidFill>
+                <a:latin typeface="Calibri"/>
+              </a:rPr>
+              <a:t>Tono absoluto («siempre», «nunca»)</a:t>
+            </a:r>
+          </a:p>
+        </p:txBody>
+      </p:sp>
+      <p:sp>
+        <p:nvSpPr>
+          <p:cNvPr id="19" name="Rounded Rectangle 18"/>
+          <p:cNvSpPr/>
+          <p:nvPr/>
+        </p:nvSpPr>
+        <p:spPr>
+          <a:xfrm>
+            <a:off x="6190488" y="1600200"/>
+            <a:ext cx="5394960" cy="676656"/>
+          </a:xfrm>
+          <a:prstGeom prst="roundRect">
+            <a:avLst>
+              <a:gd name="adj" fmla="val 6000"/>
+            </a:avLst>
+          </a:prstGeom>
+          <a:solidFill>
+            <a:srgbClr val="D9DEEF"/>
+          </a:solidFill>
+          <a:ln>
+            <a:noFill/>
+          </a:ln>
+          <a:effectLst/>
+        </p:spPr>
+        <p:style>
+          <a:lnRef idx="1">
+            <a:schemeClr val="accent1"/>
+          </a:lnRef>
+          <a:fillRef idx="3">
+            <a:schemeClr val="accent1"/>
+          </a:fillRef>
+          <a:effectRef idx="2">
+            <a:schemeClr val="accent1"/>
+          </a:effectRef>
+          <a:fontRef idx="minor">
+            <a:schemeClr val="lt1"/>
+          </a:fontRef>
+        </p:style>
+        <p:txBody>
+          <a:bodyPr rtlCol="0" anchor="ctr"/>
+          <a:lstStyle/>
+          <a:p>
+            <a:pPr algn="ctr"/>
+          </a:p>
+        </p:txBody>
+      </p:sp>
+      <p:sp>
+        <p:nvSpPr>
+          <p:cNvPr id="20" name="Oval 19"/>
+          <p:cNvSpPr/>
+          <p:nvPr/>
+        </p:nvSpPr>
+        <p:spPr>
+          <a:xfrm>
+            <a:off x="6300216" y="1682496"/>
+            <a:ext cx="512064" cy="512064"/>
+          </a:xfrm>
+          <a:prstGeom prst="ellipse">
+            <a:avLst/>
+          </a:prstGeom>
+          <a:solidFill>
+            <a:srgbClr val="2B4EB4"/>
+          </a:solidFill>
+          <a:ln>
+            <a:noFill/>
+          </a:ln>
+          <a:effectLst/>
+        </p:spPr>
+        <p:style>
+          <a:lnRef idx="1">
+            <a:schemeClr val="accent1"/>
+          </a:lnRef>
+          <a:fillRef idx="3">
+            <a:schemeClr val="accent1"/>
+          </a:fillRef>
+          <a:effectRef idx="2">
+            <a:schemeClr val="accent1"/>
+          </a:effectRef>
+          <a:fontRef idx="minor">
+            <a:schemeClr val="lt1"/>
+          </a:fontRef>
+        </p:style>
+        <p:txBody>
+          <a:bodyPr rtlCol="0" anchor="ctr" lIns="0" rIns="0" tIns="0" bIns="0"/>
+          <a:lstStyle/>
+          <a:p>
+            <a:pPr algn="ctr"/>
+            <a:r>
+              <a:rPr sz="1600" b="1">
+                <a:solidFill>
+                  <a:srgbClr val="FFFFFF"/>
+                </a:solidFill>
+                <a:latin typeface="Calibri"/>
+              </a:rPr>
+              <a:t>06</a:t>
+            </a:r>
+          </a:p>
+        </p:txBody>
+      </p:sp>
+      <p:sp>
+        <p:nvSpPr>
+          <p:cNvPr id="21" name="TextBox 20"/>
+          <p:cNvSpPr txBox="1"/>
+          <p:nvPr/>
+        </p:nvSpPr>
+        <p:spPr>
+          <a:xfrm>
+            <a:off x="6922007" y="1600200"/>
+            <a:ext cx="4572000" cy="676656"/>
+          </a:xfrm>
+          <a:prstGeom prst="rect">
+            <a:avLst/>
+          </a:prstGeom>
+          <a:noFill/>
+        </p:spPr>
+        <p:txBody>
+          <a:bodyPr wrap="square" lIns="45720" rIns="45720" tIns="27432" bIns="27432" anchor="ctr">
+            <a:spAutoFit/>
+          </a:bodyPr>
+          <a:lstStyle/>
+          <a:p>
+            <a:pPr algn="l">
+              <a:spcAft>
+                <a:spcPts val="400"/>
+              </a:spcAft>
+            </a:pPr>
+            <a:r>
+              <a:rPr sz="1800" b="0" i="0">
+                <a:solidFill>
+                  <a:srgbClr val="011754"/>
+                </a:solidFill>
+                <a:latin typeface="Calibri"/>
+              </a:rPr>
+              <a:t>Fuente que no coincide con el tema</a:t>
+            </a:r>
+          </a:p>
+        </p:txBody>
+      </p:sp>
+      <p:sp>
+        <p:nvSpPr>
+          <p:cNvPr id="22" name="Rounded Rectangle 21"/>
+          <p:cNvSpPr/>
+          <p:nvPr/>
+        </p:nvSpPr>
+        <p:spPr>
+          <a:xfrm>
+            <a:off x="6190488" y="2368296"/>
+            <a:ext cx="5394960" cy="676656"/>
+          </a:xfrm>
+          <a:prstGeom prst="roundRect">
+            <a:avLst>
+              <a:gd name="adj" fmla="val 6000"/>
+            </a:avLst>
+          </a:prstGeom>
+          <a:solidFill>
+            <a:srgbClr val="D9DEEF"/>
+          </a:solidFill>
+          <a:ln>
+            <a:noFill/>
+          </a:ln>
+          <a:effectLst/>
+        </p:spPr>
+        <p:style>
+          <a:lnRef idx="1">
+            <a:schemeClr val="accent1"/>
+          </a:lnRef>
+          <a:fillRef idx="3">
+            <a:schemeClr val="accent1"/>
+          </a:fillRef>
+          <a:effectRef idx="2">
+            <a:schemeClr val="accent1"/>
+          </a:effectRef>
+          <a:fontRef idx="minor">
+            <a:schemeClr val="lt1"/>
+          </a:fontRef>
+        </p:style>
+        <p:txBody>
+          <a:bodyPr rtlCol="0" anchor="ctr"/>
+          <a:lstStyle/>
+          <a:p>
+            <a:pPr algn="ctr"/>
+          </a:p>
+        </p:txBody>
+      </p:sp>
+      <p:sp>
+        <p:nvSpPr>
+          <p:cNvPr id="23" name="Oval 22"/>
+          <p:cNvSpPr/>
+          <p:nvPr/>
+        </p:nvSpPr>
+        <p:spPr>
+          <a:xfrm>
+            <a:off x="6300216" y="2450591"/>
+            <a:ext cx="512064" cy="512064"/>
+          </a:xfrm>
+          <a:prstGeom prst="ellipse">
+            <a:avLst/>
+          </a:prstGeom>
+          <a:solidFill>
+            <a:srgbClr val="2B4EB4"/>
+          </a:solidFill>
+          <a:ln>
+            <a:noFill/>
+          </a:ln>
+          <a:effectLst/>
+        </p:spPr>
+        <p:style>
+          <a:lnRef idx="1">
+            <a:schemeClr val="accent1"/>
+          </a:lnRef>
+          <a:fillRef idx="3">
+            <a:schemeClr val="accent1"/>
+          </a:fillRef>
+          <a:effectRef idx="2">
+            <a:schemeClr val="accent1"/>
+          </a:effectRef>
+          <a:fontRef idx="minor">
+            <a:schemeClr val="lt1"/>
+          </a:fontRef>
+        </p:style>
+        <p:txBody>
+          <a:bodyPr rtlCol="0" anchor="ctr" lIns="0" rIns="0" tIns="0" bIns="0"/>
+          <a:lstStyle/>
+          <a:p>
+            <a:pPr algn="ctr"/>
+            <a:r>
+              <a:rPr sz="1600" b="1">
+                <a:solidFill>
+                  <a:srgbClr val="FFFFFF"/>
+                </a:solidFill>
+                <a:latin typeface="Calibri"/>
+              </a:rPr>
+              <a:t>07</a:t>
+            </a:r>
+          </a:p>
+        </p:txBody>
+      </p:sp>
+      <p:sp>
+        <p:nvSpPr>
+          <p:cNvPr id="24" name="TextBox 23"/>
+          <p:cNvSpPr txBox="1"/>
+          <p:nvPr/>
+        </p:nvSpPr>
+        <p:spPr>
+          <a:xfrm>
+            <a:off x="6922007" y="2368296"/>
+            <a:ext cx="4572000" cy="676656"/>
+          </a:xfrm>
+          <a:prstGeom prst="rect">
+            <a:avLst/>
+          </a:prstGeom>
+          <a:noFill/>
+        </p:spPr>
+        <p:txBody>
+          <a:bodyPr wrap="square" lIns="45720" rIns="45720" tIns="27432" bIns="27432" anchor="ctr">
+            <a:spAutoFit/>
+          </a:bodyPr>
+          <a:lstStyle/>
+          <a:p>
+            <a:pPr algn="l">
+              <a:spcAft>
+                <a:spcPts val="400"/>
+              </a:spcAft>
+            </a:pPr>
+            <a:r>
+              <a:rPr sz="1800" b="0" i="0">
+                <a:solidFill>
+                  <a:srgbClr val="011754"/>
+                </a:solidFill>
+                <a:latin typeface="Calibri"/>
+              </a:rPr>
+              <a:t>Referencia reciente imposible de verificar</a:t>
+            </a:r>
+          </a:p>
+        </p:txBody>
+      </p:sp>
+      <p:sp>
+        <p:nvSpPr>
+          <p:cNvPr id="25" name="Rounded Rectangle 24"/>
+          <p:cNvSpPr/>
+          <p:nvPr/>
+        </p:nvSpPr>
+        <p:spPr>
+          <a:xfrm>
+            <a:off x="6190488" y="3136391"/>
+            <a:ext cx="5394960" cy="676656"/>
+          </a:xfrm>
+          <a:prstGeom prst="roundRect">
+            <a:avLst>
+              <a:gd name="adj" fmla="val 6000"/>
+            </a:avLst>
+          </a:prstGeom>
+          <a:solidFill>
+            <a:srgbClr val="D9DEEF"/>
+          </a:solidFill>
+          <a:ln>
+            <a:noFill/>
+          </a:ln>
+          <a:effectLst/>
+        </p:spPr>
+        <p:style>
+          <a:lnRef idx="1">
+            <a:schemeClr val="accent1"/>
+          </a:lnRef>
+          <a:fillRef idx="3">
+            <a:schemeClr val="accent1"/>
+          </a:fillRef>
+          <a:effectRef idx="2">
+            <a:schemeClr val="accent1"/>
+          </a:effectRef>
+          <a:fontRef idx="minor">
+            <a:schemeClr val="lt1"/>
+          </a:fontRef>
+        </p:style>
+        <p:txBody>
+          <a:bodyPr rtlCol="0" anchor="ctr"/>
+          <a:lstStyle/>
+          <a:p>
+            <a:pPr algn="ctr"/>
+          </a:p>
+        </p:txBody>
+      </p:sp>
+      <p:sp>
+        <p:nvSpPr>
+          <p:cNvPr id="26" name="Oval 25"/>
+          <p:cNvSpPr/>
+          <p:nvPr/>
+        </p:nvSpPr>
+        <p:spPr>
+          <a:xfrm>
+            <a:off x="6300216" y="3218687"/>
+            <a:ext cx="512064" cy="512064"/>
+          </a:xfrm>
+          <a:prstGeom prst="ellipse">
+            <a:avLst/>
+          </a:prstGeom>
+          <a:solidFill>
+            <a:srgbClr val="2B4EB4"/>
+          </a:solidFill>
+          <a:ln>
+            <a:noFill/>
+          </a:ln>
+          <a:effectLst/>
+        </p:spPr>
+        <p:style>
+          <a:lnRef idx="1">
+            <a:schemeClr val="accent1"/>
+          </a:lnRef>
+          <a:fillRef idx="3">
+            <a:schemeClr val="accent1"/>
+          </a:fillRef>
+          <a:effectRef idx="2">
+            <a:schemeClr val="accent1"/>
+          </a:effectRef>
+          <a:fontRef idx="minor">
+            <a:schemeClr val="lt1"/>
+          </a:fontRef>
+        </p:style>
+        <p:txBody>
+          <a:bodyPr rtlCol="0" anchor="ctr" lIns="0" rIns="0" tIns="0" bIns="0"/>
+          <a:lstStyle/>
+          <a:p>
+            <a:pPr algn="ctr"/>
+            <a:r>
+              <a:rPr sz="1600" b="1">
+                <a:solidFill>
+                  <a:srgbClr val="FFFFFF"/>
+                </a:solidFill>
+                <a:latin typeface="Calibri"/>
+              </a:rPr>
+              <a:t>08</a:t>
+            </a:r>
+          </a:p>
+        </p:txBody>
+      </p:sp>
+      <p:sp>
+        <p:nvSpPr>
+          <p:cNvPr id="27" name="TextBox 26"/>
+          <p:cNvSpPr txBox="1"/>
+          <p:nvPr/>
+        </p:nvSpPr>
+        <p:spPr>
+          <a:xfrm>
+            <a:off x="6922007" y="3136391"/>
+            <a:ext cx="4572000" cy="676656"/>
+          </a:xfrm>
+          <a:prstGeom prst="rect">
+            <a:avLst/>
+          </a:prstGeom>
+          <a:noFill/>
+        </p:spPr>
+        <p:txBody>
+          <a:bodyPr wrap="square" lIns="45720" rIns="45720" tIns="27432" bIns="27432" anchor="ctr">
+            <a:spAutoFit/>
+          </a:bodyPr>
+          <a:lstStyle/>
+          <a:p>
+            <a:pPr algn="l">
+              <a:spcAft>
+                <a:spcPts val="400"/>
+              </a:spcAft>
+            </a:pPr>
+            <a:r>
+              <a:rPr sz="1800" b="0" i="0">
+                <a:solidFill>
+                  <a:srgbClr val="011754"/>
+                </a:solidFill>
+                <a:latin typeface="Calibri"/>
+              </a:rPr>
+              <a:t>Ausencia de limitaciones</a:t>
+            </a:r>
+          </a:p>
+        </p:txBody>
+      </p:sp>
+      <p:sp>
+        <p:nvSpPr>
+          <p:cNvPr id="28" name="Rounded Rectangle 27"/>
+          <p:cNvSpPr/>
+          <p:nvPr/>
+        </p:nvSpPr>
+        <p:spPr>
+          <a:xfrm>
+            <a:off x="6190488" y="3904487"/>
+            <a:ext cx="5394960" cy="676656"/>
+          </a:xfrm>
+          <a:prstGeom prst="roundRect">
+            <a:avLst>
+              <a:gd name="adj" fmla="val 6000"/>
+            </a:avLst>
+          </a:prstGeom>
+          <a:solidFill>
+            <a:srgbClr val="D9DEEF"/>
+          </a:solidFill>
+          <a:ln>
+            <a:noFill/>
+          </a:ln>
+          <a:effectLst/>
+        </p:spPr>
+        <p:style>
+          <a:lnRef idx="1">
+            <a:schemeClr val="accent1"/>
+          </a:lnRef>
+          <a:fillRef idx="3">
+            <a:schemeClr val="accent1"/>
+          </a:fillRef>
+          <a:effectRef idx="2">
+            <a:schemeClr val="accent1"/>
+          </a:effectRef>
+          <a:fontRef idx="minor">
+            <a:schemeClr val="lt1"/>
+          </a:fontRef>
+        </p:style>
+        <p:txBody>
+          <a:bodyPr rtlCol="0" anchor="ctr"/>
+          <a:lstStyle/>
+          <a:p>
+            <a:pPr algn="ctr"/>
+          </a:p>
+        </p:txBody>
+      </p:sp>
+      <p:sp>
+        <p:nvSpPr>
+          <p:cNvPr id="29" name="Oval 28"/>
+          <p:cNvSpPr/>
+          <p:nvPr/>
+        </p:nvSpPr>
+        <p:spPr>
+          <a:xfrm>
+            <a:off x="6300216" y="3986783"/>
+            <a:ext cx="512064" cy="512064"/>
+          </a:xfrm>
+          <a:prstGeom prst="ellipse">
+            <a:avLst/>
+          </a:prstGeom>
+          <a:solidFill>
+            <a:srgbClr val="2B4EB4"/>
+          </a:solidFill>
+          <a:ln>
+            <a:noFill/>
+          </a:ln>
+          <a:effectLst/>
+        </p:spPr>
+        <p:style>
+          <a:lnRef idx="1">
+            <a:schemeClr val="accent1"/>
+          </a:lnRef>
+          <a:fillRef idx="3">
+            <a:schemeClr val="accent1"/>
+          </a:fillRef>
+          <a:effectRef idx="2">
+            <a:schemeClr val="accent1"/>
+          </a:effectRef>
+          <a:fontRef idx="minor">
+            <a:schemeClr val="lt1"/>
+          </a:fontRef>
+        </p:style>
+        <p:txBody>
+          <a:bodyPr rtlCol="0" anchor="ctr" lIns="0" rIns="0" tIns="0" bIns="0"/>
+          <a:lstStyle/>
+          <a:p>
+            <a:pPr algn="ctr"/>
+            <a:r>
+              <a:rPr sz="1600" b="1">
+                <a:solidFill>
+                  <a:srgbClr val="FFFFFF"/>
+                </a:solidFill>
+                <a:latin typeface="Calibri"/>
+              </a:rPr>
+              <a:t>09</a:t>
+            </a:r>
+          </a:p>
+        </p:txBody>
+      </p:sp>
+      <p:sp>
+        <p:nvSpPr>
+          <p:cNvPr id="30" name="TextBox 29"/>
+          <p:cNvSpPr txBox="1"/>
+          <p:nvPr/>
+        </p:nvSpPr>
+        <p:spPr>
+          <a:xfrm>
+            <a:off x="6922007" y="3904487"/>
+            <a:ext cx="4572000" cy="676656"/>
+          </a:xfrm>
+          <a:prstGeom prst="rect">
+            <a:avLst/>
+          </a:prstGeom>
+          <a:noFill/>
+        </p:spPr>
+        <p:txBody>
+          <a:bodyPr wrap="square" lIns="45720" rIns="45720" tIns="27432" bIns="27432" anchor="ctr">
+            <a:spAutoFit/>
+          </a:bodyPr>
+          <a:lstStyle/>
+          <a:p>
+            <a:pPr algn="l">
+              <a:spcAft>
+                <a:spcPts val="400"/>
+              </a:spcAft>
+            </a:pPr>
+            <a:r>
+              <a:rPr sz="1800" b="0" i="0">
+                <a:solidFill>
+                  <a:srgbClr val="011754"/>
+                </a:solidFill>
+                <a:latin typeface="Calibri"/>
+              </a:rPr>
+              <a:t>Enfoque repetido en el mismo tipo de fuente</a:t>
+            </a:r>
+          </a:p>
+        </p:txBody>
+      </p:sp>
+      <p:sp>
+        <p:nvSpPr>
+          <p:cNvPr id="31" name="Rounded Rectangle 30"/>
+          <p:cNvSpPr/>
+          <p:nvPr/>
+        </p:nvSpPr>
+        <p:spPr>
+          <a:xfrm>
+            <a:off x="6190488" y="4672583"/>
+            <a:ext cx="5394960" cy="676656"/>
+          </a:xfrm>
+          <a:prstGeom prst="roundRect">
+            <a:avLst>
+              <a:gd name="adj" fmla="val 6000"/>
+            </a:avLst>
+          </a:prstGeom>
+          <a:solidFill>
+            <a:srgbClr val="D9DEEF"/>
+          </a:solidFill>
+          <a:ln>
+            <a:noFill/>
+          </a:ln>
+          <a:effectLst/>
+        </p:spPr>
+        <p:style>
+          <a:lnRef idx="1">
+            <a:schemeClr val="accent1"/>
+          </a:lnRef>
+          <a:fillRef idx="3">
+            <a:schemeClr val="accent1"/>
+          </a:fillRef>
+          <a:effectRef idx="2">
+            <a:schemeClr val="accent1"/>
+          </a:effectRef>
+          <a:fontRef idx="minor">
+            <a:schemeClr val="lt1"/>
+          </a:fontRef>
+        </p:style>
+        <p:txBody>
+          <a:bodyPr rtlCol="0" anchor="ctr"/>
+          <a:lstStyle/>
+          <a:p>
+            <a:pPr algn="ctr"/>
+          </a:p>
+        </p:txBody>
+      </p:sp>
+      <p:sp>
+        <p:nvSpPr>
+          <p:cNvPr id="32" name="Oval 31"/>
+          <p:cNvSpPr/>
+          <p:nvPr/>
+        </p:nvSpPr>
+        <p:spPr>
+          <a:xfrm>
+            <a:off x="6300216" y="4754879"/>
+            <a:ext cx="512064" cy="512064"/>
+          </a:xfrm>
+          <a:prstGeom prst="ellipse">
+            <a:avLst/>
+          </a:prstGeom>
+          <a:solidFill>
+            <a:srgbClr val="2B4EB4"/>
+          </a:solidFill>
+          <a:ln>
+            <a:noFill/>
+          </a:ln>
+          <a:effectLst/>
+        </p:spPr>
+        <p:style>
+          <a:lnRef idx="1">
+            <a:schemeClr val="accent1"/>
+          </a:lnRef>
+          <a:fillRef idx="3">
+            <a:schemeClr val="accent1"/>
+          </a:fillRef>
+          <a:effectRef idx="2">
+            <a:schemeClr val="accent1"/>
+          </a:effectRef>
+          <a:fontRef idx="minor">
+            <a:schemeClr val="lt1"/>
+          </a:fontRef>
+        </p:style>
+        <p:txBody>
+          <a:bodyPr rtlCol="0" anchor="ctr" lIns="0" rIns="0" tIns="0" bIns="0"/>
+          <a:lstStyle/>
+          <a:p>
+            <a:pPr algn="ctr"/>
+            <a:r>
+              <a:rPr sz="1600" b="1">
+                <a:solidFill>
+                  <a:srgbClr val="FFFFFF"/>
+                </a:solidFill>
+                <a:latin typeface="Calibri"/>
+              </a:rPr>
+              <a:t>10</a:t>
+            </a:r>
+          </a:p>
+        </p:txBody>
+      </p:sp>
+      <p:sp>
+        <p:nvSpPr>
+          <p:cNvPr id="33" name="TextBox 32"/>
+          <p:cNvSpPr txBox="1"/>
+          <p:nvPr/>
+        </p:nvSpPr>
+        <p:spPr>
+          <a:xfrm>
+            <a:off x="6922007" y="4672583"/>
+            <a:ext cx="4572000" cy="676656"/>
+          </a:xfrm>
+          <a:prstGeom prst="rect">
+            <a:avLst/>
+          </a:prstGeom>
+          <a:noFill/>
+        </p:spPr>
+        <p:txBody>
+          <a:bodyPr wrap="square" lIns="45720" rIns="45720" tIns="27432" bIns="27432" anchor="ctr">
+            <a:spAutoFit/>
+          </a:bodyPr>
+          <a:lstStyle/>
+          <a:p>
+            <a:pPr algn="l">
+              <a:spcAft>
+                <a:spcPts val="400"/>
+              </a:spcAft>
+            </a:pPr>
+            <a:r>
+              <a:rPr sz="1800" b="0" i="0">
+                <a:solidFill>
+                  <a:srgbClr val="011754"/>
+                </a:solidFill>
+                <a:latin typeface="Calibri"/>
+              </a:rPr>
+              <a:t>Afirmación sin dato que la respalde</a:t>
+            </a:r>
+          </a:p>
+        </p:txBody>
+      </p:sp>
+      <p:sp>
+        <p:nvSpPr>
+          <p:cNvPr id="34" name="Rounded Rectangle 33"/>
+          <p:cNvSpPr/>
+          <p:nvPr/>
+        </p:nvSpPr>
+        <p:spPr>
+          <a:xfrm>
+            <a:off x="612648" y="5532120"/>
+            <a:ext cx="10972800" cy="685800"/>
+          </a:xfrm>
+          <a:prstGeom prst="roundRect">
+            <a:avLst>
+              <a:gd name="adj" fmla="val 6000"/>
+            </a:avLst>
+          </a:prstGeom>
+          <a:solidFill>
+            <a:srgbClr val="011754"/>
+          </a:solidFill>
+          <a:ln>
+            <a:noFill/>
+          </a:ln>
+          <a:effectLst/>
+        </p:spPr>
+        <p:style>
+          <a:lnRef idx="1">
+            <a:schemeClr val="accent1"/>
+          </a:lnRef>
+          <a:fillRef idx="3">
+            <a:schemeClr val="accent1"/>
+          </a:fillRef>
+          <a:effectRef idx="2">
+            <a:schemeClr val="accent1"/>
+          </a:effectRef>
+          <a:fontRef idx="minor">
+            <a:schemeClr val="lt1"/>
+          </a:fontRef>
+        </p:style>
+        <p:txBody>
+          <a:bodyPr rtlCol="0" anchor="ctr"/>
+          <a:lstStyle/>
+          <a:p>
+            <a:pPr algn="ctr"/>
+          </a:p>
+        </p:txBody>
+      </p:sp>
+      <p:sp>
+        <p:nvSpPr>
+          <p:cNvPr id="35" name="TextBox 34"/>
+          <p:cNvSpPr txBox="1"/>
+          <p:nvPr/>
+        </p:nvSpPr>
+        <p:spPr>
+          <a:xfrm>
+            <a:off x="841248" y="5532120"/>
+            <a:ext cx="10515600" cy="685800"/>
+          </a:xfrm>
+          <a:prstGeom prst="rect">
+            <a:avLst/>
+          </a:prstGeom>
+          <a:noFill/>
+        </p:spPr>
+        <p:txBody>
+          <a:bodyPr wrap="square" lIns="45720" rIns="45720" tIns="27432" bIns="27432" anchor="ctr">
+            <a:spAutoFit/>
+          </a:bodyPr>
+          <a:lstStyle/>
+          <a:p>
+            <a:pPr algn="l">
+              <a:spcAft>
+                <a:spcPts val="400"/>
+              </a:spcAft>
+            </a:pPr>
+            <a:r>
+              <a:rPr sz="1800" b="1" i="0">
+                <a:solidFill>
+                  <a:srgbClr val="FFFFFF"/>
+                </a:solidFill>
+                <a:latin typeface="Calibri"/>
+              </a:rPr>
+              <a:t>La lista completa de señales de alerta será un recurso descargable de la sesión.</a:t>
+            </a:r>
+          </a:p>
+        </p:txBody>
+      </p:sp>
+    </p:spTree>
+  </p:cSld>
+  <p:clrMapOvr>
+    <a:masterClrMapping/>
+  </p:clrMapOvr>
+</p:sld>
+</file>
+
+<file path=ppt/slides/slide18.xml><?xml version="1.0" encoding="utf-8"?>
+<p:sld xmlns:a="http://schemas.openxmlformats.org/drawingml/2006/main" xmlns:r="http://schemas.openxmlformats.org/officeDocument/2006/relationships" xmlns:p="http://schemas.openxmlformats.org/presentationml/2006/main">
+  <p:cSld>
+    <p:spTree>
+      <p:nvGrpSpPr>
+        <p:cNvPr id="1" name=""/>
+        <p:cNvGrpSpPr/>
+        <p:nvPr/>
+      </p:nvGrpSpPr>
+      <p:grpSpPr>
+        <a:xfrm>
+          <a:off x="0" y="0"/>
+          <a:ext cx="0" cy="0"/>
+          <a:chOff x="0" y="0"/>
+          <a:chExt cx="0" cy="0"/>
+        </a:xfrm>
+      </p:grpSpPr>
+      <p:pic>
+        <p:nvPicPr>
+          <p:cNvPr id="2" name="Picture 1" descr="divider_bg.png"/>
+          <p:cNvPicPr>
+            <a:picLocks noChangeAspect="1"/>
+          </p:cNvPicPr>
+          <p:nvPr/>
+        </p:nvPicPr>
+        <p:blipFill>
+          <a:blip r:embed="rId2"/>
+          <a:stretch>
+            <a:fillRect/>
+          </a:stretch>
+        </p:blipFill>
+        <p:spPr>
+          <a:xfrm>
+            <a:off x="0" y="0"/>
+            <a:ext cx="12191695" cy="6858000"/>
+          </a:xfrm>
+          <a:prstGeom prst="rect">
+            <a:avLst/>
+          </a:prstGeom>
+        </p:spPr>
+      </p:pic>
+      <p:sp>
+        <p:nvSpPr>
+          <p:cNvPr id="3" name="TextBox 2"/>
+          <p:cNvSpPr txBox="1"/>
+          <p:nvPr/>
+        </p:nvSpPr>
+        <p:spPr>
+          <a:xfrm>
+            <a:off x="982912" y="2676125"/>
+            <a:ext cx="437840" cy="1999910"/>
+          </a:xfrm>
+          <a:prstGeom prst="rect">
+            <a:avLst/>
+          </a:prstGeom>
+          <a:noFill/>
+        </p:spPr>
+        <p:txBody>
+          <a:bodyPr wrap="square">
+            <a:spAutoFit/>
+          </a:bodyPr>
+          <a:lstStyle/>
+          <a:p>
+            <a:pPr algn="l">
+              <a:lnSpc>
+                <a:spcPct val="115000"/>
+              </a:lnSpc>
+            </a:pPr>
+            <a:r>
+              <a:rPr sz="7200" b="1" i="0">
+                <a:solidFill>
+                  <a:srgbClr val="FFFFFF"/>
+                </a:solidFill>
+                <a:latin typeface="Calibri"/>
+              </a:rPr>
+              <a:t>4</a:t>
+            </a:r>
+          </a:p>
+        </p:txBody>
+      </p:sp>
+      <p:sp>
+        <p:nvSpPr>
+          <p:cNvPr id="4" name="TextBox 3"/>
+          <p:cNvSpPr txBox="1"/>
+          <p:nvPr/>
+        </p:nvSpPr>
+        <p:spPr>
+          <a:xfrm>
+            <a:off x="982912" y="4737409"/>
+            <a:ext cx="10346277" cy="702221"/>
+          </a:xfrm>
+          <a:prstGeom prst="rect">
+            <a:avLst/>
+          </a:prstGeom>
+          <a:noFill/>
+        </p:spPr>
+        <p:txBody>
+          <a:bodyPr wrap="square">
+            <a:spAutoFit/>
+          </a:bodyPr>
+          <a:lstStyle/>
+          <a:p>
+            <a:pPr algn="l">
+              <a:lnSpc>
+                <a:spcPct val="115000"/>
+              </a:lnSpc>
+            </a:pPr>
+            <a:r>
+              <a:rPr sz="2600" b="0" i="0">
+                <a:solidFill>
+                  <a:srgbClr val="FFFFFF"/>
+                </a:solidFill>
+                <a:latin typeface="Calibri"/>
+              </a:rPr>
+              <a:t>ÉTICA Y LÍMITES DEL USO DE LA IA EN LA ACADEMIA</a:t>
             </a:r>
           </a:p>
         </p:txBody>
@@ -9644,6 +11679,1355 @@
             <a:endParaRPr lang="es-MX" sz="1700" dirty="0">
               <a:latin typeface="Montserrat"/>
             </a:endParaRPr>
+          </a:p>
+        </p:txBody>
+      </p:sp>
+    </p:spTree>
+  </p:cSld>
+  <p:clrMapOvr>
+    <a:masterClrMapping/>
+  </p:clrMapOvr>
+</p:sld>
+</file>
+
+<file path=ppt/slides/slide20.xml><?xml version="1.0" encoding="utf-8"?>
+<p:sld xmlns:a="http://schemas.openxmlformats.org/drawingml/2006/main" xmlns:r="http://schemas.openxmlformats.org/officeDocument/2006/relationships" xmlns:p="http://schemas.openxmlformats.org/presentationml/2006/main">
+  <p:cSld>
+    <p:spTree>
+      <p:nvGrpSpPr>
+        <p:cNvPr id="1" name=""/>
+        <p:cNvGrpSpPr/>
+        <p:nvPr/>
+      </p:nvGrpSpPr>
+      <p:grpSpPr>
+        <a:xfrm>
+          <a:off x="0" y="0"/>
+          <a:ext cx="0" cy="0"/>
+          <a:chOff x="0" y="0"/>
+          <a:chExt cx="0" cy="0"/>
+        </a:xfrm>
+      </p:grpSpPr>
+      <p:pic>
+        <p:nvPicPr>
+          <p:cNvPr id="2" name="Picture 1" descr="bg_content.png"/>
+          <p:cNvPicPr>
+            <a:picLocks noChangeAspect="1"/>
+          </p:cNvPicPr>
+          <p:nvPr/>
+        </p:nvPicPr>
+        <p:blipFill>
+          <a:blip r:embed="rId2"/>
+          <a:stretch>
+            <a:fillRect/>
+          </a:stretch>
+        </p:blipFill>
+        <p:spPr>
+          <a:xfrm>
+            <a:off x="0" y="0"/>
+            <a:ext cx="12191695" cy="6858000"/>
+          </a:xfrm>
+          <a:prstGeom prst="rect">
+            <a:avLst/>
+          </a:prstGeom>
+        </p:spPr>
+      </p:pic>
+      <p:sp>
+        <p:nvSpPr>
+          <p:cNvPr id="3" name="TextBox 2"/>
+          <p:cNvSpPr txBox="1"/>
+          <p:nvPr/>
+        </p:nvSpPr>
+        <p:spPr>
+          <a:xfrm>
+            <a:off x="612648" y="777240"/>
+            <a:ext cx="10332720" cy="640080"/>
+          </a:xfrm>
+          <a:prstGeom prst="rect">
+            <a:avLst/>
+          </a:prstGeom>
+          <a:noFill/>
+        </p:spPr>
+        <p:txBody>
+          <a:bodyPr wrap="square" lIns="45720" rIns="45720" tIns="27432" bIns="27432" anchor="ctr">
+            <a:spAutoFit/>
+          </a:bodyPr>
+          <a:lstStyle/>
+          <a:p>
+            <a:pPr algn="l">
+              <a:spcAft>
+                <a:spcPts val="400"/>
+              </a:spcAft>
+            </a:pPr>
+            <a:r>
+              <a:rPr sz="2800" b="1" i="0">
+                <a:solidFill>
+                  <a:srgbClr val="1836B2"/>
+                </a:solidFill>
+                <a:latin typeface="Calibri"/>
+              </a:rPr>
+              <a:t>Qué no debe compartirse con una IA gratuita</a:t>
+            </a:r>
+          </a:p>
+        </p:txBody>
+      </p:sp>
+      <p:sp>
+        <p:nvSpPr>
+          <p:cNvPr id="4" name="TextBox 3"/>
+          <p:cNvSpPr txBox="1"/>
+          <p:nvPr/>
+        </p:nvSpPr>
+        <p:spPr>
+          <a:xfrm>
+            <a:off x="612648" y="1463040"/>
+            <a:ext cx="10972800" cy="457200"/>
+          </a:xfrm>
+          <a:prstGeom prst="rect">
+            <a:avLst/>
+          </a:prstGeom>
+          <a:noFill/>
+        </p:spPr>
+        <p:txBody>
+          <a:bodyPr wrap="square" lIns="45720" rIns="45720" tIns="27432" bIns="27432" anchor="t">
+            <a:spAutoFit/>
+          </a:bodyPr>
+          <a:lstStyle/>
+          <a:p>
+            <a:pPr algn="l">
+              <a:spcAft>
+                <a:spcPts val="400"/>
+              </a:spcAft>
+            </a:pPr>
+            <a:r>
+              <a:rPr sz="1800" b="0" i="0">
+                <a:solidFill>
+                  <a:srgbClr val="011754"/>
+                </a:solidFill>
+                <a:latin typeface="Calibri"/>
+              </a:rPr>
+              <a:t>Antes de pegar cualquier fragmento en un asistente conversacional, revísalo en cuatro pasos.</a:t>
+            </a:r>
+          </a:p>
+        </p:txBody>
+      </p:sp>
+      <p:sp>
+        <p:nvSpPr>
+          <p:cNvPr id="5" name="Rounded Rectangle 4"/>
+          <p:cNvSpPr/>
+          <p:nvPr/>
+        </p:nvSpPr>
+        <p:spPr>
+          <a:xfrm>
+            <a:off x="612648" y="2103120"/>
+            <a:ext cx="5394960" cy="1920240"/>
+          </a:xfrm>
+          <a:prstGeom prst="roundRect">
+            <a:avLst>
+              <a:gd name="adj" fmla="val 6000"/>
+            </a:avLst>
+          </a:prstGeom>
+          <a:solidFill>
+            <a:srgbClr val="D9DEEF"/>
+          </a:solidFill>
+          <a:ln>
+            <a:noFill/>
+          </a:ln>
+          <a:effectLst/>
+        </p:spPr>
+        <p:style>
+          <a:lnRef idx="1">
+            <a:schemeClr val="accent1"/>
+          </a:lnRef>
+          <a:fillRef idx="3">
+            <a:schemeClr val="accent1"/>
+          </a:fillRef>
+          <a:effectRef idx="2">
+            <a:schemeClr val="accent1"/>
+          </a:effectRef>
+          <a:fontRef idx="minor">
+            <a:schemeClr val="lt1"/>
+          </a:fontRef>
+        </p:style>
+        <p:txBody>
+          <a:bodyPr rtlCol="0" anchor="ctr"/>
+          <a:lstStyle/>
+          <a:p>
+            <a:pPr algn="ctr"/>
+          </a:p>
+        </p:txBody>
+      </p:sp>
+      <p:sp>
+        <p:nvSpPr>
+          <p:cNvPr id="6" name="TextBox 5"/>
+          <p:cNvSpPr txBox="1"/>
+          <p:nvPr/>
+        </p:nvSpPr>
+        <p:spPr>
+          <a:xfrm>
+            <a:off x="795528" y="2212848"/>
+            <a:ext cx="5029200" cy="1700784"/>
+          </a:xfrm>
+          <a:prstGeom prst="rect">
+            <a:avLst/>
+          </a:prstGeom>
+          <a:noFill/>
+        </p:spPr>
+        <p:txBody>
+          <a:bodyPr wrap="square" lIns="45720" rIns="45720" tIns="27432" bIns="27432" anchor="t">
+            <a:spAutoFit/>
+          </a:bodyPr>
+          <a:lstStyle/>
+          <a:p>
+            <a:pPr algn="l">
+              <a:spcAft>
+                <a:spcPts val="600"/>
+              </a:spcAft>
+            </a:pPr>
+            <a:r>
+              <a:rPr sz="2000" b="1" i="0">
+                <a:solidFill>
+                  <a:srgbClr val="2B4EB4"/>
+                </a:solidFill>
+                <a:latin typeface="Calibri"/>
+              </a:rPr>
+              <a:t>1. Identificar</a:t>
+            </a:r>
+          </a:p>
+          <a:p>
+            <a:pPr algn="l">
+              <a:spcAft>
+                <a:spcPts val="400"/>
+              </a:spcAft>
+            </a:pPr>
+            <a:r>
+              <a:rPr sz="1800" b="0" i="0">
+                <a:solidFill>
+                  <a:srgbClr val="011754"/>
+                </a:solidFill>
+                <a:latin typeface="Calibri"/>
+              </a:rPr>
+              <a:t>Localiza nombres, DNI, contactos, cifras inéditas o datos de una institución dentro del fragmento.</a:t>
+            </a:r>
+          </a:p>
+        </p:txBody>
+      </p:sp>
+      <p:sp>
+        <p:nvSpPr>
+          <p:cNvPr id="7" name="Rounded Rectangle 6"/>
+          <p:cNvSpPr/>
+          <p:nvPr/>
+        </p:nvSpPr>
+        <p:spPr>
+          <a:xfrm>
+            <a:off x="6190488" y="2103120"/>
+            <a:ext cx="5394960" cy="1920240"/>
+          </a:xfrm>
+          <a:prstGeom prst="roundRect">
+            <a:avLst>
+              <a:gd name="adj" fmla="val 6000"/>
+            </a:avLst>
+          </a:prstGeom>
+          <a:solidFill>
+            <a:srgbClr val="D9DEEF"/>
+          </a:solidFill>
+          <a:ln>
+            <a:noFill/>
+          </a:ln>
+          <a:effectLst/>
+        </p:spPr>
+        <p:style>
+          <a:lnRef idx="1">
+            <a:schemeClr val="accent1"/>
+          </a:lnRef>
+          <a:fillRef idx="3">
+            <a:schemeClr val="accent1"/>
+          </a:fillRef>
+          <a:effectRef idx="2">
+            <a:schemeClr val="accent1"/>
+          </a:effectRef>
+          <a:fontRef idx="minor">
+            <a:schemeClr val="lt1"/>
+          </a:fontRef>
+        </p:style>
+        <p:txBody>
+          <a:bodyPr rtlCol="0" anchor="ctr"/>
+          <a:lstStyle/>
+          <a:p>
+            <a:pPr algn="ctr"/>
+          </a:p>
+        </p:txBody>
+      </p:sp>
+      <p:sp>
+        <p:nvSpPr>
+          <p:cNvPr id="8" name="TextBox 7"/>
+          <p:cNvSpPr txBox="1"/>
+          <p:nvPr/>
+        </p:nvSpPr>
+        <p:spPr>
+          <a:xfrm>
+            <a:off x="6373368" y="2212848"/>
+            <a:ext cx="5029200" cy="1700784"/>
+          </a:xfrm>
+          <a:prstGeom prst="rect">
+            <a:avLst/>
+          </a:prstGeom>
+          <a:noFill/>
+        </p:spPr>
+        <p:txBody>
+          <a:bodyPr wrap="square" lIns="45720" rIns="45720" tIns="27432" bIns="27432" anchor="t">
+            <a:spAutoFit/>
+          </a:bodyPr>
+          <a:lstStyle/>
+          <a:p>
+            <a:pPr algn="l">
+              <a:spcAft>
+                <a:spcPts val="600"/>
+              </a:spcAft>
+            </a:pPr>
+            <a:r>
+              <a:rPr sz="2000" b="1" i="0">
+                <a:solidFill>
+                  <a:srgbClr val="2B4EB4"/>
+                </a:solidFill>
+                <a:latin typeface="Calibri"/>
+              </a:rPr>
+              <a:t>2. Clasificar</a:t>
+            </a:r>
+          </a:p>
+          <a:p>
+            <a:pPr algn="l">
+              <a:spcAft>
+                <a:spcPts val="400"/>
+              </a:spcAft>
+            </a:pPr>
+            <a:r>
+              <a:rPr sz="1800" b="0" i="0">
+                <a:solidFill>
+                  <a:srgbClr val="011754"/>
+                </a:solidFill>
+                <a:latin typeface="Calibri"/>
+              </a:rPr>
+              <a:t>Separa lo publicado y propio de lo ajeno, inédito o identificable.</a:t>
+            </a:r>
+          </a:p>
+        </p:txBody>
+      </p:sp>
+      <p:sp>
+        <p:nvSpPr>
+          <p:cNvPr id="9" name="Rounded Rectangle 8"/>
+          <p:cNvSpPr/>
+          <p:nvPr/>
+        </p:nvSpPr>
+        <p:spPr>
+          <a:xfrm>
+            <a:off x="612648" y="4206240"/>
+            <a:ext cx="5394960" cy="1920240"/>
+          </a:xfrm>
+          <a:prstGeom prst="roundRect">
+            <a:avLst>
+              <a:gd name="adj" fmla="val 6000"/>
+            </a:avLst>
+          </a:prstGeom>
+          <a:solidFill>
+            <a:srgbClr val="D9DEEF"/>
+          </a:solidFill>
+          <a:ln>
+            <a:noFill/>
+          </a:ln>
+          <a:effectLst/>
+        </p:spPr>
+        <p:style>
+          <a:lnRef idx="1">
+            <a:schemeClr val="accent1"/>
+          </a:lnRef>
+          <a:fillRef idx="3">
+            <a:schemeClr val="accent1"/>
+          </a:fillRef>
+          <a:effectRef idx="2">
+            <a:schemeClr val="accent1"/>
+          </a:effectRef>
+          <a:fontRef idx="minor">
+            <a:schemeClr val="lt1"/>
+          </a:fontRef>
+        </p:style>
+        <p:txBody>
+          <a:bodyPr rtlCol="0" anchor="ctr"/>
+          <a:lstStyle/>
+          <a:p>
+            <a:pPr algn="ctr"/>
+          </a:p>
+        </p:txBody>
+      </p:sp>
+      <p:sp>
+        <p:nvSpPr>
+          <p:cNvPr id="10" name="TextBox 9"/>
+          <p:cNvSpPr txBox="1"/>
+          <p:nvPr/>
+        </p:nvSpPr>
+        <p:spPr>
+          <a:xfrm>
+            <a:off x="795528" y="4315968"/>
+            <a:ext cx="5029200" cy="1700784"/>
+          </a:xfrm>
+          <a:prstGeom prst="rect">
+            <a:avLst/>
+          </a:prstGeom>
+          <a:noFill/>
+        </p:spPr>
+        <p:txBody>
+          <a:bodyPr wrap="square" lIns="45720" rIns="45720" tIns="27432" bIns="27432" anchor="t">
+            <a:spAutoFit/>
+          </a:bodyPr>
+          <a:lstStyle/>
+          <a:p>
+            <a:pPr algn="l">
+              <a:spcAft>
+                <a:spcPts val="600"/>
+              </a:spcAft>
+            </a:pPr>
+            <a:r>
+              <a:rPr sz="2000" b="1" i="0">
+                <a:solidFill>
+                  <a:srgbClr val="2B4EB4"/>
+                </a:solidFill>
+                <a:latin typeface="Calibri"/>
+              </a:rPr>
+              <a:t>3. Decidir</a:t>
+            </a:r>
+          </a:p>
+          <a:p>
+            <a:pPr algn="l">
+              <a:spcAft>
+                <a:spcPts val="400"/>
+              </a:spcAft>
+            </a:pPr>
+            <a:r>
+              <a:rPr sz="1800" b="0" i="0">
+                <a:solidFill>
+                  <a:srgbClr val="011754"/>
+                </a:solidFill>
+                <a:latin typeface="Calibri"/>
+              </a:rPr>
+              <a:t>Pregúntate si divulgarlo podría perjudicar a una persona o a una institución.</a:t>
+            </a:r>
+          </a:p>
+        </p:txBody>
+      </p:sp>
+      <p:sp>
+        <p:nvSpPr>
+          <p:cNvPr id="11" name="Rounded Rectangle 10"/>
+          <p:cNvSpPr/>
+          <p:nvPr/>
+        </p:nvSpPr>
+        <p:spPr>
+          <a:xfrm>
+            <a:off x="6190488" y="4206240"/>
+            <a:ext cx="5394960" cy="1920240"/>
+          </a:xfrm>
+          <a:prstGeom prst="roundRect">
+            <a:avLst>
+              <a:gd name="adj" fmla="val 6000"/>
+            </a:avLst>
+          </a:prstGeom>
+          <a:solidFill>
+            <a:srgbClr val="D9DEEF"/>
+          </a:solidFill>
+          <a:ln>
+            <a:noFill/>
+          </a:ln>
+          <a:effectLst/>
+        </p:spPr>
+        <p:style>
+          <a:lnRef idx="1">
+            <a:schemeClr val="accent1"/>
+          </a:lnRef>
+          <a:fillRef idx="3">
+            <a:schemeClr val="accent1"/>
+          </a:fillRef>
+          <a:effectRef idx="2">
+            <a:schemeClr val="accent1"/>
+          </a:effectRef>
+          <a:fontRef idx="minor">
+            <a:schemeClr val="lt1"/>
+          </a:fontRef>
+        </p:style>
+        <p:txBody>
+          <a:bodyPr rtlCol="0" anchor="ctr"/>
+          <a:lstStyle/>
+          <a:p>
+            <a:pPr algn="ctr"/>
+          </a:p>
+        </p:txBody>
+      </p:sp>
+      <p:sp>
+        <p:nvSpPr>
+          <p:cNvPr id="12" name="TextBox 11"/>
+          <p:cNvSpPr txBox="1"/>
+          <p:nvPr/>
+        </p:nvSpPr>
+        <p:spPr>
+          <a:xfrm>
+            <a:off x="6373368" y="4315968"/>
+            <a:ext cx="5029200" cy="1700784"/>
+          </a:xfrm>
+          <a:prstGeom prst="rect">
+            <a:avLst/>
+          </a:prstGeom>
+          <a:noFill/>
+        </p:spPr>
+        <p:txBody>
+          <a:bodyPr wrap="square" lIns="45720" rIns="45720" tIns="27432" bIns="27432" anchor="t">
+            <a:spAutoFit/>
+          </a:bodyPr>
+          <a:lstStyle/>
+          <a:p>
+            <a:pPr algn="l">
+              <a:spcAft>
+                <a:spcPts val="600"/>
+              </a:spcAft>
+            </a:pPr>
+            <a:r>
+              <a:rPr sz="2000" b="1" i="0">
+                <a:solidFill>
+                  <a:srgbClr val="2B4EB4"/>
+                </a:solidFill>
+                <a:latin typeface="Calibri"/>
+              </a:rPr>
+              <a:t>4. Anonimizar o retener</a:t>
+            </a:r>
+          </a:p>
+          <a:p>
+            <a:pPr algn="l">
+              <a:spcAft>
+                <a:spcPts val="400"/>
+              </a:spcAft>
+            </a:pPr>
+            <a:r>
+              <a:rPr sz="1800" b="0" i="0">
+                <a:solidFill>
+                  <a:srgbClr val="011754"/>
+                </a:solidFill>
+                <a:latin typeface="Calibri"/>
+              </a:rPr>
+              <a:t>Quita los datos identificables o, si no es posible, no lo compartas.</a:t>
+            </a:r>
+          </a:p>
+        </p:txBody>
+      </p:sp>
+      <p:sp>
+        <p:nvSpPr>
+          <p:cNvPr id="13" name="TextBox 12"/>
+          <p:cNvSpPr txBox="1"/>
+          <p:nvPr/>
+        </p:nvSpPr>
+        <p:spPr>
+          <a:xfrm>
+            <a:off x="612648" y="5943600"/>
+            <a:ext cx="10972800" cy="365760"/>
+          </a:xfrm>
+          <a:prstGeom prst="rect">
+            <a:avLst/>
+          </a:prstGeom>
+          <a:noFill/>
+        </p:spPr>
+        <p:txBody>
+          <a:bodyPr wrap="square" lIns="45720" rIns="45720" tIns="27432" bIns="27432" anchor="t">
+            <a:spAutoFit/>
+          </a:bodyPr>
+          <a:lstStyle/>
+          <a:p>
+            <a:pPr algn="l">
+              <a:spcAft>
+                <a:spcPts val="400"/>
+              </a:spcAft>
+            </a:pPr>
+            <a:r>
+              <a:rPr sz="1800" b="1" i="0">
+                <a:solidFill>
+                  <a:srgbClr val="2B4EB4"/>
+                </a:solidFill>
+                <a:latin typeface="Calibri"/>
+              </a:rPr>
+              <a:t>Lo que pegas puede quedar almacenado fuera de tu control.</a:t>
+            </a:r>
+          </a:p>
+        </p:txBody>
+      </p:sp>
+    </p:spTree>
+  </p:cSld>
+  <p:clrMapOvr>
+    <a:masterClrMapping/>
+  </p:clrMapOvr>
+</p:sld>
+</file>
+
+<file path=ppt/slides/slide21.xml><?xml version="1.0" encoding="utf-8"?>
+<p:sld xmlns:a="http://schemas.openxmlformats.org/drawingml/2006/main" xmlns:r="http://schemas.openxmlformats.org/officeDocument/2006/relationships" xmlns:p="http://schemas.openxmlformats.org/presentationml/2006/main">
+  <p:cSld>
+    <p:spTree>
+      <p:nvGrpSpPr>
+        <p:cNvPr id="1" name=""/>
+        <p:cNvGrpSpPr/>
+        <p:nvPr/>
+      </p:nvGrpSpPr>
+      <p:grpSpPr>
+        <a:xfrm>
+          <a:off x="0" y="0"/>
+          <a:ext cx="0" cy="0"/>
+          <a:chOff x="0" y="0"/>
+          <a:chExt cx="0" cy="0"/>
+        </a:xfrm>
+      </p:grpSpPr>
+      <p:pic>
+        <p:nvPicPr>
+          <p:cNvPr id="2" name="Picture 1" descr="bg_content.png"/>
+          <p:cNvPicPr>
+            <a:picLocks noChangeAspect="1"/>
+          </p:cNvPicPr>
+          <p:nvPr/>
+        </p:nvPicPr>
+        <p:blipFill>
+          <a:blip r:embed="rId2"/>
+          <a:stretch>
+            <a:fillRect/>
+          </a:stretch>
+        </p:blipFill>
+        <p:spPr>
+          <a:xfrm>
+            <a:off x="0" y="0"/>
+            <a:ext cx="12191695" cy="6858000"/>
+          </a:xfrm>
+          <a:prstGeom prst="rect">
+            <a:avLst/>
+          </a:prstGeom>
+        </p:spPr>
+      </p:pic>
+      <p:sp>
+        <p:nvSpPr>
+          <p:cNvPr id="3" name="TextBox 2"/>
+          <p:cNvSpPr txBox="1"/>
+          <p:nvPr/>
+        </p:nvSpPr>
+        <p:spPr>
+          <a:xfrm>
+            <a:off x="612648" y="777240"/>
+            <a:ext cx="10332720" cy="640080"/>
+          </a:xfrm>
+          <a:prstGeom prst="rect">
+            <a:avLst/>
+          </a:prstGeom>
+          <a:noFill/>
+        </p:spPr>
+        <p:txBody>
+          <a:bodyPr wrap="square" lIns="45720" rIns="45720" tIns="27432" bIns="27432" anchor="ctr">
+            <a:spAutoFit/>
+          </a:bodyPr>
+          <a:lstStyle/>
+          <a:p>
+            <a:pPr algn="l">
+              <a:spcAft>
+                <a:spcPts val="400"/>
+              </a:spcAft>
+            </a:pPr>
+            <a:r>
+              <a:rPr sz="2800" b="1" i="0">
+                <a:solidFill>
+                  <a:srgbClr val="1836B2"/>
+                </a:solidFill>
+                <a:latin typeface="Calibri"/>
+              </a:rPr>
+              <a:t>¿Qué sí puede compartirse?</a:t>
+            </a:r>
+          </a:p>
+        </p:txBody>
+      </p:sp>
+      <p:sp>
+        <p:nvSpPr>
+          <p:cNvPr id="4" name="Rounded Rectangle 3"/>
+          <p:cNvSpPr/>
+          <p:nvPr/>
+        </p:nvSpPr>
+        <p:spPr>
+          <a:xfrm>
+            <a:off x="612648" y="1600200"/>
+            <a:ext cx="3535680" cy="1920240"/>
+          </a:xfrm>
+          <a:prstGeom prst="roundRect">
+            <a:avLst>
+              <a:gd name="adj" fmla="val 6000"/>
+            </a:avLst>
+          </a:prstGeom>
+          <a:solidFill>
+            <a:srgbClr val="D9DEEF"/>
+          </a:solidFill>
+          <a:ln>
+            <a:noFill/>
+          </a:ln>
+          <a:effectLst/>
+        </p:spPr>
+        <p:style>
+          <a:lnRef idx="1">
+            <a:schemeClr val="accent1"/>
+          </a:lnRef>
+          <a:fillRef idx="3">
+            <a:schemeClr val="accent1"/>
+          </a:fillRef>
+          <a:effectRef idx="2">
+            <a:schemeClr val="accent1"/>
+          </a:effectRef>
+          <a:fontRef idx="minor">
+            <a:schemeClr val="lt1"/>
+          </a:fontRef>
+        </p:style>
+        <p:txBody>
+          <a:bodyPr rtlCol="0" anchor="ctr"/>
+          <a:lstStyle/>
+          <a:p>
+            <a:pPr algn="ctr"/>
+          </a:p>
+        </p:txBody>
+      </p:sp>
+      <p:sp>
+        <p:nvSpPr>
+          <p:cNvPr id="5" name="TextBox 4"/>
+          <p:cNvSpPr txBox="1"/>
+          <p:nvPr/>
+        </p:nvSpPr>
+        <p:spPr>
+          <a:xfrm>
+            <a:off x="795528" y="1709928"/>
+            <a:ext cx="3169920" cy="1700784"/>
+          </a:xfrm>
+          <a:prstGeom prst="rect">
+            <a:avLst/>
+          </a:prstGeom>
+          <a:noFill/>
+        </p:spPr>
+        <p:txBody>
+          <a:bodyPr wrap="square" lIns="45720" rIns="45720" tIns="27432" bIns="27432" anchor="t">
+            <a:spAutoFit/>
+          </a:bodyPr>
+          <a:lstStyle/>
+          <a:p>
+            <a:pPr algn="l">
+              <a:spcAft>
+                <a:spcPts val="600"/>
+              </a:spcAft>
+            </a:pPr>
+            <a:r>
+              <a:rPr sz="2000" b="1" i="0">
+                <a:solidFill>
+                  <a:srgbClr val="2B4EB4"/>
+                </a:solidFill>
+                <a:latin typeface="Calibri"/>
+              </a:rPr>
+              <a:t>Metodología general</a:t>
+            </a:r>
+          </a:p>
+          <a:p>
+            <a:pPr algn="l">
+              <a:spcAft>
+                <a:spcPts val="400"/>
+              </a:spcAft>
+            </a:pPr>
+            <a:r>
+              <a:rPr sz="1800" b="0" i="0">
+                <a:solidFill>
+                  <a:srgbClr val="011754"/>
+                </a:solidFill>
+                <a:latin typeface="Calibri"/>
+              </a:rPr>
+              <a:t>Descripción del diseño y los pasos, sin cifras ni nombres.</a:t>
+            </a:r>
+          </a:p>
+        </p:txBody>
+      </p:sp>
+      <p:sp>
+        <p:nvSpPr>
+          <p:cNvPr id="6" name="Rounded Rectangle 5"/>
+          <p:cNvSpPr/>
+          <p:nvPr/>
+        </p:nvSpPr>
+        <p:spPr>
+          <a:xfrm>
+            <a:off x="4331208" y="1600200"/>
+            <a:ext cx="3535680" cy="1920240"/>
+          </a:xfrm>
+          <a:prstGeom prst="roundRect">
+            <a:avLst>
+              <a:gd name="adj" fmla="val 6000"/>
+            </a:avLst>
+          </a:prstGeom>
+          <a:solidFill>
+            <a:srgbClr val="D9DEEF"/>
+          </a:solidFill>
+          <a:ln>
+            <a:noFill/>
+          </a:ln>
+          <a:effectLst/>
+        </p:spPr>
+        <p:style>
+          <a:lnRef idx="1">
+            <a:schemeClr val="accent1"/>
+          </a:lnRef>
+          <a:fillRef idx="3">
+            <a:schemeClr val="accent1"/>
+          </a:fillRef>
+          <a:effectRef idx="2">
+            <a:schemeClr val="accent1"/>
+          </a:effectRef>
+          <a:fontRef idx="minor">
+            <a:schemeClr val="lt1"/>
+          </a:fontRef>
+        </p:style>
+        <p:txBody>
+          <a:bodyPr rtlCol="0" anchor="ctr"/>
+          <a:lstStyle/>
+          <a:p>
+            <a:pPr algn="ctr"/>
+          </a:p>
+        </p:txBody>
+      </p:sp>
+      <p:sp>
+        <p:nvSpPr>
+          <p:cNvPr id="7" name="TextBox 6"/>
+          <p:cNvSpPr txBox="1"/>
+          <p:nvPr/>
+        </p:nvSpPr>
+        <p:spPr>
+          <a:xfrm>
+            <a:off x="4514088" y="1709928"/>
+            <a:ext cx="3169920" cy="1700784"/>
+          </a:xfrm>
+          <a:prstGeom prst="rect">
+            <a:avLst/>
+          </a:prstGeom>
+          <a:noFill/>
+        </p:spPr>
+        <p:txBody>
+          <a:bodyPr wrap="square" lIns="45720" rIns="45720" tIns="27432" bIns="27432" anchor="t">
+            <a:spAutoFit/>
+          </a:bodyPr>
+          <a:lstStyle/>
+          <a:p>
+            <a:pPr algn="l">
+              <a:spcAft>
+                <a:spcPts val="600"/>
+              </a:spcAft>
+            </a:pPr>
+            <a:r>
+              <a:rPr sz="2000" b="1" i="0">
+                <a:solidFill>
+                  <a:srgbClr val="2B4EB4"/>
+                </a:solidFill>
+                <a:latin typeface="Calibri"/>
+              </a:rPr>
+              <a:t>Pregunta de investigación</a:t>
+            </a:r>
+          </a:p>
+          <a:p>
+            <a:pPr algn="l">
+              <a:spcAft>
+                <a:spcPts val="400"/>
+              </a:spcAft>
+            </a:pPr>
+            <a:r>
+              <a:rPr sz="1800" b="0" i="0">
+                <a:solidFill>
+                  <a:srgbClr val="011754"/>
+                </a:solidFill>
+                <a:latin typeface="Calibri"/>
+              </a:rPr>
+              <a:t>El problema que quieres resolver, sin datos reservados.</a:t>
+            </a:r>
+          </a:p>
+        </p:txBody>
+      </p:sp>
+      <p:sp>
+        <p:nvSpPr>
+          <p:cNvPr id="8" name="Rounded Rectangle 7"/>
+          <p:cNvSpPr/>
+          <p:nvPr/>
+        </p:nvSpPr>
+        <p:spPr>
+          <a:xfrm>
+            <a:off x="8049767" y="1600200"/>
+            <a:ext cx="3535680" cy="1920240"/>
+          </a:xfrm>
+          <a:prstGeom prst="roundRect">
+            <a:avLst>
+              <a:gd name="adj" fmla="val 6000"/>
+            </a:avLst>
+          </a:prstGeom>
+          <a:solidFill>
+            <a:srgbClr val="D9DEEF"/>
+          </a:solidFill>
+          <a:ln>
+            <a:noFill/>
+          </a:ln>
+          <a:effectLst/>
+        </p:spPr>
+        <p:style>
+          <a:lnRef idx="1">
+            <a:schemeClr val="accent1"/>
+          </a:lnRef>
+          <a:fillRef idx="3">
+            <a:schemeClr val="accent1"/>
+          </a:fillRef>
+          <a:effectRef idx="2">
+            <a:schemeClr val="accent1"/>
+          </a:effectRef>
+          <a:fontRef idx="minor">
+            <a:schemeClr val="lt1"/>
+          </a:fontRef>
+        </p:style>
+        <p:txBody>
+          <a:bodyPr rtlCol="0" anchor="ctr"/>
+          <a:lstStyle/>
+          <a:p>
+            <a:pPr algn="ctr"/>
+          </a:p>
+        </p:txBody>
+      </p:sp>
+      <p:sp>
+        <p:nvSpPr>
+          <p:cNvPr id="9" name="TextBox 8"/>
+          <p:cNvSpPr txBox="1"/>
+          <p:nvPr/>
+        </p:nvSpPr>
+        <p:spPr>
+          <a:xfrm>
+            <a:off x="8232647" y="1709928"/>
+            <a:ext cx="3169920" cy="1700784"/>
+          </a:xfrm>
+          <a:prstGeom prst="rect">
+            <a:avLst/>
+          </a:prstGeom>
+          <a:noFill/>
+        </p:spPr>
+        <p:txBody>
+          <a:bodyPr wrap="square" lIns="45720" rIns="45720" tIns="27432" bIns="27432" anchor="t">
+            <a:spAutoFit/>
+          </a:bodyPr>
+          <a:lstStyle/>
+          <a:p>
+            <a:pPr algn="l">
+              <a:spcAft>
+                <a:spcPts val="600"/>
+              </a:spcAft>
+            </a:pPr>
+            <a:r>
+              <a:rPr sz="2000" b="1" i="0">
+                <a:solidFill>
+                  <a:srgbClr val="2B4EB4"/>
+                </a:solidFill>
+                <a:latin typeface="Calibri"/>
+              </a:rPr>
+              <a:t>Literatura publicada</a:t>
+            </a:r>
+          </a:p>
+          <a:p>
+            <a:pPr algn="l">
+              <a:spcAft>
+                <a:spcPts val="400"/>
+              </a:spcAft>
+            </a:pPr>
+            <a:r>
+              <a:rPr sz="1800" b="0" i="0">
+                <a:solidFill>
+                  <a:srgbClr val="011754"/>
+                </a:solidFill>
+                <a:latin typeface="Calibri"/>
+              </a:rPr>
+              <a:t>Artículos, libros e informes ya disponibles públicamente.</a:t>
+            </a:r>
+          </a:p>
+        </p:txBody>
+      </p:sp>
+      <p:sp>
+        <p:nvSpPr>
+          <p:cNvPr id="10" name="Rounded Rectangle 9"/>
+          <p:cNvSpPr/>
+          <p:nvPr/>
+        </p:nvSpPr>
+        <p:spPr>
+          <a:xfrm>
+            <a:off x="612648" y="3703320"/>
+            <a:ext cx="3535680" cy="1920240"/>
+          </a:xfrm>
+          <a:prstGeom prst="roundRect">
+            <a:avLst>
+              <a:gd name="adj" fmla="val 6000"/>
+            </a:avLst>
+          </a:prstGeom>
+          <a:solidFill>
+            <a:srgbClr val="D9DEEF"/>
+          </a:solidFill>
+          <a:ln>
+            <a:noFill/>
+          </a:ln>
+          <a:effectLst/>
+        </p:spPr>
+        <p:style>
+          <a:lnRef idx="1">
+            <a:schemeClr val="accent1"/>
+          </a:lnRef>
+          <a:fillRef idx="3">
+            <a:schemeClr val="accent1"/>
+          </a:fillRef>
+          <a:effectRef idx="2">
+            <a:schemeClr val="accent1"/>
+          </a:effectRef>
+          <a:fontRef idx="minor">
+            <a:schemeClr val="lt1"/>
+          </a:fontRef>
+        </p:style>
+        <p:txBody>
+          <a:bodyPr rtlCol="0" anchor="ctr"/>
+          <a:lstStyle/>
+          <a:p>
+            <a:pPr algn="ctr"/>
+          </a:p>
+        </p:txBody>
+      </p:sp>
+      <p:sp>
+        <p:nvSpPr>
+          <p:cNvPr id="11" name="TextBox 10"/>
+          <p:cNvSpPr txBox="1"/>
+          <p:nvPr/>
+        </p:nvSpPr>
+        <p:spPr>
+          <a:xfrm>
+            <a:off x="795528" y="3813048"/>
+            <a:ext cx="3169920" cy="1700784"/>
+          </a:xfrm>
+          <a:prstGeom prst="rect">
+            <a:avLst/>
+          </a:prstGeom>
+          <a:noFill/>
+        </p:spPr>
+        <p:txBody>
+          <a:bodyPr wrap="square" lIns="45720" rIns="45720" tIns="27432" bIns="27432" anchor="t">
+            <a:spAutoFit/>
+          </a:bodyPr>
+          <a:lstStyle/>
+          <a:p>
+            <a:pPr algn="l">
+              <a:spcAft>
+                <a:spcPts val="600"/>
+              </a:spcAft>
+            </a:pPr>
+            <a:r>
+              <a:rPr sz="2000" b="1" i="0">
+                <a:solidFill>
+                  <a:srgbClr val="2B4EB4"/>
+                </a:solidFill>
+                <a:latin typeface="Calibri"/>
+              </a:rPr>
+              <a:t>Resultados ya publicados</a:t>
+            </a:r>
+          </a:p>
+          <a:p>
+            <a:pPr algn="l">
+              <a:spcAft>
+                <a:spcPts val="400"/>
+              </a:spcAft>
+            </a:pPr>
+            <a:r>
+              <a:rPr sz="1800" b="0" i="0">
+                <a:solidFill>
+                  <a:srgbClr val="011754"/>
+                </a:solidFill>
+                <a:latin typeface="Calibri"/>
+              </a:rPr>
+              <a:t>Hallazgos de un artículo indexado y accesible.</a:t>
+            </a:r>
+          </a:p>
+        </p:txBody>
+      </p:sp>
+      <p:sp>
+        <p:nvSpPr>
+          <p:cNvPr id="12" name="Rounded Rectangle 11"/>
+          <p:cNvSpPr/>
+          <p:nvPr/>
+        </p:nvSpPr>
+        <p:spPr>
+          <a:xfrm>
+            <a:off x="4331208" y="3703320"/>
+            <a:ext cx="3535680" cy="1920240"/>
+          </a:xfrm>
+          <a:prstGeom prst="roundRect">
+            <a:avLst>
+              <a:gd name="adj" fmla="val 6000"/>
+            </a:avLst>
+          </a:prstGeom>
+          <a:solidFill>
+            <a:srgbClr val="D9DEEF"/>
+          </a:solidFill>
+          <a:ln>
+            <a:noFill/>
+          </a:ln>
+          <a:effectLst/>
+        </p:spPr>
+        <p:style>
+          <a:lnRef idx="1">
+            <a:schemeClr val="accent1"/>
+          </a:lnRef>
+          <a:fillRef idx="3">
+            <a:schemeClr val="accent1"/>
+          </a:fillRef>
+          <a:effectRef idx="2">
+            <a:schemeClr val="accent1"/>
+          </a:effectRef>
+          <a:fontRef idx="minor">
+            <a:schemeClr val="lt1"/>
+          </a:fontRef>
+        </p:style>
+        <p:txBody>
+          <a:bodyPr rtlCol="0" anchor="ctr"/>
+          <a:lstStyle/>
+          <a:p>
+            <a:pPr algn="ctr"/>
+          </a:p>
+        </p:txBody>
+      </p:sp>
+      <p:sp>
+        <p:nvSpPr>
+          <p:cNvPr id="13" name="TextBox 12"/>
+          <p:cNvSpPr txBox="1"/>
+          <p:nvPr/>
+        </p:nvSpPr>
+        <p:spPr>
+          <a:xfrm>
+            <a:off x="4514088" y="3813048"/>
+            <a:ext cx="3169920" cy="1700784"/>
+          </a:xfrm>
+          <a:prstGeom prst="rect">
+            <a:avLst/>
+          </a:prstGeom>
+          <a:noFill/>
+        </p:spPr>
+        <p:txBody>
+          <a:bodyPr wrap="square" lIns="45720" rIns="45720" tIns="27432" bIns="27432" anchor="t">
+            <a:spAutoFit/>
+          </a:bodyPr>
+          <a:lstStyle/>
+          <a:p>
+            <a:pPr algn="l">
+              <a:spcAft>
+                <a:spcPts val="600"/>
+              </a:spcAft>
+            </a:pPr>
+            <a:r>
+              <a:rPr sz="2000" b="1" i="0">
+                <a:solidFill>
+                  <a:srgbClr val="2B4EB4"/>
+                </a:solidFill>
+                <a:latin typeface="Calibri"/>
+              </a:rPr>
+              <a:t>Texto propio para revisar</a:t>
+            </a:r>
+          </a:p>
+          <a:p>
+            <a:pPr algn="l">
+              <a:spcAft>
+                <a:spcPts val="400"/>
+              </a:spcAft>
+            </a:pPr>
+            <a:r>
+              <a:rPr sz="1800" b="0" i="0">
+                <a:solidFill>
+                  <a:srgbClr val="011754"/>
+                </a:solidFill>
+                <a:latin typeface="Calibri"/>
+              </a:rPr>
+              <a:t>Un párrafo tuyo, sin información identificable.</a:t>
+            </a:r>
+          </a:p>
+        </p:txBody>
+      </p:sp>
+      <p:sp>
+        <p:nvSpPr>
+          <p:cNvPr id="14" name="Rounded Rectangle 13"/>
+          <p:cNvSpPr/>
+          <p:nvPr/>
+        </p:nvSpPr>
+        <p:spPr>
+          <a:xfrm>
+            <a:off x="8049767" y="3703320"/>
+            <a:ext cx="3535680" cy="1920240"/>
+          </a:xfrm>
+          <a:prstGeom prst="roundRect">
+            <a:avLst>
+              <a:gd name="adj" fmla="val 6000"/>
+            </a:avLst>
+          </a:prstGeom>
+          <a:solidFill>
+            <a:srgbClr val="D9DEEF"/>
+          </a:solidFill>
+          <a:ln>
+            <a:noFill/>
+          </a:ln>
+          <a:effectLst/>
+        </p:spPr>
+        <p:style>
+          <a:lnRef idx="1">
+            <a:schemeClr val="accent1"/>
+          </a:lnRef>
+          <a:fillRef idx="3">
+            <a:schemeClr val="accent1"/>
+          </a:fillRef>
+          <a:effectRef idx="2">
+            <a:schemeClr val="accent1"/>
+          </a:effectRef>
+          <a:fontRef idx="minor">
+            <a:schemeClr val="lt1"/>
+          </a:fontRef>
+        </p:style>
+        <p:txBody>
+          <a:bodyPr rtlCol="0" anchor="ctr"/>
+          <a:lstStyle/>
+          <a:p>
+            <a:pPr algn="ctr"/>
+          </a:p>
+        </p:txBody>
+      </p:sp>
+      <p:sp>
+        <p:nvSpPr>
+          <p:cNvPr id="15" name="TextBox 14"/>
+          <p:cNvSpPr txBox="1"/>
+          <p:nvPr/>
+        </p:nvSpPr>
+        <p:spPr>
+          <a:xfrm>
+            <a:off x="8232647" y="3813048"/>
+            <a:ext cx="3169920" cy="1700784"/>
+          </a:xfrm>
+          <a:prstGeom prst="rect">
+            <a:avLst/>
+          </a:prstGeom>
+          <a:noFill/>
+        </p:spPr>
+        <p:txBody>
+          <a:bodyPr wrap="square" lIns="45720" rIns="45720" tIns="27432" bIns="27432" anchor="t">
+            <a:spAutoFit/>
+          </a:bodyPr>
+          <a:lstStyle/>
+          <a:p>
+            <a:pPr algn="l">
+              <a:spcAft>
+                <a:spcPts val="600"/>
+              </a:spcAft>
+            </a:pPr>
+            <a:r>
+              <a:rPr sz="2000" b="1" i="0">
+                <a:solidFill>
+                  <a:srgbClr val="2B4EB4"/>
+                </a:solidFill>
+                <a:latin typeface="Calibri"/>
+              </a:rPr>
+              <a:t>Dudas conceptuales</a:t>
+            </a:r>
+          </a:p>
+          <a:p>
+            <a:pPr algn="l">
+              <a:spcAft>
+                <a:spcPts val="400"/>
+              </a:spcAft>
+            </a:pPr>
+            <a:r>
+              <a:rPr sz="1800" b="0" i="0">
+                <a:solidFill>
+                  <a:srgbClr val="011754"/>
+                </a:solidFill>
+                <a:latin typeface="Calibri"/>
+              </a:rPr>
+              <a:t>Preguntas sobre un método, un término o una técnica.</a:t>
+            </a:r>
+          </a:p>
+        </p:txBody>
+      </p:sp>
+      <p:sp>
+        <p:nvSpPr>
+          <p:cNvPr id="16" name="Rounded Rectangle 15"/>
+          <p:cNvSpPr/>
+          <p:nvPr/>
+        </p:nvSpPr>
+        <p:spPr>
+          <a:xfrm>
+            <a:off x="612648" y="5577840"/>
+            <a:ext cx="10972800" cy="685800"/>
+          </a:xfrm>
+          <a:prstGeom prst="roundRect">
+            <a:avLst>
+              <a:gd name="adj" fmla="val 6000"/>
+            </a:avLst>
+          </a:prstGeom>
+          <a:solidFill>
+            <a:srgbClr val="011754"/>
+          </a:solidFill>
+          <a:ln>
+            <a:noFill/>
+          </a:ln>
+          <a:effectLst/>
+        </p:spPr>
+        <p:style>
+          <a:lnRef idx="1">
+            <a:schemeClr val="accent1"/>
+          </a:lnRef>
+          <a:fillRef idx="3">
+            <a:schemeClr val="accent1"/>
+          </a:fillRef>
+          <a:effectRef idx="2">
+            <a:schemeClr val="accent1"/>
+          </a:effectRef>
+          <a:fontRef idx="minor">
+            <a:schemeClr val="lt1"/>
+          </a:fontRef>
+        </p:style>
+        <p:txBody>
+          <a:bodyPr rtlCol="0" anchor="ctr"/>
+          <a:lstStyle/>
+          <a:p>
+            <a:pPr algn="ctr"/>
+          </a:p>
+        </p:txBody>
+      </p:sp>
+      <p:sp>
+        <p:nvSpPr>
+          <p:cNvPr id="17" name="TextBox 16"/>
+          <p:cNvSpPr txBox="1"/>
+          <p:nvPr/>
+        </p:nvSpPr>
+        <p:spPr>
+          <a:xfrm>
+            <a:off x="841248" y="5577840"/>
+            <a:ext cx="10515600" cy="685800"/>
+          </a:xfrm>
+          <a:prstGeom prst="rect">
+            <a:avLst/>
+          </a:prstGeom>
+          <a:noFill/>
+        </p:spPr>
+        <p:txBody>
+          <a:bodyPr wrap="square" lIns="45720" rIns="45720" tIns="27432" bIns="27432" anchor="ctr">
+            <a:spAutoFit/>
+          </a:bodyPr>
+          <a:lstStyle/>
+          <a:p>
+            <a:pPr algn="l">
+              <a:spcAft>
+                <a:spcPts val="400"/>
+              </a:spcAft>
+            </a:pPr>
+            <a:r>
+              <a:rPr sz="1800" b="1" i="0">
+                <a:solidFill>
+                  <a:srgbClr val="FFFFFF"/>
+                </a:solidFill>
+                <a:latin typeface="Calibri"/>
+              </a:rPr>
+              <a:t>Lo publicado y lo propio pueden compartirse; lo ajeno, inédito o identificable, no.</a:t>
+            </a:r>
           </a:p>
         </p:txBody>
       </p:sp>
@@ -10235,6 +13619,556 @@
 </p:sld>
 </file>
 
+<file path=ppt/slides/slide23.xml><?xml version="1.0" encoding="utf-8"?>
+<p:sld xmlns:a="http://schemas.openxmlformats.org/drawingml/2006/main" xmlns:r="http://schemas.openxmlformats.org/officeDocument/2006/relationships" xmlns:p="http://schemas.openxmlformats.org/presentationml/2006/main">
+  <p:cSld>
+    <p:spTree>
+      <p:nvGrpSpPr>
+        <p:cNvPr id="1" name=""/>
+        <p:cNvGrpSpPr/>
+        <p:nvPr/>
+      </p:nvGrpSpPr>
+      <p:grpSpPr>
+        <a:xfrm>
+          <a:off x="0" y="0"/>
+          <a:ext cx="0" cy="0"/>
+          <a:chOff x="0" y="0"/>
+          <a:chExt cx="0" cy="0"/>
+        </a:xfrm>
+      </p:grpSpPr>
+      <p:pic>
+        <p:nvPicPr>
+          <p:cNvPr id="2" name="Picture 1" descr="divider_bg.png"/>
+          <p:cNvPicPr>
+            <a:picLocks noChangeAspect="1"/>
+          </p:cNvPicPr>
+          <p:nvPr/>
+        </p:nvPicPr>
+        <p:blipFill>
+          <a:blip r:embed="rId2"/>
+          <a:stretch>
+            <a:fillRect/>
+          </a:stretch>
+        </p:blipFill>
+        <p:spPr>
+          <a:xfrm>
+            <a:off x="0" y="0"/>
+            <a:ext cx="12191695" cy="6858000"/>
+          </a:xfrm>
+          <a:prstGeom prst="rect">
+            <a:avLst/>
+          </a:prstGeom>
+        </p:spPr>
+      </p:pic>
+      <p:sp>
+        <p:nvSpPr>
+          <p:cNvPr id="3" name="TextBox 2"/>
+          <p:cNvSpPr txBox="1"/>
+          <p:nvPr/>
+        </p:nvSpPr>
+        <p:spPr>
+          <a:xfrm>
+            <a:off x="982912" y="2676125"/>
+            <a:ext cx="437840" cy="1999910"/>
+          </a:xfrm>
+          <a:prstGeom prst="rect">
+            <a:avLst/>
+          </a:prstGeom>
+          <a:noFill/>
+        </p:spPr>
+        <p:txBody>
+          <a:bodyPr wrap="square">
+            <a:spAutoFit/>
+          </a:bodyPr>
+          <a:lstStyle/>
+          <a:p>
+            <a:pPr algn="l">
+              <a:lnSpc>
+                <a:spcPct val="115000"/>
+              </a:lnSpc>
+            </a:pPr>
+            <a:r>
+              <a:rPr sz="7200" b="1" i="0">
+                <a:solidFill>
+                  <a:srgbClr val="FFFFFF"/>
+                </a:solidFill>
+                <a:latin typeface="Calibri"/>
+              </a:rPr>
+              <a:t>5</a:t>
+            </a:r>
+          </a:p>
+        </p:txBody>
+      </p:sp>
+      <p:sp>
+        <p:nvSpPr>
+          <p:cNvPr id="4" name="TextBox 3"/>
+          <p:cNvSpPr txBox="1"/>
+          <p:nvPr/>
+        </p:nvSpPr>
+        <p:spPr>
+          <a:xfrm>
+            <a:off x="982912" y="4737409"/>
+            <a:ext cx="10346277" cy="702221"/>
+          </a:xfrm>
+          <a:prstGeom prst="rect">
+            <a:avLst/>
+          </a:prstGeom>
+          <a:noFill/>
+        </p:spPr>
+        <p:txBody>
+          <a:bodyPr wrap="square">
+            <a:spAutoFit/>
+          </a:bodyPr>
+          <a:lstStyle/>
+          <a:p>
+            <a:pPr algn="l">
+              <a:lnSpc>
+                <a:spcPct val="115000"/>
+              </a:lnSpc>
+            </a:pPr>
+            <a:r>
+              <a:rPr sz="2600" b="0" i="0">
+                <a:solidFill>
+                  <a:srgbClr val="FFFFFF"/>
+                </a:solidFill>
+                <a:latin typeface="Calibri"/>
+              </a:rPr>
+              <a:t>AUTORÍA, TRANSPARENCIA Y DECLARACIÓN DE USO</a:t>
+            </a:r>
+          </a:p>
+        </p:txBody>
+      </p:sp>
+    </p:spTree>
+  </p:cSld>
+  <p:clrMapOvr>
+    <a:masterClrMapping/>
+  </p:clrMapOvr>
+</p:sld>
+</file>
+
+<file path=ppt/slides/slide24.xml><?xml version="1.0" encoding="utf-8"?>
+<p:sld xmlns:a="http://schemas.openxmlformats.org/drawingml/2006/main" xmlns:r="http://schemas.openxmlformats.org/officeDocument/2006/relationships" xmlns:p="http://schemas.openxmlformats.org/presentationml/2006/main">
+  <p:cSld>
+    <p:spTree>
+      <p:nvGrpSpPr>
+        <p:cNvPr id="1" name=""/>
+        <p:cNvGrpSpPr/>
+        <p:nvPr/>
+      </p:nvGrpSpPr>
+      <p:grpSpPr>
+        <a:xfrm>
+          <a:off x="0" y="0"/>
+          <a:ext cx="0" cy="0"/>
+          <a:chOff x="0" y="0"/>
+          <a:chExt cx="0" cy="0"/>
+        </a:xfrm>
+      </p:grpSpPr>
+      <p:pic>
+        <p:nvPicPr>
+          <p:cNvPr id="2" name="Picture 1" descr="bg_content.png"/>
+          <p:cNvPicPr>
+            <a:picLocks noChangeAspect="1"/>
+          </p:cNvPicPr>
+          <p:nvPr/>
+        </p:nvPicPr>
+        <p:blipFill>
+          <a:blip r:embed="rId2"/>
+          <a:stretch>
+            <a:fillRect/>
+          </a:stretch>
+        </p:blipFill>
+        <p:spPr>
+          <a:xfrm>
+            <a:off x="0" y="0"/>
+            <a:ext cx="12191695" cy="6858000"/>
+          </a:xfrm>
+          <a:prstGeom prst="rect">
+            <a:avLst/>
+          </a:prstGeom>
+        </p:spPr>
+      </p:pic>
+      <p:sp>
+        <p:nvSpPr>
+          <p:cNvPr id="3" name="TextBox 2"/>
+          <p:cNvSpPr txBox="1"/>
+          <p:nvPr/>
+        </p:nvSpPr>
+        <p:spPr>
+          <a:xfrm>
+            <a:off x="612648" y="777240"/>
+            <a:ext cx="10332720" cy="640080"/>
+          </a:xfrm>
+          <a:prstGeom prst="rect">
+            <a:avLst/>
+          </a:prstGeom>
+          <a:noFill/>
+        </p:spPr>
+        <p:txBody>
+          <a:bodyPr wrap="square" lIns="45720" rIns="45720" tIns="27432" bIns="27432" anchor="ctr">
+            <a:spAutoFit/>
+          </a:bodyPr>
+          <a:lstStyle/>
+          <a:p>
+            <a:pPr algn="l">
+              <a:spcAft>
+                <a:spcPts val="400"/>
+              </a:spcAft>
+            </a:pPr>
+            <a:r>
+              <a:rPr sz="2800" b="1" i="0">
+                <a:solidFill>
+                  <a:srgbClr val="1836B2"/>
+                </a:solidFill>
+                <a:latin typeface="Calibri"/>
+              </a:rPr>
+              <a:t>Partimos de un texto ya trabajado con IA</a:t>
+            </a:r>
+          </a:p>
+        </p:txBody>
+      </p:sp>
+      <p:sp>
+        <p:nvSpPr>
+          <p:cNvPr id="4" name="Rounded Rectangle 3"/>
+          <p:cNvSpPr/>
+          <p:nvPr/>
+        </p:nvSpPr>
+        <p:spPr>
+          <a:xfrm>
+            <a:off x="612648" y="1600200"/>
+            <a:ext cx="10972800" cy="1097280"/>
+          </a:xfrm>
+          <a:prstGeom prst="roundRect">
+            <a:avLst>
+              <a:gd name="adj" fmla="val 6000"/>
+            </a:avLst>
+          </a:prstGeom>
+          <a:solidFill>
+            <a:srgbClr val="011754"/>
+          </a:solidFill>
+          <a:ln>
+            <a:noFill/>
+          </a:ln>
+          <a:effectLst/>
+        </p:spPr>
+        <p:style>
+          <a:lnRef idx="1">
+            <a:schemeClr val="accent1"/>
+          </a:lnRef>
+          <a:fillRef idx="3">
+            <a:schemeClr val="accent1"/>
+          </a:fillRef>
+          <a:effectRef idx="2">
+            <a:schemeClr val="accent1"/>
+          </a:effectRef>
+          <a:fontRef idx="minor">
+            <a:schemeClr val="lt1"/>
+          </a:fontRef>
+        </p:style>
+        <p:txBody>
+          <a:bodyPr rtlCol="0" anchor="ctr"/>
+          <a:lstStyle/>
+          <a:p>
+            <a:pPr algn="ctr"/>
+          </a:p>
+        </p:txBody>
+      </p:sp>
+      <p:sp>
+        <p:nvSpPr>
+          <p:cNvPr id="5" name="TextBox 4"/>
+          <p:cNvSpPr txBox="1"/>
+          <p:nvPr/>
+        </p:nvSpPr>
+        <p:spPr>
+          <a:xfrm>
+            <a:off x="868680" y="1600200"/>
+            <a:ext cx="10424160" cy="1097280"/>
+          </a:xfrm>
+          <a:prstGeom prst="rect">
+            <a:avLst/>
+          </a:prstGeom>
+          <a:noFill/>
+        </p:spPr>
+        <p:txBody>
+          <a:bodyPr wrap="square" lIns="45720" rIns="45720" tIns="27432" bIns="27432" anchor="ctr">
+            <a:spAutoFit/>
+          </a:bodyPr>
+          <a:lstStyle/>
+          <a:p>
+            <a:pPr algn="l">
+              <a:spcAft>
+                <a:spcPts val="400"/>
+              </a:spcAft>
+            </a:pPr>
+            <a:r>
+              <a:rPr sz="2200" b="0" i="1">
+                <a:solidFill>
+                  <a:srgbClr val="FFFFFF"/>
+                </a:solidFill>
+                <a:latin typeface="Calibri"/>
+              </a:rPr>
+              <a:t>«Usé una IA para traducir y mejorar la redacción de mi artículo.»</a:t>
+            </a:r>
+          </a:p>
+        </p:txBody>
+      </p:sp>
+      <p:sp>
+        <p:nvSpPr>
+          <p:cNvPr id="6" name="Rounded Rectangle 5"/>
+          <p:cNvSpPr/>
+          <p:nvPr/>
+        </p:nvSpPr>
+        <p:spPr>
+          <a:xfrm>
+            <a:off x="612648" y="2926080"/>
+            <a:ext cx="5394960" cy="2926080"/>
+          </a:xfrm>
+          <a:prstGeom prst="roundRect">
+            <a:avLst>
+              <a:gd name="adj" fmla="val 6000"/>
+            </a:avLst>
+          </a:prstGeom>
+          <a:solidFill>
+            <a:srgbClr val="D9DEEF"/>
+          </a:solidFill>
+          <a:ln>
+            <a:noFill/>
+          </a:ln>
+          <a:effectLst/>
+        </p:spPr>
+        <p:style>
+          <a:lnRef idx="1">
+            <a:schemeClr val="accent1"/>
+          </a:lnRef>
+          <a:fillRef idx="3">
+            <a:schemeClr val="accent1"/>
+          </a:fillRef>
+          <a:effectRef idx="2">
+            <a:schemeClr val="accent1"/>
+          </a:effectRef>
+          <a:fontRef idx="minor">
+            <a:schemeClr val="lt1"/>
+          </a:fontRef>
+        </p:style>
+        <p:txBody>
+          <a:bodyPr rtlCol="0" anchor="ctr"/>
+          <a:lstStyle/>
+          <a:p>
+            <a:pPr algn="ctr"/>
+          </a:p>
+        </p:txBody>
+      </p:sp>
+      <p:sp>
+        <p:nvSpPr>
+          <p:cNvPr id="7" name="TextBox 6"/>
+          <p:cNvSpPr txBox="1"/>
+          <p:nvPr/>
+        </p:nvSpPr>
+        <p:spPr>
+          <a:xfrm>
+            <a:off x="795528" y="3035808"/>
+            <a:ext cx="5029200" cy="2706624"/>
+          </a:xfrm>
+          <a:prstGeom prst="rect">
+            <a:avLst/>
+          </a:prstGeom>
+          <a:noFill/>
+        </p:spPr>
+        <p:txBody>
+          <a:bodyPr wrap="square" lIns="45720" rIns="45720" tIns="27432" bIns="27432" anchor="t">
+            <a:spAutoFit/>
+          </a:bodyPr>
+          <a:lstStyle/>
+          <a:p>
+            <a:pPr algn="l">
+              <a:spcAft>
+                <a:spcPts val="600"/>
+              </a:spcAft>
+            </a:pPr>
+            <a:r>
+              <a:rPr sz="2000" b="1" i="0">
+                <a:solidFill>
+                  <a:srgbClr val="2B4EB4"/>
+                </a:solidFill>
+                <a:latin typeface="Calibri"/>
+              </a:rPr>
+              <a:t>Lo que sí dice</a:t>
+            </a:r>
+          </a:p>
+          <a:p>
+            <a:pPr algn="l">
+              <a:spcAft>
+                <a:spcPts val="400"/>
+              </a:spcAft>
+            </a:pPr>
+            <a:r>
+              <a:rPr sz="1800" b="0" i="0">
+                <a:solidFill>
+                  <a:srgbClr val="011754"/>
+                </a:solidFill>
+                <a:latin typeface="Calibri"/>
+              </a:rPr>
+              <a:t>Que se usó IA.</a:t>
+            </a:r>
+          </a:p>
+          <a:p>
+            <a:pPr algn="l">
+              <a:spcAft>
+                <a:spcPts val="400"/>
+              </a:spcAft>
+            </a:pPr>
+            <a:r>
+              <a:rPr sz="1800" b="0" i="0">
+                <a:solidFill>
+                  <a:srgbClr val="011754"/>
+                </a:solidFill>
+                <a:latin typeface="Calibri"/>
+              </a:rPr>
+              <a:t>Que la tarea fue traducir y mejorar la redacción.</a:t>
+            </a:r>
+          </a:p>
+        </p:txBody>
+      </p:sp>
+      <p:sp>
+        <p:nvSpPr>
+          <p:cNvPr id="8" name="Rounded Rectangle 7"/>
+          <p:cNvSpPr/>
+          <p:nvPr/>
+        </p:nvSpPr>
+        <p:spPr>
+          <a:xfrm>
+            <a:off x="6190488" y="2926080"/>
+            <a:ext cx="5394960" cy="2926080"/>
+          </a:xfrm>
+          <a:prstGeom prst="roundRect">
+            <a:avLst>
+              <a:gd name="adj" fmla="val 6000"/>
+            </a:avLst>
+          </a:prstGeom>
+          <a:solidFill>
+            <a:srgbClr val="F6ECC8"/>
+          </a:solidFill>
+          <a:ln>
+            <a:noFill/>
+          </a:ln>
+          <a:effectLst/>
+        </p:spPr>
+        <p:style>
+          <a:lnRef idx="1">
+            <a:schemeClr val="accent1"/>
+          </a:lnRef>
+          <a:fillRef idx="3">
+            <a:schemeClr val="accent1"/>
+          </a:fillRef>
+          <a:effectRef idx="2">
+            <a:schemeClr val="accent1"/>
+          </a:effectRef>
+          <a:fontRef idx="minor">
+            <a:schemeClr val="lt1"/>
+          </a:fontRef>
+        </p:style>
+        <p:txBody>
+          <a:bodyPr rtlCol="0" anchor="ctr"/>
+          <a:lstStyle/>
+          <a:p>
+            <a:pPr algn="ctr"/>
+          </a:p>
+        </p:txBody>
+      </p:sp>
+      <p:sp>
+        <p:nvSpPr>
+          <p:cNvPr id="9" name="TextBox 8"/>
+          <p:cNvSpPr txBox="1"/>
+          <p:nvPr/>
+        </p:nvSpPr>
+        <p:spPr>
+          <a:xfrm>
+            <a:off x="6373368" y="3035808"/>
+            <a:ext cx="5029200" cy="2706624"/>
+          </a:xfrm>
+          <a:prstGeom prst="rect">
+            <a:avLst/>
+          </a:prstGeom>
+          <a:noFill/>
+        </p:spPr>
+        <p:txBody>
+          <a:bodyPr wrap="square" lIns="45720" rIns="45720" tIns="27432" bIns="27432" anchor="t">
+            <a:spAutoFit/>
+          </a:bodyPr>
+          <a:lstStyle/>
+          <a:p>
+            <a:pPr algn="l">
+              <a:spcAft>
+                <a:spcPts val="600"/>
+              </a:spcAft>
+            </a:pPr>
+            <a:r>
+              <a:rPr sz="2000" b="1" i="0">
+                <a:solidFill>
+                  <a:srgbClr val="8A5A00"/>
+                </a:solidFill>
+                <a:latin typeface="Calibri"/>
+              </a:rPr>
+              <a:t>¿Es suficiente? Falta indicar</a:t>
+            </a:r>
+          </a:p>
+          <a:p>
+            <a:pPr algn="l">
+              <a:spcAft>
+                <a:spcPts val="400"/>
+              </a:spcAft>
+            </a:pPr>
+            <a:r>
+              <a:rPr sz="1800" b="0" i="0">
+                <a:solidFill>
+                  <a:srgbClr val="011754"/>
+                </a:solidFill>
+                <a:latin typeface="Calibri"/>
+              </a:rPr>
+              <a:t>• La herramienta y su versión.</a:t>
+            </a:r>
+          </a:p>
+          <a:p>
+            <a:pPr algn="l">
+              <a:spcAft>
+                <a:spcPts val="400"/>
+              </a:spcAft>
+            </a:pPr>
+            <a:r>
+              <a:rPr sz="1800" b="0" i="0">
+                <a:solidFill>
+                  <a:srgbClr val="011754"/>
+                </a:solidFill>
+                <a:latin typeface="Calibri"/>
+              </a:rPr>
+              <a:t>• La tarea exacta y las partes del texto.</a:t>
+            </a:r>
+          </a:p>
+          <a:p>
+            <a:pPr algn="l">
+              <a:spcAft>
+                <a:spcPts val="400"/>
+              </a:spcAft>
+            </a:pPr>
+            <a:r>
+              <a:rPr sz="1800" b="0" i="0">
+                <a:solidFill>
+                  <a:srgbClr val="011754"/>
+                </a:solidFill>
+                <a:latin typeface="Calibri"/>
+              </a:rPr>
+              <a:t>• Qué verificaron los autores.</a:t>
+            </a:r>
+          </a:p>
+        </p:txBody>
+      </p:sp>
+    </p:spTree>
+  </p:cSld>
+  <p:clrMapOvr>
+    <a:masterClrMapping/>
+  </p:clrMapOvr>
+</p:sld>
+</file>
+
 <file path=ppt/slides/slide25.xml><?xml version="1.0" encoding="utf-8"?>
 <p:sld xmlns:a="http://schemas.openxmlformats.org/drawingml/2006/main" xmlns:r="http://schemas.openxmlformats.org/officeDocument/2006/relationships" xmlns:p="http://schemas.openxmlformats.org/presentationml/2006/main">
   <p:cSld>
@@ -11315,6 +15249,482 @@
                 <a:latin typeface="Calibri"/>
               </a:rPr>
               <a:t>La declaración protege la autoría; ocultar el uso de IA no.</a:t>
+            </a:r>
+          </a:p>
+        </p:txBody>
+      </p:sp>
+    </p:spTree>
+  </p:cSld>
+  <p:clrMapOvr>
+    <a:masterClrMapping/>
+  </p:clrMapOvr>
+</p:sld>
+</file>
+
+<file path=ppt/slides/slide27.xml><?xml version="1.0" encoding="utf-8"?>
+<p:sld xmlns:a="http://schemas.openxmlformats.org/drawingml/2006/main" xmlns:r="http://schemas.openxmlformats.org/officeDocument/2006/relationships" xmlns:p="http://schemas.openxmlformats.org/presentationml/2006/main">
+  <p:cSld>
+    <p:spTree>
+      <p:nvGrpSpPr>
+        <p:cNvPr id="1" name=""/>
+        <p:cNvGrpSpPr/>
+        <p:nvPr/>
+      </p:nvGrpSpPr>
+      <p:grpSpPr>
+        <a:xfrm>
+          <a:off x="0" y="0"/>
+          <a:ext cx="0" cy="0"/>
+          <a:chOff x="0" y="0"/>
+          <a:chExt cx="0" cy="0"/>
+        </a:xfrm>
+      </p:grpSpPr>
+      <p:pic>
+        <p:nvPicPr>
+          <p:cNvPr id="2" name="Picture 1" descr="bg_content.png"/>
+          <p:cNvPicPr>
+            <a:picLocks noChangeAspect="1"/>
+          </p:cNvPicPr>
+          <p:nvPr/>
+        </p:nvPicPr>
+        <p:blipFill>
+          <a:blip r:embed="rId2"/>
+          <a:stretch>
+            <a:fillRect/>
+          </a:stretch>
+        </p:blipFill>
+        <p:spPr>
+          <a:xfrm>
+            <a:off x="0" y="0"/>
+            <a:ext cx="12191695" cy="6858000"/>
+          </a:xfrm>
+          <a:prstGeom prst="rect">
+            <a:avLst/>
+          </a:prstGeom>
+        </p:spPr>
+      </p:pic>
+      <p:sp>
+        <p:nvSpPr>
+          <p:cNvPr id="3" name="TextBox 2"/>
+          <p:cNvSpPr txBox="1"/>
+          <p:nvPr/>
+        </p:nvSpPr>
+        <p:spPr>
+          <a:xfrm>
+            <a:off x="612648" y="777240"/>
+            <a:ext cx="10332720" cy="640080"/>
+          </a:xfrm>
+          <a:prstGeom prst="rect">
+            <a:avLst/>
+          </a:prstGeom>
+          <a:noFill/>
+        </p:spPr>
+        <p:txBody>
+          <a:bodyPr wrap="square" lIns="45720" rIns="45720" tIns="27432" bIns="27432" anchor="ctr">
+            <a:spAutoFit/>
+          </a:bodyPr>
+          <a:lstStyle/>
+          <a:p>
+            <a:pPr algn="l">
+              <a:spcAft>
+                <a:spcPts val="400"/>
+              </a:spcAft>
+            </a:pPr>
+            <a:r>
+              <a:rPr sz="2800" b="1" i="0">
+                <a:solidFill>
+                  <a:srgbClr val="1836B2"/>
+                </a:solidFill>
+                <a:latin typeface="Calibri"/>
+              </a:rPr>
+              <a:t>Límite de la declaración</a:t>
+            </a:r>
+          </a:p>
+        </p:txBody>
+      </p:sp>
+      <p:sp>
+        <p:nvSpPr>
+          <p:cNvPr id="4" name="Rounded Rectangle 3"/>
+          <p:cNvSpPr/>
+          <p:nvPr/>
+        </p:nvSpPr>
+        <p:spPr>
+          <a:xfrm>
+            <a:off x="612648" y="1645920"/>
+            <a:ext cx="3505200" cy="3017520"/>
+          </a:xfrm>
+          <a:prstGeom prst="roundRect">
+            <a:avLst>
+              <a:gd name="adj" fmla="val 6000"/>
+            </a:avLst>
+          </a:prstGeom>
+          <a:solidFill>
+            <a:srgbClr val="D9DEEF"/>
+          </a:solidFill>
+          <a:ln>
+            <a:noFill/>
+          </a:ln>
+          <a:effectLst/>
+        </p:spPr>
+        <p:style>
+          <a:lnRef idx="1">
+            <a:schemeClr val="accent1"/>
+          </a:lnRef>
+          <a:fillRef idx="3">
+            <a:schemeClr val="accent1"/>
+          </a:fillRef>
+          <a:effectRef idx="2">
+            <a:schemeClr val="accent1"/>
+          </a:effectRef>
+          <a:fontRef idx="minor">
+            <a:schemeClr val="lt1"/>
+          </a:fontRef>
+        </p:style>
+        <p:txBody>
+          <a:bodyPr rtlCol="0" anchor="ctr"/>
+          <a:lstStyle/>
+          <a:p>
+            <a:pPr algn="ctr"/>
+          </a:p>
+        </p:txBody>
+      </p:sp>
+      <p:sp>
+        <p:nvSpPr>
+          <p:cNvPr id="5" name="TextBox 4"/>
+          <p:cNvSpPr txBox="1"/>
+          <p:nvPr/>
+        </p:nvSpPr>
+        <p:spPr>
+          <a:xfrm>
+            <a:off x="795528" y="1755648"/>
+            <a:ext cx="3139440" cy="2798063"/>
+          </a:xfrm>
+          <a:prstGeom prst="rect">
+            <a:avLst/>
+          </a:prstGeom>
+          <a:noFill/>
+        </p:spPr>
+        <p:txBody>
+          <a:bodyPr wrap="square" lIns="45720" rIns="45720" tIns="27432" bIns="27432" anchor="t">
+            <a:spAutoFit/>
+          </a:bodyPr>
+          <a:lstStyle/>
+          <a:p>
+            <a:pPr algn="l">
+              <a:spcAft>
+                <a:spcPts val="600"/>
+              </a:spcAft>
+            </a:pPr>
+            <a:r>
+              <a:rPr sz="2000" b="1" i="0">
+                <a:solidFill>
+                  <a:srgbClr val="2B4EB4"/>
+                </a:solidFill>
+                <a:latin typeface="Calibri"/>
+              </a:rPr>
+              <a:t>Lo que declara</a:t>
+            </a:r>
+          </a:p>
+          <a:p>
+            <a:pPr algn="l">
+              <a:spcAft>
+                <a:spcPts val="400"/>
+              </a:spcAft>
+            </a:pPr>
+            <a:r>
+              <a:rPr sz="1800" b="0" i="0">
+                <a:solidFill>
+                  <a:srgbClr val="011754"/>
+                </a:solidFill>
+                <a:latin typeface="Calibri"/>
+              </a:rPr>
+              <a:t>Qué herramienta se usó y en qué tarea, con transparencia ante la revista o el comité.</a:t>
+            </a:r>
+          </a:p>
+        </p:txBody>
+      </p:sp>
+      <p:sp>
+        <p:nvSpPr>
+          <p:cNvPr id="6" name="Rounded Rectangle 5"/>
+          <p:cNvSpPr/>
+          <p:nvPr/>
+        </p:nvSpPr>
+        <p:spPr>
+          <a:xfrm>
+            <a:off x="4346448" y="1645920"/>
+            <a:ext cx="3505200" cy="3017520"/>
+          </a:xfrm>
+          <a:prstGeom prst="roundRect">
+            <a:avLst>
+              <a:gd name="adj" fmla="val 6000"/>
+            </a:avLst>
+          </a:prstGeom>
+          <a:solidFill>
+            <a:srgbClr val="D9DEEF"/>
+          </a:solidFill>
+          <a:ln>
+            <a:noFill/>
+          </a:ln>
+          <a:effectLst/>
+        </p:spPr>
+        <p:style>
+          <a:lnRef idx="1">
+            <a:schemeClr val="accent1"/>
+          </a:lnRef>
+          <a:fillRef idx="3">
+            <a:schemeClr val="accent1"/>
+          </a:fillRef>
+          <a:effectRef idx="2">
+            <a:schemeClr val="accent1"/>
+          </a:effectRef>
+          <a:fontRef idx="minor">
+            <a:schemeClr val="lt1"/>
+          </a:fontRef>
+        </p:style>
+        <p:txBody>
+          <a:bodyPr rtlCol="0" anchor="ctr"/>
+          <a:lstStyle/>
+          <a:p>
+            <a:pPr algn="ctr"/>
+          </a:p>
+        </p:txBody>
+      </p:sp>
+      <p:sp>
+        <p:nvSpPr>
+          <p:cNvPr id="7" name="TextBox 6"/>
+          <p:cNvSpPr txBox="1"/>
+          <p:nvPr/>
+        </p:nvSpPr>
+        <p:spPr>
+          <a:xfrm>
+            <a:off x="4529328" y="1755648"/>
+            <a:ext cx="3139440" cy="2798063"/>
+          </a:xfrm>
+          <a:prstGeom prst="rect">
+            <a:avLst/>
+          </a:prstGeom>
+          <a:noFill/>
+        </p:spPr>
+        <p:txBody>
+          <a:bodyPr wrap="square" lIns="45720" rIns="45720" tIns="27432" bIns="27432" anchor="t">
+            <a:spAutoFit/>
+          </a:bodyPr>
+          <a:lstStyle/>
+          <a:p>
+            <a:pPr algn="l">
+              <a:spcAft>
+                <a:spcPts val="600"/>
+              </a:spcAft>
+            </a:pPr>
+            <a:r>
+              <a:rPr sz="2000" b="1" i="0">
+                <a:solidFill>
+                  <a:srgbClr val="2B4EB4"/>
+                </a:solidFill>
+                <a:latin typeface="Calibri"/>
+              </a:rPr>
+              <a:t>Lo que no reemplaza</a:t>
+            </a:r>
+          </a:p>
+          <a:p>
+            <a:pPr algn="l">
+              <a:spcAft>
+                <a:spcPts val="400"/>
+              </a:spcAft>
+            </a:pPr>
+            <a:r>
+              <a:rPr sz="1800" b="0" i="0">
+                <a:solidFill>
+                  <a:srgbClr val="011754"/>
+                </a:solidFill>
+                <a:latin typeface="Calibri"/>
+              </a:rPr>
+              <a:t>La revisión, la verificación y la decisión del investigador sobre el contenido.</a:t>
+            </a:r>
+          </a:p>
+        </p:txBody>
+      </p:sp>
+      <p:sp>
+        <p:nvSpPr>
+          <p:cNvPr id="8" name="Rounded Rectangle 7"/>
+          <p:cNvSpPr/>
+          <p:nvPr/>
+        </p:nvSpPr>
+        <p:spPr>
+          <a:xfrm>
+            <a:off x="8080248" y="1645920"/>
+            <a:ext cx="3505200" cy="3017520"/>
+          </a:xfrm>
+          <a:prstGeom prst="roundRect">
+            <a:avLst>
+              <a:gd name="adj" fmla="val 6000"/>
+            </a:avLst>
+          </a:prstGeom>
+          <a:solidFill>
+            <a:srgbClr val="D9DEEF"/>
+          </a:solidFill>
+          <a:ln>
+            <a:noFill/>
+          </a:ln>
+          <a:effectLst/>
+        </p:spPr>
+        <p:style>
+          <a:lnRef idx="1">
+            <a:schemeClr val="accent1"/>
+          </a:lnRef>
+          <a:fillRef idx="3">
+            <a:schemeClr val="accent1"/>
+          </a:fillRef>
+          <a:effectRef idx="2">
+            <a:schemeClr val="accent1"/>
+          </a:effectRef>
+          <a:fontRef idx="minor">
+            <a:schemeClr val="lt1"/>
+          </a:fontRef>
+        </p:style>
+        <p:txBody>
+          <a:bodyPr rtlCol="0" anchor="ctr"/>
+          <a:lstStyle/>
+          <a:p>
+            <a:pPr algn="ctr"/>
+          </a:p>
+        </p:txBody>
+      </p:sp>
+      <p:sp>
+        <p:nvSpPr>
+          <p:cNvPr id="9" name="TextBox 8"/>
+          <p:cNvSpPr txBox="1"/>
+          <p:nvPr/>
+        </p:nvSpPr>
+        <p:spPr>
+          <a:xfrm>
+            <a:off x="8263128" y="1755648"/>
+            <a:ext cx="3139440" cy="2798063"/>
+          </a:xfrm>
+          <a:prstGeom prst="rect">
+            <a:avLst/>
+          </a:prstGeom>
+          <a:noFill/>
+        </p:spPr>
+        <p:txBody>
+          <a:bodyPr wrap="square" lIns="45720" rIns="45720" tIns="27432" bIns="27432" anchor="t">
+            <a:spAutoFit/>
+          </a:bodyPr>
+          <a:lstStyle/>
+          <a:p>
+            <a:pPr algn="l">
+              <a:spcAft>
+                <a:spcPts val="600"/>
+              </a:spcAft>
+            </a:pPr>
+            <a:r>
+              <a:rPr sz="2000" b="1" i="0">
+                <a:solidFill>
+                  <a:srgbClr val="2B4EB4"/>
+                </a:solidFill>
+                <a:latin typeface="Calibri"/>
+              </a:rPr>
+              <a:t>Investigador</a:t>
+            </a:r>
+          </a:p>
+          <a:p>
+            <a:pPr algn="l">
+              <a:spcAft>
+                <a:spcPts val="400"/>
+              </a:spcAft>
+            </a:pPr>
+            <a:r>
+              <a:rPr sz="1800" b="0" i="0">
+                <a:solidFill>
+                  <a:srgbClr val="011754"/>
+                </a:solidFill>
+                <a:latin typeface="Calibri"/>
+              </a:rPr>
+              <a:t>Evalúa, verifica, interpreta, decide y firma. La responsabilidad no se transfiere.</a:t>
+            </a:r>
+          </a:p>
+        </p:txBody>
+      </p:sp>
+      <p:sp>
+        <p:nvSpPr>
+          <p:cNvPr id="10" name="Rounded Rectangle 9"/>
+          <p:cNvSpPr/>
+          <p:nvPr/>
+        </p:nvSpPr>
+        <p:spPr>
+          <a:xfrm>
+            <a:off x="612648" y="4937760"/>
+            <a:ext cx="10972800" cy="914400"/>
+          </a:xfrm>
+          <a:prstGeom prst="roundRect">
+            <a:avLst>
+              <a:gd name="adj" fmla="val 6000"/>
+            </a:avLst>
+          </a:prstGeom>
+          <a:solidFill>
+            <a:srgbClr val="011754"/>
+          </a:solidFill>
+          <a:ln>
+            <a:noFill/>
+          </a:ln>
+          <a:effectLst/>
+        </p:spPr>
+        <p:style>
+          <a:lnRef idx="1">
+            <a:schemeClr val="accent1"/>
+          </a:lnRef>
+          <a:fillRef idx="3">
+            <a:schemeClr val="accent1"/>
+          </a:fillRef>
+          <a:effectRef idx="2">
+            <a:schemeClr val="accent1"/>
+          </a:effectRef>
+          <a:fontRef idx="minor">
+            <a:schemeClr val="lt1"/>
+          </a:fontRef>
+        </p:style>
+        <p:txBody>
+          <a:bodyPr rtlCol="0" anchor="ctr"/>
+          <a:lstStyle/>
+          <a:p>
+            <a:pPr algn="ctr"/>
+          </a:p>
+        </p:txBody>
+      </p:sp>
+      <p:sp>
+        <p:nvSpPr>
+          <p:cNvPr id="11" name="TextBox 10"/>
+          <p:cNvSpPr txBox="1"/>
+          <p:nvPr/>
+        </p:nvSpPr>
+        <p:spPr>
+          <a:xfrm>
+            <a:off x="841248" y="4937760"/>
+            <a:ext cx="10515600" cy="914400"/>
+          </a:xfrm>
+          <a:prstGeom prst="rect">
+            <a:avLst/>
+          </a:prstGeom>
+          <a:noFill/>
+        </p:spPr>
+        <p:txBody>
+          <a:bodyPr wrap="square" lIns="45720" rIns="45720" tIns="27432" bIns="27432" anchor="ctr">
+            <a:spAutoFit/>
+          </a:bodyPr>
+          <a:lstStyle/>
+          <a:p>
+            <a:pPr algn="l">
+              <a:spcAft>
+                <a:spcPts val="400"/>
+              </a:spcAft>
+            </a:pPr>
+            <a:r>
+              <a:rPr sz="1800" b="1" i="0">
+                <a:solidFill>
+                  <a:srgbClr val="FFFFFF"/>
+                </a:solidFill>
+                <a:latin typeface="Calibri"/>
+              </a:rPr>
+              <a:t>Declarar el uso de IA no disminuye la autoría; ocultarlo sí la compromete.</a:t>
             </a:r>
           </a:p>
         </p:txBody>
@@ -15265,7 +19675,7 @@
                 </a:solidFill>
                 <a:latin typeface="Calibri"/>
               </a:rPr>
-              <a:t>1. El investigador como responsable</a:t>
+              <a:t>1. El investigador como director de la IA</a:t>
             </a:r>
           </a:p>
         </p:txBody>
@@ -15513,7 +19923,7 @@
                 </a:solidFill>
                 <a:latin typeface="Calibri"/>
               </a:rPr>
-              <a:t>3. Alucinaciones, sesgos y errores</a:t>
+              <a:t>3. Sesgos, errores y alucinaciones</a:t>
             </a:r>
           </a:p>
         </p:txBody>
@@ -15552,7 +19962,7 @@
                 </a:solidFill>
                 <a:latin typeface="Calibri"/>
               </a:rPr>
-              <a:t>Cómo fallan las respuestas y cómo reconocerlo.</a:t>
+              <a:t>Cómo fallan las respuestas y cómo detectarlo.</a:t>
             </a:r>
           </a:p>
         </p:txBody>
@@ -15637,7 +20047,7 @@
                 </a:solidFill>
                 <a:latin typeface="Calibri"/>
               </a:rPr>
-              <a:t>4. Criterios y ciclo de auditoría</a:t>
+              <a:t>4. Ética y límites en la academia</a:t>
             </a:r>
           </a:p>
         </p:txBody>
@@ -15676,7 +20086,7 @@
                 </a:solidFill>
                 <a:latin typeface="Calibri"/>
               </a:rPr>
-              <a:t>Cinco criterios para decidir si una respuesta se acepta.</a:t>
+              <a:t>Qué datos no se comparten con una IA gratuita.</a:t>
             </a:r>
           </a:p>
         </p:txBody>
@@ -15761,7 +20171,7 @@
                 </a:solidFill>
                 <a:latin typeface="Calibri"/>
               </a:rPr>
-              <a:t>5. Datos sensibles y declaración de uso</a:t>
+              <a:t>5. Autoría y declaración de uso</a:t>
             </a:r>
           </a:p>
         </p:txBody>
@@ -15800,7 +20210,7 @@
                 </a:solidFill>
                 <a:latin typeface="Calibri"/>
               </a:rPr>
-              <a:t>Qué no compartir con una IA gratuita y cómo declarar su uso.</a:t>
+              <a:t>Cómo declarar el uso de IA con herramienta, tarea y verificación.</a:t>
             </a:r>
           </a:p>
         </p:txBody>
@@ -15924,7 +20334,134 @@
                 </a:solidFill>
                 <a:latin typeface="Calibri"/>
               </a:rPr>
-              <a:t>Auditoría guiada de una respuesta de IA y declaración de uso.</a:t>
+              <a:t>Auditoría guiada de una respuesta y caso autónomo.</a:t>
+            </a:r>
+          </a:p>
+        </p:txBody>
+      </p:sp>
+    </p:spTree>
+  </p:cSld>
+  <p:clrMapOvr>
+    <a:masterClrMapping/>
+  </p:clrMapOvr>
+</p:sld>
+</file>
+
+<file path=ppt/slides/slide5.xml><?xml version="1.0" encoding="utf-8"?>
+<p:sld xmlns:a="http://schemas.openxmlformats.org/drawingml/2006/main" xmlns:r="http://schemas.openxmlformats.org/officeDocument/2006/relationships" xmlns:p="http://schemas.openxmlformats.org/presentationml/2006/main">
+  <p:cSld>
+    <p:spTree>
+      <p:nvGrpSpPr>
+        <p:cNvPr id="1" name=""/>
+        <p:cNvGrpSpPr/>
+        <p:nvPr/>
+      </p:nvGrpSpPr>
+      <p:grpSpPr>
+        <a:xfrm>
+          <a:off x="0" y="0"/>
+          <a:ext cx="0" cy="0"/>
+          <a:chOff x="0" y="0"/>
+          <a:chExt cx="0" cy="0"/>
+        </a:xfrm>
+      </p:grpSpPr>
+      <p:pic>
+        <p:nvPicPr>
+          <p:cNvPr id="2" name="Picture 1" descr="divider_bg.png"/>
+          <p:cNvPicPr>
+            <a:picLocks noChangeAspect="1"/>
+          </p:cNvPicPr>
+          <p:nvPr/>
+        </p:nvPicPr>
+        <p:blipFill>
+          <a:blip r:embed="rId2"/>
+          <a:stretch>
+            <a:fillRect/>
+          </a:stretch>
+        </p:blipFill>
+        <p:spPr>
+          <a:xfrm>
+            <a:off x="0" y="0"/>
+            <a:ext cx="12191695" cy="6858000"/>
+          </a:xfrm>
+          <a:prstGeom prst="rect">
+            <a:avLst/>
+          </a:prstGeom>
+        </p:spPr>
+      </p:pic>
+      <p:sp>
+        <p:nvSpPr>
+          <p:cNvPr id="3" name="TextBox 2"/>
+          <p:cNvSpPr txBox="1"/>
+          <p:nvPr/>
+        </p:nvSpPr>
+        <p:spPr>
+          <a:xfrm>
+            <a:off x="982912" y="2676125"/>
+            <a:ext cx="437840" cy="1999910"/>
+          </a:xfrm>
+          <a:prstGeom prst="rect">
+            <a:avLst/>
+          </a:prstGeom>
+          <a:noFill/>
+        </p:spPr>
+        <p:txBody>
+          <a:bodyPr wrap="square">
+            <a:spAutoFit/>
+          </a:bodyPr>
+          <a:lstStyle/>
+          <a:p>
+            <a:pPr algn="l">
+              <a:lnSpc>
+                <a:spcPct val="115000"/>
+              </a:lnSpc>
+            </a:pPr>
+            <a:r>
+              <a:rPr sz="7200" b="1" i="0">
+                <a:solidFill>
+                  <a:srgbClr val="FFFFFF"/>
+                </a:solidFill>
+                <a:latin typeface="Calibri"/>
+              </a:rPr>
+              <a:t>1</a:t>
+            </a:r>
+          </a:p>
+        </p:txBody>
+      </p:sp>
+      <p:sp>
+        <p:nvSpPr>
+          <p:cNvPr id="4" name="TextBox 3"/>
+          <p:cNvSpPr txBox="1"/>
+          <p:nvPr/>
+        </p:nvSpPr>
+        <p:spPr>
+          <a:xfrm>
+            <a:off x="982912" y="4737409"/>
+            <a:ext cx="10346277" cy="702221"/>
+          </a:xfrm>
+          <a:prstGeom prst="rect">
+            <a:avLst/>
+          </a:prstGeom>
+          <a:noFill/>
+        </p:spPr>
+        <p:txBody>
+          <a:bodyPr wrap="square">
+            <a:spAutoFit/>
+          </a:bodyPr>
+          <a:lstStyle/>
+          <a:p>
+            <a:pPr algn="l">
+              <a:lnSpc>
+                <a:spcPct val="115000"/>
+              </a:lnSpc>
+            </a:pPr>
+            <a:r>
+              <a:rPr sz="2600" b="0" i="0">
+                <a:solidFill>
+                  <a:srgbClr val="FFFFFF"/>
+                </a:solidFill>
+                <a:latin typeface="Calibri"/>
+              </a:rPr>
+              <a:t>EL INVESTIGADOR COMO DIRECTOR DE LA IA</a:t>
             </a:r>
           </a:p>
         </p:txBody>
@@ -16401,6 +20938,1160 @@
                 <a:latin typeface="Calibri"/>
               </a:rPr>
               <a:t>La IA apoya el proceso; no lo reemplaza. Si algo falla en la tesis, responde el investigador, no el chatbot.</a:t>
+            </a:r>
+          </a:p>
+        </p:txBody>
+      </p:sp>
+    </p:spTree>
+  </p:cSld>
+  <p:clrMapOvr>
+    <a:masterClrMapping/>
+  </p:clrMapOvr>
+</p:sld>
+</file>
+
+<file path=ppt/slides/slide7.xml><?xml version="1.0" encoding="utf-8"?>
+<p:sld xmlns:a="http://schemas.openxmlformats.org/drawingml/2006/main" xmlns:r="http://schemas.openxmlformats.org/officeDocument/2006/relationships" xmlns:p="http://schemas.openxmlformats.org/presentationml/2006/main">
+  <p:cSld>
+    <p:spTree>
+      <p:nvGrpSpPr>
+        <p:cNvPr id="1" name=""/>
+        <p:cNvGrpSpPr/>
+        <p:nvPr/>
+      </p:nvGrpSpPr>
+      <p:grpSpPr>
+        <a:xfrm>
+          <a:off x="0" y="0"/>
+          <a:ext cx="0" cy="0"/>
+          <a:chOff x="0" y="0"/>
+          <a:chExt cx="0" cy="0"/>
+        </a:xfrm>
+      </p:grpSpPr>
+      <p:pic>
+        <p:nvPicPr>
+          <p:cNvPr id="2" name="Picture 1" descr="bg_content.png"/>
+          <p:cNvPicPr>
+            <a:picLocks noChangeAspect="1"/>
+          </p:cNvPicPr>
+          <p:nvPr/>
+        </p:nvPicPr>
+        <p:blipFill>
+          <a:blip r:embed="rId2"/>
+          <a:stretch>
+            <a:fillRect/>
+          </a:stretch>
+        </p:blipFill>
+        <p:spPr>
+          <a:xfrm>
+            <a:off x="0" y="0"/>
+            <a:ext cx="12191695" cy="6858000"/>
+          </a:xfrm>
+          <a:prstGeom prst="rect">
+            <a:avLst/>
+          </a:prstGeom>
+        </p:spPr>
+      </p:pic>
+      <p:sp>
+        <p:nvSpPr>
+          <p:cNvPr id="3" name="TextBox 2"/>
+          <p:cNvSpPr txBox="1"/>
+          <p:nvPr/>
+        </p:nvSpPr>
+        <p:spPr>
+          <a:xfrm>
+            <a:off x="612648" y="777240"/>
+            <a:ext cx="10332720" cy="640080"/>
+          </a:xfrm>
+          <a:prstGeom prst="rect">
+            <a:avLst/>
+          </a:prstGeom>
+          <a:noFill/>
+        </p:spPr>
+        <p:txBody>
+          <a:bodyPr wrap="square" lIns="45720" rIns="45720" tIns="27432" bIns="27432" anchor="ctr">
+            <a:spAutoFit/>
+          </a:bodyPr>
+          <a:lstStyle/>
+          <a:p>
+            <a:pPr algn="l">
+              <a:spcAft>
+                <a:spcPts val="400"/>
+              </a:spcAft>
+            </a:pPr>
+            <a:r>
+              <a:rPr sz="2800" b="1" i="0">
+                <a:solidFill>
+                  <a:srgbClr val="1836B2"/>
+                </a:solidFill>
+                <a:latin typeface="Calibri"/>
+              </a:rPr>
+              <a:t>¿Qué decisiones sigue tomando el investigador?</a:t>
+            </a:r>
+          </a:p>
+        </p:txBody>
+      </p:sp>
+      <p:sp>
+        <p:nvSpPr>
+          <p:cNvPr id="4" name="Rounded Rectangle 3"/>
+          <p:cNvSpPr/>
+          <p:nvPr/>
+        </p:nvSpPr>
+        <p:spPr>
+          <a:xfrm>
+            <a:off x="612648" y="1600200"/>
+            <a:ext cx="5394960" cy="1828800"/>
+          </a:xfrm>
+          <a:prstGeom prst="roundRect">
+            <a:avLst>
+              <a:gd name="adj" fmla="val 6000"/>
+            </a:avLst>
+          </a:prstGeom>
+          <a:solidFill>
+            <a:srgbClr val="D9DEEF"/>
+          </a:solidFill>
+          <a:ln>
+            <a:noFill/>
+          </a:ln>
+          <a:effectLst/>
+        </p:spPr>
+        <p:style>
+          <a:lnRef idx="1">
+            <a:schemeClr val="accent1"/>
+          </a:lnRef>
+          <a:fillRef idx="3">
+            <a:schemeClr val="accent1"/>
+          </a:fillRef>
+          <a:effectRef idx="2">
+            <a:schemeClr val="accent1"/>
+          </a:effectRef>
+          <a:fontRef idx="minor">
+            <a:schemeClr val="lt1"/>
+          </a:fontRef>
+        </p:style>
+        <p:txBody>
+          <a:bodyPr rtlCol="0" anchor="ctr"/>
+          <a:lstStyle/>
+          <a:p>
+            <a:pPr algn="ctr"/>
+          </a:p>
+        </p:txBody>
+      </p:sp>
+      <p:sp>
+        <p:nvSpPr>
+          <p:cNvPr id="5" name="TextBox 4"/>
+          <p:cNvSpPr txBox="1"/>
+          <p:nvPr/>
+        </p:nvSpPr>
+        <p:spPr>
+          <a:xfrm>
+            <a:off x="795528" y="1709928"/>
+            <a:ext cx="5029200" cy="1609344"/>
+          </a:xfrm>
+          <a:prstGeom prst="rect">
+            <a:avLst/>
+          </a:prstGeom>
+          <a:noFill/>
+        </p:spPr>
+        <p:txBody>
+          <a:bodyPr wrap="square" lIns="45720" rIns="45720" tIns="27432" bIns="27432" anchor="t">
+            <a:spAutoFit/>
+          </a:bodyPr>
+          <a:lstStyle/>
+          <a:p>
+            <a:pPr algn="l">
+              <a:spcAft>
+                <a:spcPts val="600"/>
+              </a:spcAft>
+            </a:pPr>
+            <a:r>
+              <a:rPr sz="2000" b="1" i="0">
+                <a:solidFill>
+                  <a:srgbClr val="2B4EB4"/>
+                </a:solidFill>
+                <a:latin typeface="Calibri"/>
+              </a:rPr>
+              <a:t>Qué preguntar</a:t>
+            </a:r>
+          </a:p>
+          <a:p>
+            <a:pPr algn="l">
+              <a:spcAft>
+                <a:spcPts val="400"/>
+              </a:spcAft>
+            </a:pPr>
+            <a:r>
+              <a:rPr sz="1800" b="0" i="0">
+                <a:solidFill>
+                  <a:srgbClr val="011754"/>
+                </a:solidFill>
+                <a:latin typeface="Calibri"/>
+              </a:rPr>
+              <a:t>Formular la pregunta de investigación y delimitar el problema. La IA responde lo que se le pide; no sabe qué vale la pena preguntar.</a:t>
+            </a:r>
+          </a:p>
+        </p:txBody>
+      </p:sp>
+      <p:sp>
+        <p:nvSpPr>
+          <p:cNvPr id="6" name="Rounded Rectangle 5"/>
+          <p:cNvSpPr/>
+          <p:nvPr/>
+        </p:nvSpPr>
+        <p:spPr>
+          <a:xfrm>
+            <a:off x="6190488" y="1600200"/>
+            <a:ext cx="5394960" cy="1828800"/>
+          </a:xfrm>
+          <a:prstGeom prst="roundRect">
+            <a:avLst>
+              <a:gd name="adj" fmla="val 6000"/>
+            </a:avLst>
+          </a:prstGeom>
+          <a:solidFill>
+            <a:srgbClr val="D9DEEF"/>
+          </a:solidFill>
+          <a:ln>
+            <a:noFill/>
+          </a:ln>
+          <a:effectLst/>
+        </p:spPr>
+        <p:style>
+          <a:lnRef idx="1">
+            <a:schemeClr val="accent1"/>
+          </a:lnRef>
+          <a:fillRef idx="3">
+            <a:schemeClr val="accent1"/>
+          </a:fillRef>
+          <a:effectRef idx="2">
+            <a:schemeClr val="accent1"/>
+          </a:effectRef>
+          <a:fontRef idx="minor">
+            <a:schemeClr val="lt1"/>
+          </a:fontRef>
+        </p:style>
+        <p:txBody>
+          <a:bodyPr rtlCol="0" anchor="ctr"/>
+          <a:lstStyle/>
+          <a:p>
+            <a:pPr algn="ctr"/>
+          </a:p>
+        </p:txBody>
+      </p:sp>
+      <p:sp>
+        <p:nvSpPr>
+          <p:cNvPr id="7" name="TextBox 6"/>
+          <p:cNvSpPr txBox="1"/>
+          <p:nvPr/>
+        </p:nvSpPr>
+        <p:spPr>
+          <a:xfrm>
+            <a:off x="6373368" y="1709928"/>
+            <a:ext cx="5029200" cy="1609344"/>
+          </a:xfrm>
+          <a:prstGeom prst="rect">
+            <a:avLst/>
+          </a:prstGeom>
+          <a:noFill/>
+        </p:spPr>
+        <p:txBody>
+          <a:bodyPr wrap="square" lIns="45720" rIns="45720" tIns="27432" bIns="27432" anchor="t">
+            <a:spAutoFit/>
+          </a:bodyPr>
+          <a:lstStyle/>
+          <a:p>
+            <a:pPr algn="l">
+              <a:spcAft>
+                <a:spcPts val="600"/>
+              </a:spcAft>
+            </a:pPr>
+            <a:r>
+              <a:rPr sz="2000" b="1" i="0">
+                <a:solidFill>
+                  <a:srgbClr val="2B4EB4"/>
+                </a:solidFill>
+                <a:latin typeface="Calibri"/>
+              </a:rPr>
+              <a:t>Qué aceptar</a:t>
+            </a:r>
+          </a:p>
+          <a:p>
+            <a:pPr algn="l">
+              <a:spcAft>
+                <a:spcPts val="400"/>
+              </a:spcAft>
+            </a:pPr>
+            <a:r>
+              <a:rPr sz="1800" b="0" i="0">
+                <a:solidFill>
+                  <a:srgbClr val="011754"/>
+                </a:solidFill>
+                <a:latin typeface="Calibri"/>
+              </a:rPr>
+              <a:t>Evaluar si una respuesta es pertinente y suficiente antes de usarla como evidencia o antecedente.</a:t>
+            </a:r>
+          </a:p>
+        </p:txBody>
+      </p:sp>
+      <p:sp>
+        <p:nvSpPr>
+          <p:cNvPr id="8" name="Rounded Rectangle 7"/>
+          <p:cNvSpPr/>
+          <p:nvPr/>
+        </p:nvSpPr>
+        <p:spPr>
+          <a:xfrm>
+            <a:off x="612648" y="3611880"/>
+            <a:ext cx="5394960" cy="1828800"/>
+          </a:xfrm>
+          <a:prstGeom prst="roundRect">
+            <a:avLst>
+              <a:gd name="adj" fmla="val 6000"/>
+            </a:avLst>
+          </a:prstGeom>
+          <a:solidFill>
+            <a:srgbClr val="D9DEEF"/>
+          </a:solidFill>
+          <a:ln>
+            <a:noFill/>
+          </a:ln>
+          <a:effectLst/>
+        </p:spPr>
+        <p:style>
+          <a:lnRef idx="1">
+            <a:schemeClr val="accent1"/>
+          </a:lnRef>
+          <a:fillRef idx="3">
+            <a:schemeClr val="accent1"/>
+          </a:fillRef>
+          <a:effectRef idx="2">
+            <a:schemeClr val="accent1"/>
+          </a:effectRef>
+          <a:fontRef idx="minor">
+            <a:schemeClr val="lt1"/>
+          </a:fontRef>
+        </p:style>
+        <p:txBody>
+          <a:bodyPr rtlCol="0" anchor="ctr"/>
+          <a:lstStyle/>
+          <a:p>
+            <a:pPr algn="ctr"/>
+          </a:p>
+        </p:txBody>
+      </p:sp>
+      <p:sp>
+        <p:nvSpPr>
+          <p:cNvPr id="9" name="TextBox 8"/>
+          <p:cNvSpPr txBox="1"/>
+          <p:nvPr/>
+        </p:nvSpPr>
+        <p:spPr>
+          <a:xfrm>
+            <a:off x="795528" y="3721608"/>
+            <a:ext cx="5029200" cy="1609344"/>
+          </a:xfrm>
+          <a:prstGeom prst="rect">
+            <a:avLst/>
+          </a:prstGeom>
+          <a:noFill/>
+        </p:spPr>
+        <p:txBody>
+          <a:bodyPr wrap="square" lIns="45720" rIns="45720" tIns="27432" bIns="27432" anchor="t">
+            <a:spAutoFit/>
+          </a:bodyPr>
+          <a:lstStyle/>
+          <a:p>
+            <a:pPr algn="l">
+              <a:spcAft>
+                <a:spcPts val="600"/>
+              </a:spcAft>
+            </a:pPr>
+            <a:r>
+              <a:rPr sz="2000" b="1" i="0">
+                <a:solidFill>
+                  <a:srgbClr val="2B4EB4"/>
+                </a:solidFill>
+                <a:latin typeface="Calibri"/>
+              </a:rPr>
+              <a:t>Qué verificar</a:t>
+            </a:r>
+          </a:p>
+          <a:p>
+            <a:pPr algn="l">
+              <a:spcAft>
+                <a:spcPts val="400"/>
+              </a:spcAft>
+            </a:pPr>
+            <a:r>
+              <a:rPr sz="1800" b="0" i="0">
+                <a:solidFill>
+                  <a:srgbClr val="011754"/>
+                </a:solidFill>
+                <a:latin typeface="Calibri"/>
+              </a:rPr>
+              <a:t>Comprobar datos, cifras y referencias en la fuente original: título, autor, año, revista y DOI.</a:t>
+            </a:r>
+          </a:p>
+        </p:txBody>
+      </p:sp>
+      <p:sp>
+        <p:nvSpPr>
+          <p:cNvPr id="10" name="Rounded Rectangle 9"/>
+          <p:cNvSpPr/>
+          <p:nvPr/>
+        </p:nvSpPr>
+        <p:spPr>
+          <a:xfrm>
+            <a:off x="6190488" y="3611880"/>
+            <a:ext cx="5394960" cy="1828800"/>
+          </a:xfrm>
+          <a:prstGeom prst="roundRect">
+            <a:avLst>
+              <a:gd name="adj" fmla="val 6000"/>
+            </a:avLst>
+          </a:prstGeom>
+          <a:solidFill>
+            <a:srgbClr val="D9DEEF"/>
+          </a:solidFill>
+          <a:ln>
+            <a:noFill/>
+          </a:ln>
+          <a:effectLst/>
+        </p:spPr>
+        <p:style>
+          <a:lnRef idx="1">
+            <a:schemeClr val="accent1"/>
+          </a:lnRef>
+          <a:fillRef idx="3">
+            <a:schemeClr val="accent1"/>
+          </a:fillRef>
+          <a:effectRef idx="2">
+            <a:schemeClr val="accent1"/>
+          </a:effectRef>
+          <a:fontRef idx="minor">
+            <a:schemeClr val="lt1"/>
+          </a:fontRef>
+        </p:style>
+        <p:txBody>
+          <a:bodyPr rtlCol="0" anchor="ctr"/>
+          <a:lstStyle/>
+          <a:p>
+            <a:pPr algn="ctr"/>
+          </a:p>
+        </p:txBody>
+      </p:sp>
+      <p:sp>
+        <p:nvSpPr>
+          <p:cNvPr id="11" name="TextBox 10"/>
+          <p:cNvSpPr txBox="1"/>
+          <p:nvPr/>
+        </p:nvSpPr>
+        <p:spPr>
+          <a:xfrm>
+            <a:off x="6373368" y="3721608"/>
+            <a:ext cx="5029200" cy="1609344"/>
+          </a:xfrm>
+          <a:prstGeom prst="rect">
+            <a:avLst/>
+          </a:prstGeom>
+          <a:noFill/>
+        </p:spPr>
+        <p:txBody>
+          <a:bodyPr wrap="square" lIns="45720" rIns="45720" tIns="27432" bIns="27432" anchor="t">
+            <a:spAutoFit/>
+          </a:bodyPr>
+          <a:lstStyle/>
+          <a:p>
+            <a:pPr algn="l">
+              <a:spcAft>
+                <a:spcPts val="600"/>
+              </a:spcAft>
+            </a:pPr>
+            <a:r>
+              <a:rPr sz="2000" b="1" i="0">
+                <a:solidFill>
+                  <a:srgbClr val="2B4EB4"/>
+                </a:solidFill>
+                <a:latin typeface="Calibri"/>
+              </a:rPr>
+              <a:t>Qué declarar</a:t>
+            </a:r>
+          </a:p>
+          <a:p>
+            <a:pPr algn="l">
+              <a:spcAft>
+                <a:spcPts val="400"/>
+              </a:spcAft>
+            </a:pPr>
+            <a:r>
+              <a:rPr sz="1800" b="0" i="0">
+                <a:solidFill>
+                  <a:srgbClr val="011754"/>
+                </a:solidFill>
+                <a:latin typeface="Calibri"/>
+              </a:rPr>
+              <a:t>Registrar cómo se usó la IA en el trabajo final: herramienta, tarea y verificación realizada.</a:t>
+            </a:r>
+          </a:p>
+        </p:txBody>
+      </p:sp>
+      <p:sp>
+        <p:nvSpPr>
+          <p:cNvPr id="12" name="Rounded Rectangle 11"/>
+          <p:cNvSpPr/>
+          <p:nvPr/>
+        </p:nvSpPr>
+        <p:spPr>
+          <a:xfrm>
+            <a:off x="612648" y="5486400"/>
+            <a:ext cx="10972800" cy="640080"/>
+          </a:xfrm>
+          <a:prstGeom prst="roundRect">
+            <a:avLst>
+              <a:gd name="adj" fmla="val 6000"/>
+            </a:avLst>
+          </a:prstGeom>
+          <a:solidFill>
+            <a:srgbClr val="011754"/>
+          </a:solidFill>
+          <a:ln>
+            <a:noFill/>
+          </a:ln>
+          <a:effectLst/>
+        </p:spPr>
+        <p:style>
+          <a:lnRef idx="1">
+            <a:schemeClr val="accent1"/>
+          </a:lnRef>
+          <a:fillRef idx="3">
+            <a:schemeClr val="accent1"/>
+          </a:fillRef>
+          <a:effectRef idx="2">
+            <a:schemeClr val="accent1"/>
+          </a:effectRef>
+          <a:fontRef idx="minor">
+            <a:schemeClr val="lt1"/>
+          </a:fontRef>
+        </p:style>
+        <p:txBody>
+          <a:bodyPr rtlCol="0" anchor="ctr"/>
+          <a:lstStyle/>
+          <a:p>
+            <a:pPr algn="ctr"/>
+          </a:p>
+        </p:txBody>
+      </p:sp>
+      <p:sp>
+        <p:nvSpPr>
+          <p:cNvPr id="13" name="TextBox 12"/>
+          <p:cNvSpPr txBox="1"/>
+          <p:nvPr/>
+        </p:nvSpPr>
+        <p:spPr>
+          <a:xfrm>
+            <a:off x="841248" y="5486400"/>
+            <a:ext cx="10515600" cy="640080"/>
+          </a:xfrm>
+          <a:prstGeom prst="rect">
+            <a:avLst/>
+          </a:prstGeom>
+          <a:noFill/>
+        </p:spPr>
+        <p:txBody>
+          <a:bodyPr wrap="square" lIns="45720" rIns="45720" tIns="27432" bIns="27432" anchor="ctr">
+            <a:spAutoFit/>
+          </a:bodyPr>
+          <a:lstStyle/>
+          <a:p>
+            <a:pPr algn="l">
+              <a:spcAft>
+                <a:spcPts val="400"/>
+              </a:spcAft>
+            </a:pPr>
+            <a:r>
+              <a:rPr sz="1800" b="1" i="0">
+                <a:solidFill>
+                  <a:srgbClr val="FFFFFF"/>
+                </a:solidFill>
+                <a:latin typeface="Calibri"/>
+              </a:rPr>
+              <a:t>Cuatro decisiones, un solo responsable: el investigador.</a:t>
+            </a:r>
+          </a:p>
+        </p:txBody>
+      </p:sp>
+    </p:spTree>
+  </p:cSld>
+  <p:clrMapOvr>
+    <a:masterClrMapping/>
+  </p:clrMapOvr>
+</p:sld>
+</file>
+
+<file path=ppt/slides/slide8.xml><?xml version="1.0" encoding="utf-8"?>
+<p:sld xmlns:a="http://schemas.openxmlformats.org/drawingml/2006/main" xmlns:r="http://schemas.openxmlformats.org/officeDocument/2006/relationships" xmlns:p="http://schemas.openxmlformats.org/presentationml/2006/main">
+  <p:cSld>
+    <p:spTree>
+      <p:nvGrpSpPr>
+        <p:cNvPr id="1" name=""/>
+        <p:cNvGrpSpPr/>
+        <p:nvPr/>
+      </p:nvGrpSpPr>
+      <p:grpSpPr>
+        <a:xfrm>
+          <a:off x="0" y="0"/>
+          <a:ext cx="0" cy="0"/>
+          <a:chOff x="0" y="0"/>
+          <a:chExt cx="0" cy="0"/>
+        </a:xfrm>
+      </p:grpSpPr>
+      <p:pic>
+        <p:nvPicPr>
+          <p:cNvPr id="2" name="Picture 1" descr="bg_content.png"/>
+          <p:cNvPicPr>
+            <a:picLocks noChangeAspect="1"/>
+          </p:cNvPicPr>
+          <p:nvPr/>
+        </p:nvPicPr>
+        <p:blipFill>
+          <a:blip r:embed="rId2"/>
+          <a:stretch>
+            <a:fillRect/>
+          </a:stretch>
+        </p:blipFill>
+        <p:spPr>
+          <a:xfrm>
+            <a:off x="0" y="0"/>
+            <a:ext cx="12191695" cy="6858000"/>
+          </a:xfrm>
+          <a:prstGeom prst="rect">
+            <a:avLst/>
+          </a:prstGeom>
+        </p:spPr>
+      </p:pic>
+      <p:sp>
+        <p:nvSpPr>
+          <p:cNvPr id="3" name="TextBox 2"/>
+          <p:cNvSpPr txBox="1"/>
+          <p:nvPr/>
+        </p:nvSpPr>
+        <p:spPr>
+          <a:xfrm>
+            <a:off x="612648" y="777240"/>
+            <a:ext cx="10332720" cy="640080"/>
+          </a:xfrm>
+          <a:prstGeom prst="rect">
+            <a:avLst/>
+          </a:prstGeom>
+          <a:noFill/>
+        </p:spPr>
+        <p:txBody>
+          <a:bodyPr wrap="square" lIns="45720" rIns="45720" tIns="27432" bIns="27432" anchor="ctr">
+            <a:spAutoFit/>
+          </a:bodyPr>
+          <a:lstStyle/>
+          <a:p>
+            <a:pPr algn="l">
+              <a:spcAft>
+                <a:spcPts val="400"/>
+              </a:spcAft>
+            </a:pPr>
+            <a:r>
+              <a:rPr sz="2800" b="1" i="0">
+                <a:solidFill>
+                  <a:srgbClr val="1836B2"/>
+                </a:solidFill>
+                <a:latin typeface="Calibri"/>
+              </a:rPr>
+              <a:t>¿Para qué puede apoyar la IA al investigador?</a:t>
+            </a:r>
+          </a:p>
+        </p:txBody>
+      </p:sp>
+      <p:sp>
+        <p:nvSpPr>
+          <p:cNvPr id="4" name="Rounded Rectangle 3"/>
+          <p:cNvSpPr/>
+          <p:nvPr/>
+        </p:nvSpPr>
+        <p:spPr>
+          <a:xfrm>
+            <a:off x="612648" y="1600200"/>
+            <a:ext cx="5394960" cy="1828800"/>
+          </a:xfrm>
+          <a:prstGeom prst="roundRect">
+            <a:avLst>
+              <a:gd name="adj" fmla="val 6000"/>
+            </a:avLst>
+          </a:prstGeom>
+          <a:solidFill>
+            <a:srgbClr val="D9DEEF"/>
+          </a:solidFill>
+          <a:ln>
+            <a:noFill/>
+          </a:ln>
+          <a:effectLst/>
+        </p:spPr>
+        <p:style>
+          <a:lnRef idx="1">
+            <a:schemeClr val="accent1"/>
+          </a:lnRef>
+          <a:fillRef idx="3">
+            <a:schemeClr val="accent1"/>
+          </a:fillRef>
+          <a:effectRef idx="2">
+            <a:schemeClr val="accent1"/>
+          </a:effectRef>
+          <a:fontRef idx="minor">
+            <a:schemeClr val="lt1"/>
+          </a:fontRef>
+        </p:style>
+        <p:txBody>
+          <a:bodyPr rtlCol="0" anchor="ctr"/>
+          <a:lstStyle/>
+          <a:p>
+            <a:pPr algn="ctr"/>
+          </a:p>
+        </p:txBody>
+      </p:sp>
+      <p:sp>
+        <p:nvSpPr>
+          <p:cNvPr id="5" name="TextBox 4"/>
+          <p:cNvSpPr txBox="1"/>
+          <p:nvPr/>
+        </p:nvSpPr>
+        <p:spPr>
+          <a:xfrm>
+            <a:off x="795528" y="1709928"/>
+            <a:ext cx="5029200" cy="1609344"/>
+          </a:xfrm>
+          <a:prstGeom prst="rect">
+            <a:avLst/>
+          </a:prstGeom>
+          <a:noFill/>
+        </p:spPr>
+        <p:txBody>
+          <a:bodyPr wrap="square" lIns="45720" rIns="45720" tIns="27432" bIns="27432" anchor="t">
+            <a:spAutoFit/>
+          </a:bodyPr>
+          <a:lstStyle/>
+          <a:p>
+            <a:pPr algn="l">
+              <a:spcAft>
+                <a:spcPts val="600"/>
+              </a:spcAft>
+            </a:pPr>
+            <a:r>
+              <a:rPr sz="2000" b="1" i="0">
+                <a:solidFill>
+                  <a:srgbClr val="2B4EB4"/>
+                </a:solidFill>
+                <a:latin typeface="Calibri"/>
+              </a:rPr>
+              <a:t>Explorar</a:t>
+            </a:r>
+          </a:p>
+          <a:p>
+            <a:pPr algn="l">
+              <a:spcAft>
+                <a:spcPts val="400"/>
+              </a:spcAft>
+            </a:pPr>
+            <a:r>
+              <a:rPr sz="1800" b="0" i="0">
+                <a:solidFill>
+                  <a:srgbClr val="011754"/>
+                </a:solidFill>
+                <a:latin typeface="Calibri"/>
+              </a:rPr>
+              <a:t>Identificar ángulos o enfoques posibles de un problema y términos de búsqueda que aún no consideraste.</a:t>
+            </a:r>
+          </a:p>
+        </p:txBody>
+      </p:sp>
+      <p:sp>
+        <p:nvSpPr>
+          <p:cNvPr id="6" name="Rounded Rectangle 5"/>
+          <p:cNvSpPr/>
+          <p:nvPr/>
+        </p:nvSpPr>
+        <p:spPr>
+          <a:xfrm>
+            <a:off x="6190488" y="1600200"/>
+            <a:ext cx="5394960" cy="1828800"/>
+          </a:xfrm>
+          <a:prstGeom prst="roundRect">
+            <a:avLst>
+              <a:gd name="adj" fmla="val 6000"/>
+            </a:avLst>
+          </a:prstGeom>
+          <a:solidFill>
+            <a:srgbClr val="D9DEEF"/>
+          </a:solidFill>
+          <a:ln>
+            <a:noFill/>
+          </a:ln>
+          <a:effectLst/>
+        </p:spPr>
+        <p:style>
+          <a:lnRef idx="1">
+            <a:schemeClr val="accent1"/>
+          </a:lnRef>
+          <a:fillRef idx="3">
+            <a:schemeClr val="accent1"/>
+          </a:fillRef>
+          <a:effectRef idx="2">
+            <a:schemeClr val="accent1"/>
+          </a:effectRef>
+          <a:fontRef idx="minor">
+            <a:schemeClr val="lt1"/>
+          </a:fontRef>
+        </p:style>
+        <p:txBody>
+          <a:bodyPr rtlCol="0" anchor="ctr"/>
+          <a:lstStyle/>
+          <a:p>
+            <a:pPr algn="ctr"/>
+          </a:p>
+        </p:txBody>
+      </p:sp>
+      <p:sp>
+        <p:nvSpPr>
+          <p:cNvPr id="7" name="TextBox 6"/>
+          <p:cNvSpPr txBox="1"/>
+          <p:nvPr/>
+        </p:nvSpPr>
+        <p:spPr>
+          <a:xfrm>
+            <a:off x="6373368" y="1709928"/>
+            <a:ext cx="5029200" cy="1609344"/>
+          </a:xfrm>
+          <a:prstGeom prst="rect">
+            <a:avLst/>
+          </a:prstGeom>
+          <a:noFill/>
+        </p:spPr>
+        <p:txBody>
+          <a:bodyPr wrap="square" lIns="45720" rIns="45720" tIns="27432" bIns="27432" anchor="t">
+            <a:spAutoFit/>
+          </a:bodyPr>
+          <a:lstStyle/>
+          <a:p>
+            <a:pPr algn="l">
+              <a:spcAft>
+                <a:spcPts val="600"/>
+              </a:spcAft>
+            </a:pPr>
+            <a:r>
+              <a:rPr sz="2000" b="1" i="0">
+                <a:solidFill>
+                  <a:srgbClr val="2B4EB4"/>
+                </a:solidFill>
+                <a:latin typeface="Calibri"/>
+              </a:rPr>
+              <a:t>Organizar</a:t>
+            </a:r>
+          </a:p>
+          <a:p>
+            <a:pPr algn="l">
+              <a:spcAft>
+                <a:spcPts val="400"/>
+              </a:spcAft>
+            </a:pPr>
+            <a:r>
+              <a:rPr sz="1800" b="0" i="0">
+                <a:solidFill>
+                  <a:srgbClr val="011754"/>
+                </a:solidFill>
+                <a:latin typeface="Calibri"/>
+              </a:rPr>
+              <a:t>Estructurar ideas, antecedentes o resultados que ya obtuviste, por ejemplo en un esquema o una matriz.</a:t>
+            </a:r>
+          </a:p>
+        </p:txBody>
+      </p:sp>
+      <p:sp>
+        <p:nvSpPr>
+          <p:cNvPr id="8" name="Rounded Rectangle 7"/>
+          <p:cNvSpPr/>
+          <p:nvPr/>
+        </p:nvSpPr>
+        <p:spPr>
+          <a:xfrm>
+            <a:off x="612648" y="3611880"/>
+            <a:ext cx="5394960" cy="1828800"/>
+          </a:xfrm>
+          <a:prstGeom prst="roundRect">
+            <a:avLst>
+              <a:gd name="adj" fmla="val 6000"/>
+            </a:avLst>
+          </a:prstGeom>
+          <a:solidFill>
+            <a:srgbClr val="D9DEEF"/>
+          </a:solidFill>
+          <a:ln>
+            <a:noFill/>
+          </a:ln>
+          <a:effectLst/>
+        </p:spPr>
+        <p:style>
+          <a:lnRef idx="1">
+            <a:schemeClr val="accent1"/>
+          </a:lnRef>
+          <a:fillRef idx="3">
+            <a:schemeClr val="accent1"/>
+          </a:fillRef>
+          <a:effectRef idx="2">
+            <a:schemeClr val="accent1"/>
+          </a:effectRef>
+          <a:fontRef idx="minor">
+            <a:schemeClr val="lt1"/>
+          </a:fontRef>
+        </p:style>
+        <p:txBody>
+          <a:bodyPr rtlCol="0" anchor="ctr"/>
+          <a:lstStyle/>
+          <a:p>
+            <a:pPr algn="ctr"/>
+          </a:p>
+        </p:txBody>
+      </p:sp>
+      <p:sp>
+        <p:nvSpPr>
+          <p:cNvPr id="9" name="TextBox 8"/>
+          <p:cNvSpPr txBox="1"/>
+          <p:nvPr/>
+        </p:nvSpPr>
+        <p:spPr>
+          <a:xfrm>
+            <a:off x="795528" y="3721608"/>
+            <a:ext cx="5029200" cy="1609344"/>
+          </a:xfrm>
+          <a:prstGeom prst="rect">
+            <a:avLst/>
+          </a:prstGeom>
+          <a:noFill/>
+        </p:spPr>
+        <p:txBody>
+          <a:bodyPr wrap="square" lIns="45720" rIns="45720" tIns="27432" bIns="27432" anchor="t">
+            <a:spAutoFit/>
+          </a:bodyPr>
+          <a:lstStyle/>
+          <a:p>
+            <a:pPr algn="l">
+              <a:spcAft>
+                <a:spcPts val="600"/>
+              </a:spcAft>
+            </a:pPr>
+            <a:r>
+              <a:rPr sz="2000" b="1" i="0">
+                <a:solidFill>
+                  <a:srgbClr val="2B4EB4"/>
+                </a:solidFill>
+                <a:latin typeface="Calibri"/>
+              </a:rPr>
+              <a:t>Redactar borradores</a:t>
+            </a:r>
+          </a:p>
+          <a:p>
+            <a:pPr algn="l">
+              <a:spcAft>
+                <a:spcPts val="400"/>
+              </a:spcAft>
+            </a:pPr>
+            <a:r>
+              <a:rPr sz="1800" b="0" i="0">
+                <a:solidFill>
+                  <a:srgbClr val="011754"/>
+                </a:solidFill>
+                <a:latin typeface="Calibri"/>
+              </a:rPr>
+              <a:t>Proponer una primera versión de un texto o resumen que luego revisas, corriges y reescribes.</a:t>
+            </a:r>
+          </a:p>
+        </p:txBody>
+      </p:sp>
+      <p:sp>
+        <p:nvSpPr>
+          <p:cNvPr id="10" name="Rounded Rectangle 9"/>
+          <p:cNvSpPr/>
+          <p:nvPr/>
+        </p:nvSpPr>
+        <p:spPr>
+          <a:xfrm>
+            <a:off x="6190488" y="3611880"/>
+            <a:ext cx="5394960" cy="1828800"/>
+          </a:xfrm>
+          <a:prstGeom prst="roundRect">
+            <a:avLst>
+              <a:gd name="adj" fmla="val 6000"/>
+            </a:avLst>
+          </a:prstGeom>
+          <a:solidFill>
+            <a:srgbClr val="D9DEEF"/>
+          </a:solidFill>
+          <a:ln>
+            <a:noFill/>
+          </a:ln>
+          <a:effectLst/>
+        </p:spPr>
+        <p:style>
+          <a:lnRef idx="1">
+            <a:schemeClr val="accent1"/>
+          </a:lnRef>
+          <a:fillRef idx="3">
+            <a:schemeClr val="accent1"/>
+          </a:fillRef>
+          <a:effectRef idx="2">
+            <a:schemeClr val="accent1"/>
+          </a:effectRef>
+          <a:fontRef idx="minor">
+            <a:schemeClr val="lt1"/>
+          </a:fontRef>
+        </p:style>
+        <p:txBody>
+          <a:bodyPr rtlCol="0" anchor="ctr"/>
+          <a:lstStyle/>
+          <a:p>
+            <a:pPr algn="ctr"/>
+          </a:p>
+        </p:txBody>
+      </p:sp>
+      <p:sp>
+        <p:nvSpPr>
+          <p:cNvPr id="11" name="TextBox 10"/>
+          <p:cNvSpPr txBox="1"/>
+          <p:nvPr/>
+        </p:nvSpPr>
+        <p:spPr>
+          <a:xfrm>
+            <a:off x="6373368" y="3721608"/>
+            <a:ext cx="5029200" cy="1609344"/>
+          </a:xfrm>
+          <a:prstGeom prst="rect">
+            <a:avLst/>
+          </a:prstGeom>
+          <a:noFill/>
+        </p:spPr>
+        <p:txBody>
+          <a:bodyPr wrap="square" lIns="45720" rIns="45720" tIns="27432" bIns="27432" anchor="t">
+            <a:spAutoFit/>
+          </a:bodyPr>
+          <a:lstStyle/>
+          <a:p>
+            <a:pPr algn="l">
+              <a:spcAft>
+                <a:spcPts val="600"/>
+              </a:spcAft>
+            </a:pPr>
+            <a:r>
+              <a:rPr sz="2000" b="1" i="0">
+                <a:solidFill>
+                  <a:srgbClr val="2B4EB4"/>
+                </a:solidFill>
+                <a:latin typeface="Calibri"/>
+              </a:rPr>
+              <a:t>Comparar</a:t>
+            </a:r>
+          </a:p>
+          <a:p>
+            <a:pPr algn="l">
+              <a:spcAft>
+                <a:spcPts val="400"/>
+              </a:spcAft>
+            </a:pPr>
+            <a:r>
+              <a:rPr sz="1800" b="0" i="0">
+                <a:solidFill>
+                  <a:srgbClr val="011754"/>
+                </a:solidFill>
+                <a:latin typeface="Calibri"/>
+              </a:rPr>
+              <a:t>Contrastar alternativas o enfoques que el investigador ya reunió, señalando coincidencias y diferencias.</a:t>
+            </a:r>
+          </a:p>
+        </p:txBody>
+      </p:sp>
+      <p:sp>
+        <p:nvSpPr>
+          <p:cNvPr id="12" name="Rounded Rectangle 11"/>
+          <p:cNvSpPr/>
+          <p:nvPr/>
+        </p:nvSpPr>
+        <p:spPr>
+          <a:xfrm>
+            <a:off x="612648" y="5486400"/>
+            <a:ext cx="10972800" cy="640080"/>
+          </a:xfrm>
+          <a:prstGeom prst="roundRect">
+            <a:avLst>
+              <a:gd name="adj" fmla="val 6000"/>
+            </a:avLst>
+          </a:prstGeom>
+          <a:solidFill>
+            <a:srgbClr val="011754"/>
+          </a:solidFill>
+          <a:ln>
+            <a:noFill/>
+          </a:ln>
+          <a:effectLst/>
+        </p:spPr>
+        <p:style>
+          <a:lnRef idx="1">
+            <a:schemeClr val="accent1"/>
+          </a:lnRef>
+          <a:fillRef idx="3">
+            <a:schemeClr val="accent1"/>
+          </a:fillRef>
+          <a:effectRef idx="2">
+            <a:schemeClr val="accent1"/>
+          </a:effectRef>
+          <a:fontRef idx="minor">
+            <a:schemeClr val="lt1"/>
+          </a:fontRef>
+        </p:style>
+        <p:txBody>
+          <a:bodyPr rtlCol="0" anchor="ctr"/>
+          <a:lstStyle/>
+          <a:p>
+            <a:pPr algn="ctr"/>
+          </a:p>
+        </p:txBody>
+      </p:sp>
+      <p:sp>
+        <p:nvSpPr>
+          <p:cNvPr id="13" name="TextBox 12"/>
+          <p:cNvSpPr txBox="1"/>
+          <p:nvPr/>
+        </p:nvSpPr>
+        <p:spPr>
+          <a:xfrm>
+            <a:off x="841248" y="5486400"/>
+            <a:ext cx="10515600" cy="640080"/>
+          </a:xfrm>
+          <a:prstGeom prst="rect">
+            <a:avLst/>
+          </a:prstGeom>
+          <a:noFill/>
+        </p:spPr>
+        <p:txBody>
+          <a:bodyPr wrap="square" lIns="45720" rIns="45720" tIns="27432" bIns="27432" anchor="ctr">
+            <a:spAutoFit/>
+          </a:bodyPr>
+          <a:lstStyle/>
+          <a:p>
+            <a:pPr algn="l">
+              <a:spcAft>
+                <a:spcPts val="400"/>
+              </a:spcAft>
+            </a:pPr>
+            <a:r>
+              <a:rPr sz="1800" b="1" i="0">
+                <a:solidFill>
+                  <a:srgbClr val="FFFFFF"/>
+                </a:solidFill>
+                <a:latin typeface="Calibri"/>
+              </a:rPr>
+              <a:t>Ninguna de estas tareas reemplaza el juicio del investigador.</a:t>
             </a:r>
           </a:p>
         </p:txBody>
